--- a/docs/presentation/ClaimGuard_Mentor_Session.pptx
+++ b/docs/presentation/ClaimGuard_Mentor_Session.pptx
@@ -128,21 +128,21 @@
   <p:extLst>
     <p:ext uri="{521415D9-36F7-43E2-AB2F-B90AF26B5E84}">
       <p14:sectionLst xmlns:p14="http://schemas.microsoft.com/office/powerpoint/2010/main">
-        <p14:section name="Opening" id="{4113cbad-9147-32df-257f-8e2187e82573}">
+        <p14:section name="Opening" id="{3f508a7e-7c3b-bc0d-d765-7ded606fbc0a}">
           <p14:sldIdLst>
             <p14:sldId id="256"/>
             <p14:sldId id="257"/>
             <p14:sldId id="258"/>
           </p14:sldIdLst>
         </p14:section>
-        <p14:section name="Core" id="{87505a97-640c-cc24-54c3-d6e91e1b52b2}">
+        <p14:section name="Core" id="{b6ca45f2-fc9d-e78b-0d45-e599be936ae4}">
           <p14:sldIdLst>
             <p14:sldId id="259"/>
             <p14:sldId id="260"/>
             <p14:sldId id="261"/>
           </p14:sldIdLst>
         </p14:section>
-        <p14:section name="Queue and AI" id="{779255aa-051c-ea2e-c5da-c298c1dc368e}">
+        <p14:section name="Queue and AI" id="{0d883270-65d2-2859-2d82-ab814d89f7f1}">
           <p14:sldIdLst>
             <p14:sldId id="262"/>
             <p14:sldId id="263"/>
@@ -150,21 +150,21 @@
             <p14:sldId id="265"/>
           </p14:sldIdLst>
         </p14:section>
-        <p14:section name="Built this week" id="{b5ea3095-b8a8-db46-2106-e480086701ca}">
+        <p14:section name="Built this week" id="{e5b6fecc-6dd8-54f3-54f8-d0587b5dcbfc}">
           <p14:sldIdLst>
             <p14:sldId id="266"/>
             <p14:sldId id="267"/>
             <p14:sldId id="268"/>
           </p14:sldIdLst>
         </p14:section>
-        <p14:section name="Less work for the operator" id="{76c330c8-3e44-cfda-5e2e-c2a073867424}">
+        <p14:section name="Less work for the operator" id="{aeb841a9-ced8-85b7-049d-db18da55e8c5}">
           <p14:sldIdLst>
             <p14:sldId id="269"/>
             <p14:sldId id="270"/>
             <p14:sldId id="271"/>
           </p14:sldIdLst>
         </p14:section>
-        <p14:section name="Trust" id="{233c570f-2124-2c9c-3922-01749ac6410d}">
+        <p14:section name="Trust" id="{aa79cb90-8088-36b3-f504-7ca9d0c254b0}">
           <p14:sldIdLst>
             <p14:sldId id="272"/>
             <p14:sldId id="273"/>
@@ -172,7 +172,7 @@
             <p14:sldId id="275"/>
           </p14:sldIdLst>
         </p14:section>
-        <p14:section name="Close" id="{3812ea31-f601-64a9-3c17-6a162773f72f}">
+        <p14:section name="Close" id="{927ee377-f915-5085-d43c-40fb63199711}">
           <p14:sldIdLst>
             <p14:sldId id="276"/>
             <p14:sldId id="277"/>
@@ -1231,7 +1231,7 @@
           <a:p>
             <a:r>
               <a:rPr lang="en-US" dirty="0"/>
-              <a:t>Open by saying the goal in the mentor's words: a trustworthy, explainable copilot for claim pre-validation, not a production RCM platform. The deck follows his workflow in section 3.</a:t>
+              <a:t>Good afternoon, and thank you for the email of 16 October. It changed how we spent the week, so I will start from it. The goal you set is a trustworthy, explainable copilot for claim pre-validation, not a production revenue-cycle platform. That is what this deck shows. It covers everything we built after the Phase 1 submission: the rule engine and its checks, the task queue, the cache, the AI explanation step, the new correction workflow, security, audit and deployment. Two promises before we start. Every number you will see comes from a command you can re-run, and anything simulated says so on its own slide. Second, the last two slides list what we have not done, and I will read them out, because you should hear that from us first.</a:t>
             </a:r>
             <a:endParaRPr lang="en-US" dirty="0"/>
           </a:p>
@@ -1319,7 +1319,7 @@
           <a:p>
             <a:r>
               <a:rPr lang="en-US" dirty="0"/>
-              <a:t>Be honest about the AI evaluation: in the supplied-case runs many answers fell back to the template because of provider timeouts. The fallback working is the point, but the live-answer quality sample is small.</a:t>
+              <a:t>Here is how we keep the AI from saying something it should not. First, the model sees only the rule text and never a claim value. Second, its text is checked mechanically: invented values, clinical or fraud talk, approval or payment words, even disguised ones, garbled script and repetition. Third, any failure leaves the engine's own explanation in place: if the model is slow, down, over budget or rejected, the finding and its text stay. Fourth, we red-teamed prompt injection with a real model; it found one hole, we closed it and added a test. In the load test the guard refused templates containing phrases like "have a valid" and "are correct", because the finding did not cover them. That is the guard working. The cost is that a refused template is not cached, so those claims ask the model again. I am honest about the sample: in one twenty-five-case run, seventeen answers fell back to the template.</a:t>
             </a:r>
             <a:endParaRPr lang="en-US" dirty="0"/>
           </a:p>
@@ -1407,7 +1407,7 @@
           <a:p>
             <a:r>
               <a:rPr lang="en-US" dirty="0"/>
-              <a:t>No model here, on purpose. Each sentence is built from the finding and the claim, so every sentence cites a rule and claim paths. That makes grounding something we can test, not hope for.</a:t>
+              <a:t>This is the first of the two things built this week, and it answers your request for correction assistance and a reviewer summary. On the left is the reviewer copilot panel on a real claim. It gives one summary: how many findings, which severity, and the order that clears the claim fastest. It gives one suggestion per finding, of three kinds: a value to correct, a value to check against the source, or information to ask the provider for. We built it with code, on purpose, with no model. Every sentence is built from the finding and the claim, so it cites a rule and claim paths, and that makes grounding something we can test rather than hope for. A value is proposed only if it follows from other values on the same claim, and no identifier can be edited. A claim with no finding reads pre-validation clearance, not payer approval.</a:t>
             </a:r>
             <a:endParaRPr lang="en-US" dirty="0"/>
           </a:p>
@@ -1495,7 +1495,7 @@
           <a:p>
             <a:r>
               <a:rPr lang="en-US" dirty="0"/>
-              <a:t>Live: press Try this in a what-if, show the before and after table, then apply with a reason. The trace page shows both versions.</a:t>
+              <a:t>The second thing built this week is what-if and recheck. The officer edits a field, or presses "try this" on a proposal. The engine runs on a copy and shows each rule before and after: cleared, still flagged, or a new problem. Nothing is saved. Then, with a reason and a tick confirming the value was checked against the source, the correction is saved as version two, which goes through triage like any claim. Version one stays exactly as received and is closed, and the findings that were cleared are recorded with the reviewer's reason. The controls matter. Only the holder of the claim can try or apply a correction. Clearing a high-severity finding needs the same senior authority as deciding it, so correcting data cannot be a way around sign-off. Identifiers cannot be edited, and the reason may not contain them.</a:t>
             </a:r>
             <a:endParaRPr lang="en-US" dirty="0"/>
           </a:p>
@@ -1583,7 +1583,7 @@
           <a:p>
             <a:r>
               <a:rPr lang="en-US" dirty="0"/>
-              <a:t>The first version proposed only the line amount and created a new R012 failure in 25 of 30 cases, because the claim total had matched the wrong line. Measuring it found that; the copilot now proposes the line and the total together.</a:t>
+              <a:t>We measured the copilot against the real engine on the six hundred public claims. There are seven hundred seventy-seven flagged findings, each with exactly one suggestion. Of the proposed corrections, every one cleared the finding it was proposed for: thirty of thirty on line amounts, thirty-four of thirty-four on claim totals, twenty-nine of twenty-nine on currency. Applying all proposals on a claim created zero new findings, no cited path was missing from the claim, and no text had approval or payment words. Four thousand two hundred attempts to edit an identifier were all refused. The measurement also caught a real bug: the first version fixed the line amount alone and created a new total failure in twenty-five of thirty cases. The copilot now proposes the line and the total together. The limit is on the slide: only three rules have computable fixes, and the reviewer still checks the figure against the bill.</a:t>
             </a:r>
             <a:endParaRPr lang="en-US" dirty="0"/>
           </a:p>
@@ -1671,7 +1671,7 @@
           <a:p>
             <a:r>
               <a:rPr lang="en-US" dirty="0"/>
-              <a:t>Everything on this slide is simulated reviewers on the real pipeline. A timed session with real reviewers is the first thing to do next.</a:t>
+              <a:t>This slide is about making the operator's day easier, which is what you encouraged us to do beyond the minimum. There are four levers. Confirming needs no typed reason, because confirming agrees with the engine, while dismissing still needs one. Bulk confirm, auto-clear of green claims and auto-request of information are all off by default, each with a random audit sample and an exact bound on the miss rate. In simulation, the number of findings a person decides per five hundred claims dropped from six hundred fifty to three hundred ninety-nine, minus thirty-nine percent, with none wrong against the answer key. Everything here is simulated reviewers on the real pipeline. Time per finding has not been measured. The first real step is a timed session with a few officers, which is question four.</a:t>
             </a:r>
             <a:endParaRPr lang="en-US" dirty="0"/>
           </a:p>
@@ -1759,7 +1759,7 @@
           <a:p>
             <a:r>
               <a:rPr lang="en-US" dirty="0"/>
-              <a:t>He warned that a model trained on artificial decisions may only reproduce the rules. We tested that honestly and archived it.</a:t>
+              <a:t>You warned us that a model trained on artificial decisions might only reproduce the rules, so we tested that honestly. On the left is the workload report, which is live and read-only. It reads reviewer confirmations and dismissals per rule, and it lists rules reviewers keep overriding, which are candidates to retune, and rules almost always upheld, which are candidates for lighter review. In simulation it found both bad rules in twenty of twenty histories, with no false alarms. On the right is the fine-tuned model, Laya. It learned the rulebook: accuracy 0.97 against 0.63 zero-shot. But its labels are the engine's own, it finds only sixty-four percent of real failures, and it cannot save an operator time after the engine has run. So we archived it. It is not in the decision path, and a confidence is never shown as a probability.</a:t>
             </a:r>
             <a:endParaRPr lang="en-US" dirty="0"/>
           </a:p>
@@ -1847,7 +1847,7 @@
           <a:p>
             <a:r>
               <a:rPr lang="en-US" dirty="0"/>
-              <a:t>The rule logic follows published practice. The attributes the single-claim rules need are invented and labelled so.</a:t>
+              <a:t>These are the eight advisory rules, kept apart from the fifteen. They have their own ids, file and schema, and they never change an official result. E101 to E103 look across claims: a duplicate line, an authorization exhausted across claims, a daily quantity across claims. E102 is the cross-claim authorization usage you described, working on explicitly synthetic history, and it fires only when earlier claims contributed units, so it never double-reports what R009 already fails. E001 to E005 follow published practice on bundling, modifiers and diagnosis, but their attributes are invented and labelled so, which means they cannot fire on public data by design. Four thousand eight hundred of four thousand eight hundred results agree with an independent oracle.</a:t>
             </a:r>
             <a:endParaRPr lang="en-US" dirty="0"/>
           </a:p>
@@ -1935,7 +1935,7 @@
           <a:p>
             <a:r>
               <a:rPr lang="en-US" dirty="0"/>
-              <a:t>No outside party has attacked the system. Say so.</a:t>
+              <a:t>On security, four numbers. A hundred and sixteen black-box attack checks, all passing. Ninety-three deliberate breakages of the security and queue rules, each caught by a test. Four hundred thousand fuzzed requests through the API. And fifty checks on the deployment showing nothing but the proxy is reachable. Underneath: identity is badge, password and authenticator code, with four clearance levels enforced on the server, and a hidden action is not offered at all, not just disabled. Reviewers see pseudonyms, and unmasking needs its own permission, a reason, and an hourly limit. The most dangerous administrator actions need a second administrator. Claims, results and corrections are encrypted at rest. What is not done: nobody outside our team has attacked it, and one person holding two accounts is logged but not prevented.</a:t>
             </a:r>
             <a:endParaRPr lang="en-US" dirty="0"/>
           </a:p>
@@ -2023,7 +2023,7 @@
           <a:p>
             <a:r>
               <a:rPr lang="en-US" dirty="0"/>
-              <a:t>Run audit_guard_demo.py live: it rewrites a row and the health panel turns red.</a:t>
+              <a:t>Every important moment is written down. When a claim is received we record the input hash, the rule pack hash and the result hash. When a finding is decided, we record who, what, why, and the original status. A what-if is recorded with who and how many changes, and nothing else is kept. A saved correction links both versions by input hash and records each change from and to. Unmasking an identifier is recorded and counted against an hourly limit. On the right, the tamper evidence: logs are hash-chained and signed, an append-only mirror refuses to follow an edited log, and a ledger has checkpoints and Merkle proofs. In the demo I will rewrite an audit row, and the health panel goes red within seconds.</a:t>
             </a:r>
             <a:endParaRPr lang="en-US" dirty="0"/>
           </a:p>
@@ -2111,7 +2111,7 @@
           <a:p>
             <a:r>
               <a:rPr lang="en-US" dirty="0"/>
-              <a:t>Kubernetes manifests are written and structurally tested but there was no cluster to apply them to. Say so.</a:t>
+              <a:t>Everything runs on premises, because hospital data stays inside the hospital. I want to be precise about what has been tested and what has not. The Docker Compose stack with API, worker, MongoDB, Redis and proxy is tested: fifty of fifty attack checks and twenty-three of twenty-three backup and restore checks. Encrypted backup and restore have a runbook and were tested end to end. The model server is designed and scripted. Kubernetes manifests, network policies and restricted pods are written and tested structurally, but we had no cluster to apply them to. The firewall and outside port scan ran in throwaway containers, not on the real server, and the target server, an RTX 3080 with 10 gigabytes, has not been run on yet. For data protection, each obligation is mapped to what the system does. Subject access and erasure and a retention period are not built yet.</a:t>
             </a:r>
             <a:endParaRPr lang="en-US" dirty="0"/>
           </a:p>
@@ -2199,7 +2199,7 @@
           <a:p>
             <a:r>
               <a:rPr lang="en-US" dirty="0"/>
-              <a:t>Walk the table top to bottom. Points 4 and 6 contain questions for the mentor.</a:t>
+              <a:t>This slide is your email, point by point, with where we stand on each. One: human in the loop. Built, with lanes, a transparent score, four-eyes for high severity and a full audit trail. Two: all fifteen rules are right, with an F1 of 1.00 on the six hundred public claims, and the eight extra rules live in a separate pack so they never touch the benchmark. Three: the AI is grounded and has a plan for wrong output. Four: R006 stays exactly as documented, and I have three claims for you on the last slide. Five: authorization is aggregated per claim, and cross-claim is only an extension. Six: the wording is now pre-validation clearance, never approval. Seven: the JSONL schema is unchanged, with confidence null. Eight: one workflow, which is next.</a:t>
             </a:r>
             <a:endParaRPr lang="en-US" dirty="0"/>
           </a:p>
@@ -2287,7 +2287,7 @@
           <a:p>
             <a:r>
               <a:rPr lang="en-US" dirty="0"/>
-              <a:t>Measured on an RTX 4060 laptop with 8 GB, not the 3080 target. Ollama ran now. vLLM could not be installed here: the system drive has under 9 GB free and vLLM needs about 15 GB with a model.</a:t>
+              <a:t>This is what the model measured here. The laptop has an RTX 4060 with 8 gigabytes, not the 3080 target. With Ollama's default settings, it serves one request at a time: about fifty-three explanations a minute, at any concurrency. With eight parallel slots and flash attention, it reaches one hundred thirty-seven a minute, with no errors, and it stops improving past eight parallel requests. The better test is the one in the card below: three hundred ninety-nine claims through the real explanation step, with an empty cache. Seventy-four model calls answered seven hundred seventy-seven findings, and the run took forty-nine seconds, about four hundred ninety claims a minute. With a warm cache, about two thousand. So the model is not the limit. vLLM is the planned production server and has not been run here. We stay on Ollama unless the target measurement says otherwise, and the benchmark script works on either.</a:t>
             </a:r>
             <a:endParaRPr lang="en-US" dirty="0"/>
           </a:p>
@@ -2375,7 +2375,7 @@
           <a:p>
             <a:r>
               <a:rPr lang="en-US" dirty="0"/>
-              <a:t>Read this slide out. It is the most credible slide in the deck.</a:t>
+              <a:t>This is the most important slide for credibility, so I will read it. The public data is synthetic, so perfect scores do not show how real claims behave. The savings are simulated, and there has been no timed session with real reviewers. We have not run on the target server, so throughput on the RTX 3080 and vLLM are unmeasured. There is no Kubernetes cluster, so the manifests are only structurally tested. Real paper, handwriting and Arabic documents are untested. Subject access, erasure and retention are designed but not built. The copilot has computable fixes for three rules, and for the rest it asks or checks. And nobody outside the team has attacked the system. Each of these is a next step, not a hidden problem.</a:t>
             </a:r>
             <a:endParaRPr lang="en-US" dirty="0"/>
           </a:p>
@@ -2463,7 +2463,7 @@
           <a:p>
             <a:r>
               <a:rPr lang="en-US" dirty="0"/>
-              <a:t>Demo order follows the mentor's six steps.</a:t>
+              <a:t>For the demo, I will follow your six steps. A claim with a wrong amount arrives. The senior opens it and sees the summary and evidence. We try a what-if and every check would pass. We apply it with a reason, which creates version two. The trace shows both versions, who changed what and why. Then I rewrite an audit row and the alarm goes red. After that, four questions for you. First, R006 and R013: three public claims, CG-B10B19D8A56A, CG-00348A9B1AAD and CG-EC233ACB399D, split one service into a plain line and an EDU-SEPARATE line, and the rules pass them as documented, but the total quantity exceeds the per-line limit. Is that intended? Second, is pre-validation clear the right label? Third, is a Redis Streams queue in Rust acceptable in place of Celery or ARQ? Fourth, could we run a timed session with a few officers?</a:t>
             </a:r>
             <a:endParaRPr lang="en-US" dirty="0"/>
           </a:p>
@@ -2551,7 +2551,7 @@
           <a:p>
             <a:r>
               <a:rPr lang="en-US" dirty="0"/>
-              <a:t>Steps 3 and 5 are what was added this week. Everything else existed and was measured earlier.</a:t>
+              <a:t>This is the one workflow you asked for, in six steps. A claim arrives in any format and the fifteen rules run in under a fifth of a millisecond. Each finding is either a fail or unable-to-assess when data is missing, and it cites the claim paths it rests on. Third, the copilot explains it and says what to ask or correct, and it never invents a value. Fourth, the officer decides: confirm, dismiss with a reason, or request information, with a senior for high severity. Fifth, the officer corrects the claim and revalidates: a what-if first, then a new version, while the original stays untouched. Sixth, everything is traceable, with both versions side by side and the measured accuracy shown. Steps three and five are what we added this week, and they are marked in amber.</a:t>
             </a:r>
             <a:endParaRPr lang="en-US" dirty="0"/>
           </a:p>
@@ -2639,7 +2639,7 @@
           <a:p>
             <a:r>
               <a:rPr lang="en-US" dirty="0"/>
-              <a:t>Trace one claim left to right. MongoDB is the truth. Redis only carries work; losing it loses nothing because the outbox marker stays in MongoDB.</a:t>
+              <a:t>Here is how the pieces fit, and I will trace one claim from left to right. Inputs are validated at intake, and anything unreadable is quarantined with a reason. The rule engine writes the result to MongoDB, which is the source of truth: claims and results are encrypted at rest. A marker saying "publish this" is written in the same operation, and Redis Streams carries the work to a pool of consumers. The AI explanation step has a circuit breaker, a budget, a cache and a grounding guard. The dispatcher puts the claim in a personal inbox, the officer decides in the console, and a correction becomes a new version that goes through the same path again. Along the bottom are the records: signed logs, a ledger, and access control with pseudonymised identifiers. Redis only carries work. If we lose it, we lose nothing, because the marker stays in MongoDB.</a:t>
             </a:r>
             <a:endParaRPr lang="en-US" dirty="0"/>
           </a:p>
@@ -2727,7 +2727,7 @@
           <a:p>
             <a:r>
               <a:rPr lang="en-US" dirty="0"/>
-              <a:t>Be upfront: the public set is synthetic and small. Nine of fifteen rules have no failing example in the 50-claim split, which is why the 150 and 400 splits are reported beside it.</a:t>
+              <a:t>On correctness, I want to be upfront. The F1 is 1.00 on all six hundred public claims: four hundred development, a hundred and fifty validation and fifty stress. Zero of three thousand and fifteen clean results were wrongly flagged, and the ninety-five percent bound on the false-alarm rate is 1.9 percent. The Rust engine runs in 0.19 milliseconds per claim and agrees exactly with the Python reference on ten thousand six hundred claims. Missing data gives unable-to-assess, never a pass. R006 is exactly as documented, and R009 aggregates per authorization within one claim. The advisory rules are kept apart. The caveat is the one on the slide: the public set is synthetic, so a perfect score is not proof about real claims, and nine of fifteen rules have no failing example in the fifty-claim split.</a:t>
             </a:r>
             <a:endParaRPr lang="en-US" dirty="0"/>
           </a:p>
@@ -2815,7 +2815,7 @@
           <a:p>
             <a:r>
               <a:rPr lang="en-US" dirty="0"/>
-              <a:t>The document reader runs in its own container. Say plainly that handwriting and Arabic are untested.</a:t>
+              <a:t>Claims do not arrive tidy, so intake treats every file as untrusted until proven. FHIR bundles, CSV tables and JSONL give identical claims and identical reports on all six hundred public claims. Twelve thousand randomly damaged FHIR bundles reached the same accept-or-quarantine verdict as the reference. For PDFs and photos, the reader runs in its own isolated container. On two hundred and forty synthetic documents it read ninety-seven point four percent of fields correctly, with one silent error. A reading is only ever a draft, and the clerk compares every field with the page. I should say plainly that real paper, handwriting and Arabic are not tested yet. A damaged record is quarantined with a reason and never stops the run.</a:t>
             </a:r>
             <a:endParaRPr lang="en-US" dirty="0"/>
           </a:p>
@@ -2903,7 +2903,7 @@
           <a:p>
             <a:r>
               <a:rPr lang="en-US" dirty="0"/>
-              <a:t>You asked for Celery or ARQ. Those are Python libraries; this is the same pattern in Rust on Redis Streams. Question 2 in the mentor pack asks whether that is acceptable.</a:t>
+              <a:t>Now the task queue. You mentioned Celery or ARQ. Those are Python libraries, and what we built is the same pattern in Rust on Redis Streams, which is question three for you at the end. The flow: intake writes the claim and a publish marker in one atomic write. The relay publishes and clears the marker only after Redis accepted. A consumer group and a pool process the claims. Each of the six boxes below is a failure we designed for and tested. If Redis is down, the markers wait in MongoDB. If a consumer dies, another takes over its message. A poison claim becomes a dead letter after three deliveries. Duplicates change nothing. A burst waits in the stream, never in front of the model. A lost message is republished after fifteen minutes. Throughput on the target server is not measured yet.</a:t>
             </a:r>
             <a:endParaRPr lang="en-US" dirty="0"/>
           </a:p>
@@ -2991,7 +2991,7 @@
           <a:p>
             <a:r>
               <a:rPr lang="en-US" dirty="0"/>
-              <a:t>The people and the model in the simulation are simulated. The invariants (no claim in two inboxes, nobody decides a claim they may not) are what carries over.</a:t>
+              <a:t>This is how the work reaches people. Every flagged finding earns points: a fail on a high-severity rule counts four, down to one for a medium-severity unable-to-assess. Green means nothing flagged. Lane A is one to three flagged findings with a score under ten, and lane B is the rest. The score is deliberately simple and transparent, as you asked. High severity needs a senior, a different senior countersigns blind, and a third settles a disagreement. Leases return abandoned claims to the pool, and no route lets anyone assign or move a claim. The chart is a simulation with simulated people and a simulated clock: draining five hundred claims takes about three hours with four seniors, and nearly six with four-eyes. Two hundred and fifty-three of the five hundred need a senior, so seniors are the bottleneck.</a:t>
             </a:r>
             <a:endParaRPr lang="en-US" dirty="0"/>
           </a:p>
@@ -3079,7 +3079,7 @@
           <a:p>
             <a:r>
               <a:rPr lang="en-US" dirty="0"/>
-              <a:t>The cache holds text with placeholders. The grounding guard runs again on the filled text every time, cached or not.</a:t>
+              <a:t>The cache is the reason the model is not a bottleneck. What is cached is an explanation template: text with the placeholders value and line, keyed by the rule, the failure shape, the prompt version and the model. The model never sees a claim value, so the cached text can contain none. What is never cached: the filled text, the claim values, and anything about permissions. A demotion must apply at once. The grounding guard runs again on the filled text every time, cached or not. We measured this under load this week: three hundred ninety-nine claims with findings, seven hundred seventy-seven findings, the real engine and the real model. With an empty cache, ninety point five percent of findings needed no model call. Once warm, it is ninety-seven point seven. Five failures in a row open the breaker, and the hard deadline is ninety seconds.</a:t>
             </a:r>
             <a:endParaRPr lang="en-US" dirty="0"/>
           </a:p>
@@ -15896,7 +15896,7 @@
                             <a:srgbClr val="14746F"/>
                           </a:solidFill>
                         </a:rPr>
-                        <a:t>52.4</a:t>
+                        <a:t>53.3</a:t>
                       </a:r>
                       <a:endParaRPr lang="en-US" sz="1300" dirty="0"/>
                     </a:p>
@@ -15957,7 +15957,7 @@
                             <a:srgbClr val="17292B"/>
                           </a:solidFill>
                         </a:rPr>
-                        <a:t>1.16 s</a:t>
+                        <a:t>1.13 s</a:t>
                       </a:r>
                       <a:endParaRPr lang="en-US" sz="1300" dirty="0"/>
                     </a:p>
@@ -16018,7 +16018,7 @@
                             <a:srgbClr val="17292B"/>
                           </a:solidFill>
                         </a:rPr>
-                        <a:t>62.7</a:t>
+                        <a:t>63.8</a:t>
                       </a:r>
                       <a:endParaRPr lang="en-US" sz="1300" dirty="0"/>
                     </a:p>
@@ -16264,7 +16264,7 @@
                             <a:srgbClr val="14746F"/>
                           </a:solidFill>
                         </a:rPr>
-                        <a:t>116.6</a:t>
+                        <a:t>122.9</a:t>
                       </a:r>
                       <a:endParaRPr lang="en-US" sz="1300" dirty="0"/>
                     </a:p>
@@ -16325,7 +16325,7 @@
                             <a:srgbClr val="17292B"/>
                           </a:solidFill>
                         </a:rPr>
-                        <a:t>2 s</a:t>
+                        <a:t>1.79 s</a:t>
                       </a:r>
                       <a:endParaRPr lang="en-US" sz="1300" dirty="0"/>
                     </a:p>
@@ -16386,7 +16386,7 @@
                             <a:srgbClr val="17292B"/>
                           </a:solidFill>
                         </a:rPr>
-                        <a:t>139.9</a:t>
+                        <a:t>146.5</a:t>
                       </a:r>
                       <a:endParaRPr lang="en-US" sz="1300" dirty="0"/>
                     </a:p>
@@ -16632,7 +16632,7 @@
                             <a:srgbClr val="14746F"/>
                           </a:solidFill>
                         </a:rPr>
-                        <a:t>142.7</a:t>
+                        <a:t>137.5</a:t>
                       </a:r>
                       <a:endParaRPr lang="en-US" sz="1300" dirty="0"/>
                     </a:p>
@@ -16693,7 +16693,7 @@
                             <a:srgbClr val="17292B"/>
                           </a:solidFill>
                         </a:rPr>
-                        <a:t>3.16 s</a:t>
+                        <a:t>3.26 s</a:t>
                       </a:r>
                       <a:endParaRPr lang="en-US" sz="1300" dirty="0"/>
                     </a:p>
@@ -16754,7 +16754,7 @@
                             <a:srgbClr val="17292B"/>
                           </a:solidFill>
                         </a:rPr>
-                        <a:t>171</a:t>
+                        <a:t>165.3</a:t>
                       </a:r>
                       <a:endParaRPr lang="en-US" sz="1300" dirty="0"/>
                     </a:p>
@@ -17000,7 +17000,7 @@
                             <a:srgbClr val="14746F"/>
                           </a:solidFill>
                         </a:rPr>
-                        <a:t>131.9</a:t>
+                        <a:t>134.9</a:t>
                       </a:r>
                       <a:endParaRPr lang="en-US" sz="1300" dirty="0"/>
                     </a:p>
@@ -17061,7 +17061,7 @@
                             <a:srgbClr val="17292B"/>
                           </a:solidFill>
                         </a:rPr>
-                        <a:t>6.79 s</a:t>
+                        <a:t>6.75 s</a:t>
                       </a:r>
                       <a:endParaRPr lang="en-US" sz="1300" dirty="0"/>
                     </a:p>
@@ -17122,7 +17122,7 @@
                             <a:srgbClr val="17292B"/>
                           </a:solidFill>
                         </a:rPr>
-                        <a:t>158.9</a:t>
+                        <a:t>160.4</a:t>
                       </a:r>
                       <a:endParaRPr lang="en-US" sz="1300" dirty="0"/>
                     </a:p>
@@ -17207,7 +17207,7 @@
                 <a:ea typeface="Cambria" pitchFamily="34" charset="-122"/>
                 <a:cs typeface="Cambria" pitchFamily="34" charset="-120"/>
               </a:rPr>
-              <a:t>143</a:t>
+              <a:t>137</a:t>
             </a:r>
             <a:endParaRPr lang="en-US" sz="5400" dirty="0"/>
           </a:p>
@@ -17243,7 +17243,7 @@
                   <a:srgbClr val="5C7173"/>
                 </a:solidFill>
               </a:rPr>
-              <a:t>explanations a minute with 8 slots (gemma3:4b, laptop RTX 4060). Default: 54, one at a time</a:t>
+              <a:t>explanations a minute with 8 slots (gemma3:4b, laptop RTX 4060). Default: 53, one at a time</a:t>
             </a:r>
             <a:endParaRPr lang="en-US" sz="1400" dirty="0"/>
           </a:p>
@@ -17309,7 +17309,7 @@
                   <a:srgbClr val="0E3B3F"/>
                 </a:solidFill>
               </a:rPr>
-              <a:t>vLLM is the planned production server, and it has not been run.</a:t>
+              <a:t>Through the real queue step: 399 claims, 777 findings, empty cache, 8 workers.</a:t>
             </a:r>
             <a:endParaRPr lang="en-US" sz="1400" dirty="0"/>
           </a:p>
@@ -17323,7 +17323,7 @@
                   <a:srgbClr val="17292B"/>
                 </a:solidFill>
               </a:rPr>
-              <a:t>Ollama's downloaded model cannot be reused by vLLM, the Hugging Face cache holds no chat model, and the laptop's system drive has under 9 GB free (vLLM with a 4B model needs about 15 GB). Only 5% of findings need a model call once the template cache is warm, so 140 calls a minute can cover roughly 2,800 findings a minute. The benchmark script works against any server, so the same table can be made on the target.</a:t>
+              <a:t>74 model calls (90.5% of findings needed none), 49 seconds, about 490 claims a minute; warm cache about 2,050 a minute, 18 calls that retried 3 templates the guard had refused. 0 model errors. A debug build on this laptop, not the target card. vLLM is the planned production server and has not been run here: we stay on Ollama unless the target measurement says otherwise, and the benchmark script works on either.</a:t>
             </a:r>
             <a:endParaRPr lang="en-US" sz="1400" dirty="0"/>
           </a:p>
@@ -27006,7 +27006,7 @@
               <a:buNone/>
             </a:pPr>
             <a:r>
-              <a:rPr lang="en-US" sz="3200" b="1" dirty="0">
+              <a:rPr lang="en-US" sz="3000" b="1" dirty="0">
                 <a:solidFill>
                   <a:srgbClr val="14746F"/>
                 </a:solidFill>
@@ -27014,9 +27014,9 @@
                 <a:ea typeface="Cambria" pitchFamily="34" charset="-122"/>
                 <a:cs typeface="Cambria" pitchFamily="34" charset="-120"/>
               </a:rPr>
-              <a:t>632 of 665</a:t>
-            </a:r>
-            <a:endParaRPr lang="en-US" sz="3200" dirty="0"/>
+              <a:t>90.5% to 97.7%</a:t>
+            </a:r>
+            <a:endParaRPr lang="en-US" sz="3000" dirty="0"/>
           </a:p>
         </p:txBody>
       </p:sp>
@@ -27050,7 +27050,7 @@
                   <a:srgbClr val="5C7173"/>
                 </a:solidFill>
               </a:rPr>
-              <a:t>findings served from the template cache (95%), 33 model calls</a:t>
+              <a:t>of 777 findings need no model call: empty cache, then warm (real model, 399 claims)</a:t>
             </a:r>
             <a:endParaRPr lang="en-US" sz="1400" dirty="0"/>
           </a:p>
@@ -27236,7 +27236,7 @@
                   <a:srgbClr val="5C7173"/>
                 </a:solidFill>
               </a:rPr>
-              <a:t>Budgets (explanations per minute and per day) are counted in the database, not in Redis. Defaults: 30 a minute, 2,000 a day.</a:t>
+              <a:t>Budgets are counted in the database, not Redis (defaults 30 a minute, 2,000 a day; the load test raised the minute budget to 600). A template the guard refuses is not cached.</a:t>
             </a:r>
             <a:endParaRPr lang="en-US" sz="1100" dirty="0"/>
           </a:p>

--- a/docs/presentation/ClaimGuard_Mentor_Session.pptx
+++ b/docs/presentation/ClaimGuard_Mentor_Session.pptx
@@ -38,9 +38,15 @@
     <p:sldId id="286" r:id="rId32"/>
     <p:sldId id="287" r:id="rId33"/>
     <p:sldId id="288" r:id="rId34"/>
+    <p:sldId id="289" r:id="rId35"/>
+    <p:sldId id="290" r:id="rId36"/>
+    <p:sldId id="291" r:id="rId37"/>
+    <p:sldId id="292" r:id="rId38"/>
+    <p:sldId id="293" r:id="rId39"/>
+    <p:sldId id="294" r:id="rId40"/>
   </p:sldIdLst>
   <p:notesMasterIdLst>
-    <p:notesMasterId r:id="rId35"/>
+    <p:notesMasterId r:id="rId41"/>
   </p:notesMasterIdLst>
   <p:sldSz cx="12192000" cy="6858000"/>
   <p:notesSz cx="6858000" cy="12192000"/>
@@ -139,14 +145,14 @@
   <p:extLst>
     <p:ext uri="{521415D9-36F7-43E2-AB2F-B90AF26B5E84}">
       <p14:sectionLst xmlns:p14="http://schemas.microsoft.com/office/powerpoint/2010/main">
-        <p14:section name="Opening" id="{211f1a6a-fa2d-17fd-2349-6c46f60abac3}">
+        <p14:section name="Opening" id="{ee76d728-a490-1709-723b-5460f77493c6}">
           <p14:sldIdLst>
             <p14:sldId id="256"/>
             <p14:sldId id="257"/>
             <p14:sldId id="258"/>
           </p14:sldIdLst>
         </p14:section>
-        <p14:section name="Core" id="{15b7b148-bd68-5a6e-11df-4aaaf42dcba8}">
+        <p14:section name="Core" id="{3b4dea60-84e8-5c72-1a6e-d9231f56d2a3}">
           <p14:sldIdLst>
             <p14:sldId id="259"/>
             <p14:sldId id="260"/>
@@ -157,7 +163,7 @@
             <p14:sldId id="265"/>
           </p14:sldIdLst>
         </p14:section>
-        <p14:section name="Queue, load balancing and AI" id="{db2395ea-9468-4911-420f-7be964dc18d2}">
+        <p14:section name="Queue, load balancing and AI" id="{b1eaa0d6-9179-8c77-703f-f9b326bfeaf6}">
           <p14:sldIdLst>
             <p14:sldId id="266"/>
             <p14:sldId id="267"/>
@@ -170,34 +176,40 @@
             <p14:sldId id="274"/>
           </p14:sldIdLst>
         </p14:section>
-        <p14:section name="Storage and built this week" id="{565caad2-149e-bb5c-1c17-8e6855edc54d}">
+        <p14:section name="Storage and built this week" id="{02906909-a041-2ab4-e420-a473b486f4db}">
           <p14:sldIdLst>
             <p14:sldId id="275"/>
             <p14:sldId id="276"/>
             <p14:sldId id="277"/>
           </p14:sldIdLst>
         </p14:section>
-        <p14:section name="Less work for the operator" id="{82b5b5bb-4416-3dfe-8faf-61a664052a83}">
+        <p14:section name="Less work for the operator" id="{c222081f-3a55-e453-59e2-598847e3fcd4}">
           <p14:sldIdLst>
             <p14:sldId id="278"/>
             <p14:sldId id="279"/>
             <p14:sldId id="280"/>
             <p14:sldId id="281"/>
             <p14:sldId id="282"/>
-          </p14:sldIdLst>
-        </p14:section>
-        <p14:section name="Trust" id="{4b1b2e22-1b6a-736c-c7d7-88348d031a6b}">
-          <p14:sldIdLst>
             <p14:sldId id="283"/>
             <p14:sldId id="284"/>
             <p14:sldId id="285"/>
           </p14:sldIdLst>
         </p14:section>
-        <p14:section name="Close" id="{4ede5651-80a5-ade0-de00-45dab2e05823}">
+        <p14:section name="Trust" id="{4fea54b4-87f3-5b97-02b7-49318d03ab34}">
           <p14:sldIdLst>
             <p14:sldId id="286"/>
             <p14:sldId id="287"/>
             <p14:sldId id="288"/>
+            <p14:sldId id="289"/>
+            <p14:sldId id="290"/>
+            <p14:sldId id="291"/>
+          </p14:sldIdLst>
+        </p14:section>
+        <p14:section name="Close" id="{c8c97747-d8d7-8316-2562-91ff42ea7284}">
+          <p14:sldIdLst>
+            <p14:sldId id="292"/>
+            <p14:sldId id="293"/>
+            <p14:sldId id="294"/>
           </p14:sldIdLst>
         </p14:section>
       </p14:sectionLst>
@@ -858,6 +870,576 @@
 </c:chartSpace>
 </file>
 
+<file path=ppt/charts/chart3.xml><?xml version="1.0" encoding="utf-8"?>
+<c:chartSpace xmlns:c="http://schemas.openxmlformats.org/drawingml/2006/chart" xmlns:a="http://schemas.openxmlformats.org/drawingml/2006/main" xmlns:r="http://schemas.openxmlformats.org/officeDocument/2006/relationships">
+  <c:date1904 val="0"/>
+  <c:roundedCorners val="1"/>
+  <c:chart>
+    <c:title>
+      <c:tx>
+        <c:rich>
+          <a:bodyPr/>
+          <a:lstStyle/>
+          <a:p>
+            <a:pPr>
+              <a:defRPr sz="1200" b="0" i="0" u="none" strike="noStrike">
+                <a:solidFill>
+                  <a:srgbClr val="0E3B3F"/>
+                </a:solidFill>
+                <a:latin typeface="+mn-lt"/>
+              </a:defRPr>
+            </a:pPr>
+            <a:r>
+              <a:rPr sz="1200" b="0" i="0" u="none" strike="noStrike">
+                <a:solidFill>
+                  <a:srgbClr val="0E3B3F"/>
+                </a:solidFill>
+                <a:latin typeface="+mn-lt"/>
+              </a:rPr>
+              <a:t>95% upper bound on the miss rate (%) after n audited claims, none missed</a:t>
+            </a:r>
+          </a:p>
+        </c:rich>
+      </c:tx>
+      <c:layout/>
+      <c:overlay val="0"/>
+    </c:title>
+    <c:autoTitleDeleted val="0"/>
+    <c:plotArea>
+      <c:layout/>
+      <c:barChart>
+        <c:barDir val="col"/>
+        <c:grouping val="clustered"/>
+        <c:varyColors val="0"/>
+        <c:ser>
+          <c:idx val="0"/>
+          <c:order val="0"/>
+          <c:tx>
+            <c:strRef>
+              <c:f>Sheet1!$B$1</c:f>
+              <c:strCache>
+                <c:ptCount val="1"/>
+                <c:pt idx="0">
+                  <c:v>Upper bound</c:v>
+                </c:pt>
+              </c:strCache>
+            </c:strRef>
+          </c:tx>
+          <c:spPr>
+            <a:solidFill>
+              <a:srgbClr val="14746F"/>
+            </a:solidFill>
+            <a:effectLst/>
+          </c:spPr>
+          <c:invertIfNegative val="0"/>
+          <c:dLbls>
+            <c:numFmt formatCode="#,##0" sourceLinked="0"/>
+            <c:txPr>
+              <a:bodyPr/>
+              <a:lstStyle/>
+              <a:p>
+                <a:pPr>
+                  <a:defRPr b="0" i="0" strike="noStrike" sz="1200" u="none">
+                    <a:solidFill>
+                      <a:srgbClr val="17292B"/>
+                    </a:solidFill>
+                    <a:latin typeface="+mn-lt"/>
+                  </a:defRPr>
+                </a:pPr>
+              </a:p>
+            </c:txPr>
+            <c:showLegendKey val="0"/>
+            <c:showVal val="1"/>
+            <c:showCatName val="0"/>
+            <c:showSerName val="0"/>
+            <c:showPercent val="0"/>
+            <c:showBubbleSize val="0"/>
+            <c:showLeaderLines val="0"/>
+          </c:dLbls>
+          <c:cat>
+            <c:multiLvlStrRef>
+              <c:f>Sheet1!$A$2:$A$8</c:f>
+              <c:multiLvlStrCache>
+                <c:ptCount val="7"/>
+                <c:lvl>
+                  <c:pt idx="0">
+                    <c:v>30</c:v>
+                  </c:pt>
+                  <c:pt idx="1">
+                    <c:v>60</c:v>
+                  </c:pt>
+                  <c:pt idx="2">
+                    <c:v>150</c:v>
+                  </c:pt>
+                  <c:pt idx="3">
+                    <c:v>300</c:v>
+                  </c:pt>
+                  <c:pt idx="4">
+                    <c:v>600</c:v>
+                  </c:pt>
+                  <c:pt idx="5">
+                    <c:v>1,000</c:v>
+                  </c:pt>
+                  <c:pt idx="6">
+                    <c:v>3,000</c:v>
+                  </c:pt>
+                </c:lvl>
+              </c:multiLvlStrCache>
+            </c:multiLvlStrRef>
+          </c:cat>
+          <c:val>
+            <c:numRef>
+              <c:f>Sheet1!$B$2:$B$8</c:f>
+              <c:numCache>
+                <c:formatCode>General</c:formatCode>
+                <c:ptCount val="7"/>
+                <c:pt idx="0">
+                  <c:v>9.5</c:v>
+                </c:pt>
+                <c:pt idx="1">
+                  <c:v>4.9</c:v>
+                </c:pt>
+                <c:pt idx="2">
+                  <c:v>2</c:v>
+                </c:pt>
+                <c:pt idx="3">
+                  <c:v>1</c:v>
+                </c:pt>
+                <c:pt idx="4">
+                  <c:v>0.5</c:v>
+                </c:pt>
+                <c:pt idx="5">
+                  <c:v>0.3</c:v>
+                </c:pt>
+                <c:pt idx="6">
+                  <c:v>0.1</c:v>
+                </c:pt>
+              </c:numCache>
+            </c:numRef>
+          </c:val>
+        </c:ser>
+        <c:dLbls>
+          <c:numFmt formatCode="#,##0" sourceLinked="0"/>
+          <c:txPr>
+            <a:bodyPr/>
+            <a:lstStyle/>
+            <a:p>
+              <a:pPr>
+                <a:defRPr b="0" i="0" strike="noStrike" sz="1200" u="none">
+                  <a:solidFill>
+                    <a:srgbClr val="17292B"/>
+                  </a:solidFill>
+                  <a:latin typeface="+mn-lt"/>
+                </a:defRPr>
+              </a:pPr>
+            </a:p>
+          </c:txPr>
+          <c:showLegendKey val="0"/>
+          <c:showVal val="1"/>
+          <c:showCatName val="0"/>
+          <c:showSerName val="0"/>
+          <c:showPercent val="0"/>
+          <c:showBubbleSize val="0"/>
+          <c:showLeaderLines val="0"/>
+        </c:dLbls>
+        <c:gapWidth val="150"/>
+        <c:overlap val="0"/>
+        <c:axId val="2094734554"/>
+        <c:axId val="2094734552"/>
+        <c:axId val="2094734556"/>
+      </c:barChart>
+      <c:catAx>
+        <c:axId val="2094734554"/>
+        <c:scaling>
+          <c:orientation val="minMax"/>
+        </c:scaling>
+        <c:delete val="0"/>
+        <c:axPos val="b"/>
+        <c:numFmt formatCode="General" sourceLinked="1"/>
+        <c:majorTickMark val="out"/>
+        <c:minorTickMark val="none"/>
+        <c:tickLblPos val="low"/>
+        <c:spPr>
+          <a:ln w="12700" cap="flat">
+            <a:solidFill>
+              <a:srgbClr val="888888"/>
+            </a:solidFill>
+            <a:prstDash val="solid"/>
+            <a:round/>
+          </a:ln>
+        </c:spPr>
+        <c:txPr>
+          <a:bodyPr/>
+          <a:lstStyle/>
+          <a:p>
+            <a:pPr>
+              <a:defRPr sz="1100" b="0" i="0" u="none" strike="noStrike">
+                <a:solidFill>
+                  <a:srgbClr val="17292B"/>
+                </a:solidFill>
+                <a:latin typeface="+mn-lt"/>
+              </a:defRPr>
+            </a:pPr>
+            <a:endParaRPr lang="en-US"/>
+          </a:p>
+        </c:txPr>
+        <c:crossAx val="2094734552"/>
+        <c:crosses val="autoZero"/>
+        <c:auto val="1"/>
+        <c:lblAlgn val="ctr"/>
+        <c:noMultiLvlLbl val="1"/>
+      </c:catAx>
+      <c:valAx>
+        <c:axId val="2094734552"/>
+        <c:scaling>
+          <c:orientation val="minMax"/>
+          <c:min val="0"/>
+        </c:scaling>
+        <c:delete val="0"/>
+        <c:axPos val="l"/>
+        <c:majorGridlines>
+          <c:spPr>
+            <a:ln w="6350" cap="flat">
+              <a:solidFill>
+                <a:srgbClr val="D5E1DF"/>
+              </a:solidFill>
+              <a:prstDash val="solid"/>
+              <a:round/>
+            </a:ln>
+          </c:spPr>
+        </c:majorGridlines>
+        <c:numFmt formatCode="General" sourceLinked="0"/>
+        <c:majorTickMark val="out"/>
+        <c:minorTickMark val="none"/>
+        <c:tickLblPos val="nextTo"/>
+        <c:spPr>
+          <a:ln w="12700" cap="flat">
+            <a:solidFill>
+              <a:srgbClr val="888888"/>
+            </a:solidFill>
+            <a:prstDash val="solid"/>
+            <a:round/>
+          </a:ln>
+        </c:spPr>
+        <c:txPr>
+          <a:bodyPr/>
+          <a:lstStyle/>
+          <a:p>
+            <a:pPr>
+              <a:defRPr sz="1000" b="0" i="0" u="none" strike="noStrike">
+                <a:solidFill>
+                  <a:srgbClr val="5C7173"/>
+                </a:solidFill>
+                <a:latin typeface="+mn-lt"/>
+              </a:defRPr>
+            </a:pPr>
+            <a:endParaRPr lang="en-US"/>
+          </a:p>
+        </c:txPr>
+        <c:crossAx val="2094734554"/>
+        <c:crosses val="autoZero"/>
+        <c:crossBetween val="between"/>
+      </c:valAx>
+      <c:spPr>
+        <a:noFill/>
+        <a:ln>
+          <a:noFill/>
+        </a:ln>
+        <a:effectLst/>
+      </c:spPr>
+    </c:plotArea>
+    <c:plotVisOnly val="1"/>
+    <c:dispBlanksAs val="span"/>
+  </c:chart>
+  <c:spPr>
+    <a:noFill/>
+    <a:ln>
+      <a:noFill/>
+    </a:ln>
+    <a:effectLst/>
+  </c:spPr>
+  <c:externalData r:id="rId1">
+    <c:autoUpdate val="0"/>
+  </c:externalData>
+</c:chartSpace>
+</file>
+
+<file path=ppt/charts/chart4.xml><?xml version="1.0" encoding="utf-8"?>
+<c:chartSpace xmlns:c="http://schemas.openxmlformats.org/drawingml/2006/chart" xmlns:a="http://schemas.openxmlformats.org/drawingml/2006/main" xmlns:r="http://schemas.openxmlformats.org/officeDocument/2006/relationships">
+  <c:date1904 val="0"/>
+  <c:roundedCorners val="1"/>
+  <c:chart>
+    <c:title>
+      <c:tx>
+        <c:rich>
+          <a:bodyPr/>
+          <a:lstStyle/>
+          <a:p>
+            <a:pPr>
+              <a:defRPr sz="1300" b="0" i="0" u="none" strike="noStrike">
+                <a:solidFill>
+                  <a:srgbClr val="0E3B3F"/>
+                </a:solidFill>
+                <a:latin typeface="+mn-lt"/>
+              </a:defRPr>
+            </a:pPr>
+            <a:r>
+              <a:rPr sz="1300" b="0" i="0" u="none" strike="noStrike">
+                <a:solidFill>
+                  <a:srgbClr val="0E3B3F"/>
+                </a:solidFill>
+                <a:latin typeface="+mn-lt"/>
+              </a:rPr>
+              <a:t>Findings a person decides per 500 claims</a:t>
+            </a:r>
+          </a:p>
+        </c:rich>
+      </c:tx>
+      <c:layout/>
+      <c:overlay val="0"/>
+    </c:title>
+    <c:autoTitleDeleted val="0"/>
+    <c:plotArea>
+      <c:layout/>
+      <c:barChart>
+        <c:barDir val="col"/>
+        <c:grouping val="clustered"/>
+        <c:varyColors val="0"/>
+        <c:ser>
+          <c:idx val="0"/>
+          <c:order val="0"/>
+          <c:tx>
+            <c:strRef>
+              <c:f>Sheet1!$B$1</c:f>
+              <c:strCache>
+                <c:ptCount val="1"/>
+                <c:pt idx="0">
+                  <c:v>Findings</c:v>
+                </c:pt>
+              </c:strCache>
+            </c:strRef>
+          </c:tx>
+          <c:spPr>
+            <a:solidFill>
+              <a:srgbClr val="14746F"/>
+            </a:solidFill>
+            <a:effectLst/>
+          </c:spPr>
+          <c:invertIfNegative val="0"/>
+          <c:dLbls>
+            <c:numFmt formatCode="#,##0" sourceLinked="0"/>
+            <c:txPr>
+              <a:bodyPr/>
+              <a:lstStyle/>
+              <a:p>
+                <a:pPr>
+                  <a:defRPr b="0" i="0" strike="noStrike" sz="1200" u="none">
+                    <a:solidFill>
+                      <a:srgbClr val="17292B"/>
+                    </a:solidFill>
+                    <a:latin typeface="+mn-lt"/>
+                  </a:defRPr>
+                </a:pPr>
+              </a:p>
+            </c:txPr>
+            <c:showLegendKey val="0"/>
+            <c:showVal val="1"/>
+            <c:showCatName val="0"/>
+            <c:showSerName val="0"/>
+            <c:showPercent val="0"/>
+            <c:showBubbleSize val="0"/>
+            <c:showLeaderLines val="0"/>
+          </c:dLbls>
+          <c:cat>
+            <c:multiLvlStrRef>
+              <c:f>Sheet1!$A$2:$A$5</c:f>
+              <c:multiLvlStrCache>
+                <c:ptCount val="4"/>
+                <c:lvl>
+                  <c:pt idx="0">
+                    <c:v>Today</c:v>
+                  </c:pt>
+                  <c:pt idx="1">
+                    <c:v>Auto-clear</c:v>
+                  </c:pt>
+                  <c:pt idx="2">
+                    <c:v>+ medium</c:v>
+                  </c:pt>
+                  <c:pt idx="3">
+                    <c:v>+ all</c:v>
+                  </c:pt>
+                </c:lvl>
+              </c:multiLvlStrCache>
+            </c:multiLvlStrRef>
+          </c:cat>
+          <c:val>
+            <c:numRef>
+              <c:f>Sheet1!$B$2:$B$5</c:f>
+              <c:numCache>
+                <c:formatCode>General</c:formatCode>
+                <c:ptCount val="4"/>
+                <c:pt idx="0">
+                  <c:v>650</c:v>
+                </c:pt>
+                <c:pt idx="1">
+                  <c:v>650</c:v>
+                </c:pt>
+                <c:pt idx="2">
+                  <c:v>541</c:v>
+                </c:pt>
+                <c:pt idx="3">
+                  <c:v>399</c:v>
+                </c:pt>
+              </c:numCache>
+            </c:numRef>
+          </c:val>
+        </c:ser>
+        <c:dLbls>
+          <c:numFmt formatCode="#,##0" sourceLinked="0"/>
+          <c:txPr>
+            <a:bodyPr/>
+            <a:lstStyle/>
+            <a:p>
+              <a:pPr>
+                <a:defRPr b="0" i="0" strike="noStrike" sz="1200" u="none">
+                  <a:solidFill>
+                    <a:srgbClr val="17292B"/>
+                  </a:solidFill>
+                  <a:latin typeface="+mn-lt"/>
+                </a:defRPr>
+              </a:pPr>
+            </a:p>
+          </c:txPr>
+          <c:showLegendKey val="0"/>
+          <c:showVal val="1"/>
+          <c:showCatName val="0"/>
+          <c:showSerName val="0"/>
+          <c:showPercent val="0"/>
+          <c:showBubbleSize val="0"/>
+          <c:showLeaderLines val="0"/>
+        </c:dLbls>
+        <c:gapWidth val="150"/>
+        <c:overlap val="0"/>
+        <c:axId val="2094734554"/>
+        <c:axId val="2094734552"/>
+        <c:axId val="2094734556"/>
+      </c:barChart>
+      <c:catAx>
+        <c:axId val="2094734554"/>
+        <c:scaling>
+          <c:orientation val="minMax"/>
+        </c:scaling>
+        <c:delete val="0"/>
+        <c:axPos val="b"/>
+        <c:numFmt formatCode="General" sourceLinked="1"/>
+        <c:majorTickMark val="out"/>
+        <c:minorTickMark val="none"/>
+        <c:tickLblPos val="low"/>
+        <c:spPr>
+          <a:ln w="12700" cap="flat">
+            <a:solidFill>
+              <a:srgbClr val="888888"/>
+            </a:solidFill>
+            <a:prstDash val="solid"/>
+            <a:round/>
+          </a:ln>
+        </c:spPr>
+        <c:txPr>
+          <a:bodyPr/>
+          <a:lstStyle/>
+          <a:p>
+            <a:pPr>
+              <a:defRPr sz="1100" b="0" i="0" u="none" strike="noStrike">
+                <a:solidFill>
+                  <a:srgbClr val="17292B"/>
+                </a:solidFill>
+                <a:latin typeface="+mn-lt"/>
+              </a:defRPr>
+            </a:pPr>
+            <a:endParaRPr lang="en-US"/>
+          </a:p>
+        </c:txPr>
+        <c:crossAx val="2094734552"/>
+        <c:crosses val="autoZero"/>
+        <c:auto val="1"/>
+        <c:lblAlgn val="ctr"/>
+        <c:noMultiLvlLbl val="1"/>
+      </c:catAx>
+      <c:valAx>
+        <c:axId val="2094734552"/>
+        <c:scaling>
+          <c:orientation val="minMax"/>
+          <c:min val="0"/>
+        </c:scaling>
+        <c:delete val="0"/>
+        <c:axPos val="l"/>
+        <c:majorGridlines>
+          <c:spPr>
+            <a:ln w="6350" cap="flat">
+              <a:solidFill>
+                <a:srgbClr val="D5E1DF"/>
+              </a:solidFill>
+              <a:prstDash val="solid"/>
+              <a:round/>
+            </a:ln>
+          </c:spPr>
+        </c:majorGridlines>
+        <c:numFmt formatCode="General" sourceLinked="0"/>
+        <c:majorTickMark val="out"/>
+        <c:minorTickMark val="none"/>
+        <c:tickLblPos val="nextTo"/>
+        <c:spPr>
+          <a:ln w="12700" cap="flat">
+            <a:solidFill>
+              <a:srgbClr val="888888"/>
+            </a:solidFill>
+            <a:prstDash val="solid"/>
+            <a:round/>
+          </a:ln>
+        </c:spPr>
+        <c:txPr>
+          <a:bodyPr/>
+          <a:lstStyle/>
+          <a:p>
+            <a:pPr>
+              <a:defRPr sz="1000" b="0" i="0" u="none" strike="noStrike">
+                <a:solidFill>
+                  <a:srgbClr val="5C7173"/>
+                </a:solidFill>
+                <a:latin typeface="+mn-lt"/>
+              </a:defRPr>
+            </a:pPr>
+            <a:endParaRPr lang="en-US"/>
+          </a:p>
+        </c:txPr>
+        <c:crossAx val="2094734554"/>
+        <c:crosses val="autoZero"/>
+        <c:crossBetween val="between"/>
+      </c:valAx>
+      <c:spPr>
+        <a:noFill/>
+        <a:ln>
+          <a:noFill/>
+        </a:ln>
+        <a:effectLst/>
+      </c:spPr>
+    </c:plotArea>
+    <c:plotVisOnly val="1"/>
+    <c:dispBlanksAs val="span"/>
+  </c:chart>
+  <c:spPr>
+    <a:noFill/>
+    <a:ln>
+      <a:noFill/>
+    </a:ln>
+    <a:effectLst/>
+  </c:spPr>
+  <c:externalData r:id="rId1">
+    <c:autoUpdate val="0"/>
+  </c:externalData>
+</c:chartSpace>
+</file>
+
 <file path=ppt/notesMasters/notesMaster1.xml><?xml version="1.0" encoding="utf-8"?>
 <p:notesMaster xmlns:a="http://schemas.openxmlformats.org/drawingml/2006/main" xmlns:r="http://schemas.openxmlformats.org/officeDocument/2006/relationships" xmlns:p="http://schemas.openxmlformats.org/presentationml/2006/main">
   <p:cSld>
@@ -2045,7 +2627,7 @@
           <a:p>
             <a:r>
               <a:rPr lang="en-US" dirty="0"/>
-              <a:t>You asked how the data is stored, and that it is encrypted. MongoDB holds everything durable. In the claims collection, each claim version is stored with its receipt, and the claim, the rule results, the advisory results, the AI explanations, the corrections and every reviewer decision are encrypted field by field, inside the application, before they reach the database. The method is a Fernet token: AES-128 in CBC mode with an HMAC-SHA256 tag. The envelope also names the claim, the version and the field it belongs to, so someone with database access cannot swap one claim's evidence under another claim; it is detected and refused. What stays readable is only what the database needs to route work: ids, state, lane, score, timestamps, hashes, and a keyed hash of the patient id, which lets us find a patient's earlier claims without the id being readable. Users are stored with a bcrypt hash and an encrypted authenticator seed. Redis holds only the message "run claim X, version V", no claim data. The audit logs are encrypted on disk. Honest limits: whoever holds the key sees everything, the shape of the data is visible, and rotating the key needs a re-encryption pass that is not built yet.</a:t>
+              <a:t>You asked how the data is stored, and that it is encrypted. MongoDB holds everything durable. In the claims collection, each claim version is stored with its receipt, and the claim, the rule results, the advisory results, the AI explanations, the corrections and every reviewer decision are encrypted field by field, inside the application, before they reach the database. The method is a Fernet token: AES-128 in CBC mode with an HMAC-SHA256 tag. The envelope also names the claim, the version and the field it belongs to, so someone with database access cannot swap one claim's evidence under another claim; it is detected and refused. What stays readable is only what the database needs to route work: ids, state, lane, score, timestamps, hashes, and a keyed hash of the patient id, which lets us find a patient's earlier claims without the id being readable. Users are stored with a bcrypt hash and an encrypted authenticator seed. Redis holds only the message "run claim X, version V", no claim data. The audit logs are encrypted on disk. Honest limits: whoever holds the key sees everything, and the shape of the data is visible, for example how many claims there are and in which lanes. The key can be rotated with one command, which I will show on the backup slide.</a:t>
             </a:r>
             <a:endParaRPr lang="en-US" dirty="0"/>
           </a:p>
@@ -2661,7 +3243,7 @@
           <a:p>
             <a:r>
               <a:rPr lang="en-US" dirty="0"/>
-              <a:t>You warned us that a model trained on artificial decisions might only reproduce the rules, so we tested that honestly. On the left is the workload report, which is live and read-only. It reads reviewer confirmations and dismissals per rule, and it lists rules reviewers keep overriding, which are candidates to retune, and rules almost always upheld, which are candidates for lighter review. In simulation it found both bad rules in twenty of twenty histories, with no false alarms. On the right is the fine-tuned model, Laya. It learned the rulebook: accuracy 0.97 against 0.63 zero-shot. But its labels are the engine's own, it finds only sixty-four percent of real failures, and it cannot save an operator time after the engine has run. So we archived it. It is not in the decision path, and a confidence is never shown as a probability.</a:t>
+              <a:t>This is the first of the lever slides, the work-reduction ideas you encouraged. Auto-clear. A claim with nothing flagged and an intact set of fifteen results can be cleared by the system rather than verified by a person. It is off by default. When it is on, a random five percent still go to a person, and the draw is written on the claim so each one can be checked. A damaged claim, or one with any flagged finding, is never cleared by the system. On the six hundred labelled claims, in twenty random batches of five hundred, the system cleared one hundred fifty-nine claims a batch by itself, thirty-two percent, and none of them had a finding in the answer key. The chart is the honest part: the audit can only prove a small miss rate if it is big enough. With zero misses in three hundred audited claims, we can say with ninety-five percent confidence that the miss rate is at most one percent. The administrator's audit panel shows the escalation rate with that exact bound, and advises keeping five percent until three hundred audited claims are resolved. This is synthetic data where the engine equals the key, so it shows what the policy does here, not what a hospital would see.</a:t>
             </a:r>
             <a:endParaRPr lang="en-US" dirty="0"/>
           </a:p>
@@ -2749,7 +3331,7 @@
           <a:p>
             <a:r>
               <a:rPr lang="en-US" dirty="0"/>
-              <a:t>These are the eight advisory rules, kept apart from the fifteen. They have their own ids, file and schema, and they never change an official result. E101 to E103 look across claims: a duplicate line, an authorization exhausted across claims, a daily quantity across claims. E102 is the cross-claim authorization usage you described, working on explicitly synthetic history, and it fires only when earlier claims contributed units, so it never double-reports what R009 already fails. E001 to E005 follow published practice on bundling, modifiers and diagnosis, but their attributes are invented and labelled so, which means they cannot fire on public data by design. Four thousand eight hundred of four thousand eight hundred results agree with an independent oracle.</a:t>
+              <a:t>Second lever: auto-request. Many findings only say that data is missing. They need no judgment to ask the provider about. With this setting, the system records the request-information decision itself, with the reason taken from the rulebook's own corrective-action text, never from claim data. A claim that also has real findings keeps them for a person. A random share is handled by a person in full, and the audit counts how often that person also asked for the information. The table is measured on the real pipeline. Today a person decides six hundred fifty findings per five hundred claims. Auto-clear alone changes nothing there, because it only removes whole green claims. Adding auto-request for medium severity takes it to five hundred forty-one, minus seventeen percent. Adding all severities takes it to three hundred ninety-nine, minus thirty-nine percent, with zero requests on a finding the answer key does not call missing data. Note the unit: this is findings and claims, not minutes. We have not measured review time, and the slide says so.</a:t>
             </a:r>
             <a:endParaRPr lang="en-US" dirty="0"/>
           </a:p>
@@ -2837,7 +3419,7 @@
           <a:p>
             <a:r>
               <a:rPr lang="en-US" dirty="0"/>
-              <a:t>Three more things we built that are not on the main path, so I will be quick. First, payer rules as data. The fifteen rules are code, hashed with the build, and nobody can edit them. But what a payer contract says, such as the submission window, the allowed providers, the services needing authorization and the price and quantity limits, is a table an administrator can change. A change is validated, shown as a list of differences, needs a reason, and with two administrators must be approved by a different one with a fresh code. Each applied change becomes a numbered version in a hash-chained log, and the rulebook hash in every receipt covers the table. Second, the specification, written for our UML teacher: twenty use cases, each with a main scenario, alternatives and failures, fourteen UML diagrams that we checked against the code, such as the state machine and the database collections, a catalogue of failures and recovery, and a French cahier des charges. Third, live updates: the console learns of a change in under two seconds, instead of polling every twenty, and the stream carries no claim data.</a:t>
+              <a:t>Third lever, and the smallest: confirming. Confirming agrees with the engine, so it needs no typed reason, while dismissing still does, because dismissing overrides the engine. There is a confirm button on each finding, a confirm-all on a claim, and when the last finding is decided the console opens the next claim. That is on. Bulk confirm is off by default. It is only for rules whose findings reviewers almost always uphold: a rule qualifies when the exact lower bound of its upheld rate is above a setting, from at least twenty decisions by at least three reviewers. The inbox then has a By rule view: the operator opens the list, looks at the findings, and confirms them all. The guards are all on the server: the rule must qualify at that moment, each claim goes through the normal decision path with leases, clearance, two-senior sign-off and both logs, a random share is left for a full review, and bulk decisions never count as evidence about the rule, otherwise a rubber stamp would keep a bad rule eligible. The limits are on the slide: the look-at-the-list step is enforced by the screen only, and the evidence came from simulated reviewers.</a:t>
             </a:r>
             <a:endParaRPr lang="en-US" dirty="0"/>
           </a:p>
@@ -2925,7 +3507,7 @@
           <a:p>
             <a:r>
               <a:rPr lang="en-US" dirty="0"/>
-              <a:t>This is what each person sees. A viewer sees all claims, read only. A reviewer or senior has the inbox, claim review with the copilot, what-if and recheck, Ask the rulebook, and import from files. An administrator has the queue overview, submit claims, routing settings, users, payer rules, system health, and the audit and trace pages, but cannot decide a claim. Pages are chosen by the permissions the server reports: what you may not do is not offered at all, and the server checks again on every request. Server text is only ever shown as text, and a test scans every script for ways to inject markup. There is also a desktop app: one file of about twenty-seven megabytes that shows the same console in its own window, published as a pre-release with a hash. A clickable mobile prototype exists, but after your meeting of 27 September the web console is the main target. Not done: a manual accessibility audit and a phone test.</a:t>
+              <a:t>You warned us that a model trained on artificial decisions might only reproduce the rules, so we tested that honestly. On the left is the workload report, which is live and read-only. It reads reviewer confirmations and dismissals per rule, and it lists rules reviewers keep overriding, which are candidates to retune, and rules almost always upheld, which are candidates for lighter review. In simulation it found both bad rules in twenty of twenty histories, with no false alarms. On the right is the fine-tuned model, Laya. It learned the rulebook: accuracy 0.97 against 0.63 zero-shot. But its labels are the engine's own, it finds only sixty-four percent of real failures, and it cannot save an operator time after the engine has run. So we archived it. It is not in the decision path, and a confidence is never shown as a probability.</a:t>
             </a:r>
             <a:endParaRPr lang="en-US" dirty="0"/>
           </a:p>
@@ -3013,7 +3595,7 @@
           <a:p>
             <a:r>
               <a:rPr lang="en-US" dirty="0"/>
-              <a:t>On security, four numbers. A hundred and sixteen black-box attack checks, all passing. Ninety-three deliberate breakages of the security and queue rules, each caught by a test. Four hundred thousand fuzzed requests through the API. And an unmasking limit of sixty claims an hour per person. Underneath: identity is badge, password and authenticator code, with four clearance levels enforced on the server, and a hidden action is not offered at all, not just disabled. Reviewers see pseudonyms, and unmasking needs its own permission, a reason, and that hourly limit. The most dangerous administrator actions need a second administrator. Claims, results and corrections are encrypted at rest. What is not done: nobody outside our team has attacked it, and one person holding two accounts is logged but not prevented.</a:t>
+              <a:t>These are the eight advisory rules, kept apart from the fifteen. They have their own ids, file and schema, and they never change an official result. E101 to E103 look across claims: a duplicate line, an authorization exhausted across claims, a daily quantity across claims. E102 is the cross-claim authorization usage you described, working on explicitly synthetic history, and it fires only when earlier claims contributed units, so it never double-reports what R009 already fails. E001 to E005 follow published practice on bundling, modifiers and diagnosis, but their attributes are invented and labelled so, which means they cannot fire on public data by design. Four thousand eight hundred of four thousand eight hundred results agree with an independent oracle.</a:t>
             </a:r>
             <a:endParaRPr lang="en-US" dirty="0"/>
           </a:p>
@@ -3101,7 +3683,7 @@
           <a:p>
             <a:r>
               <a:rPr lang="en-US" dirty="0"/>
-              <a:t>Every important moment is written down. When a claim is received we record the input hash, the rule pack hash and the result hash. When a finding is decided, we record who, what, why, and the original status. A what-if is recorded with who and how many changes, and nothing else is kept. A saved correction links both versions by input hash and records each change from and to. Unmasking an identifier is recorded and counted against an hourly limit. On the right, the tamper evidence: logs are hash-chained and signed, an append-only mirror refuses to follow an edited log, a trusted timestamp from an outside authority can anchor the head, and a ledger has Ed25519 checkpoints and Merkle proofs. In the demo I will rewrite an audit row, and the health panel goes red within seconds.</a:t>
+              <a:t>Three more things we built that are not on the main path, so I will be quick. First, payer rules as data. The fifteen rules are code, hashed with the build, and nobody can edit them. But what a payer contract says, such as the submission window, the allowed providers, the services needing authorization and the price and quantity limits, is a table an administrator can change. A change is validated, shown as a list of differences, needs a reason, and with two administrators must be approved by a different one with a fresh code. Each applied change becomes a numbered version in a hash-chained log, and the rulebook hash in every receipt covers the table. Second, the specification, written for our UML teacher: twenty use cases, each with a main scenario, alternatives and failures, fourteen UML diagrams that we checked against the code, such as the state machine and the database collections, a catalogue of failures and recovery, and a French cahier des charges. Third, live updates: the console learns of a change in under two seconds, instead of polling every twenty, and the stream carries no claim data.</a:t>
             </a:r>
             <a:endParaRPr lang="en-US" dirty="0"/>
           </a:p>
@@ -3277,7 +3859,7 @@
           <a:p>
             <a:r>
               <a:rPr lang="en-US" dirty="0"/>
-              <a:t>This is what the model measured here, and it is the speed of the AI step, nothing about servers. The laptop has an RTX 4060 with 8 gigabytes. With Ollama's default settings, it serves one request at a time: about fifty-three explanations a minute, at any concurrency. With eight parallel slots and flash attention, it reaches one hundred thirty-seven a minute, with no errors, and it stops improving past eight parallel requests. The better test is the card below: three hundred ninety-nine claims through the real explanation step, with an empty cache. Seventy-four model calls answered seven hundred seventy-seven findings, and the run took forty-nine seconds, about four hundred ninety claims a minute. With a warm cache, about two thousand. So the model is not the limit. It is a debug build on one laptop, so treat the numbers as measurements of this machine.</a:t>
+              <a:t>This is what each person sees. A viewer sees all claims, read only. A reviewer or senior has the inbox, claim review with the copilot, what-if and recheck, Ask the rulebook, and import from files. An administrator has the queue overview, submit claims, routing settings, users, payer rules, system health, and the audit and trace pages, but cannot decide a claim. Pages are chosen by the permissions the server reports: what you may not do is not offered at all, and the server checks again on every request. Server text is only ever shown as text, and a test scans every script for ways to inject markup. There is also a desktop app: one file of about twenty-seven megabytes that shows the same console in its own window, published as a pre-release with a hash. A clickable mobile prototype exists, but after your meeting of 27 September the web console is the main target. Not done: a manual accessibility audit and a phone test.</a:t>
             </a:r>
             <a:endParaRPr lang="en-US" dirty="0"/>
           </a:p>
@@ -3365,7 +3947,7 @@
           <a:p>
             <a:r>
               <a:rPr lang="en-US" dirty="0"/>
-              <a:t>This is the most important slide for credibility, so I will read it, and then I will answer the questions I expect. The public data is synthetic, so perfect scores do not show how real claims behave. The savings are simulated, and there has been no timed session with real reviewers. Real paper, handwriting and Arabic documents are untested. Subject access, erasure and retention are designed but not built, and encryption key rotation needs a re-encryption pass that is not built. A correction creates a new version in our system, but we do not write it back to the hospital's own system. The copilot has computable fixes for three rules, and for the rest it asks or checks. And nobody outside the team has attacked it. Expected questions. Why is F1 one point zero? Because the public claims are synthetic: it shows the engine is deterministic and correct against the documented rules, not that it works on real claims; the next step is real exports. Why a language model at all, when the cache serves most explanations? Because it phrases a new rule or failure shape once, the guard checks it, the cache keeps it, and without a model the system still works. Why YARA-X? We benchmarked it against plain Python and Python was faster in that build, so I will not claim speed. Our case is structural: the rules are readable files kept apart from code, hashed with the build, and they cannot have side effects. Will four-eyes become a bottleneck? Yes, it roughly doubles senior load in our simulation; it applies only to high-severity findings, and the thresholds are a versioned setting. What about the source system? We never edit a claim; every correction is a signed new version, and the write-back is an integration step we have not built.</a:t>
+              <a:t>On security, four numbers. A hundred and sixteen black-box attack checks, all passing. Ninety-three deliberate breakages of the security and queue rules, each caught by a test. Four hundred thousand fuzzed requests through the API. And an unmasking limit of sixty claims an hour per person. Underneath: identity is badge, password and authenticator code, with four clearance levels enforced on the server, and a hidden action is not offered at all, not just disabled. Reviewers see pseudonyms, and unmasking needs its own permission, a reason, and that hourly limit. The most dangerous administrator actions need a second administrator. Claims, results and corrections are encrypted at rest. What is not done: nobody outside our team has attacked it, and one person holding two accounts is logged but not prevented.</a:t>
             </a:r>
             <a:endParaRPr lang="en-US" dirty="0"/>
           </a:p>
@@ -3453,7 +4035,7 @@
           <a:p>
             <a:r>
               <a:rPr lang="en-US" dirty="0"/>
-              <a:t>Last before the demo, three ideas for where this could go, and I want to be clear that these are plans, not things we have built. One: attach a standard code to every finding. Each of our fifteen and eight rules would carry the matching claim adjustment reason or NPHIES error code as a badge in the console, so our language matches the remittance advice your billing teams read. We would need the official value sets from you rather than guessing. Two: payer overlays. Today a payer's contract is one versioned, approved policy table. The next step is payer-specific rule sets chosen by the insurer on the claim, so the same claim can pass for one payer and fail for another. Three: a proper time-saved study. Two matched packs of thirty claims, half the reviewers using the console first and half the baseline first, so learning effects cancel. We would log the median handling time per claim, the seeded errors missed and the clean claims wrongly flagged, and ask a short workload survey. That is question four.</a:t>
+              <a:t>Some engineering details on sign-in. The usual weakness of an account lock is that a stranger who knows a badge number can keep that person out. Ours only keeps out clients the owner has never signed in from. A client the owner signed in from is remembered for thirty days, as a keyed hash. Each badge and client pair gets five failures in fifteen minutes, after which only that client is refused, and each address as a whole gets a hundred. A correct sign-in by the owner clears the lock. The counters live in the database, updated atomically and expiring by themselves, so a restart or a second process sees the same counts. And every kind of refusal looks the same from outside: unknown badge, wrong password, wrong code, replayed code, locked, inactive. We timed eight of them with the real password cost, and they all took between eighty point three and eighty-two point six milliseconds, within three percent. What is still true: a stranger can keep someone out of a new device for fifteen minutes, and the timing was measured in-process, not across a network.</a:t>
             </a:r>
             <a:endParaRPr lang="en-US" dirty="0"/>
           </a:p>
@@ -3541,7 +4123,7 @@
           <a:p>
             <a:r>
               <a:rPr lang="en-US" dirty="0"/>
-              <a:t>For the demo, I will follow your six steps. A claim with a wrong amount arrives. The senior opens it and sees the summary and evidence. We try a what-if and every check would pass. We apply it with a reason, which creates version two. The trace shows both versions, who changed what and why. Then I rewrite an audit row and the alarm goes red. After that, four questions for you. First, R006 and R013: three public claims, CG-B10B19D8A56A, CG-00348A9B1AAD and CG-EC233ACB399D, split one service into a plain line and an EDU-SEPARATE line, and the rules pass them as documented, but the total quantity exceeds the per-line limit. Is that intended? Second, is pre-validation clear the right label? Third, is a Redis Streams queue in Rust acceptable in place of Celery or ARQ? Fourth, could we run a timed session with a few officers?</a:t>
+              <a:t>Two operational pieces we built because a security system that cannot be restored is not finished. Backup. One script writes one encrypted file, AES-256 with six hundred thousand key-stretching rounds, holding both databases, both audit logs and the audit mirror, plus a checksum, and it never overwrites. Restore refuses a wrong key, a damaged file, or contents that fail their checksums. We proved it by destroying everything: we put users and twelve claims in through the real API, backed up, destroyed every volume, restored, and checked that the same administrator signs in with the same password and authenticator and that the audit chains verify. The test found two real problems, both fixed: the restore replaced the database's own accounts mid-way, and the first script reported success after a failure. Key rotation. One command re-encrypts every stored claim, result, explanation, decision and name under a new key, stops rather than damaging anything, can be repeated after an interruption, and has a dry run. A second command does the same for authenticator seeds, so nobody has to enrol again.</a:t>
             </a:r>
             <a:endParaRPr lang="en-US" dirty="0"/>
           </a:p>
@@ -3565,6 +4147,534 @@
             <a:fld id="{F7021451-1387-4CA6-816F-3879F97B5CBC}" type="slidenum">
               <a:rPr lang="en-US"/>
               <a:t>33</a:t>
+            </a:fld>
+            <a:endParaRPr lang="en-US"/>
+          </a:p>
+        </p:txBody>
+      </p:sp>
+    </p:spTree>
+    <p:extLst>
+      <p:ext uri="{BB962C8B-B14F-4D97-AF65-F5344CB8AC3E}">
+        <p14:creationId xmlns:p14="http://schemas.microsoft.com/office/powerpoint/2010/main" val="1024086991"/>
+      </p:ext>
+    </p:extLst>
+  </p:cSld>
+  <p:clrMapOvr>
+    <a:masterClrMapping/>
+  </p:clrMapOvr>
+</p:notes>
+</file>
+
+<file path=ppt/notesSlides/notesSlide34.xml><?xml version="1.0" encoding="utf-8"?>
+<p:notes xmlns:a="http://schemas.openxmlformats.org/drawingml/2006/main" xmlns:r="http://schemas.openxmlformats.org/officeDocument/2006/relationships" xmlns:p="http://schemas.openxmlformats.org/presentationml/2006/main">
+  <p:cSld>
+    <p:spTree>
+      <p:nvGrpSpPr>
+        <p:cNvPr id="1" name=""/>
+        <p:cNvGrpSpPr/>
+        <p:nvPr/>
+      </p:nvGrpSpPr>
+      <p:grpSpPr>
+        <a:xfrm>
+          <a:off x="0" y="0"/>
+          <a:ext cx="0" cy="0"/>
+          <a:chOff x="0" y="0"/>
+          <a:chExt cx="0" cy="0"/>
+        </a:xfrm>
+      </p:grpSpPr>
+      <p:sp>
+        <p:nvSpPr>
+          <p:cNvPr id="2" name="Slide Image Placeholder 1"/>
+          <p:cNvSpPr>
+            <a:spLocks noGrp="1" noRot="1" noChangeAspect="1"/>
+          </p:cNvSpPr>
+          <p:nvPr>
+            <p:ph type="sldImg"/>
+          </p:nvPr>
+        </p:nvSpPr>
+        <p:spPr/>
+      </p:sp>
+      <p:sp>
+        <p:nvSpPr>
+          <p:cNvPr id="3" name="Notes Placeholder 2"/>
+          <p:cNvSpPr>
+            <a:spLocks noGrp="1"/>
+          </p:cNvSpPr>
+          <p:nvPr>
+            <p:ph type="body" idx="1"/>
+          </p:nvPr>
+        </p:nvSpPr>
+        <p:spPr/>
+        <p:txBody>
+          <a:bodyPr/>
+          <a:lstStyle/>
+          <a:p>
+            <a:r>
+              <a:rPr lang="en-US" dirty="0"/>
+              <a:t>Stress. We built a flood harness with sixteen checks. Three thousand idle connections. Three hundred busy clients for twenty seconds: twenty-nine thousand seven hundred requests, all answered. Two hundred clients hammering a protected route without a session, every one refused. A four-hundred-client sign-in flood: ordinary refusals first, then the rate limit, and no server error. And a hundred clients sending large bodies. Through all of it, a polite client was still answered in one to twelve milliseconds, memory peaked at eighty-seven megabytes against sixty-six idle, and the server was healthy afterwards. This is one machine and one address, so it is not a distributed attack. Beside it, nineteen checks in a real Chrome planted script-injection payloads in claim notes, invoice numbers, provider ids, names and even failed sign-in badges, and opened every screen: nothing ran, and the text showed as plain text. Add the four hundred thousand fuzzed requests and the ninety-three deliberate breakages, each caught by a test.</a:t>
+            </a:r>
+            <a:endParaRPr lang="en-US" dirty="0"/>
+          </a:p>
+        </p:txBody>
+      </p:sp>
+      <p:sp>
+        <p:nvSpPr>
+          <p:cNvPr id="4" name="Slide Number Placeholder 3"/>
+          <p:cNvSpPr>
+            <a:spLocks noGrp="1"/>
+          </p:cNvSpPr>
+          <p:nvPr>
+            <p:ph type="sldNum" sz="quarter" idx="10"/>
+          </p:nvPr>
+        </p:nvSpPr>
+        <p:spPr/>
+        <p:txBody>
+          <a:bodyPr/>
+          <a:lstStyle/>
+          <a:p>
+            <a:fld id="{F7021451-1387-4CA6-816F-3879F97B5CBC}" type="slidenum">
+              <a:rPr lang="en-US"/>
+              <a:t>34</a:t>
+            </a:fld>
+            <a:endParaRPr lang="en-US"/>
+          </a:p>
+        </p:txBody>
+      </p:sp>
+    </p:spTree>
+    <p:extLst>
+      <p:ext uri="{BB962C8B-B14F-4D97-AF65-F5344CB8AC3E}">
+        <p14:creationId xmlns:p14="http://schemas.microsoft.com/office/powerpoint/2010/main" val="1024086991"/>
+      </p:ext>
+    </p:extLst>
+  </p:cSld>
+  <p:clrMapOvr>
+    <a:masterClrMapping/>
+  </p:clrMapOvr>
+</p:notes>
+</file>
+
+<file path=ppt/notesSlides/notesSlide35.xml><?xml version="1.0" encoding="utf-8"?>
+<p:notes xmlns:a="http://schemas.openxmlformats.org/drawingml/2006/main" xmlns:r="http://schemas.openxmlformats.org/officeDocument/2006/relationships" xmlns:p="http://schemas.openxmlformats.org/presentationml/2006/main">
+  <p:cSld>
+    <p:spTree>
+      <p:nvGrpSpPr>
+        <p:cNvPr id="1" name=""/>
+        <p:cNvGrpSpPr/>
+        <p:nvPr/>
+      </p:nvGrpSpPr>
+      <p:grpSpPr>
+        <a:xfrm>
+          <a:off x="0" y="0"/>
+          <a:ext cx="0" cy="0"/>
+          <a:chOff x="0" y="0"/>
+          <a:chExt cx="0" cy="0"/>
+        </a:xfrm>
+      </p:grpSpPr>
+      <p:sp>
+        <p:nvSpPr>
+          <p:cNvPr id="2" name="Slide Image Placeholder 1"/>
+          <p:cNvSpPr>
+            <a:spLocks noGrp="1" noRot="1" noChangeAspect="1"/>
+          </p:cNvSpPr>
+          <p:nvPr>
+            <p:ph type="sldImg"/>
+          </p:nvPr>
+        </p:nvSpPr>
+        <p:spPr/>
+      </p:sp>
+      <p:sp>
+        <p:nvSpPr>
+          <p:cNvPr id="3" name="Notes Placeholder 2"/>
+          <p:cNvSpPr>
+            <a:spLocks noGrp="1"/>
+          </p:cNvSpPr>
+          <p:nvPr>
+            <p:ph type="body" idx="1"/>
+          </p:nvPr>
+        </p:nvSpPr>
+        <p:spPr/>
+        <p:txBody>
+          <a:bodyPr/>
+          <a:lstStyle/>
+          <a:p>
+            <a:r>
+              <a:rPr lang="en-US" dirty="0"/>
+              <a:t>Every important moment is written down. When a claim is received we record the input hash, the rule pack hash and the result hash. When a finding is decided, we record who, what, why, and the original status. A what-if is recorded with who and how many changes, and nothing else is kept. A saved correction links both versions by input hash and records each change from and to. Unmasking an identifier is recorded and counted against an hourly limit. On the right, the tamper evidence: logs are hash-chained and signed, an append-only mirror refuses to follow an edited log, a trusted timestamp from an outside authority can anchor the head, and a ledger has Ed25519 checkpoints and Merkle proofs. In the demo I will rewrite an audit row, and the health panel goes red within seconds.</a:t>
+            </a:r>
+            <a:endParaRPr lang="en-US" dirty="0"/>
+          </a:p>
+        </p:txBody>
+      </p:sp>
+      <p:sp>
+        <p:nvSpPr>
+          <p:cNvPr id="4" name="Slide Number Placeholder 3"/>
+          <p:cNvSpPr>
+            <a:spLocks noGrp="1"/>
+          </p:cNvSpPr>
+          <p:nvPr>
+            <p:ph type="sldNum" sz="quarter" idx="10"/>
+          </p:nvPr>
+        </p:nvSpPr>
+        <p:spPr/>
+        <p:txBody>
+          <a:bodyPr/>
+          <a:lstStyle/>
+          <a:p>
+            <a:fld id="{F7021451-1387-4CA6-816F-3879F97B5CBC}" type="slidenum">
+              <a:rPr lang="en-US"/>
+              <a:t>35</a:t>
+            </a:fld>
+            <a:endParaRPr lang="en-US"/>
+          </a:p>
+        </p:txBody>
+      </p:sp>
+    </p:spTree>
+    <p:extLst>
+      <p:ext uri="{BB962C8B-B14F-4D97-AF65-F5344CB8AC3E}">
+        <p14:creationId xmlns:p14="http://schemas.microsoft.com/office/powerpoint/2010/main" val="1024086991"/>
+      </p:ext>
+    </p:extLst>
+  </p:cSld>
+  <p:clrMapOvr>
+    <a:masterClrMapping/>
+  </p:clrMapOvr>
+</p:notes>
+</file>
+
+<file path=ppt/notesSlides/notesSlide36.xml><?xml version="1.0" encoding="utf-8"?>
+<p:notes xmlns:a="http://schemas.openxmlformats.org/drawingml/2006/main" xmlns:r="http://schemas.openxmlformats.org/officeDocument/2006/relationships" xmlns:p="http://schemas.openxmlformats.org/presentationml/2006/main">
+  <p:cSld>
+    <p:spTree>
+      <p:nvGrpSpPr>
+        <p:cNvPr id="1" name=""/>
+        <p:cNvGrpSpPr/>
+        <p:nvPr/>
+      </p:nvGrpSpPr>
+      <p:grpSpPr>
+        <a:xfrm>
+          <a:off x="0" y="0"/>
+          <a:ext cx="0" cy="0"/>
+          <a:chOff x="0" y="0"/>
+          <a:chExt cx="0" cy="0"/>
+        </a:xfrm>
+      </p:grpSpPr>
+      <p:sp>
+        <p:nvSpPr>
+          <p:cNvPr id="2" name="Slide Image Placeholder 1"/>
+          <p:cNvSpPr>
+            <a:spLocks noGrp="1" noRot="1" noChangeAspect="1"/>
+          </p:cNvSpPr>
+          <p:nvPr>
+            <p:ph type="sldImg"/>
+          </p:nvPr>
+        </p:nvSpPr>
+        <p:spPr/>
+      </p:sp>
+      <p:sp>
+        <p:nvSpPr>
+          <p:cNvPr id="3" name="Notes Placeholder 2"/>
+          <p:cNvSpPr>
+            <a:spLocks noGrp="1"/>
+          </p:cNvSpPr>
+          <p:nvPr>
+            <p:ph type="body" idx="1"/>
+          </p:nvPr>
+        </p:nvSpPr>
+        <p:spPr/>
+        <p:txBody>
+          <a:bodyPr/>
+          <a:lstStyle/>
+          <a:p>
+            <a:r>
+              <a:rPr lang="en-US" dirty="0"/>
+              <a:t>This is what the model measured here, and it is the speed of the AI step, nothing about servers. The laptop has an RTX 4060 with 8 gigabytes. With Ollama's default settings, it serves one request at a time: about fifty-three explanations a minute, at any concurrency. With eight parallel slots and flash attention, it reaches one hundred thirty-seven a minute, with no errors, and it stops improving past eight parallel requests. The better test is the card below: three hundred ninety-nine claims through the real explanation step, with an empty cache. Seventy-four model calls answered seven hundred seventy-seven findings, and the run took forty-nine seconds, about four hundred ninety claims a minute. With a warm cache, about two thousand. So the model is not the limit. It is a debug build on one laptop, so treat the numbers as measurements of this machine.</a:t>
+            </a:r>
+            <a:endParaRPr lang="en-US" dirty="0"/>
+          </a:p>
+        </p:txBody>
+      </p:sp>
+      <p:sp>
+        <p:nvSpPr>
+          <p:cNvPr id="4" name="Slide Number Placeholder 3"/>
+          <p:cNvSpPr>
+            <a:spLocks noGrp="1"/>
+          </p:cNvSpPr>
+          <p:nvPr>
+            <p:ph type="sldNum" sz="quarter" idx="10"/>
+          </p:nvPr>
+        </p:nvSpPr>
+        <p:spPr/>
+        <p:txBody>
+          <a:bodyPr/>
+          <a:lstStyle/>
+          <a:p>
+            <a:fld id="{F7021451-1387-4CA6-816F-3879F97B5CBC}" type="slidenum">
+              <a:rPr lang="en-US"/>
+              <a:t>36</a:t>
+            </a:fld>
+            <a:endParaRPr lang="en-US"/>
+          </a:p>
+        </p:txBody>
+      </p:sp>
+    </p:spTree>
+    <p:extLst>
+      <p:ext uri="{BB962C8B-B14F-4D97-AF65-F5344CB8AC3E}">
+        <p14:creationId xmlns:p14="http://schemas.microsoft.com/office/powerpoint/2010/main" val="1024086991"/>
+      </p:ext>
+    </p:extLst>
+  </p:cSld>
+  <p:clrMapOvr>
+    <a:masterClrMapping/>
+  </p:clrMapOvr>
+</p:notes>
+</file>
+
+<file path=ppt/notesSlides/notesSlide37.xml><?xml version="1.0" encoding="utf-8"?>
+<p:notes xmlns:a="http://schemas.openxmlformats.org/drawingml/2006/main" xmlns:r="http://schemas.openxmlformats.org/officeDocument/2006/relationships" xmlns:p="http://schemas.openxmlformats.org/presentationml/2006/main">
+  <p:cSld>
+    <p:spTree>
+      <p:nvGrpSpPr>
+        <p:cNvPr id="1" name=""/>
+        <p:cNvGrpSpPr/>
+        <p:nvPr/>
+      </p:nvGrpSpPr>
+      <p:grpSpPr>
+        <a:xfrm>
+          <a:off x="0" y="0"/>
+          <a:ext cx="0" cy="0"/>
+          <a:chOff x="0" y="0"/>
+          <a:chExt cx="0" cy="0"/>
+        </a:xfrm>
+      </p:grpSpPr>
+      <p:sp>
+        <p:nvSpPr>
+          <p:cNvPr id="2" name="Slide Image Placeholder 1"/>
+          <p:cNvSpPr>
+            <a:spLocks noGrp="1" noRot="1" noChangeAspect="1"/>
+          </p:cNvSpPr>
+          <p:nvPr>
+            <p:ph type="sldImg"/>
+          </p:nvPr>
+        </p:nvSpPr>
+        <p:spPr/>
+      </p:sp>
+      <p:sp>
+        <p:nvSpPr>
+          <p:cNvPr id="3" name="Notes Placeholder 2"/>
+          <p:cNvSpPr>
+            <a:spLocks noGrp="1"/>
+          </p:cNvSpPr>
+          <p:nvPr>
+            <p:ph type="body" idx="1"/>
+          </p:nvPr>
+        </p:nvSpPr>
+        <p:spPr/>
+        <p:txBody>
+          <a:bodyPr/>
+          <a:lstStyle/>
+          <a:p>
+            <a:r>
+              <a:rPr lang="en-US" dirty="0"/>
+              <a:t>This is the most important slide for credibility, so I will read it, and then I will answer the questions I expect. The public data is synthetic, so perfect scores do not show how real claims behave. The savings are simulated, and there has been no timed session with real reviewers. Real paper, handwriting and Arabic documents are untested. Subject access, erasure and retention are designed but not built, and one administrator can switch on the automatic modes without a second approval, with no automatic brake. A correction creates a new version in our system, but we do not write it back to the hospital's own system. The copilot has computable fixes for three rules, and for the rest it asks or checks. And nobody outside the team has attacked it. Expected questions. Why is F1 one point zero? Because the public claims are synthetic: it shows the engine is deterministic and correct against the documented rules, not that it works on real claims; the next step is real exports. Why a language model at all, when the cache serves most explanations? Because it phrases a new rule or failure shape once, the guard checks it, the cache keeps it, and without a model the system still works. Why YARA-X? We benchmarked it against plain Python and Python was faster in that build, so I will not claim speed. Our case is structural: the rules are readable files kept apart from code, hashed with the build, and they cannot have side effects. Will four-eyes become a bottleneck? Yes, it roughly doubles senior load in our simulation; it applies only to high-severity findings, and the thresholds are a versioned setting. What about the source system? We never edit a claim; every correction is a signed new version, and the write-back is an integration step we have not built.</a:t>
+            </a:r>
+            <a:endParaRPr lang="en-US" dirty="0"/>
+          </a:p>
+        </p:txBody>
+      </p:sp>
+      <p:sp>
+        <p:nvSpPr>
+          <p:cNvPr id="4" name="Slide Number Placeholder 3"/>
+          <p:cNvSpPr>
+            <a:spLocks noGrp="1"/>
+          </p:cNvSpPr>
+          <p:nvPr>
+            <p:ph type="sldNum" sz="quarter" idx="10"/>
+          </p:nvPr>
+        </p:nvSpPr>
+        <p:spPr/>
+        <p:txBody>
+          <a:bodyPr/>
+          <a:lstStyle/>
+          <a:p>
+            <a:fld id="{F7021451-1387-4CA6-816F-3879F97B5CBC}" type="slidenum">
+              <a:rPr lang="en-US"/>
+              <a:t>37</a:t>
+            </a:fld>
+            <a:endParaRPr lang="en-US"/>
+          </a:p>
+        </p:txBody>
+      </p:sp>
+    </p:spTree>
+    <p:extLst>
+      <p:ext uri="{BB962C8B-B14F-4D97-AF65-F5344CB8AC3E}">
+        <p14:creationId xmlns:p14="http://schemas.microsoft.com/office/powerpoint/2010/main" val="1024086991"/>
+      </p:ext>
+    </p:extLst>
+  </p:cSld>
+  <p:clrMapOvr>
+    <a:masterClrMapping/>
+  </p:clrMapOvr>
+</p:notes>
+</file>
+
+<file path=ppt/notesSlides/notesSlide38.xml><?xml version="1.0" encoding="utf-8"?>
+<p:notes xmlns:a="http://schemas.openxmlformats.org/drawingml/2006/main" xmlns:r="http://schemas.openxmlformats.org/officeDocument/2006/relationships" xmlns:p="http://schemas.openxmlformats.org/presentationml/2006/main">
+  <p:cSld>
+    <p:spTree>
+      <p:nvGrpSpPr>
+        <p:cNvPr id="1" name=""/>
+        <p:cNvGrpSpPr/>
+        <p:nvPr/>
+      </p:nvGrpSpPr>
+      <p:grpSpPr>
+        <a:xfrm>
+          <a:off x="0" y="0"/>
+          <a:ext cx="0" cy="0"/>
+          <a:chOff x="0" y="0"/>
+          <a:chExt cx="0" cy="0"/>
+        </a:xfrm>
+      </p:grpSpPr>
+      <p:sp>
+        <p:nvSpPr>
+          <p:cNvPr id="2" name="Slide Image Placeholder 1"/>
+          <p:cNvSpPr>
+            <a:spLocks noGrp="1" noRot="1" noChangeAspect="1"/>
+          </p:cNvSpPr>
+          <p:nvPr>
+            <p:ph type="sldImg"/>
+          </p:nvPr>
+        </p:nvSpPr>
+        <p:spPr/>
+      </p:sp>
+      <p:sp>
+        <p:nvSpPr>
+          <p:cNvPr id="3" name="Notes Placeholder 2"/>
+          <p:cNvSpPr>
+            <a:spLocks noGrp="1"/>
+          </p:cNvSpPr>
+          <p:nvPr>
+            <p:ph type="body" idx="1"/>
+          </p:nvPr>
+        </p:nvSpPr>
+        <p:spPr/>
+        <p:txBody>
+          <a:bodyPr/>
+          <a:lstStyle/>
+          <a:p>
+            <a:r>
+              <a:rPr lang="en-US" dirty="0"/>
+              <a:t>Last before the demo, three ideas for where this could go, and I want to be clear that these are plans, not things we have built. One: attach a standard code to every finding. Each of our fifteen and eight rules would carry the matching claim adjustment reason or NPHIES error code as a badge in the console, so our language matches the remittance advice your billing teams read. We would need the official value sets from you rather than guessing. Two: payer overlays. Today a payer's contract is one versioned, approved policy table. The next step is payer-specific rule sets chosen by the insurer on the claim, so the same claim can pass for one payer and fail for another. Three: a proper time-saved study. Two matched packs of thirty claims, half the reviewers using the console first and half the baseline first, so learning effects cancel. We would log the median handling time per claim, the seeded errors missed and the clean claims wrongly flagged, and ask a short workload survey. That is question four.</a:t>
+            </a:r>
+            <a:endParaRPr lang="en-US" dirty="0"/>
+          </a:p>
+        </p:txBody>
+      </p:sp>
+      <p:sp>
+        <p:nvSpPr>
+          <p:cNvPr id="4" name="Slide Number Placeholder 3"/>
+          <p:cNvSpPr>
+            <a:spLocks noGrp="1"/>
+          </p:cNvSpPr>
+          <p:nvPr>
+            <p:ph type="sldNum" sz="quarter" idx="10"/>
+          </p:nvPr>
+        </p:nvSpPr>
+        <p:spPr/>
+        <p:txBody>
+          <a:bodyPr/>
+          <a:lstStyle/>
+          <a:p>
+            <a:fld id="{F7021451-1387-4CA6-816F-3879F97B5CBC}" type="slidenum">
+              <a:rPr lang="en-US"/>
+              <a:t>38</a:t>
+            </a:fld>
+            <a:endParaRPr lang="en-US"/>
+          </a:p>
+        </p:txBody>
+      </p:sp>
+    </p:spTree>
+    <p:extLst>
+      <p:ext uri="{BB962C8B-B14F-4D97-AF65-F5344CB8AC3E}">
+        <p14:creationId xmlns:p14="http://schemas.microsoft.com/office/powerpoint/2010/main" val="1024086991"/>
+      </p:ext>
+    </p:extLst>
+  </p:cSld>
+  <p:clrMapOvr>
+    <a:masterClrMapping/>
+  </p:clrMapOvr>
+</p:notes>
+</file>
+
+<file path=ppt/notesSlides/notesSlide39.xml><?xml version="1.0" encoding="utf-8"?>
+<p:notes xmlns:a="http://schemas.openxmlformats.org/drawingml/2006/main" xmlns:r="http://schemas.openxmlformats.org/officeDocument/2006/relationships" xmlns:p="http://schemas.openxmlformats.org/presentationml/2006/main">
+  <p:cSld>
+    <p:spTree>
+      <p:nvGrpSpPr>
+        <p:cNvPr id="1" name=""/>
+        <p:cNvGrpSpPr/>
+        <p:nvPr/>
+      </p:nvGrpSpPr>
+      <p:grpSpPr>
+        <a:xfrm>
+          <a:off x="0" y="0"/>
+          <a:ext cx="0" cy="0"/>
+          <a:chOff x="0" y="0"/>
+          <a:chExt cx="0" cy="0"/>
+        </a:xfrm>
+      </p:grpSpPr>
+      <p:sp>
+        <p:nvSpPr>
+          <p:cNvPr id="2" name="Slide Image Placeholder 1"/>
+          <p:cNvSpPr>
+            <a:spLocks noGrp="1" noRot="1" noChangeAspect="1"/>
+          </p:cNvSpPr>
+          <p:nvPr>
+            <p:ph type="sldImg"/>
+          </p:nvPr>
+        </p:nvSpPr>
+        <p:spPr/>
+      </p:sp>
+      <p:sp>
+        <p:nvSpPr>
+          <p:cNvPr id="3" name="Notes Placeholder 2"/>
+          <p:cNvSpPr>
+            <a:spLocks noGrp="1"/>
+          </p:cNvSpPr>
+          <p:nvPr>
+            <p:ph type="body" idx="1"/>
+          </p:nvPr>
+        </p:nvSpPr>
+        <p:spPr/>
+        <p:txBody>
+          <a:bodyPr/>
+          <a:lstStyle/>
+          <a:p>
+            <a:r>
+              <a:rPr lang="en-US" dirty="0"/>
+              <a:t>For the demo, I will follow your six steps. A claim with a wrong amount arrives. The senior opens it and sees the summary and evidence. We try a what-if and every check would pass. We apply it with a reason, which creates version two. The trace shows both versions, who changed what and why. Then I rewrite an audit row and the alarm goes red. After that, four questions for you. First, R006 and R013: three public claims, CG-B10B19D8A56A, CG-00348A9B1AAD and CG-EC233ACB399D, split one service into a plain line and an EDU-SEPARATE line, and the rules pass them as documented, but the total quantity exceeds the per-line limit. Is that intended? Second, is pre-validation clear the right label? Third, is a Redis Streams queue in Rust acceptable in place of Celery or ARQ? Fourth, could we run a timed session with a few officers?</a:t>
+            </a:r>
+            <a:endParaRPr lang="en-US" dirty="0"/>
+          </a:p>
+        </p:txBody>
+      </p:sp>
+      <p:sp>
+        <p:nvSpPr>
+          <p:cNvPr id="4" name="Slide Number Placeholder 3"/>
+          <p:cNvSpPr>
+            <a:spLocks noGrp="1"/>
+          </p:cNvSpPr>
+          <p:nvPr>
+            <p:ph type="sldNum" sz="quarter" idx="10"/>
+          </p:nvPr>
+        </p:nvSpPr>
+        <p:spPr/>
+        <p:txBody>
+          <a:bodyPr/>
+          <a:lstStyle/>
+          <a:p>
+            <a:fld id="{F7021451-1387-4CA6-816F-3879F97B5CBC}" type="slidenum">
+              <a:rPr lang="en-US"/>
+              <a:t>39</a:t>
             </a:fld>
             <a:endParaRPr lang="en-US"/>
           </a:p>
@@ -15982,7 +17092,7 @@
                   <a:srgbClr val="DDEEEB"/>
                 </a:solidFill>
               </a:rPr>
-              <a:t>Limits: whoever holds the key sees everything; key rotation needs a re-encryption pass (not built)</a:t>
+              <a:t>Limits: whoever holds the key sees everything, and the shape of the data is visible. The key can be rotated by one command</a:t>
             </a:r>
             <a:endParaRPr lang="en-US" sz="1250" dirty="0"/>
           </a:p>
@@ -21942,7 +23052,7 @@
                 <a:ea typeface="Cambria" pitchFamily="34" charset="-122"/>
                 <a:cs typeface="Cambria" pitchFamily="34" charset="-120"/>
               </a:rPr>
-              <a:t>Learning from feedback, and a model we set aside</a:t>
+              <a:t>Auto-clear green claims, with a random audit</a:t>
             </a:r>
             <a:endParaRPr lang="en-US" sz="3200" dirty="0"/>
           </a:p>
@@ -21950,18 +23060,1865 @@
       </p:sp>
       <p:sp>
         <p:nvSpPr>
-          <p:cNvPr id="4" name="left"/>
+          <p:cNvPr id="4" name="tag"/>
           <p:cNvSpPr/>
           <p:nvPr/>
         </p:nvSpPr>
         <p:spPr>
           <a:xfrm>
-            <a:off x="548640" y="1417320"/>
-            <a:ext cx="5394960" cy="4572000"/>
+            <a:off x="9966960" y="73152"/>
+            <a:ext cx="1371600" cy="274320"/>
           </a:xfrm>
           <a:prstGeom prst="roundRect">
             <a:avLst>
-              <a:gd name="adj" fmla="val 2400"/>
+              <a:gd name="adj" fmla="val 50000"/>
+            </a:avLst>
+          </a:prstGeom>
+          <a:solidFill>
+            <a:srgbClr val="F2A541"/>
+          </a:solidFill>
+          <a:ln w="12700">
+            <a:solidFill>
+              <a:srgbClr val="F2A541"/>
+            </a:solidFill>
+            <a:prstDash val="solid"/>
+          </a:ln>
+        </p:spPr>
+      </p:sp>
+      <p:sp>
+        <p:nvSpPr>
+          <p:cNvPr id="5" name="tag text"/>
+          <p:cNvSpPr txBox="1"/>
+          <p:nvPr/>
+        </p:nvSpPr>
+        <p:spPr>
+          <a:xfrm>
+            <a:off x="9966960" y="73152"/>
+            <a:ext cx="1371600" cy="274320"/>
+          </a:xfrm>
+          <a:prstGeom prst="rect">
+            <a:avLst/>
+          </a:prstGeom>
+          <a:noFill/>
+          <a:ln/>
+        </p:spPr>
+        <p:txBody>
+          <a:bodyPr wrap="square" lIns="0" tIns="0" rIns="0" bIns="0" rtlCol="0" anchor="ctr"/>
+          <a:lstStyle/>
+          <a:p>
+            <a:pPr algn="ctr" indent="0" marL="0">
+              <a:buNone/>
+            </a:pPr>
+            <a:r>
+              <a:rPr lang="en-US" sz="1100" b="1" dirty="0">
+                <a:solidFill>
+                  <a:srgbClr val="17292B"/>
+                </a:solidFill>
+              </a:rPr>
+              <a:t>off by default</a:t>
+            </a:r>
+            <a:endParaRPr lang="en-US" sz="1100" dirty="0"/>
+          </a:p>
+        </p:txBody>
+      </p:sp>
+      <p:sp>
+        <p:nvSpPr>
+          <p:cNvPr id="6" name="bullets"/>
+          <p:cNvSpPr txBox="1"/>
+          <p:nvPr/>
+        </p:nvSpPr>
+        <p:spPr>
+          <a:xfrm>
+            <a:off x="548640" y="1371600"/>
+            <a:ext cx="5486400" cy="2743200"/>
+          </a:xfrm>
+          <a:prstGeom prst="rect">
+            <a:avLst/>
+          </a:prstGeom>
+          <a:noFill/>
+          <a:ln/>
+        </p:spPr>
+        <p:txBody>
+          <a:bodyPr wrap="square" lIns="0" tIns="0" rIns="0" bIns="0" rtlCol="0" anchor="t"/>
+          <a:lstStyle/>
+          <a:p>
+            <a:pPr marL="203200" indent="-203200">
+              <a:spcAft>
+                <a:spcPts val="600"/>
+              </a:spcAft>
+              <a:buSzPct val="100000"/>
+              <a:buChar char="•"/>
+            </a:pPr>
+            <a:r>
+              <a:rPr lang="en-US" sz="1350" dirty="0">
+                <a:solidFill>
+                  <a:srgbClr val="17292B"/>
+                </a:solidFill>
+              </a:rPr>
+              <a:t>A claim with nothing flagged and an intact set of 15 results can be cleared by the system (actor system:auto-clear)</a:t>
+            </a:r>
+            <a:endParaRPr lang="en-US" sz="1350" dirty="0"/>
+          </a:p>
+          <a:p>
+            <a:pPr marL="203200" indent="-203200">
+              <a:spcAft>
+                <a:spcPts val="600"/>
+              </a:spcAft>
+              <a:buSzPct val="100000"/>
+              <a:buChar char="•"/>
+            </a:pPr>
+            <a:r>
+              <a:rPr lang="en-US" sz="1350" dirty="0">
+                <a:solidFill>
+                  <a:srgbClr val="17292B"/>
+                </a:solidFill>
+              </a:rPr>
+              <a:t>Except a random 5% (audit_percent, 1 to 100) that still go to a person. The draw is written on the claim</a:t>
+            </a:r>
+            <a:endParaRPr lang="en-US" sz="1350" dirty="0"/>
+          </a:p>
+          <a:p>
+            <a:pPr marL="203200" indent="-203200">
+              <a:spcAft>
+                <a:spcPts val="600"/>
+              </a:spcAft>
+              <a:buSzPct val="100000"/>
+              <a:buChar char="•"/>
+            </a:pPr>
+            <a:r>
+              <a:rPr lang="en-US" sz="1350" dirty="0">
+                <a:solidFill>
+                  <a:srgbClr val="17292B"/>
+                </a:solidFill>
+              </a:rPr>
+              <a:t>A damaged claim, or one with a flagged finding, is never cleared by the system</a:t>
+            </a:r>
+            <a:endParaRPr lang="en-US" sz="1350" dirty="0"/>
+          </a:p>
+          <a:p>
+            <a:pPr marL="203200" indent="-203200">
+              <a:spcAft>
+                <a:spcPts val="600"/>
+              </a:spcAft>
+              <a:buSzPct val="100000"/>
+              <a:buChar char="•"/>
+            </a:pPr>
+            <a:r>
+              <a:rPr lang="en-US" sz="1350" dirty="0">
+                <a:solidFill>
+                  <a:srgbClr val="17292B"/>
+                </a:solidFill>
+              </a:rPr>
+              <a:t>System-cleared claims never count as verified by a person in the feedback reports</a:t>
+            </a:r>
+            <a:endParaRPr lang="en-US" sz="1350" dirty="0"/>
+          </a:p>
+        </p:txBody>
+      </p:sp>
+      <p:sp>
+        <p:nvSpPr>
+          <p:cNvPr id="7" name="stat"/>
+          <p:cNvSpPr txBox="1"/>
+          <p:nvPr/>
+        </p:nvSpPr>
+        <p:spPr>
+          <a:xfrm>
+            <a:off x="548640" y="4160520"/>
+            <a:ext cx="2651760" cy="822960"/>
+          </a:xfrm>
+          <a:prstGeom prst="rect">
+            <a:avLst/>
+          </a:prstGeom>
+          <a:noFill/>
+          <a:ln/>
+        </p:spPr>
+        <p:txBody>
+          <a:bodyPr wrap="square" lIns="0" tIns="0" rIns="0" bIns="0" rtlCol="0" anchor="b"/>
+          <a:lstStyle/>
+          <a:p>
+            <a:pPr indent="0" marL="0">
+              <a:buNone/>
+            </a:pPr>
+            <a:r>
+              <a:rPr lang="en-US" sz="3400" b="1" dirty="0">
+                <a:solidFill>
+                  <a:srgbClr val="14746F"/>
+                </a:solidFill>
+                <a:latin typeface="Cambria" pitchFamily="34" charset="0"/>
+                <a:ea typeface="Cambria" pitchFamily="34" charset="-122"/>
+                <a:cs typeface="Cambria" pitchFamily="34" charset="-120"/>
+              </a:rPr>
+              <a:t>159 of 500</a:t>
+            </a:r>
+            <a:endParaRPr lang="en-US" sz="3400" dirty="0"/>
+          </a:p>
+        </p:txBody>
+      </p:sp>
+      <p:sp>
+        <p:nvSpPr>
+          <p:cNvPr id="8" name="stat label"/>
+          <p:cNvSpPr txBox="1"/>
+          <p:nvPr/>
+        </p:nvSpPr>
+        <p:spPr>
+          <a:xfrm>
+            <a:off x="548640" y="5029200"/>
+            <a:ext cx="2651760" cy="822960"/>
+          </a:xfrm>
+          <a:prstGeom prst="rect">
+            <a:avLst/>
+          </a:prstGeom>
+          <a:noFill/>
+          <a:ln/>
+        </p:spPr>
+        <p:txBody>
+          <a:bodyPr wrap="square" lIns="0" tIns="0" rIns="0" bIns="0" rtlCol="0" anchor="t"/>
+          <a:lstStyle/>
+          <a:p>
+            <a:pPr indent="0" marL="0">
+              <a:buNone/>
+            </a:pPr>
+            <a:r>
+              <a:rPr lang="en-US" sz="1400" dirty="0">
+                <a:solidFill>
+                  <a:srgbClr val="5C7173"/>
+                </a:solidFill>
+              </a:rPr>
+              <a:t>claims cleared by the system (31.8%), on 20 random batches of the 600 labelled claims</a:t>
+            </a:r>
+            <a:endParaRPr lang="en-US" sz="1400" dirty="0"/>
+          </a:p>
+        </p:txBody>
+      </p:sp>
+      <p:sp>
+        <p:nvSpPr>
+          <p:cNvPr id="9" name="stat"/>
+          <p:cNvSpPr txBox="1"/>
+          <p:nvPr/>
+        </p:nvSpPr>
+        <p:spPr>
+          <a:xfrm>
+            <a:off x="3383280" y="4160520"/>
+            <a:ext cx="2651760" cy="822960"/>
+          </a:xfrm>
+          <a:prstGeom prst="rect">
+            <a:avLst/>
+          </a:prstGeom>
+          <a:noFill/>
+          <a:ln/>
+        </p:spPr>
+        <p:txBody>
+          <a:bodyPr wrap="square" lIns="0" tIns="0" rIns="0" bIns="0" rtlCol="0" anchor="b"/>
+          <a:lstStyle/>
+          <a:p>
+            <a:pPr indent="0" marL="0">
+              <a:buNone/>
+            </a:pPr>
+            <a:r>
+              <a:rPr lang="en-US" sz="3400" b="1" dirty="0">
+                <a:solidFill>
+                  <a:srgbClr val="14746F"/>
+                </a:solidFill>
+                <a:latin typeface="Cambria" pitchFamily="34" charset="0"/>
+                <a:ea typeface="Cambria" pitchFamily="34" charset="-122"/>
+                <a:cs typeface="Cambria" pitchFamily="34" charset="-120"/>
+              </a:rPr>
+              <a:t>0</a:t>
+            </a:r>
+            <a:endParaRPr lang="en-US" sz="3400" dirty="0"/>
+          </a:p>
+        </p:txBody>
+      </p:sp>
+      <p:sp>
+        <p:nvSpPr>
+          <p:cNvPr id="10" name="stat label"/>
+          <p:cNvSpPr txBox="1"/>
+          <p:nvPr/>
+        </p:nvSpPr>
+        <p:spPr>
+          <a:xfrm>
+            <a:off x="3383280" y="5029200"/>
+            <a:ext cx="2651760" cy="822960"/>
+          </a:xfrm>
+          <a:prstGeom prst="rect">
+            <a:avLst/>
+          </a:prstGeom>
+          <a:noFill/>
+          <a:ln/>
+        </p:spPr>
+        <p:txBody>
+          <a:bodyPr wrap="square" lIns="0" tIns="0" rIns="0" bIns="0" rtlCol="0" anchor="t"/>
+          <a:lstStyle/>
+          <a:p>
+            <a:pPr indent="0" marL="0">
+              <a:buNone/>
+            </a:pPr>
+            <a:r>
+              <a:rPr lang="en-US" sz="1400" dirty="0">
+                <a:solidFill>
+                  <a:srgbClr val="5C7173"/>
+                </a:solidFill>
+              </a:rPr>
+              <a:t>cleared claims that had a finding in the answer key</a:t>
+            </a:r>
+            <a:endParaRPr lang="en-US" sz="1400" dirty="0"/>
+          </a:p>
+        </p:txBody>
+      </p:sp>
+      <p:graphicFrame>
+        <p:nvGraphicFramePr>
+          <p:cNvPr id="11" name="Chart 0" descr=""/>
+          <p:cNvGraphicFramePr/>
+          <p:nvPr/>
+        </p:nvGraphicFramePr>
+        <p:xfrm>
+          <a:off x="6309360" y="1325880"/>
+          <a:ext cx="5303520" cy="2926080"/>
+        </p:xfrm>
+        <a:graphic xmlns:a="http://schemas.openxmlformats.org/drawingml/2006/main">
+          <a:graphicData uri="http://schemas.openxmlformats.org/drawingml/2006/chart">
+            <c:chart xmlns:c="http://schemas.openxmlformats.org/drawingml/2006/chart" r:id="rId1"/>
+          </a:graphicData>
+        </a:graphic>
+      </p:graphicFrame>
+      <p:sp>
+        <p:nvSpPr>
+          <p:cNvPr id="12" name="audit panel card"/>
+          <p:cNvSpPr/>
+          <p:nvPr/>
+        </p:nvSpPr>
+        <p:spPr>
+          <a:xfrm>
+            <a:off x="6309360" y="4389120"/>
+            <a:ext cx="5303520" cy="1691640"/>
+          </a:xfrm>
+          <a:prstGeom prst="roundRect">
+            <a:avLst>
+              <a:gd name="adj" fmla="val 6486"/>
+            </a:avLst>
+          </a:prstGeom>
+          <a:solidFill>
+            <a:srgbClr val="0E3B3F"/>
+          </a:solidFill>
+          <a:ln w="12700">
+            <a:solidFill>
+              <a:srgbClr val="0E3B3F"/>
+            </a:solidFill>
+            <a:prstDash val="solid"/>
+          </a:ln>
+        </p:spPr>
+      </p:sp>
+      <p:sp>
+        <p:nvSpPr>
+          <p:cNvPr id="13" name="audit panel text"/>
+          <p:cNvSpPr txBox="1"/>
+          <p:nvPr/>
+        </p:nvSpPr>
+        <p:spPr>
+          <a:xfrm>
+            <a:off x="6492240" y="4434840"/>
+            <a:ext cx="4937760" cy="1600200"/>
+          </a:xfrm>
+          <a:prstGeom prst="rect">
+            <a:avLst/>
+          </a:prstGeom>
+          <a:noFill/>
+          <a:ln/>
+        </p:spPr>
+        <p:txBody>
+          <a:bodyPr wrap="square" lIns="0" tIns="0" rIns="0" bIns="0" rtlCol="0" anchor="ctr"/>
+          <a:lstStyle/>
+          <a:p>
+            <a:pPr indent="0" marL="0">
+              <a:spcAft>
+                <a:spcPts val="400"/>
+              </a:spcAft>
+              <a:buNone/>
+            </a:pPr>
+            <a:r>
+              <a:rPr lang="en-US" sz="1500" b="1" dirty="0">
+                <a:solidFill>
+                  <a:srgbClr val="FFFFFF"/>
+                </a:solidFill>
+                <a:latin typeface="Cambria" pitchFamily="34" charset="0"/>
+                <a:ea typeface="Cambria" pitchFamily="34" charset="-122"/>
+                <a:cs typeface="Cambria" pitchFamily="34" charset="-120"/>
+              </a:rPr>
+              <a:t>The audit panel (administrator)</a:t>
+            </a:r>
+            <a:endParaRPr lang="en-US" sz="1500" dirty="0"/>
+          </a:p>
+          <a:p>
+            <a:pPr indent="0" marL="0">
+              <a:buNone/>
+            </a:pPr>
+            <a:r>
+              <a:rPr lang="en-US" sz="1200" dirty="0">
+                <a:solidFill>
+                  <a:srgbClr val="DDEEEB"/>
+                </a:solidFill>
+              </a:rPr>
+              <a:t>Claims cleared, verified clear, escalated, and the escalation rate with an exact 95% upper bound. Every escalation counts as a possible miss. Read-only advice: keep 5% until 300 audited claims are resolved; lower it only when the bound is under 1%.</a:t>
+            </a:r>
+            <a:endParaRPr lang="en-US" sz="1500" dirty="0"/>
+          </a:p>
+        </p:txBody>
+      </p:sp>
+      <p:sp>
+        <p:nvSpPr>
+          <p:cNvPr id="14" name="footnote"/>
+          <p:cNvSpPr txBox="1"/>
+          <p:nvPr/>
+        </p:nvSpPr>
+        <p:spPr>
+          <a:xfrm>
+            <a:off x="548640" y="6217920"/>
+            <a:ext cx="10424160" cy="365760"/>
+          </a:xfrm>
+          <a:prstGeom prst="rect">
+            <a:avLst/>
+          </a:prstGeom>
+          <a:noFill/>
+          <a:ln/>
+        </p:spPr>
+        <p:txBody>
+          <a:bodyPr wrap="square" lIns="0" tIns="0" rIns="0" bIns="0" rtlCol="0" anchor="ctr"/>
+          <a:lstStyle/>
+          <a:p>
+            <a:pPr indent="0" marL="0">
+              <a:buNone/>
+            </a:pPr>
+            <a:r>
+              <a:rPr lang="en-US" sz="1100" i="1" dirty="0">
+                <a:solidFill>
+                  <a:srgbClr val="5C7173"/>
+                </a:solidFill>
+              </a:rPr>
+              <a:t>Synthetic mix, engine equal to the key: this shows what the policy does here, not what a hospital would see.</a:t>
+            </a:r>
+            <a:endParaRPr lang="en-US" sz="1100" dirty="0"/>
+          </a:p>
+        </p:txBody>
+      </p:sp>
+      <p:sp>
+        <p:nvSpPr>
+          <p:cNvPr id="25" name="Slide Number Placeholder 0"/>
+          <p:cNvSpPr>
+            <a:spLocks noGrp="1"/>
+          </p:cNvSpPr>
+          <p:nvPr>
+            <p:ph type="sldNum" sz="quarter" idx="4294967295"/>
+          </p:nvPr>
+        </p:nvSpPr>
+        <p:spPr>
+          <a:xfrm>
+            <a:off x="11247120" y="6400800"/>
+            <a:ext cx="548640" cy="274320"/>
+          </a:xfrm>
+          <a:prstGeom prst="rect">
+            <a:avLst/>
+          </a:prstGeom>
+          <a:extLst>
+            <a:ext uri="{C572A759-6A51-4108-AA02-DFA0A04FC94B}">
+              <ma14:wrappingTextBoxFlag xmlns:ma14="http://schemas.microsoft.com/office/mac/drawingml/2011/main" val="0"/>
+            </a:ext>
+          </a:extLst>
+        </p:spPr>
+        <p:txBody>
+          <a:bodyPr/>
+          <a:lstStyle>
+            <a:lvl1pPr>
+              <a:defRPr sz="1000">
+                <a:solidFill>
+                  <a:srgbClr val="5C7173"/>
+                </a:solidFill>
+              </a:defRPr>
+            </a:lvl1pPr>
+          </a:lstStyle>
+          <a:p>
+            <a:pPr algn="l"/>
+            <a:fld id="{F7021451-1387-4CA6-816F-3879F97B5CBC}" type="slidenum">
+              <a:rPr b="0" lang="en-US"/>
+              <a:t>24</a:t>
+            </a:fld>
+            <a:endParaRPr lang="en-US"/>
+          </a:p>
+        </p:txBody>
+      </p:sp>
+    </p:spTree>
+  </p:cSld>
+  <p:clrMapOvr>
+    <a:masterClrMapping/>
+  </p:clrMapOvr>
+</p:sld>
+</file>
+
+<file path=ppt/slides/slide25.xml><?xml version="1.0" encoding="utf-8"?>
+<p:sld xmlns:a="http://schemas.openxmlformats.org/drawingml/2006/main" xmlns:r="http://schemas.openxmlformats.org/officeDocument/2006/relationships" xmlns:p="http://schemas.openxmlformats.org/presentationml/2006/main">
+  <p:cSld name="Slide 25">
+    <p:spTree>
+      <p:nvGrpSpPr>
+        <p:cNvPr id="1" name=""/>
+        <p:cNvGrpSpPr/>
+        <p:nvPr/>
+      </p:nvGrpSpPr>
+      <p:grpSpPr>
+        <a:xfrm>
+          <a:off x="0" y="0"/>
+          <a:ext cx="0" cy="0"/>
+          <a:chOff x="0" y="0"/>
+          <a:chExt cx="0" cy="0"/>
+        </a:xfrm>
+      </p:grpSpPr>
+      <p:sp>
+        <p:nvSpPr>
+          <p:cNvPr id="2" name="Text 0"/>
+          <p:cNvSpPr/>
+          <p:nvPr>
+            <p:ph idx="100" type="title" hasCustomPrompt="1"/>
+          </p:nvPr>
+        </p:nvSpPr>
+        <p:spPr>
+          <a:xfrm>
+            <a:off x="548640" y="365760"/>
+            <a:ext cx="11064240" cy="822960"/>
+          </a:xfrm>
+          <a:prstGeom prst="rect">
+            <a:avLst/>
+          </a:prstGeom>
+          <a:noFill/>
+          <a:ln/>
+        </p:spPr>
+        <p:txBody>
+          <a:bodyPr wrap="square" lIns="0" tIns="0" rIns="0" bIns="0" rtlCol="0" anchor="ctr"/>
+          <a:lstStyle/>
+          <a:p>
+            <a:pPr indent="0" marL="0">
+              <a:buNone/>
+            </a:pPr>
+            <a:r>
+              <a:rPr lang="en-US" sz="3200" b="1" dirty="0">
+                <a:solidFill>
+                  <a:srgbClr val="0E3B3F"/>
+                </a:solidFill>
+                <a:latin typeface="Cambria" pitchFamily="34" charset="0"/>
+                <a:ea typeface="Cambria" pitchFamily="34" charset="-122"/>
+                <a:cs typeface="Cambria" pitchFamily="34" charset="-120"/>
+              </a:rPr>
+              <a:t>Auto-request, and what each step saves</a:t>
+            </a:r>
+            <a:endParaRPr lang="en-US" sz="3200" dirty="0"/>
+          </a:p>
+        </p:txBody>
+      </p:sp>
+      <p:sp>
+        <p:nvSpPr>
+          <p:cNvPr id="4" name="tag"/>
+          <p:cNvSpPr/>
+          <p:nvPr/>
+        </p:nvSpPr>
+        <p:spPr>
+          <a:xfrm>
+            <a:off x="9966960" y="73152"/>
+            <a:ext cx="1371600" cy="274320"/>
+          </a:xfrm>
+          <a:prstGeom prst="roundRect">
+            <a:avLst>
+              <a:gd name="adj" fmla="val 50000"/>
+            </a:avLst>
+          </a:prstGeom>
+          <a:solidFill>
+            <a:srgbClr val="F2A541"/>
+          </a:solidFill>
+          <a:ln w="12700">
+            <a:solidFill>
+              <a:srgbClr val="F2A541"/>
+            </a:solidFill>
+            <a:prstDash val="solid"/>
+          </a:ln>
+        </p:spPr>
+      </p:sp>
+      <p:sp>
+        <p:nvSpPr>
+          <p:cNvPr id="5" name="tag text"/>
+          <p:cNvSpPr txBox="1"/>
+          <p:nvPr/>
+        </p:nvSpPr>
+        <p:spPr>
+          <a:xfrm>
+            <a:off x="9966960" y="73152"/>
+            <a:ext cx="1371600" cy="274320"/>
+          </a:xfrm>
+          <a:prstGeom prst="rect">
+            <a:avLst/>
+          </a:prstGeom>
+          <a:noFill/>
+          <a:ln/>
+        </p:spPr>
+        <p:txBody>
+          <a:bodyPr wrap="square" lIns="0" tIns="0" rIns="0" bIns="0" rtlCol="0" anchor="ctr"/>
+          <a:lstStyle/>
+          <a:p>
+            <a:pPr algn="ctr" indent="0" marL="0">
+              <a:buNone/>
+            </a:pPr>
+            <a:r>
+              <a:rPr lang="en-US" sz="1100" b="1" dirty="0">
+                <a:solidFill>
+                  <a:srgbClr val="17292B"/>
+                </a:solidFill>
+              </a:rPr>
+              <a:t>off by default</a:t>
+            </a:r>
+            <a:endParaRPr lang="en-US" sz="1100" dirty="0"/>
+          </a:p>
+        </p:txBody>
+      </p:sp>
+      <p:graphicFrame>
+        <p:nvGraphicFramePr>
+          <p:cNvPr id="26" name="table"/>
+          <p:cNvGraphicFramePr>
+            <a:graphicFrameLocks noGrp="1"/>
+          </p:cNvGraphicFramePr>
+          <p:nvPr>
+            <p:extLst>
+              <p:ext uri="{D42A27DB-BD31-4B8C-83A1-F6EECF244321}">
+                <p14:modId xmlns:p14="http://schemas.microsoft.com/office/powerpoint/2010/main" val="1579011935"/>
+              </p:ext>
+            </p:extLst>
+          </p:nvPr>
+        </p:nvGraphicFramePr>
+        <p:xfrm>
+          <a:off x="548640" y="1371600"/>
+          <a:ext cx="6583680" cy="914400"/>
+        </p:xfrm>
+        <a:graphic>
+          <a:graphicData uri="http://schemas.openxmlformats.org/drawingml/2006/table">
+            <a:tbl>
+              <a:tblPr/>
+              <a:tblGrid>
+                <a:gridCol w="2743200"/>
+                <a:gridCol w="2011680"/>
+                <a:gridCol w="1828800"/>
+              </a:tblGrid>
+              <a:tr h="457200">
+                <a:tc>
+                  <a:txBody>
+                    <a:bodyPr/>
+                    <a:lstStyle/>
+                    <a:p>
+                      <a:pPr indent="0" marL="0">
+                        <a:buNone/>
+                      </a:pPr>
+                      <a:r>
+                        <a:rPr lang="en-US" sz="1250" b="1" dirty="0">
+                          <a:solidFill>
+                            <a:srgbClr val="FFFFFF"/>
+                          </a:solidFill>
+                        </a:rPr>
+                        <a:t>Per 500 claims</a:t>
+                      </a:r>
+                      <a:endParaRPr lang="en-US" sz="1250" dirty="0"/>
+                    </a:p>
+                  </a:txBody>
+                  <a:tcPr marL="91440" marR="91440" marT="36576" marB="36576" anchor="ctr">
+                    <a:lnL w="6350" cap="flat" cmpd="sng" algn="ctr">
+                      <a:solidFill>
+                        <a:srgbClr val="D5E1DF"/>
+                      </a:solidFill>
+                      <a:prstDash val="solid"/>
+                      <a:round/>
+                      <a:headEnd type="none" w="med" len="med"/>
+                      <a:tailEnd type="none" w="med" len="med"/>
+                    </a:lnL>
+                    <a:lnR w="6350" cap="flat" cmpd="sng" algn="ctr">
+                      <a:solidFill>
+                        <a:srgbClr val="D5E1DF"/>
+                      </a:solidFill>
+                      <a:prstDash val="solid"/>
+                      <a:round/>
+                      <a:headEnd type="none" w="med" len="med"/>
+                      <a:tailEnd type="none" w="med" len="med"/>
+                    </a:lnR>
+                    <a:lnT w="6350" cap="flat" cmpd="sng" algn="ctr">
+                      <a:solidFill>
+                        <a:srgbClr val="D5E1DF"/>
+                      </a:solidFill>
+                      <a:prstDash val="solid"/>
+                      <a:round/>
+                      <a:headEnd type="none" w="med" len="med"/>
+                      <a:tailEnd type="none" w="med" len="med"/>
+                    </a:lnT>
+                    <a:lnB w="6350" cap="flat" cmpd="sng" algn="ctr">
+                      <a:solidFill>
+                        <a:srgbClr val="D5E1DF"/>
+                      </a:solidFill>
+                      <a:prstDash val="solid"/>
+                      <a:round/>
+                      <a:headEnd type="none" w="med" len="med"/>
+                      <a:tailEnd type="none" w="med" len="med"/>
+                    </a:lnB>
+                    <a:solidFill>
+                      <a:srgbClr val="0E3B3F"/>
+                    </a:solidFill>
+                  </a:tcPr>
+                </a:tc>
+                <a:tc>
+                  <a:txBody>
+                    <a:bodyPr/>
+                    <a:lstStyle/>
+                    <a:p>
+                      <a:pPr indent="0" marL="0">
+                        <a:buNone/>
+                      </a:pPr>
+                      <a:r>
+                        <a:rPr lang="en-US" sz="1250" b="1" dirty="0">
+                          <a:solidFill>
+                            <a:srgbClr val="FFFFFF"/>
+                          </a:solidFill>
+                        </a:rPr>
+                        <a:t>Decided without a person</a:t>
+                      </a:r>
+                      <a:endParaRPr lang="en-US" sz="1250" dirty="0"/>
+                    </a:p>
+                  </a:txBody>
+                  <a:tcPr marL="91440" marR="91440" marT="36576" marB="36576" anchor="ctr">
+                    <a:lnL w="6350" cap="flat" cmpd="sng" algn="ctr">
+                      <a:solidFill>
+                        <a:srgbClr val="D5E1DF"/>
+                      </a:solidFill>
+                      <a:prstDash val="solid"/>
+                      <a:round/>
+                      <a:headEnd type="none" w="med" len="med"/>
+                      <a:tailEnd type="none" w="med" len="med"/>
+                    </a:lnL>
+                    <a:lnR w="6350" cap="flat" cmpd="sng" algn="ctr">
+                      <a:solidFill>
+                        <a:srgbClr val="D5E1DF"/>
+                      </a:solidFill>
+                      <a:prstDash val="solid"/>
+                      <a:round/>
+                      <a:headEnd type="none" w="med" len="med"/>
+                      <a:tailEnd type="none" w="med" len="med"/>
+                    </a:lnR>
+                    <a:lnT w="6350" cap="flat" cmpd="sng" algn="ctr">
+                      <a:solidFill>
+                        <a:srgbClr val="D5E1DF"/>
+                      </a:solidFill>
+                      <a:prstDash val="solid"/>
+                      <a:round/>
+                      <a:headEnd type="none" w="med" len="med"/>
+                      <a:tailEnd type="none" w="med" len="med"/>
+                    </a:lnT>
+                    <a:lnB w="6350" cap="flat" cmpd="sng" algn="ctr">
+                      <a:solidFill>
+                        <a:srgbClr val="D5E1DF"/>
+                      </a:solidFill>
+                      <a:prstDash val="solid"/>
+                      <a:round/>
+                      <a:headEnd type="none" w="med" len="med"/>
+                      <a:tailEnd type="none" w="med" len="med"/>
+                    </a:lnB>
+                    <a:solidFill>
+                      <a:srgbClr val="0E3B3F"/>
+                    </a:solidFill>
+                  </a:tcPr>
+                </a:tc>
+                <a:tc>
+                  <a:txBody>
+                    <a:bodyPr/>
+                    <a:lstStyle/>
+                    <a:p>
+                      <a:pPr indent="0" marL="0">
+                        <a:buNone/>
+                      </a:pPr>
+                      <a:r>
+                        <a:rPr lang="en-US" sz="1250" b="1" dirty="0">
+                          <a:solidFill>
+                            <a:srgbClr val="FFFFFF"/>
+                          </a:solidFill>
+                        </a:rPr>
+                        <a:t>Findings a person decides</a:t>
+                      </a:r>
+                      <a:endParaRPr lang="en-US" sz="1250" dirty="0"/>
+                    </a:p>
+                  </a:txBody>
+                  <a:tcPr marL="91440" marR="91440" marT="36576" marB="36576" anchor="ctr">
+                    <a:lnL w="6350" cap="flat" cmpd="sng" algn="ctr">
+                      <a:solidFill>
+                        <a:srgbClr val="D5E1DF"/>
+                      </a:solidFill>
+                      <a:prstDash val="solid"/>
+                      <a:round/>
+                      <a:headEnd type="none" w="med" len="med"/>
+                      <a:tailEnd type="none" w="med" len="med"/>
+                    </a:lnL>
+                    <a:lnR w="6350" cap="flat" cmpd="sng" algn="ctr">
+                      <a:solidFill>
+                        <a:srgbClr val="D5E1DF"/>
+                      </a:solidFill>
+                      <a:prstDash val="solid"/>
+                      <a:round/>
+                      <a:headEnd type="none" w="med" len="med"/>
+                      <a:tailEnd type="none" w="med" len="med"/>
+                    </a:lnR>
+                    <a:lnT w="6350" cap="flat" cmpd="sng" algn="ctr">
+                      <a:solidFill>
+                        <a:srgbClr val="D5E1DF"/>
+                      </a:solidFill>
+                      <a:prstDash val="solid"/>
+                      <a:round/>
+                      <a:headEnd type="none" w="med" len="med"/>
+                      <a:tailEnd type="none" w="med" len="med"/>
+                    </a:lnT>
+                    <a:lnB w="6350" cap="flat" cmpd="sng" algn="ctr">
+                      <a:solidFill>
+                        <a:srgbClr val="D5E1DF"/>
+                      </a:solidFill>
+                      <a:prstDash val="solid"/>
+                      <a:round/>
+                      <a:headEnd type="none" w="med" len="med"/>
+                      <a:tailEnd type="none" w="med" len="med"/>
+                    </a:lnB>
+                    <a:solidFill>
+                      <a:srgbClr val="0E3B3F"/>
+                    </a:solidFill>
+                  </a:tcPr>
+                </a:tc>
+              </a:tr>
+              <a:tr h="457200">
+                <a:tc>
+                  <a:txBody>
+                    <a:bodyPr/>
+                    <a:lstStyle/>
+                    <a:p>
+                      <a:pPr indent="0" marL="0">
+                        <a:buNone/>
+                      </a:pPr>
+                      <a:r>
+                        <a:rPr lang="en-US" sz="1250" dirty="0">
+                          <a:solidFill>
+                            <a:srgbClr val="17292B"/>
+                          </a:solidFill>
+                        </a:rPr>
+                        <a:t>Today</a:t>
+                      </a:r>
+                      <a:endParaRPr lang="en-US" sz="1250" dirty="0"/>
+                    </a:p>
+                  </a:txBody>
+                  <a:tcPr marL="91440" marR="91440" marT="36576" marB="36576" anchor="ctr">
+                    <a:lnL w="6350" cap="flat" cmpd="sng" algn="ctr">
+                      <a:solidFill>
+                        <a:srgbClr val="D5E1DF"/>
+                      </a:solidFill>
+                      <a:prstDash val="solid"/>
+                      <a:round/>
+                      <a:headEnd type="none" w="med" len="med"/>
+                      <a:tailEnd type="none" w="med" len="med"/>
+                    </a:lnL>
+                    <a:lnR w="6350" cap="flat" cmpd="sng" algn="ctr">
+                      <a:solidFill>
+                        <a:srgbClr val="D5E1DF"/>
+                      </a:solidFill>
+                      <a:prstDash val="solid"/>
+                      <a:round/>
+                      <a:headEnd type="none" w="med" len="med"/>
+                      <a:tailEnd type="none" w="med" len="med"/>
+                    </a:lnR>
+                    <a:lnT w="6350" cap="flat" cmpd="sng" algn="ctr">
+                      <a:solidFill>
+                        <a:srgbClr val="D5E1DF"/>
+                      </a:solidFill>
+                      <a:prstDash val="solid"/>
+                      <a:round/>
+                      <a:headEnd type="none" w="med" len="med"/>
+                      <a:tailEnd type="none" w="med" len="med"/>
+                    </a:lnT>
+                    <a:lnB w="6350" cap="flat" cmpd="sng" algn="ctr">
+                      <a:solidFill>
+                        <a:srgbClr val="D5E1DF"/>
+                      </a:solidFill>
+                      <a:prstDash val="solid"/>
+                      <a:round/>
+                      <a:headEnd type="none" w="med" len="med"/>
+                      <a:tailEnd type="none" w="med" len="med"/>
+                    </a:lnB>
+                    <a:solidFill>
+                      <a:srgbClr val="FFFFFF"/>
+                    </a:solidFill>
+                  </a:tcPr>
+                </a:tc>
+                <a:tc>
+                  <a:txBody>
+                    <a:bodyPr/>
+                    <a:lstStyle/>
+                    <a:p>
+                      <a:pPr indent="0" marL="0">
+                        <a:buNone/>
+                      </a:pPr>
+                      <a:r>
+                        <a:rPr lang="en-US" sz="1250" dirty="0">
+                          <a:solidFill>
+                            <a:srgbClr val="17292B"/>
+                          </a:solidFill>
+                        </a:rPr>
+                        <a:t>0</a:t>
+                      </a:r>
+                      <a:endParaRPr lang="en-US" sz="1250" dirty="0"/>
+                    </a:p>
+                  </a:txBody>
+                  <a:tcPr marL="91440" marR="91440" marT="36576" marB="36576" anchor="ctr">
+                    <a:lnL w="6350" cap="flat" cmpd="sng" algn="ctr">
+                      <a:solidFill>
+                        <a:srgbClr val="D5E1DF"/>
+                      </a:solidFill>
+                      <a:prstDash val="solid"/>
+                      <a:round/>
+                      <a:headEnd type="none" w="med" len="med"/>
+                      <a:tailEnd type="none" w="med" len="med"/>
+                    </a:lnL>
+                    <a:lnR w="6350" cap="flat" cmpd="sng" algn="ctr">
+                      <a:solidFill>
+                        <a:srgbClr val="D5E1DF"/>
+                      </a:solidFill>
+                      <a:prstDash val="solid"/>
+                      <a:round/>
+                      <a:headEnd type="none" w="med" len="med"/>
+                      <a:tailEnd type="none" w="med" len="med"/>
+                    </a:lnR>
+                    <a:lnT w="6350" cap="flat" cmpd="sng" algn="ctr">
+                      <a:solidFill>
+                        <a:srgbClr val="D5E1DF"/>
+                      </a:solidFill>
+                      <a:prstDash val="solid"/>
+                      <a:round/>
+                      <a:headEnd type="none" w="med" len="med"/>
+                      <a:tailEnd type="none" w="med" len="med"/>
+                    </a:lnT>
+                    <a:lnB w="6350" cap="flat" cmpd="sng" algn="ctr">
+                      <a:solidFill>
+                        <a:srgbClr val="D5E1DF"/>
+                      </a:solidFill>
+                      <a:prstDash val="solid"/>
+                      <a:round/>
+                      <a:headEnd type="none" w="med" len="med"/>
+                      <a:tailEnd type="none" w="med" len="med"/>
+                    </a:lnB>
+                    <a:solidFill>
+                      <a:srgbClr val="FFFFFF"/>
+                    </a:solidFill>
+                  </a:tcPr>
+                </a:tc>
+                <a:tc>
+                  <a:txBody>
+                    <a:bodyPr/>
+                    <a:lstStyle/>
+                    <a:p>
+                      <a:pPr indent="0" marL="0">
+                        <a:buNone/>
+                      </a:pPr>
+                      <a:r>
+                        <a:rPr lang="en-US" sz="1250" dirty="0">
+                          <a:solidFill>
+                            <a:srgbClr val="17292B"/>
+                          </a:solidFill>
+                        </a:rPr>
+                        <a:t>650</a:t>
+                      </a:r>
+                      <a:endParaRPr lang="en-US" sz="1250" dirty="0"/>
+                    </a:p>
+                  </a:txBody>
+                  <a:tcPr marL="91440" marR="91440" marT="36576" marB="36576" anchor="ctr">
+                    <a:lnL w="6350" cap="flat" cmpd="sng" algn="ctr">
+                      <a:solidFill>
+                        <a:srgbClr val="D5E1DF"/>
+                      </a:solidFill>
+                      <a:prstDash val="solid"/>
+                      <a:round/>
+                      <a:headEnd type="none" w="med" len="med"/>
+                      <a:tailEnd type="none" w="med" len="med"/>
+                    </a:lnL>
+                    <a:lnR w="6350" cap="flat" cmpd="sng" algn="ctr">
+                      <a:solidFill>
+                        <a:srgbClr val="D5E1DF"/>
+                      </a:solidFill>
+                      <a:prstDash val="solid"/>
+                      <a:round/>
+                      <a:headEnd type="none" w="med" len="med"/>
+                      <a:tailEnd type="none" w="med" len="med"/>
+                    </a:lnR>
+                    <a:lnT w="6350" cap="flat" cmpd="sng" algn="ctr">
+                      <a:solidFill>
+                        <a:srgbClr val="D5E1DF"/>
+                      </a:solidFill>
+                      <a:prstDash val="solid"/>
+                      <a:round/>
+                      <a:headEnd type="none" w="med" len="med"/>
+                      <a:tailEnd type="none" w="med" len="med"/>
+                    </a:lnT>
+                    <a:lnB w="6350" cap="flat" cmpd="sng" algn="ctr">
+                      <a:solidFill>
+                        <a:srgbClr val="D5E1DF"/>
+                      </a:solidFill>
+                      <a:prstDash val="solid"/>
+                      <a:round/>
+                      <a:headEnd type="none" w="med" len="med"/>
+                      <a:tailEnd type="none" w="med" len="med"/>
+                    </a:lnB>
+                    <a:solidFill>
+                      <a:srgbClr val="FFFFFF"/>
+                    </a:solidFill>
+                  </a:tcPr>
+                </a:tc>
+              </a:tr>
+              <a:tr h="457200">
+                <a:tc>
+                  <a:txBody>
+                    <a:bodyPr/>
+                    <a:lstStyle/>
+                    <a:p>
+                      <a:pPr indent="0" marL="0">
+                        <a:buNone/>
+                      </a:pPr>
+                      <a:r>
+                        <a:rPr lang="en-US" sz="1250" dirty="0">
+                          <a:solidFill>
+                            <a:srgbClr val="17292B"/>
+                          </a:solidFill>
+                        </a:rPr>
+                        <a:t>Auto-clear only</a:t>
+                      </a:r>
+                      <a:endParaRPr lang="en-US" sz="1250" dirty="0"/>
+                    </a:p>
+                  </a:txBody>
+                  <a:tcPr marL="91440" marR="91440" marT="36576" marB="36576" anchor="ctr">
+                    <a:lnL w="6350" cap="flat" cmpd="sng" algn="ctr">
+                      <a:solidFill>
+                        <a:srgbClr val="D5E1DF"/>
+                      </a:solidFill>
+                      <a:prstDash val="solid"/>
+                      <a:round/>
+                      <a:headEnd type="none" w="med" len="med"/>
+                      <a:tailEnd type="none" w="med" len="med"/>
+                    </a:lnL>
+                    <a:lnR w="6350" cap="flat" cmpd="sng" algn="ctr">
+                      <a:solidFill>
+                        <a:srgbClr val="D5E1DF"/>
+                      </a:solidFill>
+                      <a:prstDash val="solid"/>
+                      <a:round/>
+                      <a:headEnd type="none" w="med" len="med"/>
+                      <a:tailEnd type="none" w="med" len="med"/>
+                    </a:lnR>
+                    <a:lnT w="6350" cap="flat" cmpd="sng" algn="ctr">
+                      <a:solidFill>
+                        <a:srgbClr val="D5E1DF"/>
+                      </a:solidFill>
+                      <a:prstDash val="solid"/>
+                      <a:round/>
+                      <a:headEnd type="none" w="med" len="med"/>
+                      <a:tailEnd type="none" w="med" len="med"/>
+                    </a:lnT>
+                    <a:lnB w="6350" cap="flat" cmpd="sng" algn="ctr">
+                      <a:solidFill>
+                        <a:srgbClr val="D5E1DF"/>
+                      </a:solidFill>
+                      <a:prstDash val="solid"/>
+                      <a:round/>
+                      <a:headEnd type="none" w="med" len="med"/>
+                      <a:tailEnd type="none" w="med" len="med"/>
+                    </a:lnB>
+                    <a:solidFill>
+                      <a:srgbClr val="F2F6F5"/>
+                    </a:solidFill>
+                  </a:tcPr>
+                </a:tc>
+                <a:tc>
+                  <a:txBody>
+                    <a:bodyPr/>
+                    <a:lstStyle/>
+                    <a:p>
+                      <a:pPr indent="0" marL="0">
+                        <a:buNone/>
+                      </a:pPr>
+                      <a:r>
+                        <a:rPr lang="en-US" sz="1250" dirty="0">
+                          <a:solidFill>
+                            <a:srgbClr val="17292B"/>
+                          </a:solidFill>
+                        </a:rPr>
+                        <a:t>159 (31.7%)</a:t>
+                      </a:r>
+                      <a:endParaRPr lang="en-US" sz="1250" dirty="0"/>
+                    </a:p>
+                  </a:txBody>
+                  <a:tcPr marL="91440" marR="91440" marT="36576" marB="36576" anchor="ctr">
+                    <a:lnL w="6350" cap="flat" cmpd="sng" algn="ctr">
+                      <a:solidFill>
+                        <a:srgbClr val="D5E1DF"/>
+                      </a:solidFill>
+                      <a:prstDash val="solid"/>
+                      <a:round/>
+                      <a:headEnd type="none" w="med" len="med"/>
+                      <a:tailEnd type="none" w="med" len="med"/>
+                    </a:lnL>
+                    <a:lnR w="6350" cap="flat" cmpd="sng" algn="ctr">
+                      <a:solidFill>
+                        <a:srgbClr val="D5E1DF"/>
+                      </a:solidFill>
+                      <a:prstDash val="solid"/>
+                      <a:round/>
+                      <a:headEnd type="none" w="med" len="med"/>
+                      <a:tailEnd type="none" w="med" len="med"/>
+                    </a:lnR>
+                    <a:lnT w="6350" cap="flat" cmpd="sng" algn="ctr">
+                      <a:solidFill>
+                        <a:srgbClr val="D5E1DF"/>
+                      </a:solidFill>
+                      <a:prstDash val="solid"/>
+                      <a:round/>
+                      <a:headEnd type="none" w="med" len="med"/>
+                      <a:tailEnd type="none" w="med" len="med"/>
+                    </a:lnT>
+                    <a:lnB w="6350" cap="flat" cmpd="sng" algn="ctr">
+                      <a:solidFill>
+                        <a:srgbClr val="D5E1DF"/>
+                      </a:solidFill>
+                      <a:prstDash val="solid"/>
+                      <a:round/>
+                      <a:headEnd type="none" w="med" len="med"/>
+                      <a:tailEnd type="none" w="med" len="med"/>
+                    </a:lnB>
+                    <a:solidFill>
+                      <a:srgbClr val="F2F6F5"/>
+                    </a:solidFill>
+                  </a:tcPr>
+                </a:tc>
+                <a:tc>
+                  <a:txBody>
+                    <a:bodyPr/>
+                    <a:lstStyle/>
+                    <a:p>
+                      <a:pPr indent="0" marL="0">
+                        <a:buNone/>
+                      </a:pPr>
+                      <a:r>
+                        <a:rPr lang="en-US" sz="1250" dirty="0">
+                          <a:solidFill>
+                            <a:srgbClr val="17292B"/>
+                          </a:solidFill>
+                        </a:rPr>
+                        <a:t>650</a:t>
+                      </a:r>
+                      <a:endParaRPr lang="en-US" sz="1250" dirty="0"/>
+                    </a:p>
+                  </a:txBody>
+                  <a:tcPr marL="91440" marR="91440" marT="36576" marB="36576" anchor="ctr">
+                    <a:lnL w="6350" cap="flat" cmpd="sng" algn="ctr">
+                      <a:solidFill>
+                        <a:srgbClr val="D5E1DF"/>
+                      </a:solidFill>
+                      <a:prstDash val="solid"/>
+                      <a:round/>
+                      <a:headEnd type="none" w="med" len="med"/>
+                      <a:tailEnd type="none" w="med" len="med"/>
+                    </a:lnL>
+                    <a:lnR w="6350" cap="flat" cmpd="sng" algn="ctr">
+                      <a:solidFill>
+                        <a:srgbClr val="D5E1DF"/>
+                      </a:solidFill>
+                      <a:prstDash val="solid"/>
+                      <a:round/>
+                      <a:headEnd type="none" w="med" len="med"/>
+                      <a:tailEnd type="none" w="med" len="med"/>
+                    </a:lnR>
+                    <a:lnT w="6350" cap="flat" cmpd="sng" algn="ctr">
+                      <a:solidFill>
+                        <a:srgbClr val="D5E1DF"/>
+                      </a:solidFill>
+                      <a:prstDash val="solid"/>
+                      <a:round/>
+                      <a:headEnd type="none" w="med" len="med"/>
+                      <a:tailEnd type="none" w="med" len="med"/>
+                    </a:lnT>
+                    <a:lnB w="6350" cap="flat" cmpd="sng" algn="ctr">
+                      <a:solidFill>
+                        <a:srgbClr val="D5E1DF"/>
+                      </a:solidFill>
+                      <a:prstDash val="solid"/>
+                      <a:round/>
+                      <a:headEnd type="none" w="med" len="med"/>
+                      <a:tailEnd type="none" w="med" len="med"/>
+                    </a:lnB>
+                    <a:solidFill>
+                      <a:srgbClr val="F2F6F5"/>
+                    </a:solidFill>
+                  </a:tcPr>
+                </a:tc>
+              </a:tr>
+              <a:tr h="457200">
+                <a:tc>
+                  <a:txBody>
+                    <a:bodyPr/>
+                    <a:lstStyle/>
+                    <a:p>
+                      <a:pPr indent="0" marL="0">
+                        <a:buNone/>
+                      </a:pPr>
+                      <a:r>
+                        <a:rPr lang="en-US" sz="1250" dirty="0">
+                          <a:solidFill>
+                            <a:srgbClr val="17292B"/>
+                          </a:solidFill>
+                        </a:rPr>
+                        <a:t>+ auto-request, medium severity</a:t>
+                      </a:r>
+                      <a:endParaRPr lang="en-US" sz="1250" dirty="0"/>
+                    </a:p>
+                  </a:txBody>
+                  <a:tcPr marL="91440" marR="91440" marT="36576" marB="36576" anchor="ctr">
+                    <a:lnL w="6350" cap="flat" cmpd="sng" algn="ctr">
+                      <a:solidFill>
+                        <a:srgbClr val="D5E1DF"/>
+                      </a:solidFill>
+                      <a:prstDash val="solid"/>
+                      <a:round/>
+                      <a:headEnd type="none" w="med" len="med"/>
+                      <a:tailEnd type="none" w="med" len="med"/>
+                    </a:lnL>
+                    <a:lnR w="6350" cap="flat" cmpd="sng" algn="ctr">
+                      <a:solidFill>
+                        <a:srgbClr val="D5E1DF"/>
+                      </a:solidFill>
+                      <a:prstDash val="solid"/>
+                      <a:round/>
+                      <a:headEnd type="none" w="med" len="med"/>
+                      <a:tailEnd type="none" w="med" len="med"/>
+                    </a:lnR>
+                    <a:lnT w="6350" cap="flat" cmpd="sng" algn="ctr">
+                      <a:solidFill>
+                        <a:srgbClr val="D5E1DF"/>
+                      </a:solidFill>
+                      <a:prstDash val="solid"/>
+                      <a:round/>
+                      <a:headEnd type="none" w="med" len="med"/>
+                      <a:tailEnd type="none" w="med" len="med"/>
+                    </a:lnT>
+                    <a:lnB w="6350" cap="flat" cmpd="sng" algn="ctr">
+                      <a:solidFill>
+                        <a:srgbClr val="D5E1DF"/>
+                      </a:solidFill>
+                      <a:prstDash val="solid"/>
+                      <a:round/>
+                      <a:headEnd type="none" w="med" len="med"/>
+                      <a:tailEnd type="none" w="med" len="med"/>
+                    </a:lnB>
+                    <a:solidFill>
+                      <a:srgbClr val="FFFFFF"/>
+                    </a:solidFill>
+                  </a:tcPr>
+                </a:tc>
+                <a:tc>
+                  <a:txBody>
+                    <a:bodyPr/>
+                    <a:lstStyle/>
+                    <a:p>
+                      <a:pPr indent="0" marL="0">
+                        <a:buNone/>
+                      </a:pPr>
+                      <a:r>
+                        <a:rPr lang="en-US" sz="1250" dirty="0">
+                          <a:solidFill>
+                            <a:srgbClr val="17292B"/>
+                          </a:solidFill>
+                        </a:rPr>
+                        <a:t>170 (34.1%)</a:t>
+                      </a:r>
+                      <a:endParaRPr lang="en-US" sz="1250" dirty="0"/>
+                    </a:p>
+                  </a:txBody>
+                  <a:tcPr marL="91440" marR="91440" marT="36576" marB="36576" anchor="ctr">
+                    <a:lnL w="6350" cap="flat" cmpd="sng" algn="ctr">
+                      <a:solidFill>
+                        <a:srgbClr val="D5E1DF"/>
+                      </a:solidFill>
+                      <a:prstDash val="solid"/>
+                      <a:round/>
+                      <a:headEnd type="none" w="med" len="med"/>
+                      <a:tailEnd type="none" w="med" len="med"/>
+                    </a:lnL>
+                    <a:lnR w="6350" cap="flat" cmpd="sng" algn="ctr">
+                      <a:solidFill>
+                        <a:srgbClr val="D5E1DF"/>
+                      </a:solidFill>
+                      <a:prstDash val="solid"/>
+                      <a:round/>
+                      <a:headEnd type="none" w="med" len="med"/>
+                      <a:tailEnd type="none" w="med" len="med"/>
+                    </a:lnR>
+                    <a:lnT w="6350" cap="flat" cmpd="sng" algn="ctr">
+                      <a:solidFill>
+                        <a:srgbClr val="D5E1DF"/>
+                      </a:solidFill>
+                      <a:prstDash val="solid"/>
+                      <a:round/>
+                      <a:headEnd type="none" w="med" len="med"/>
+                      <a:tailEnd type="none" w="med" len="med"/>
+                    </a:lnT>
+                    <a:lnB w="6350" cap="flat" cmpd="sng" algn="ctr">
+                      <a:solidFill>
+                        <a:srgbClr val="D5E1DF"/>
+                      </a:solidFill>
+                      <a:prstDash val="solid"/>
+                      <a:round/>
+                      <a:headEnd type="none" w="med" len="med"/>
+                      <a:tailEnd type="none" w="med" len="med"/>
+                    </a:lnB>
+                    <a:solidFill>
+                      <a:srgbClr val="FFFFFF"/>
+                    </a:solidFill>
+                  </a:tcPr>
+                </a:tc>
+                <a:tc>
+                  <a:txBody>
+                    <a:bodyPr/>
+                    <a:lstStyle/>
+                    <a:p>
+                      <a:pPr indent="0" marL="0">
+                        <a:buNone/>
+                      </a:pPr>
+                      <a:r>
+                        <a:rPr lang="en-US" sz="1250" dirty="0">
+                          <a:solidFill>
+                            <a:srgbClr val="17292B"/>
+                          </a:solidFill>
+                        </a:rPr>
+                        <a:t>541 (-16.9%)</a:t>
+                      </a:r>
+                      <a:endParaRPr lang="en-US" sz="1250" dirty="0"/>
+                    </a:p>
+                  </a:txBody>
+                  <a:tcPr marL="91440" marR="91440" marT="36576" marB="36576" anchor="ctr">
+                    <a:lnL w="6350" cap="flat" cmpd="sng" algn="ctr">
+                      <a:solidFill>
+                        <a:srgbClr val="D5E1DF"/>
+                      </a:solidFill>
+                      <a:prstDash val="solid"/>
+                      <a:round/>
+                      <a:headEnd type="none" w="med" len="med"/>
+                      <a:tailEnd type="none" w="med" len="med"/>
+                    </a:lnL>
+                    <a:lnR w="6350" cap="flat" cmpd="sng" algn="ctr">
+                      <a:solidFill>
+                        <a:srgbClr val="D5E1DF"/>
+                      </a:solidFill>
+                      <a:prstDash val="solid"/>
+                      <a:round/>
+                      <a:headEnd type="none" w="med" len="med"/>
+                      <a:tailEnd type="none" w="med" len="med"/>
+                    </a:lnR>
+                    <a:lnT w="6350" cap="flat" cmpd="sng" algn="ctr">
+                      <a:solidFill>
+                        <a:srgbClr val="D5E1DF"/>
+                      </a:solidFill>
+                      <a:prstDash val="solid"/>
+                      <a:round/>
+                      <a:headEnd type="none" w="med" len="med"/>
+                      <a:tailEnd type="none" w="med" len="med"/>
+                    </a:lnT>
+                    <a:lnB w="6350" cap="flat" cmpd="sng" algn="ctr">
+                      <a:solidFill>
+                        <a:srgbClr val="D5E1DF"/>
+                      </a:solidFill>
+                      <a:prstDash val="solid"/>
+                      <a:round/>
+                      <a:headEnd type="none" w="med" len="med"/>
+                      <a:tailEnd type="none" w="med" len="med"/>
+                    </a:lnB>
+                    <a:solidFill>
+                      <a:srgbClr val="FFFFFF"/>
+                    </a:solidFill>
+                  </a:tcPr>
+                </a:tc>
+              </a:tr>
+              <a:tr h="457200">
+                <a:tc>
+                  <a:txBody>
+                    <a:bodyPr/>
+                    <a:lstStyle/>
+                    <a:p>
+                      <a:pPr indent="0" marL="0">
+                        <a:buNone/>
+                      </a:pPr>
+                      <a:r>
+                        <a:rPr lang="en-US" sz="1250" b="1" dirty="0">
+                          <a:solidFill>
+                            <a:srgbClr val="17292B"/>
+                          </a:solidFill>
+                        </a:rPr>
+                        <a:t>+ auto-request, all severities</a:t>
+                      </a:r>
+                      <a:endParaRPr lang="en-US" sz="1250" dirty="0"/>
+                    </a:p>
+                  </a:txBody>
+                  <a:tcPr marL="91440" marR="91440" marT="36576" marB="36576" anchor="ctr">
+                    <a:lnL w="6350" cap="flat" cmpd="sng" algn="ctr">
+                      <a:solidFill>
+                        <a:srgbClr val="D5E1DF"/>
+                      </a:solidFill>
+                      <a:prstDash val="solid"/>
+                      <a:round/>
+                      <a:headEnd type="none" w="med" len="med"/>
+                      <a:tailEnd type="none" w="med" len="med"/>
+                    </a:lnL>
+                    <a:lnR w="6350" cap="flat" cmpd="sng" algn="ctr">
+                      <a:solidFill>
+                        <a:srgbClr val="D5E1DF"/>
+                      </a:solidFill>
+                      <a:prstDash val="solid"/>
+                      <a:round/>
+                      <a:headEnd type="none" w="med" len="med"/>
+                      <a:tailEnd type="none" w="med" len="med"/>
+                    </a:lnR>
+                    <a:lnT w="6350" cap="flat" cmpd="sng" algn="ctr">
+                      <a:solidFill>
+                        <a:srgbClr val="D5E1DF"/>
+                      </a:solidFill>
+                      <a:prstDash val="solid"/>
+                      <a:round/>
+                      <a:headEnd type="none" w="med" len="med"/>
+                      <a:tailEnd type="none" w="med" len="med"/>
+                    </a:lnT>
+                    <a:lnB w="6350" cap="flat" cmpd="sng" algn="ctr">
+                      <a:solidFill>
+                        <a:srgbClr val="D5E1DF"/>
+                      </a:solidFill>
+                      <a:prstDash val="solid"/>
+                      <a:round/>
+                      <a:headEnd type="none" w="med" len="med"/>
+                      <a:tailEnd type="none" w="med" len="med"/>
+                    </a:lnB>
+                    <a:solidFill>
+                      <a:srgbClr val="F2F6F5"/>
+                    </a:solidFill>
+                  </a:tcPr>
+                </a:tc>
+                <a:tc>
+                  <a:txBody>
+                    <a:bodyPr/>
+                    <a:lstStyle/>
+                    <a:p>
+                      <a:pPr indent="0" marL="0">
+                        <a:buNone/>
+                      </a:pPr>
+                      <a:r>
+                        <a:rPr lang="en-US" sz="1250" b="1" dirty="0">
+                          <a:solidFill>
+                            <a:srgbClr val="14746F"/>
+                          </a:solidFill>
+                        </a:rPr>
+                        <a:t>196 (39.1%)</a:t>
+                      </a:r>
+                      <a:endParaRPr lang="en-US" sz="1250" dirty="0"/>
+                    </a:p>
+                  </a:txBody>
+                  <a:tcPr marL="91440" marR="91440" marT="36576" marB="36576" anchor="ctr">
+                    <a:lnL w="6350" cap="flat" cmpd="sng" algn="ctr">
+                      <a:solidFill>
+                        <a:srgbClr val="D5E1DF"/>
+                      </a:solidFill>
+                      <a:prstDash val="solid"/>
+                      <a:round/>
+                      <a:headEnd type="none" w="med" len="med"/>
+                      <a:tailEnd type="none" w="med" len="med"/>
+                    </a:lnL>
+                    <a:lnR w="6350" cap="flat" cmpd="sng" algn="ctr">
+                      <a:solidFill>
+                        <a:srgbClr val="D5E1DF"/>
+                      </a:solidFill>
+                      <a:prstDash val="solid"/>
+                      <a:round/>
+                      <a:headEnd type="none" w="med" len="med"/>
+                      <a:tailEnd type="none" w="med" len="med"/>
+                    </a:lnR>
+                    <a:lnT w="6350" cap="flat" cmpd="sng" algn="ctr">
+                      <a:solidFill>
+                        <a:srgbClr val="D5E1DF"/>
+                      </a:solidFill>
+                      <a:prstDash val="solid"/>
+                      <a:round/>
+                      <a:headEnd type="none" w="med" len="med"/>
+                      <a:tailEnd type="none" w="med" len="med"/>
+                    </a:lnT>
+                    <a:lnB w="6350" cap="flat" cmpd="sng" algn="ctr">
+                      <a:solidFill>
+                        <a:srgbClr val="D5E1DF"/>
+                      </a:solidFill>
+                      <a:prstDash val="solid"/>
+                      <a:round/>
+                      <a:headEnd type="none" w="med" len="med"/>
+                      <a:tailEnd type="none" w="med" len="med"/>
+                    </a:lnB>
+                    <a:solidFill>
+                      <a:srgbClr val="F2F6F5"/>
+                    </a:solidFill>
+                  </a:tcPr>
+                </a:tc>
+                <a:tc>
+                  <a:txBody>
+                    <a:bodyPr/>
+                    <a:lstStyle/>
+                    <a:p>
+                      <a:pPr indent="0" marL="0">
+                        <a:buNone/>
+                      </a:pPr>
+                      <a:r>
+                        <a:rPr lang="en-US" sz="1250" b="1" dirty="0">
+                          <a:solidFill>
+                            <a:srgbClr val="14746F"/>
+                          </a:solidFill>
+                        </a:rPr>
+                        <a:t>399 (-38.6%)</a:t>
+                      </a:r>
+                      <a:endParaRPr lang="en-US" sz="1250" dirty="0"/>
+                    </a:p>
+                  </a:txBody>
+                  <a:tcPr marL="91440" marR="91440" marT="36576" marB="36576" anchor="ctr">
+                    <a:lnL w="6350" cap="flat" cmpd="sng" algn="ctr">
+                      <a:solidFill>
+                        <a:srgbClr val="D5E1DF"/>
+                      </a:solidFill>
+                      <a:prstDash val="solid"/>
+                      <a:round/>
+                      <a:headEnd type="none" w="med" len="med"/>
+                      <a:tailEnd type="none" w="med" len="med"/>
+                    </a:lnL>
+                    <a:lnR w="6350" cap="flat" cmpd="sng" algn="ctr">
+                      <a:solidFill>
+                        <a:srgbClr val="D5E1DF"/>
+                      </a:solidFill>
+                      <a:prstDash val="solid"/>
+                      <a:round/>
+                      <a:headEnd type="none" w="med" len="med"/>
+                      <a:tailEnd type="none" w="med" len="med"/>
+                    </a:lnR>
+                    <a:lnT w="6350" cap="flat" cmpd="sng" algn="ctr">
+                      <a:solidFill>
+                        <a:srgbClr val="D5E1DF"/>
+                      </a:solidFill>
+                      <a:prstDash val="solid"/>
+                      <a:round/>
+                      <a:headEnd type="none" w="med" len="med"/>
+                      <a:tailEnd type="none" w="med" len="med"/>
+                    </a:lnT>
+                    <a:lnB w="6350" cap="flat" cmpd="sng" algn="ctr">
+                      <a:solidFill>
+                        <a:srgbClr val="D5E1DF"/>
+                      </a:solidFill>
+                      <a:prstDash val="solid"/>
+                      <a:round/>
+                      <a:headEnd type="none" w="med" len="med"/>
+                      <a:tailEnd type="none" w="med" len="med"/>
+                    </a:lnB>
+                    <a:solidFill>
+                      <a:srgbClr val="F2F6F5"/>
+                    </a:solidFill>
+                  </a:tcPr>
+                </a:tc>
+              </a:tr>
+            </a:tbl>
+          </a:graphicData>
+        </a:graphic>
+      </p:graphicFrame>
+      <p:sp>
+        <p:nvSpPr>
+          <p:cNvPr id="7" name="bullets"/>
+          <p:cNvSpPr txBox="1"/>
+          <p:nvPr/>
+        </p:nvSpPr>
+        <p:spPr>
+          <a:xfrm>
+            <a:off x="548640" y="3840480"/>
+            <a:ext cx="6583680" cy="2286000"/>
+          </a:xfrm>
+          <a:prstGeom prst="rect">
+            <a:avLst/>
+          </a:prstGeom>
+          <a:noFill/>
+          <a:ln/>
+        </p:spPr>
+        <p:txBody>
+          <a:bodyPr wrap="square" lIns="0" tIns="0" rIns="0" bIns="0" rtlCol="0" anchor="t"/>
+          <a:lstStyle/>
+          <a:p>
+            <a:pPr marL="203200" indent="-203200">
+              <a:spcAft>
+                <a:spcPts val="600"/>
+              </a:spcAft>
+              <a:buSzPct val="100000"/>
+              <a:buChar char="•"/>
+            </a:pPr>
+            <a:r>
+              <a:rPr lang="en-US" sz="1250" dirty="0">
+                <a:solidFill>
+                  <a:srgbClr val="17292B"/>
+                </a:solidFill>
+              </a:rPr>
+              <a:t>For a finding that only says data is missing (UNABLE_TO_ASSESS), the system records the request itself (system:auto-request)</a:t>
+            </a:r>
+            <a:endParaRPr lang="en-US" sz="1250" dirty="0"/>
+          </a:p>
+          <a:p>
+            <a:pPr marL="203200" indent="-203200">
+              <a:spcAft>
+                <a:spcPts val="600"/>
+              </a:spcAft>
+              <a:buSzPct val="100000"/>
+              <a:buChar char="•"/>
+            </a:pPr>
+            <a:r>
+              <a:rPr lang="en-US" sz="1250" dirty="0">
+                <a:solidFill>
+                  <a:srgbClr val="17292B"/>
+                </a:solidFill>
+              </a:rPr>
+              <a:t>The reason is the rulebook's own corrective-action text, never claim data</a:t>
+            </a:r>
+            <a:endParaRPr lang="en-US" sz="1250" dirty="0"/>
+          </a:p>
+          <a:p>
+            <a:pPr marL="203200" indent="-203200">
+              <a:spcAft>
+                <a:spcPts val="600"/>
+              </a:spcAft>
+              <a:buSzPct val="100000"/>
+              <a:buChar char="•"/>
+            </a:pPr>
+            <a:r>
+              <a:rPr lang="en-US" sz="1250" dirty="0">
+                <a:solidFill>
+                  <a:srgbClr val="17292B"/>
+                </a:solidFill>
+              </a:rPr>
+              <a:t>A claim that also has real findings keeps them for a person</a:t>
+            </a:r>
+            <a:endParaRPr lang="en-US" sz="1250" dirty="0"/>
+          </a:p>
+          <a:p>
+            <a:pPr marL="203200" indent="-203200">
+              <a:spcAft>
+                <a:spcPts val="600"/>
+              </a:spcAft>
+              <a:buSzPct val="100000"/>
+              <a:buChar char="•"/>
+            </a:pPr>
+            <a:r>
+              <a:rPr lang="en-US" sz="1250" dirty="0">
+                <a:solidFill>
+                  <a:srgbClr val="17292B"/>
+                </a:solidFill>
+              </a:rPr>
+              <a:t>A random share is handled by a person in full, and the audit counts how often they asked too</a:t>
+            </a:r>
+            <a:endParaRPr lang="en-US" sz="1250" dirty="0"/>
+          </a:p>
+          <a:p>
+            <a:pPr marL="203200" indent="-203200">
+              <a:spcAft>
+                <a:spcPts val="600"/>
+              </a:spcAft>
+              <a:buSzPct val="100000"/>
+              <a:buChar char="•"/>
+            </a:pPr>
+            <a:r>
+              <a:rPr lang="en-US" sz="1250" dirty="0">
+                <a:solidFill>
+                  <a:srgbClr val="17292B"/>
+                </a:solidFill>
+              </a:rPr>
+              <a:t>0 recorded requests were on a finding the answer key does not call missing data</a:t>
+            </a:r>
+            <a:endParaRPr lang="en-US" sz="1250" dirty="0"/>
+          </a:p>
+        </p:txBody>
+      </p:sp>
+      <p:graphicFrame>
+        <p:nvGraphicFramePr>
+          <p:cNvPr id="8" name="Chart 0" descr=""/>
+          <p:cNvGraphicFramePr/>
+          <p:nvPr/>
+        </p:nvGraphicFramePr>
+        <p:xfrm>
+          <a:off x="7315200" y="1325880"/>
+          <a:ext cx="4297680" cy="3840480"/>
+        </p:xfrm>
+        <a:graphic xmlns:a="http://schemas.openxmlformats.org/drawingml/2006/main">
+          <a:graphicData uri="http://schemas.openxmlformats.org/drawingml/2006/chart">
+            <c:chart xmlns:c="http://schemas.openxmlformats.org/drawingml/2006/chart" r:id="rId1"/>
+          </a:graphicData>
+        </a:graphic>
+      </p:graphicFrame>
+      <p:sp>
+        <p:nvSpPr>
+          <p:cNvPr id="9" name="footnote"/>
+          <p:cNvSpPr txBox="1"/>
+          <p:nvPr/>
+        </p:nvSpPr>
+        <p:spPr>
+          <a:xfrm>
+            <a:off x="548640" y="6217920"/>
+            <a:ext cx="10424160" cy="365760"/>
+          </a:xfrm>
+          <a:prstGeom prst="rect">
+            <a:avLst/>
+          </a:prstGeom>
+          <a:noFill/>
+          <a:ln/>
+        </p:spPr>
+        <p:txBody>
+          <a:bodyPr wrap="square" lIns="0" tIns="0" rIns="0" bIns="0" rtlCol="0" anchor="ctr"/>
+          <a:lstStyle/>
+          <a:p>
+            <a:pPr indent="0" marL="0">
+              <a:buNone/>
+            </a:pPr>
+            <a:r>
+              <a:rPr lang="en-US" sz="1100" i="1" dirty="0">
+                <a:solidFill>
+                  <a:srgbClr val="5C7173"/>
+                </a:solidFill>
+              </a:rPr>
+              <a:t>Real engine and triage, 20 random batches, 5% audit. No review time is measured: these are shares of claims and findings, not minutes.</a:t>
+            </a:r>
+            <a:endParaRPr lang="en-US" sz="1100" dirty="0"/>
+          </a:p>
+        </p:txBody>
+      </p:sp>
+      <p:sp>
+        <p:nvSpPr>
+          <p:cNvPr id="25" name="Slide Number Placeholder 0"/>
+          <p:cNvSpPr>
+            <a:spLocks noGrp="1"/>
+          </p:cNvSpPr>
+          <p:nvPr>
+            <p:ph type="sldNum" sz="quarter" idx="4294967295"/>
+          </p:nvPr>
+        </p:nvSpPr>
+        <p:spPr>
+          <a:xfrm>
+            <a:off x="11247120" y="6400800"/>
+            <a:ext cx="548640" cy="274320"/>
+          </a:xfrm>
+          <a:prstGeom prst="rect">
+            <a:avLst/>
+          </a:prstGeom>
+          <a:extLst>
+            <a:ext uri="{C572A759-6A51-4108-AA02-DFA0A04FC94B}">
+              <ma14:wrappingTextBoxFlag xmlns:ma14="http://schemas.microsoft.com/office/mac/drawingml/2011/main" val="0"/>
+            </a:ext>
+          </a:extLst>
+        </p:spPr>
+        <p:txBody>
+          <a:bodyPr/>
+          <a:lstStyle>
+            <a:lvl1pPr>
+              <a:defRPr sz="1000">
+                <a:solidFill>
+                  <a:srgbClr val="5C7173"/>
+                </a:solidFill>
+              </a:defRPr>
+            </a:lvl1pPr>
+          </a:lstStyle>
+          <a:p>
+            <a:pPr algn="l"/>
+            <a:fld id="{F7021451-1387-4CA6-816F-3879F97B5CBC}" type="slidenum">
+              <a:rPr b="0" lang="en-US"/>
+              <a:t>25</a:t>
+            </a:fld>
+            <a:endParaRPr lang="en-US"/>
+          </a:p>
+        </p:txBody>
+      </p:sp>
+    </p:spTree>
+  </p:cSld>
+  <p:clrMapOvr>
+    <a:masterClrMapping/>
+  </p:clrMapOvr>
+</p:sld>
+</file>
+
+<file path=ppt/slides/slide26.xml><?xml version="1.0" encoding="utf-8"?>
+<p:sld xmlns:a="http://schemas.openxmlformats.org/drawingml/2006/main" xmlns:r="http://schemas.openxmlformats.org/officeDocument/2006/relationships" xmlns:p="http://schemas.openxmlformats.org/presentationml/2006/main">
+  <p:cSld name="Slide 26">
+    <p:spTree>
+      <p:nvGrpSpPr>
+        <p:cNvPr id="1" name=""/>
+        <p:cNvGrpSpPr/>
+        <p:nvPr/>
+      </p:nvGrpSpPr>
+      <p:grpSpPr>
+        <a:xfrm>
+          <a:off x="0" y="0"/>
+          <a:ext cx="0" cy="0"/>
+          <a:chOff x="0" y="0"/>
+          <a:chExt cx="0" cy="0"/>
+        </a:xfrm>
+      </p:grpSpPr>
+      <p:sp>
+        <p:nvSpPr>
+          <p:cNvPr id="2" name="Text 0"/>
+          <p:cNvSpPr/>
+          <p:nvPr>
+            <p:ph idx="100" type="title" hasCustomPrompt="1"/>
+          </p:nvPr>
+        </p:nvSpPr>
+        <p:spPr>
+          <a:xfrm>
+            <a:off x="548640" y="365760"/>
+            <a:ext cx="11064240" cy="822960"/>
+          </a:xfrm>
+          <a:prstGeom prst="rect">
+            <a:avLst/>
+          </a:prstGeom>
+          <a:noFill/>
+          <a:ln/>
+        </p:spPr>
+        <p:txBody>
+          <a:bodyPr wrap="square" lIns="0" tIns="0" rIns="0" bIns="0" rtlCol="0" anchor="ctr"/>
+          <a:lstStyle/>
+          <a:p>
+            <a:pPr indent="0" marL="0">
+              <a:buNone/>
+            </a:pPr>
+            <a:r>
+              <a:rPr lang="en-US" sz="3200" b="1" dirty="0">
+                <a:solidFill>
+                  <a:srgbClr val="0E3B3F"/>
+                </a:solidFill>
+                <a:latin typeface="Cambria" pitchFamily="34" charset="0"/>
+                <a:ea typeface="Cambria" pitchFamily="34" charset="-122"/>
+                <a:cs typeface="Cambria" pitchFamily="34" charset="-120"/>
+              </a:rPr>
+              <a:t>One-click confirm, and bulk confirm for reliable rules</a:t>
+            </a:r>
+            <a:endParaRPr lang="en-US" sz="3200" dirty="0"/>
+          </a:p>
+        </p:txBody>
+      </p:sp>
+      <p:sp>
+        <p:nvSpPr>
+          <p:cNvPr id="4" name="confirm card 1"/>
+          <p:cNvSpPr/>
+          <p:nvPr/>
+        </p:nvSpPr>
+        <p:spPr>
+          <a:xfrm>
+            <a:off x="548640" y="1371600"/>
+            <a:ext cx="3566160" cy="4069080"/>
+          </a:xfrm>
+          <a:prstGeom prst="roundRect">
+            <a:avLst>
+              <a:gd name="adj" fmla="val 3077"/>
             </a:avLst>
           </a:prstGeom>
           <a:solidFill>
@@ -21977,14 +24934,14 @@
       </p:sp>
       <p:sp>
         <p:nvSpPr>
-          <p:cNvPr id="5" name="h"/>
+          <p:cNvPr id="5" name="confirm title"/>
           <p:cNvSpPr txBox="1"/>
           <p:nvPr/>
         </p:nvSpPr>
         <p:spPr>
           <a:xfrm>
-            <a:off x="777240" y="1508760"/>
-            <a:ext cx="4937760" cy="411480"/>
+            <a:off x="777240" y="1463040"/>
+            <a:ext cx="3108960" cy="457200"/>
           </a:xfrm>
           <a:prstGeom prst="rect">
             <a:avLst/>
@@ -22000,7 +24957,7 @@
               <a:buNone/>
             </a:pPr>
             <a:r>
-              <a:rPr lang="en-US" sz="1800" b="1" dirty="0">
+              <a:rPr lang="en-US" sz="1700" b="1" dirty="0">
                 <a:solidFill>
                   <a:srgbClr val="0E3B3F"/>
                 </a:solidFill>
@@ -22008,22 +24965,85 @@
                 <a:ea typeface="Cambria" pitchFamily="34" charset="-122"/>
                 <a:cs typeface="Cambria" pitchFamily="34" charset="-120"/>
               </a:rPr>
-              <a:t>Workload report (live)</a:t>
-            </a:r>
-            <a:endParaRPr lang="en-US" sz="1800" dirty="0"/>
-          </a:p>
-        </p:txBody>
-      </p:sp>
-      <p:sp>
-        <p:nvSpPr>
-          <p:cNvPr id="6" name="bullets"/>
+              <a:t>One-click confirm</a:t>
+            </a:r>
+            <a:endParaRPr lang="en-US" sz="1700" dirty="0"/>
+          </a:p>
+        </p:txBody>
+      </p:sp>
+      <p:sp>
+        <p:nvSpPr>
+          <p:cNvPr id="6" name="tag"/>
+          <p:cNvSpPr/>
+          <p:nvPr/>
+        </p:nvSpPr>
+        <p:spPr>
+          <a:xfrm>
+            <a:off x="777240" y="1965960"/>
+            <a:ext cx="1280160" cy="274320"/>
+          </a:xfrm>
+          <a:prstGeom prst="roundRect">
+            <a:avLst>
+              <a:gd name="adj" fmla="val 50000"/>
+            </a:avLst>
+          </a:prstGeom>
+          <a:solidFill>
+            <a:srgbClr val="14746F"/>
+          </a:solidFill>
+          <a:ln w="12700">
+            <a:solidFill>
+              <a:srgbClr val="14746F"/>
+            </a:solidFill>
+            <a:prstDash val="solid"/>
+          </a:ln>
+        </p:spPr>
+      </p:sp>
+      <p:sp>
+        <p:nvSpPr>
+          <p:cNvPr id="7" name="tag text"/>
           <p:cNvSpPr txBox="1"/>
           <p:nvPr/>
         </p:nvSpPr>
         <p:spPr>
           <a:xfrm>
-            <a:off x="777240" y="2011680"/>
-            <a:ext cx="4937760" cy="2377440"/>
+            <a:off x="777240" y="1965960"/>
+            <a:ext cx="1280160" cy="274320"/>
+          </a:xfrm>
+          <a:prstGeom prst="rect">
+            <a:avLst/>
+          </a:prstGeom>
+          <a:noFill/>
+          <a:ln/>
+        </p:spPr>
+        <p:txBody>
+          <a:bodyPr wrap="square" lIns="0" tIns="0" rIns="0" bIns="0" rtlCol="0" anchor="ctr"/>
+          <a:lstStyle/>
+          <a:p>
+            <a:pPr algn="ctr" indent="0" marL="0">
+              <a:buNone/>
+            </a:pPr>
+            <a:r>
+              <a:rPr lang="en-US" sz="1100" b="1" dirty="0">
+                <a:solidFill>
+                  <a:srgbClr val="FFFFFF"/>
+                </a:solidFill>
+              </a:rPr>
+              <a:t>on</a:t>
+            </a:r>
+            <a:endParaRPr lang="en-US" sz="1100" dirty="0"/>
+          </a:p>
+        </p:txBody>
+      </p:sp>
+      <p:sp>
+        <p:nvSpPr>
+          <p:cNvPr id="8" name="bullets"/>
+          <p:cNvSpPr txBox="1"/>
+          <p:nvPr/>
+        </p:nvSpPr>
+        <p:spPr>
+          <a:xfrm>
+            <a:off x="777240" y="2423160"/>
+            <a:ext cx="3154680" cy="2926080"/>
           </a:xfrm>
           <a:prstGeom prst="rect">
             <a:avLst/>
@@ -22043,14 +25063,14 @@
               <a:buChar char="•"/>
             </a:pPr>
             <a:r>
-              <a:rPr lang="en-US" sz="1500" dirty="0">
+              <a:rPr lang="en-US" sz="1250" dirty="0">
                 <a:solidFill>
                   <a:srgbClr val="17292B"/>
                 </a:solidFill>
               </a:rPr>
-              <a:t>Reads reviewer confirmations and dismissals per rule</a:t>
-            </a:r>
-            <a:endParaRPr lang="en-US" sz="1500" dirty="0"/>
+              <a:t>Confirming agrees with the engine, so it needs no typed reason; dismissing still does</a:t>
+            </a:r>
+            <a:endParaRPr lang="en-US" sz="1250" dirty="0"/>
           </a:p>
           <a:p>
             <a:pPr marL="203200" indent="-203200">
@@ -22061,14 +25081,14 @@
               <a:buChar char="•"/>
             </a:pPr>
             <a:r>
-              <a:rPr lang="en-US" sz="1500" dirty="0">
+              <a:rPr lang="en-US" sz="1250" dirty="0">
                 <a:solidFill>
                   <a:srgbClr val="17292B"/>
                 </a:solidFill>
               </a:rPr>
-              <a:t>Lists rules reviewers keep overriding: candidates to retune</a:t>
-            </a:r>
-            <a:endParaRPr lang="en-US" sz="1500" dirty="0"/>
+              <a:t>Confirm the issue, or Confirm all N findings in two clicks, or press c twice</a:t>
+            </a:r>
+            <a:endParaRPr lang="en-US" sz="1250" dirty="0"/>
           </a:p>
           <a:p>
             <a:pPr marL="203200" indent="-203200">
@@ -22079,14 +25099,14 @@
               <a:buChar char="•"/>
             </a:pPr>
             <a:r>
-              <a:rPr lang="en-US" sz="1500" dirty="0">
+              <a:rPr lang="en-US" sz="1250" dirty="0">
                 <a:solidFill>
                   <a:srgbClr val="17292B"/>
                 </a:solidFill>
               </a:rPr>
-              <a:t>Lists rules almost always upheld: candidates for light review, with a bounded price</a:t>
-            </a:r>
-            <a:endParaRPr lang="en-US" sz="1500" dirty="0"/>
+              <a:t>When the last finding is decided the console opens the next claim</a:t>
+            </a:r>
+            <a:endParaRPr lang="en-US" sz="1250" dirty="0"/>
           </a:p>
           <a:p>
             <a:pPr marL="203200" indent="-203200">
@@ -22097,67 +25117,31 @@
               <a:buChar char="•"/>
             </a:pPr>
             <a:r>
-              <a:rPr lang="en-US" sz="1500" dirty="0">
+              <a:rPr lang="en-US" sz="1250" dirty="0">
                 <a:solidFill>
                   <a:srgbClr val="17292B"/>
                 </a:solidFill>
               </a:rPr>
-              <a:t>Read-only. It changes nothing by itself</a:t>
-            </a:r>
-            <a:endParaRPr lang="en-US" sz="1500" dirty="0"/>
-          </a:p>
-        </p:txBody>
-      </p:sp>
-      <p:sp>
-        <p:nvSpPr>
-          <p:cNvPr id="7" name="note"/>
-          <p:cNvSpPr txBox="1"/>
-          <p:nvPr/>
-        </p:nvSpPr>
-        <p:spPr>
-          <a:xfrm>
-            <a:off x="777240" y="4572000"/>
-            <a:ext cx="4937760" cy="1188720"/>
-          </a:xfrm>
-          <a:prstGeom prst="rect">
-            <a:avLst/>
-          </a:prstGeom>
-          <a:noFill/>
-          <a:ln/>
-        </p:spPr>
-        <p:txBody>
-          <a:bodyPr wrap="square" lIns="0" tIns="0" rIns="0" bIns="0" rtlCol="0" anchor="t"/>
-          <a:lstStyle/>
-          <a:p>
-            <a:pPr indent="0" marL="0">
-              <a:buNone/>
-            </a:pPr>
-            <a:r>
-              <a:rPr lang="en-US" sz="1300" i="1" dirty="0">
-                <a:solidFill>
-                  <a:srgbClr val="5C7173"/>
-                </a:solidFill>
-              </a:rPr>
-              <a:t>In simulation both bad rules were found in 20 of 20 histories after 5,000 decisions, with 0 false alarms.</a:t>
-            </a:r>
-            <a:endParaRPr lang="en-US" sz="1300" dirty="0"/>
-          </a:p>
-        </p:txBody>
-      </p:sp>
-      <p:sp>
-        <p:nvSpPr>
-          <p:cNvPr id="8" name="right"/>
+              <a:t>Same record in the review log and the security log as before</a:t>
+            </a:r>
+            <a:endParaRPr lang="en-US" sz="1250" dirty="0"/>
+          </a:p>
+        </p:txBody>
+      </p:sp>
+      <p:sp>
+        <p:nvSpPr>
+          <p:cNvPr id="9" name="confirm card 2"/>
           <p:cNvSpPr/>
           <p:nvPr/>
         </p:nvSpPr>
         <p:spPr>
           <a:xfrm>
-            <a:off x="6217920" y="1417320"/>
-            <a:ext cx="5394960" cy="4572000"/>
+            <a:off x="4297680" y="1371600"/>
+            <a:ext cx="3566160" cy="4069080"/>
           </a:xfrm>
           <a:prstGeom prst="roundRect">
             <a:avLst>
-              <a:gd name="adj" fmla="val 2400"/>
+              <a:gd name="adj" fmla="val 3077"/>
             </a:avLst>
           </a:prstGeom>
           <a:solidFill>
@@ -22173,14 +25157,14 @@
       </p:sp>
       <p:sp>
         <p:nvSpPr>
-          <p:cNvPr id="9" name="h"/>
+          <p:cNvPr id="10" name="confirm title"/>
           <p:cNvSpPr txBox="1"/>
           <p:nvPr/>
         </p:nvSpPr>
         <p:spPr>
           <a:xfrm>
-            <a:off x="6446520" y="1508760"/>
-            <a:ext cx="4937760" cy="411480"/>
+            <a:off x="4526280" y="1463040"/>
+            <a:ext cx="3108960" cy="457200"/>
           </a:xfrm>
           <a:prstGeom prst="rect">
             <a:avLst/>
@@ -22196,7 +25180,7 @@
               <a:buNone/>
             </a:pPr>
             <a:r>
-              <a:rPr lang="en-US" sz="1800" b="1" dirty="0">
+              <a:rPr lang="en-US" sz="1700" b="1" dirty="0">
                 <a:solidFill>
                   <a:srgbClr val="0E3B3F"/>
                 </a:solidFill>
@@ -22204,6 +25188,741 @@
                 <a:ea typeface="Cambria" pitchFamily="34" charset="-122"/>
                 <a:cs typeface="Cambria" pitchFamily="34" charset="-120"/>
               </a:rPr>
+              <a:t>Bulk confirm</a:t>
+            </a:r>
+            <a:endParaRPr lang="en-US" sz="1700" dirty="0"/>
+          </a:p>
+        </p:txBody>
+      </p:sp>
+      <p:sp>
+        <p:nvSpPr>
+          <p:cNvPr id="11" name="tag"/>
+          <p:cNvSpPr/>
+          <p:nvPr/>
+        </p:nvSpPr>
+        <p:spPr>
+          <a:xfrm>
+            <a:off x="4526280" y="1965960"/>
+            <a:ext cx="1280160" cy="274320"/>
+          </a:xfrm>
+          <a:prstGeom prst="roundRect">
+            <a:avLst>
+              <a:gd name="adj" fmla="val 50000"/>
+            </a:avLst>
+          </a:prstGeom>
+          <a:solidFill>
+            <a:srgbClr val="D5E1DF"/>
+          </a:solidFill>
+          <a:ln w="12700">
+            <a:solidFill>
+              <a:srgbClr val="D5E1DF"/>
+            </a:solidFill>
+            <a:prstDash val="solid"/>
+          </a:ln>
+        </p:spPr>
+      </p:sp>
+      <p:sp>
+        <p:nvSpPr>
+          <p:cNvPr id="12" name="tag text"/>
+          <p:cNvSpPr txBox="1"/>
+          <p:nvPr/>
+        </p:nvSpPr>
+        <p:spPr>
+          <a:xfrm>
+            <a:off x="4526280" y="1965960"/>
+            <a:ext cx="1280160" cy="274320"/>
+          </a:xfrm>
+          <a:prstGeom prst="rect">
+            <a:avLst/>
+          </a:prstGeom>
+          <a:noFill/>
+          <a:ln/>
+        </p:spPr>
+        <p:txBody>
+          <a:bodyPr wrap="square" lIns="0" tIns="0" rIns="0" bIns="0" rtlCol="0" anchor="ctr"/>
+          <a:lstStyle/>
+          <a:p>
+            <a:pPr algn="ctr" indent="0" marL="0">
+              <a:buNone/>
+            </a:pPr>
+            <a:r>
+              <a:rPr lang="en-US" sz="1100" b="1" dirty="0">
+                <a:solidFill>
+                  <a:srgbClr val="17292B"/>
+                </a:solidFill>
+              </a:rPr>
+              <a:t>off by default</a:t>
+            </a:r>
+            <a:endParaRPr lang="en-US" sz="1100" dirty="0"/>
+          </a:p>
+        </p:txBody>
+      </p:sp>
+      <p:sp>
+        <p:nvSpPr>
+          <p:cNvPr id="13" name="bullets"/>
+          <p:cNvSpPr txBox="1"/>
+          <p:nvPr/>
+        </p:nvSpPr>
+        <p:spPr>
+          <a:xfrm>
+            <a:off x="4526280" y="2423160"/>
+            <a:ext cx="3154680" cy="2926080"/>
+          </a:xfrm>
+          <a:prstGeom prst="rect">
+            <a:avLst/>
+          </a:prstGeom>
+          <a:noFill/>
+          <a:ln/>
+        </p:spPr>
+        <p:txBody>
+          <a:bodyPr wrap="square" lIns="0" tIns="0" rIns="0" bIns="0" rtlCol="0" anchor="t"/>
+          <a:lstStyle/>
+          <a:p>
+            <a:pPr marL="203200" indent="-203200">
+              <a:spcAft>
+                <a:spcPts val="600"/>
+              </a:spcAft>
+              <a:buSzPct val="100000"/>
+              <a:buChar char="•"/>
+            </a:pPr>
+            <a:r>
+              <a:rPr lang="en-US" sz="1250" dirty="0">
+                <a:solidFill>
+                  <a:srgbClr val="17292B"/>
+                </a:solidFill>
+              </a:rPr>
+              <a:t>Only for rules whose findings reviewers almost always uphold: an exact 95% lower bound of the upheld rate above a setting, from at least 20 decisions by at least 3 reviewers</a:t>
+            </a:r>
+            <a:endParaRPr lang="en-US" sz="1250" dirty="0"/>
+          </a:p>
+          <a:p>
+            <a:pPr marL="203200" indent="-203200">
+              <a:spcAft>
+                <a:spcPts val="600"/>
+              </a:spcAft>
+              <a:buSzPct val="100000"/>
+              <a:buChar char="•"/>
+            </a:pPr>
+            <a:r>
+              <a:rPr lang="en-US" sz="1250" dirty="0">
+                <a:solidFill>
+                  <a:srgbClr val="17292B"/>
+                </a:solidFill>
+              </a:rPr>
+              <a:t>A By rule view: open the list, look, confirm all in two clicks</a:t>
+            </a:r>
+            <a:endParaRPr lang="en-US" sz="1250" dirty="0"/>
+          </a:p>
+          <a:p>
+            <a:pPr marL="203200" indent="-203200">
+              <a:spcAft>
+                <a:spcPts val="600"/>
+              </a:spcAft>
+              <a:buSzPct val="100000"/>
+              <a:buChar char="•"/>
+            </a:pPr>
+            <a:r>
+              <a:rPr lang="en-US" sz="1250" dirty="0">
+                <a:solidFill>
+                  <a:srgbClr val="17292B"/>
+                </a:solidFill>
+              </a:rPr>
+              <a:t>Only confirm is possible</a:t>
+            </a:r>
+            <a:endParaRPr lang="en-US" sz="1250" dirty="0"/>
+          </a:p>
+        </p:txBody>
+      </p:sp>
+      <p:sp>
+        <p:nvSpPr>
+          <p:cNvPr id="14" name="confirm card 3"/>
+          <p:cNvSpPr/>
+          <p:nvPr/>
+        </p:nvSpPr>
+        <p:spPr>
+          <a:xfrm>
+            <a:off x="8046720" y="1371600"/>
+            <a:ext cx="3566160" cy="4069080"/>
+          </a:xfrm>
+          <a:prstGeom prst="roundRect">
+            <a:avLst>
+              <a:gd name="adj" fmla="val 3077"/>
+            </a:avLst>
+          </a:prstGeom>
+          <a:solidFill>
+            <a:srgbClr val="F2F6F5"/>
+          </a:solidFill>
+          <a:ln w="12700">
+            <a:solidFill>
+              <a:srgbClr val="F2F6F5"/>
+            </a:solidFill>
+            <a:prstDash val="solid"/>
+          </a:ln>
+        </p:spPr>
+      </p:sp>
+      <p:sp>
+        <p:nvSpPr>
+          <p:cNvPr id="15" name="confirm title"/>
+          <p:cNvSpPr txBox="1"/>
+          <p:nvPr/>
+        </p:nvSpPr>
+        <p:spPr>
+          <a:xfrm>
+            <a:off x="8275320" y="1463040"/>
+            <a:ext cx="3108960" cy="457200"/>
+          </a:xfrm>
+          <a:prstGeom prst="rect">
+            <a:avLst/>
+          </a:prstGeom>
+          <a:noFill/>
+          <a:ln/>
+        </p:spPr>
+        <p:txBody>
+          <a:bodyPr wrap="square" lIns="0" tIns="0" rIns="0" bIns="0" rtlCol="0" anchor="ctr"/>
+          <a:lstStyle/>
+          <a:p>
+            <a:pPr indent="0" marL="0">
+              <a:buNone/>
+            </a:pPr>
+            <a:r>
+              <a:rPr lang="en-US" sz="1700" b="1" dirty="0">
+                <a:solidFill>
+                  <a:srgbClr val="0E3B3F"/>
+                </a:solidFill>
+                <a:latin typeface="Cambria" pitchFamily="34" charset="0"/>
+                <a:ea typeface="Cambria" pitchFamily="34" charset="-122"/>
+                <a:cs typeface="Cambria" pitchFamily="34" charset="-120"/>
+              </a:rPr>
+              <a:t>Guards, all on the server</a:t>
+            </a:r>
+            <a:endParaRPr lang="en-US" sz="1700" dirty="0"/>
+          </a:p>
+        </p:txBody>
+      </p:sp>
+      <p:sp>
+        <p:nvSpPr>
+          <p:cNvPr id="16" name="bullets"/>
+          <p:cNvSpPr txBox="1"/>
+          <p:nvPr/>
+        </p:nvSpPr>
+        <p:spPr>
+          <a:xfrm>
+            <a:off x="8275320" y="2011680"/>
+            <a:ext cx="3154680" cy="2926080"/>
+          </a:xfrm>
+          <a:prstGeom prst="rect">
+            <a:avLst/>
+          </a:prstGeom>
+          <a:noFill/>
+          <a:ln/>
+        </p:spPr>
+        <p:txBody>
+          <a:bodyPr wrap="square" lIns="0" tIns="0" rIns="0" bIns="0" rtlCol="0" anchor="t"/>
+          <a:lstStyle/>
+          <a:p>
+            <a:pPr marL="203200" indent="-203200">
+              <a:spcAft>
+                <a:spcPts val="600"/>
+              </a:spcAft>
+              <a:buSzPct val="100000"/>
+              <a:buChar char="•"/>
+            </a:pPr>
+            <a:r>
+              <a:rPr lang="en-US" sz="1250" dirty="0">
+                <a:solidFill>
+                  <a:srgbClr val="17292B"/>
+                </a:solidFill>
+              </a:rPr>
+              <a:t>The rule must qualify at that moment, checked on every request</a:t>
+            </a:r>
+            <a:endParaRPr lang="en-US" sz="1250" dirty="0"/>
+          </a:p>
+          <a:p>
+            <a:pPr marL="203200" indent="-203200">
+              <a:spcAft>
+                <a:spcPts val="600"/>
+              </a:spcAft>
+              <a:buSzPct val="100000"/>
+              <a:buChar char="•"/>
+            </a:pPr>
+            <a:r>
+              <a:rPr lang="en-US" sz="1250" dirty="0">
+                <a:solidFill>
+                  <a:srgbClr val="17292B"/>
+                </a:solidFill>
+              </a:rPr>
+              <a:t>Each claim goes through the normal decision path: lease, clearance, two-senior sign-off, masking, both logs</a:t>
+            </a:r>
+            <a:endParaRPr lang="en-US" sz="1250" dirty="0"/>
+          </a:p>
+          <a:p>
+            <a:pPr marL="203200" indent="-203200">
+              <a:spcAft>
+                <a:spcPts val="600"/>
+              </a:spcAft>
+              <a:buSzPct val="100000"/>
+              <a:buChar char="•"/>
+            </a:pPr>
+            <a:r>
+              <a:rPr lang="en-US" sz="1250" dirty="0">
+                <a:solidFill>
+                  <a:srgbClr val="17292B"/>
+                </a:solidFill>
+              </a:rPr>
+              <a:t>A random share is left for a full review</a:t>
+            </a:r>
+            <a:endParaRPr lang="en-US" sz="1250" dirty="0"/>
+          </a:p>
+          <a:p>
+            <a:pPr marL="203200" indent="-203200">
+              <a:spcAft>
+                <a:spcPts val="600"/>
+              </a:spcAft>
+              <a:buSzPct val="100000"/>
+              <a:buChar char="•"/>
+            </a:pPr>
+            <a:r>
+              <a:rPr lang="en-US" sz="1250" dirty="0">
+                <a:solidFill>
+                  <a:srgbClr val="17292B"/>
+                </a:solidFill>
+              </a:rPr>
+              <a:t>Bulk decisions never count as evidence, so a rubber stamp cannot keep a rule eligible</a:t>
+            </a:r>
+            <a:endParaRPr lang="en-US" sz="1250" dirty="0"/>
+          </a:p>
+        </p:txBody>
+      </p:sp>
+      <p:sp>
+        <p:nvSpPr>
+          <p:cNvPr id="17" name="confirm limit"/>
+          <p:cNvSpPr/>
+          <p:nvPr/>
+        </p:nvSpPr>
+        <p:spPr>
+          <a:xfrm>
+            <a:off x="548640" y="5532120"/>
+            <a:ext cx="11064240" cy="594360"/>
+          </a:xfrm>
+          <a:prstGeom prst="roundRect">
+            <a:avLst>
+              <a:gd name="adj" fmla="val 18462"/>
+            </a:avLst>
+          </a:prstGeom>
+          <a:solidFill>
+            <a:srgbClr val="FFF1DB"/>
+          </a:solidFill>
+          <a:ln w="12700">
+            <a:solidFill>
+              <a:srgbClr val="FFF1DB"/>
+            </a:solidFill>
+            <a:prstDash val="solid"/>
+          </a:ln>
+        </p:spPr>
+      </p:sp>
+      <p:sp>
+        <p:nvSpPr>
+          <p:cNvPr id="18" name="confirm limit text"/>
+          <p:cNvSpPr txBox="1"/>
+          <p:nvPr/>
+        </p:nvSpPr>
+        <p:spPr>
+          <a:xfrm>
+            <a:off x="731520" y="5532120"/>
+            <a:ext cx="10698480" cy="594360"/>
+          </a:xfrm>
+          <a:prstGeom prst="rect">
+            <a:avLst/>
+          </a:prstGeom>
+          <a:noFill/>
+          <a:ln/>
+        </p:spPr>
+        <p:txBody>
+          <a:bodyPr wrap="square" lIns="0" tIns="0" rIns="0" bIns="0" rtlCol="0" anchor="ctr"/>
+          <a:lstStyle/>
+          <a:p>
+            <a:pPr indent="0" marL="0">
+              <a:buNone/>
+            </a:pPr>
+            <a:r>
+              <a:rPr lang="en-US" sz="1200" dirty="0">
+                <a:solidFill>
+                  <a:srgbClr val="17292B"/>
+                </a:solidFill>
+              </a:rPr>
+              <a:t>Limits: the 'look at the list first' step is enforced by the screen only. The evidence for the reliable rules came from simulated reviewers. One administrator can switch these on, logged but without a second approval, and there is no automatic brake.</a:t>
+            </a:r>
+            <a:endParaRPr lang="en-US" sz="1200" dirty="0"/>
+          </a:p>
+        </p:txBody>
+      </p:sp>
+      <p:sp>
+        <p:nvSpPr>
+          <p:cNvPr id="25" name="Slide Number Placeholder 0"/>
+          <p:cNvSpPr>
+            <a:spLocks noGrp="1"/>
+          </p:cNvSpPr>
+          <p:nvPr>
+            <p:ph type="sldNum" sz="quarter" idx="4294967295"/>
+          </p:nvPr>
+        </p:nvSpPr>
+        <p:spPr>
+          <a:xfrm>
+            <a:off x="11247120" y="6400800"/>
+            <a:ext cx="548640" cy="274320"/>
+          </a:xfrm>
+          <a:prstGeom prst="rect">
+            <a:avLst/>
+          </a:prstGeom>
+          <a:extLst>
+            <a:ext uri="{C572A759-6A51-4108-AA02-DFA0A04FC94B}">
+              <ma14:wrappingTextBoxFlag xmlns:ma14="http://schemas.microsoft.com/office/mac/drawingml/2011/main" val="0"/>
+            </a:ext>
+          </a:extLst>
+        </p:spPr>
+        <p:txBody>
+          <a:bodyPr/>
+          <a:lstStyle>
+            <a:lvl1pPr>
+              <a:defRPr sz="1000">
+                <a:solidFill>
+                  <a:srgbClr val="5C7173"/>
+                </a:solidFill>
+              </a:defRPr>
+            </a:lvl1pPr>
+          </a:lstStyle>
+          <a:p>
+            <a:pPr algn="l"/>
+            <a:fld id="{F7021451-1387-4CA6-816F-3879F97B5CBC}" type="slidenum">
+              <a:rPr b="0" lang="en-US"/>
+              <a:t>26</a:t>
+            </a:fld>
+            <a:endParaRPr lang="en-US"/>
+          </a:p>
+        </p:txBody>
+      </p:sp>
+    </p:spTree>
+  </p:cSld>
+  <p:clrMapOvr>
+    <a:masterClrMapping/>
+  </p:clrMapOvr>
+</p:sld>
+</file>
+
+<file path=ppt/slides/slide27.xml><?xml version="1.0" encoding="utf-8"?>
+<p:sld xmlns:a="http://schemas.openxmlformats.org/drawingml/2006/main" xmlns:r="http://schemas.openxmlformats.org/officeDocument/2006/relationships" xmlns:p="http://schemas.openxmlformats.org/presentationml/2006/main">
+  <p:cSld name="Slide 27">
+    <p:spTree>
+      <p:nvGrpSpPr>
+        <p:cNvPr id="1" name=""/>
+        <p:cNvGrpSpPr/>
+        <p:nvPr/>
+      </p:nvGrpSpPr>
+      <p:grpSpPr>
+        <a:xfrm>
+          <a:off x="0" y="0"/>
+          <a:ext cx="0" cy="0"/>
+          <a:chOff x="0" y="0"/>
+          <a:chExt cx="0" cy="0"/>
+        </a:xfrm>
+      </p:grpSpPr>
+      <p:sp>
+        <p:nvSpPr>
+          <p:cNvPr id="2" name="Text 0"/>
+          <p:cNvSpPr/>
+          <p:nvPr>
+            <p:ph idx="100" type="title" hasCustomPrompt="1"/>
+          </p:nvPr>
+        </p:nvSpPr>
+        <p:spPr>
+          <a:xfrm>
+            <a:off x="548640" y="365760"/>
+            <a:ext cx="11064240" cy="822960"/>
+          </a:xfrm>
+          <a:prstGeom prst="rect">
+            <a:avLst/>
+          </a:prstGeom>
+          <a:noFill/>
+          <a:ln/>
+        </p:spPr>
+        <p:txBody>
+          <a:bodyPr wrap="square" lIns="0" tIns="0" rIns="0" bIns="0" rtlCol="0" anchor="ctr"/>
+          <a:lstStyle/>
+          <a:p>
+            <a:pPr indent="0" marL="0">
+              <a:buNone/>
+            </a:pPr>
+            <a:r>
+              <a:rPr lang="en-US" sz="3200" b="1" dirty="0">
+                <a:solidFill>
+                  <a:srgbClr val="0E3B3F"/>
+                </a:solidFill>
+                <a:latin typeface="Cambria" pitchFamily="34" charset="0"/>
+                <a:ea typeface="Cambria" pitchFamily="34" charset="-122"/>
+                <a:cs typeface="Cambria" pitchFamily="34" charset="-120"/>
+              </a:rPr>
+              <a:t>Learning from feedback, and a model we set aside</a:t>
+            </a:r>
+            <a:endParaRPr lang="en-US" sz="3200" dirty="0"/>
+          </a:p>
+        </p:txBody>
+      </p:sp>
+      <p:sp>
+        <p:nvSpPr>
+          <p:cNvPr id="4" name="left"/>
+          <p:cNvSpPr/>
+          <p:nvPr/>
+        </p:nvSpPr>
+        <p:spPr>
+          <a:xfrm>
+            <a:off x="548640" y="1417320"/>
+            <a:ext cx="5394960" cy="4572000"/>
+          </a:xfrm>
+          <a:prstGeom prst="roundRect">
+            <a:avLst>
+              <a:gd name="adj" fmla="val 2400"/>
+            </a:avLst>
+          </a:prstGeom>
+          <a:solidFill>
+            <a:srgbClr val="F2F6F5"/>
+          </a:solidFill>
+          <a:ln w="12700">
+            <a:solidFill>
+              <a:srgbClr val="F2F6F5"/>
+            </a:solidFill>
+            <a:prstDash val="solid"/>
+          </a:ln>
+        </p:spPr>
+      </p:sp>
+      <p:sp>
+        <p:nvSpPr>
+          <p:cNvPr id="5" name="h"/>
+          <p:cNvSpPr txBox="1"/>
+          <p:nvPr/>
+        </p:nvSpPr>
+        <p:spPr>
+          <a:xfrm>
+            <a:off x="777240" y="1508760"/>
+            <a:ext cx="4937760" cy="411480"/>
+          </a:xfrm>
+          <a:prstGeom prst="rect">
+            <a:avLst/>
+          </a:prstGeom>
+          <a:noFill/>
+          <a:ln/>
+        </p:spPr>
+        <p:txBody>
+          <a:bodyPr wrap="square" lIns="0" tIns="0" rIns="0" bIns="0" rtlCol="0" anchor="ctr"/>
+          <a:lstStyle/>
+          <a:p>
+            <a:pPr indent="0" marL="0">
+              <a:buNone/>
+            </a:pPr>
+            <a:r>
+              <a:rPr lang="en-US" sz="1800" b="1" dirty="0">
+                <a:solidFill>
+                  <a:srgbClr val="0E3B3F"/>
+                </a:solidFill>
+                <a:latin typeface="Cambria" pitchFamily="34" charset="0"/>
+                <a:ea typeface="Cambria" pitchFamily="34" charset="-122"/>
+                <a:cs typeface="Cambria" pitchFamily="34" charset="-120"/>
+              </a:rPr>
+              <a:t>Workload report (live)</a:t>
+            </a:r>
+            <a:endParaRPr lang="en-US" sz="1800" dirty="0"/>
+          </a:p>
+        </p:txBody>
+      </p:sp>
+      <p:sp>
+        <p:nvSpPr>
+          <p:cNvPr id="6" name="bullets"/>
+          <p:cNvSpPr txBox="1"/>
+          <p:nvPr/>
+        </p:nvSpPr>
+        <p:spPr>
+          <a:xfrm>
+            <a:off x="777240" y="2011680"/>
+            <a:ext cx="4937760" cy="2377440"/>
+          </a:xfrm>
+          <a:prstGeom prst="rect">
+            <a:avLst/>
+          </a:prstGeom>
+          <a:noFill/>
+          <a:ln/>
+        </p:spPr>
+        <p:txBody>
+          <a:bodyPr wrap="square" lIns="0" tIns="0" rIns="0" bIns="0" rtlCol="0" anchor="t"/>
+          <a:lstStyle/>
+          <a:p>
+            <a:pPr marL="203200" indent="-203200">
+              <a:spcAft>
+                <a:spcPts val="600"/>
+              </a:spcAft>
+              <a:buSzPct val="100000"/>
+              <a:buChar char="•"/>
+            </a:pPr>
+            <a:r>
+              <a:rPr lang="en-US" sz="1500" dirty="0">
+                <a:solidFill>
+                  <a:srgbClr val="17292B"/>
+                </a:solidFill>
+              </a:rPr>
+              <a:t>Reads reviewer confirmations and dismissals per rule</a:t>
+            </a:r>
+            <a:endParaRPr lang="en-US" sz="1500" dirty="0"/>
+          </a:p>
+          <a:p>
+            <a:pPr marL="203200" indent="-203200">
+              <a:spcAft>
+                <a:spcPts val="600"/>
+              </a:spcAft>
+              <a:buSzPct val="100000"/>
+              <a:buChar char="•"/>
+            </a:pPr>
+            <a:r>
+              <a:rPr lang="en-US" sz="1500" dirty="0">
+                <a:solidFill>
+                  <a:srgbClr val="17292B"/>
+                </a:solidFill>
+              </a:rPr>
+              <a:t>Lists rules reviewers keep overriding: candidates to retune</a:t>
+            </a:r>
+            <a:endParaRPr lang="en-US" sz="1500" dirty="0"/>
+          </a:p>
+          <a:p>
+            <a:pPr marL="203200" indent="-203200">
+              <a:spcAft>
+                <a:spcPts val="600"/>
+              </a:spcAft>
+              <a:buSzPct val="100000"/>
+              <a:buChar char="•"/>
+            </a:pPr>
+            <a:r>
+              <a:rPr lang="en-US" sz="1500" dirty="0">
+                <a:solidFill>
+                  <a:srgbClr val="17292B"/>
+                </a:solidFill>
+              </a:rPr>
+              <a:t>Lists rules almost always upheld: candidates for light review, with a bounded price</a:t>
+            </a:r>
+            <a:endParaRPr lang="en-US" sz="1500" dirty="0"/>
+          </a:p>
+          <a:p>
+            <a:pPr marL="203200" indent="-203200">
+              <a:spcAft>
+                <a:spcPts val="600"/>
+              </a:spcAft>
+              <a:buSzPct val="100000"/>
+              <a:buChar char="•"/>
+            </a:pPr>
+            <a:r>
+              <a:rPr lang="en-US" sz="1500" dirty="0">
+                <a:solidFill>
+                  <a:srgbClr val="17292B"/>
+                </a:solidFill>
+              </a:rPr>
+              <a:t>Read-only. It changes nothing by itself</a:t>
+            </a:r>
+            <a:endParaRPr lang="en-US" sz="1500" dirty="0"/>
+          </a:p>
+        </p:txBody>
+      </p:sp>
+      <p:sp>
+        <p:nvSpPr>
+          <p:cNvPr id="7" name="note"/>
+          <p:cNvSpPr txBox="1"/>
+          <p:nvPr/>
+        </p:nvSpPr>
+        <p:spPr>
+          <a:xfrm>
+            <a:off x="777240" y="4572000"/>
+            <a:ext cx="4937760" cy="1188720"/>
+          </a:xfrm>
+          <a:prstGeom prst="rect">
+            <a:avLst/>
+          </a:prstGeom>
+          <a:noFill/>
+          <a:ln/>
+        </p:spPr>
+        <p:txBody>
+          <a:bodyPr wrap="square" lIns="0" tIns="0" rIns="0" bIns="0" rtlCol="0" anchor="t"/>
+          <a:lstStyle/>
+          <a:p>
+            <a:pPr indent="0" marL="0">
+              <a:buNone/>
+            </a:pPr>
+            <a:r>
+              <a:rPr lang="en-US" sz="1300" i="1" dirty="0">
+                <a:solidFill>
+                  <a:srgbClr val="5C7173"/>
+                </a:solidFill>
+              </a:rPr>
+              <a:t>In simulation both bad rules were found in 20 of 20 histories after 5,000 decisions, with 0 false alarms.</a:t>
+            </a:r>
+            <a:endParaRPr lang="en-US" sz="1300" dirty="0"/>
+          </a:p>
+        </p:txBody>
+      </p:sp>
+      <p:sp>
+        <p:nvSpPr>
+          <p:cNvPr id="8" name="right"/>
+          <p:cNvSpPr/>
+          <p:nvPr/>
+        </p:nvSpPr>
+        <p:spPr>
+          <a:xfrm>
+            <a:off x="6217920" y="1417320"/>
+            <a:ext cx="5394960" cy="4572000"/>
+          </a:xfrm>
+          <a:prstGeom prst="roundRect">
+            <a:avLst>
+              <a:gd name="adj" fmla="val 2400"/>
+            </a:avLst>
+          </a:prstGeom>
+          <a:solidFill>
+            <a:srgbClr val="F2F6F5"/>
+          </a:solidFill>
+          <a:ln w="12700">
+            <a:solidFill>
+              <a:srgbClr val="F2F6F5"/>
+            </a:solidFill>
+            <a:prstDash val="solid"/>
+          </a:ln>
+        </p:spPr>
+      </p:sp>
+      <p:sp>
+        <p:nvSpPr>
+          <p:cNvPr id="9" name="h"/>
+          <p:cNvSpPr txBox="1"/>
+          <p:nvPr/>
+        </p:nvSpPr>
+        <p:spPr>
+          <a:xfrm>
+            <a:off x="6446520" y="1508760"/>
+            <a:ext cx="4937760" cy="411480"/>
+          </a:xfrm>
+          <a:prstGeom prst="rect">
+            <a:avLst/>
+          </a:prstGeom>
+          <a:noFill/>
+          <a:ln/>
+        </p:spPr>
+        <p:txBody>
+          <a:bodyPr wrap="square" lIns="0" tIns="0" rIns="0" bIns="0" rtlCol="0" anchor="ctr"/>
+          <a:lstStyle/>
+          <a:p>
+            <a:pPr indent="0" marL="0">
+              <a:buNone/>
+            </a:pPr>
+            <a:r>
+              <a:rPr lang="en-US" sz="1800" b="1" dirty="0">
+                <a:solidFill>
+                  <a:srgbClr val="0E3B3F"/>
+                </a:solidFill>
+                <a:latin typeface="Cambria" pitchFamily="34" charset="0"/>
+                <a:ea typeface="Cambria" pitchFamily="34" charset="-122"/>
+                <a:cs typeface="Cambria" pitchFamily="34" charset="-120"/>
+              </a:rPr>
               <a:t>Laya fine-tune (archived)</a:t>
             </a:r>
             <a:endParaRPr lang="en-US" sz="1800" dirty="0"/>
@@ -22212,7 +25931,7 @@
       </p:sp>
       <p:graphicFrame>
         <p:nvGraphicFramePr>
-          <p:cNvPr id="25" name="table"/>
+          <p:cNvPr id="28" name="table"/>
           <p:cNvGraphicFramePr>
             <a:graphicFrameLocks noGrp="1"/>
           </p:cNvGraphicFramePr>
@@ -23096,7 +26815,7 @@
             <a:pPr algn="l"/>
             <a:fld id="{F7021451-1387-4CA6-816F-3879F97B5CBC}" type="slidenum">
               <a:rPr b="0" lang="en-US"/>
-              <a:t>24</a:t>
+              <a:t>27</a:t>
             </a:fld>
             <a:endParaRPr lang="en-US"/>
           </a:p>
@@ -23110,9 +26829,9 @@
 </p:sld>
 </file>
 
-<file path=ppt/slides/slide25.xml><?xml version="1.0" encoding="utf-8"?>
+<file path=ppt/slides/slide28.xml><?xml version="1.0" encoding="utf-8"?>
 <p:sld xmlns:a="http://schemas.openxmlformats.org/drawingml/2006/main" xmlns:r="http://schemas.openxmlformats.org/officeDocument/2006/relationships" xmlns:p="http://schemas.openxmlformats.org/presentationml/2006/main">
-  <p:cSld name="Slide 25">
+  <p:cSld name="Slide 28">
     <p:spTree>
       <p:nvGrpSpPr>
         <p:cNvPr id="1" name=""/>
@@ -23170,7 +26889,7 @@
       </p:sp>
       <p:graphicFrame>
         <p:nvGraphicFramePr>
-          <p:cNvPr id="26" name="table"/>
+          <p:cNvPr id="29" name="table"/>
           <p:cNvGraphicFramePr>
             <a:graphicFrameLocks noGrp="1"/>
           </p:cNvGraphicFramePr>
@@ -25099,7 +28818,7 @@
             <a:pPr algn="l"/>
             <a:fld id="{F7021451-1387-4CA6-816F-3879F97B5CBC}" type="slidenum">
               <a:rPr b="0" lang="en-US"/>
-              <a:t>25</a:t>
+              <a:t>28</a:t>
             </a:fld>
             <a:endParaRPr lang="en-US"/>
           </a:p>
@@ -25113,9 +28832,9 @@
 </p:sld>
 </file>
 
-<file path=ppt/slides/slide26.xml><?xml version="1.0" encoding="utf-8"?>
+<file path=ppt/slides/slide29.xml><?xml version="1.0" encoding="utf-8"?>
 <p:sld xmlns:a="http://schemas.openxmlformats.org/drawingml/2006/main" xmlns:r="http://schemas.openxmlformats.org/officeDocument/2006/relationships" xmlns:p="http://schemas.openxmlformats.org/presentationml/2006/main">
-  <p:cSld name="Slide 26">
+  <p:cSld name="Slide 29">
     <p:spTree>
       <p:nvGrpSpPr>
         <p:cNvPr id="1" name=""/>
@@ -25861,7 +29580,7 @@
             <a:pPr algn="l"/>
             <a:fld id="{F7021451-1387-4CA6-816F-3879F97B5CBC}" type="slidenum">
               <a:rPr b="0" lang="en-US"/>
-              <a:t>26</a:t>
+              <a:t>29</a:t>
             </a:fld>
             <a:endParaRPr lang="en-US"/>
           </a:p>
@@ -25875,9 +29594,9 @@
 </p:sld>
 </file>
 
-<file path=ppt/slides/slide27.xml><?xml version="1.0" encoding="utf-8"?>
+<file path=ppt/slides/slide3.xml><?xml version="1.0" encoding="utf-8"?>
 <p:sld xmlns:a="http://schemas.openxmlformats.org/drawingml/2006/main" xmlns:r="http://schemas.openxmlformats.org/officeDocument/2006/relationships" xmlns:p="http://schemas.openxmlformats.org/presentationml/2006/main">
-  <p:cSld name="Slide 27">
+  <p:cSld name="Slide 3">
     <p:spTree>
       <p:nvGrpSpPr>
         <p:cNvPr id="1" name=""/>
@@ -25927,6 +29646,1257 @@
                 <a:ea typeface="Cambria" pitchFamily="34" charset="-122"/>
                 <a:cs typeface="Cambria" pitchFamily="34" charset="-120"/>
               </a:rPr>
+              <a:t>The workflow you described, running end to end</a:t>
+            </a:r>
+            <a:endParaRPr lang="en-US" sz="3200" dirty="0"/>
+          </a:p>
+        </p:txBody>
+      </p:sp>
+      <p:sp>
+        <p:nvSpPr>
+          <p:cNvPr id="4" name="step card 1"/>
+          <p:cNvSpPr/>
+          <p:nvPr/>
+        </p:nvSpPr>
+        <p:spPr>
+          <a:xfrm>
+            <a:off x="548640" y="1508760"/>
+            <a:ext cx="3520440" cy="2148840"/>
+          </a:xfrm>
+          <a:prstGeom prst="roundRect">
+            <a:avLst>
+              <a:gd name="adj" fmla="val 5106"/>
+            </a:avLst>
+          </a:prstGeom>
+          <a:solidFill>
+            <a:srgbClr val="F2F6F5"/>
+          </a:solidFill>
+          <a:ln w="12700">
+            <a:solidFill>
+              <a:srgbClr val="F2F6F5"/>
+            </a:solidFill>
+            <a:prstDash val="solid"/>
+          </a:ln>
+        </p:spPr>
+      </p:sp>
+      <p:sp>
+        <p:nvSpPr>
+          <p:cNvPr id="5" name="badge"/>
+          <p:cNvSpPr/>
+          <p:nvPr/>
+        </p:nvSpPr>
+        <p:spPr>
+          <a:xfrm>
+            <a:off x="777240" y="1737360"/>
+            <a:ext cx="384048" cy="384048"/>
+          </a:xfrm>
+          <a:prstGeom prst="ellipse">
+            <a:avLst/>
+          </a:prstGeom>
+          <a:solidFill>
+            <a:srgbClr val="14746F"/>
+          </a:solidFill>
+          <a:ln w="12700">
+            <a:solidFill>
+              <a:srgbClr val="14746F"/>
+            </a:solidFill>
+            <a:prstDash val="solid"/>
+          </a:ln>
+        </p:spPr>
+      </p:sp>
+      <p:sp>
+        <p:nvSpPr>
+          <p:cNvPr id="6" name="badge text"/>
+          <p:cNvSpPr txBox="1"/>
+          <p:nvPr/>
+        </p:nvSpPr>
+        <p:spPr>
+          <a:xfrm>
+            <a:off x="777240" y="1737360"/>
+            <a:ext cx="384048" cy="384048"/>
+          </a:xfrm>
+          <a:prstGeom prst="rect">
+            <a:avLst/>
+          </a:prstGeom>
+          <a:noFill/>
+          <a:ln/>
+        </p:spPr>
+        <p:txBody>
+          <a:bodyPr wrap="square" lIns="0" tIns="0" rIns="0" bIns="0" rtlCol="0" anchor="ctr"/>
+          <a:lstStyle/>
+          <a:p>
+            <a:pPr algn="ctr" indent="0" marL="0">
+              <a:buNone/>
+            </a:pPr>
+            <a:r>
+              <a:rPr lang="en-US" sz="1400" b="1" dirty="0">
+                <a:solidFill>
+                  <a:srgbClr val="FFFFFF"/>
+                </a:solidFill>
+              </a:rPr>
+              <a:t>1</a:t>
+            </a:r>
+            <a:endParaRPr lang="en-US" sz="1400" dirty="0"/>
+          </a:p>
+        </p:txBody>
+      </p:sp>
+      <p:sp>
+        <p:nvSpPr>
+          <p:cNvPr id="7" name="step title"/>
+          <p:cNvSpPr txBox="1"/>
+          <p:nvPr/>
+        </p:nvSpPr>
+        <p:spPr>
+          <a:xfrm>
+            <a:off x="777240" y="2286000"/>
+            <a:ext cx="3063240" cy="548640"/>
+          </a:xfrm>
+          <a:prstGeom prst="rect">
+            <a:avLst/>
+          </a:prstGeom>
+          <a:noFill/>
+          <a:ln/>
+        </p:spPr>
+        <p:txBody>
+          <a:bodyPr wrap="square" lIns="0" tIns="0" rIns="0" bIns="0" rtlCol="0" anchor="t"/>
+          <a:lstStyle/>
+          <a:p>
+            <a:pPr indent="0" marL="0">
+              <a:buNone/>
+            </a:pPr>
+            <a:r>
+              <a:rPr lang="en-US" sz="1800" b="1" dirty="0">
+                <a:solidFill>
+                  <a:srgbClr val="0E3B3F"/>
+                </a:solidFill>
+                <a:latin typeface="Cambria" pitchFamily="34" charset="0"/>
+                <a:ea typeface="Cambria" pitchFamily="34" charset="-122"/>
+                <a:cs typeface="Cambria" pitchFamily="34" charset="-120"/>
+              </a:rPr>
+              <a:t>Claim received and validated</a:t>
+            </a:r>
+            <a:endParaRPr lang="en-US" sz="1800" dirty="0"/>
+          </a:p>
+        </p:txBody>
+      </p:sp>
+      <p:sp>
+        <p:nvSpPr>
+          <p:cNvPr id="8" name="step text"/>
+          <p:cNvSpPr txBox="1"/>
+          <p:nvPr/>
+        </p:nvSpPr>
+        <p:spPr>
+          <a:xfrm>
+            <a:off x="777240" y="2834640"/>
+            <a:ext cx="3063240" cy="731520"/>
+          </a:xfrm>
+          <a:prstGeom prst="rect">
+            <a:avLst/>
+          </a:prstGeom>
+          <a:noFill/>
+          <a:ln/>
+        </p:spPr>
+        <p:txBody>
+          <a:bodyPr wrap="square" lIns="0" tIns="0" rIns="0" bIns="0" rtlCol="0" anchor="t"/>
+          <a:lstStyle/>
+          <a:p>
+            <a:pPr indent="0" marL="0">
+              <a:buNone/>
+            </a:pPr>
+            <a:r>
+              <a:rPr lang="en-US" sz="1400" dirty="0">
+                <a:solidFill>
+                  <a:srgbClr val="17292B"/>
+                </a:solidFill>
+              </a:rPr>
+              <a:t>FHIR, CSV, JSONL, PDF or photo. 15 rules, 0.19 ms per claim</a:t>
+            </a:r>
+            <a:endParaRPr lang="en-US" sz="1400" dirty="0"/>
+          </a:p>
+        </p:txBody>
+      </p:sp>
+      <p:sp>
+        <p:nvSpPr>
+          <p:cNvPr id="9" name="step card 2"/>
+          <p:cNvSpPr/>
+          <p:nvPr/>
+        </p:nvSpPr>
+        <p:spPr>
+          <a:xfrm>
+            <a:off x="4325112" y="1508760"/>
+            <a:ext cx="3520440" cy="2148840"/>
+          </a:xfrm>
+          <a:prstGeom prst="roundRect">
+            <a:avLst>
+              <a:gd name="adj" fmla="val 5106"/>
+            </a:avLst>
+          </a:prstGeom>
+          <a:solidFill>
+            <a:srgbClr val="F2F6F5"/>
+          </a:solidFill>
+          <a:ln w="12700">
+            <a:solidFill>
+              <a:srgbClr val="F2F6F5"/>
+            </a:solidFill>
+            <a:prstDash val="solid"/>
+          </a:ln>
+        </p:spPr>
+      </p:sp>
+      <p:sp>
+        <p:nvSpPr>
+          <p:cNvPr id="10" name="badge"/>
+          <p:cNvSpPr/>
+          <p:nvPr/>
+        </p:nvSpPr>
+        <p:spPr>
+          <a:xfrm>
+            <a:off x="4553712" y="1737360"/>
+            <a:ext cx="384048" cy="384048"/>
+          </a:xfrm>
+          <a:prstGeom prst="ellipse">
+            <a:avLst/>
+          </a:prstGeom>
+          <a:solidFill>
+            <a:srgbClr val="14746F"/>
+          </a:solidFill>
+          <a:ln w="12700">
+            <a:solidFill>
+              <a:srgbClr val="14746F"/>
+            </a:solidFill>
+            <a:prstDash val="solid"/>
+          </a:ln>
+        </p:spPr>
+      </p:sp>
+      <p:sp>
+        <p:nvSpPr>
+          <p:cNvPr id="11" name="badge text"/>
+          <p:cNvSpPr txBox="1"/>
+          <p:nvPr/>
+        </p:nvSpPr>
+        <p:spPr>
+          <a:xfrm>
+            <a:off x="4553712" y="1737360"/>
+            <a:ext cx="384048" cy="384048"/>
+          </a:xfrm>
+          <a:prstGeom prst="rect">
+            <a:avLst/>
+          </a:prstGeom>
+          <a:noFill/>
+          <a:ln/>
+        </p:spPr>
+        <p:txBody>
+          <a:bodyPr wrap="square" lIns="0" tIns="0" rIns="0" bIns="0" rtlCol="0" anchor="ctr"/>
+          <a:lstStyle/>
+          <a:p>
+            <a:pPr algn="ctr" indent="0" marL="0">
+              <a:buNone/>
+            </a:pPr>
+            <a:r>
+              <a:rPr lang="en-US" sz="1400" b="1" dirty="0">
+                <a:solidFill>
+                  <a:srgbClr val="FFFFFF"/>
+                </a:solidFill>
+              </a:rPr>
+              <a:t>2</a:t>
+            </a:r>
+            <a:endParaRPr lang="en-US" sz="1400" dirty="0"/>
+          </a:p>
+        </p:txBody>
+      </p:sp>
+      <p:sp>
+        <p:nvSpPr>
+          <p:cNvPr id="12" name="step title"/>
+          <p:cNvSpPr txBox="1"/>
+          <p:nvPr/>
+        </p:nvSpPr>
+        <p:spPr>
+          <a:xfrm>
+            <a:off x="4553712" y="2286000"/>
+            <a:ext cx="3063240" cy="548640"/>
+          </a:xfrm>
+          <a:prstGeom prst="rect">
+            <a:avLst/>
+          </a:prstGeom>
+          <a:noFill/>
+          <a:ln/>
+        </p:spPr>
+        <p:txBody>
+          <a:bodyPr wrap="square" lIns="0" tIns="0" rIns="0" bIns="0" rtlCol="0" anchor="t"/>
+          <a:lstStyle/>
+          <a:p>
+            <a:pPr indent="0" marL="0">
+              <a:buNone/>
+            </a:pPr>
+            <a:r>
+              <a:rPr lang="en-US" sz="1800" b="1" dirty="0">
+                <a:solidFill>
+                  <a:srgbClr val="0E3B3F"/>
+                </a:solidFill>
+                <a:latin typeface="Cambria" pitchFamily="34" charset="0"/>
+                <a:ea typeface="Cambria" pitchFamily="34" charset="-122"/>
+                <a:cs typeface="Cambria" pitchFamily="34" charset="-120"/>
+              </a:rPr>
+              <a:t>Errors, doubts and evidence</a:t>
+            </a:r>
+            <a:endParaRPr lang="en-US" sz="1800" dirty="0"/>
+          </a:p>
+        </p:txBody>
+      </p:sp>
+      <p:sp>
+        <p:nvSpPr>
+          <p:cNvPr id="13" name="step text"/>
+          <p:cNvSpPr txBox="1"/>
+          <p:nvPr/>
+        </p:nvSpPr>
+        <p:spPr>
+          <a:xfrm>
+            <a:off x="4553712" y="2834640"/>
+            <a:ext cx="3063240" cy="731520"/>
+          </a:xfrm>
+          <a:prstGeom prst="rect">
+            <a:avLst/>
+          </a:prstGeom>
+          <a:noFill/>
+          <a:ln/>
+        </p:spPr>
+        <p:txBody>
+          <a:bodyPr wrap="square" lIns="0" tIns="0" rIns="0" bIns="0" rtlCol="0" anchor="t"/>
+          <a:lstStyle/>
+          <a:p>
+            <a:pPr indent="0" marL="0">
+              <a:buNone/>
+            </a:pPr>
+            <a:r>
+              <a:rPr lang="en-US" sz="1400" dirty="0">
+                <a:solidFill>
+                  <a:srgbClr val="17292B"/>
+                </a:solidFill>
+              </a:rPr>
+              <a:t>FAIL, or UNABLE_TO_ASSESS when data is missing. Each finding cites claim paths</a:t>
+            </a:r>
+            <a:endParaRPr lang="en-US" sz="1400" dirty="0"/>
+          </a:p>
+        </p:txBody>
+      </p:sp>
+      <p:sp>
+        <p:nvSpPr>
+          <p:cNvPr id="14" name="step card 3"/>
+          <p:cNvSpPr/>
+          <p:nvPr/>
+        </p:nvSpPr>
+        <p:spPr>
+          <a:xfrm>
+            <a:off x="8101584" y="1508760"/>
+            <a:ext cx="3520440" cy="2148840"/>
+          </a:xfrm>
+          <a:prstGeom prst="roundRect">
+            <a:avLst>
+              <a:gd name="adj" fmla="val 5106"/>
+            </a:avLst>
+          </a:prstGeom>
+          <a:solidFill>
+            <a:srgbClr val="FFF1DB"/>
+          </a:solidFill>
+          <a:ln w="12700">
+            <a:solidFill>
+              <a:srgbClr val="FFF1DB"/>
+            </a:solidFill>
+            <a:prstDash val="solid"/>
+          </a:ln>
+        </p:spPr>
+      </p:sp>
+      <p:sp>
+        <p:nvSpPr>
+          <p:cNvPr id="15" name="badge"/>
+          <p:cNvSpPr/>
+          <p:nvPr/>
+        </p:nvSpPr>
+        <p:spPr>
+          <a:xfrm>
+            <a:off x="8330184" y="1737360"/>
+            <a:ext cx="384048" cy="384048"/>
+          </a:xfrm>
+          <a:prstGeom prst="ellipse">
+            <a:avLst/>
+          </a:prstGeom>
+          <a:solidFill>
+            <a:srgbClr val="C47A12"/>
+          </a:solidFill>
+          <a:ln w="12700">
+            <a:solidFill>
+              <a:srgbClr val="C47A12"/>
+            </a:solidFill>
+            <a:prstDash val="solid"/>
+          </a:ln>
+        </p:spPr>
+      </p:sp>
+      <p:sp>
+        <p:nvSpPr>
+          <p:cNvPr id="16" name="badge text"/>
+          <p:cNvSpPr txBox="1"/>
+          <p:nvPr/>
+        </p:nvSpPr>
+        <p:spPr>
+          <a:xfrm>
+            <a:off x="8330184" y="1737360"/>
+            <a:ext cx="384048" cy="384048"/>
+          </a:xfrm>
+          <a:prstGeom prst="rect">
+            <a:avLst/>
+          </a:prstGeom>
+          <a:noFill/>
+          <a:ln/>
+        </p:spPr>
+        <p:txBody>
+          <a:bodyPr wrap="square" lIns="0" tIns="0" rIns="0" bIns="0" rtlCol="0" anchor="ctr"/>
+          <a:lstStyle/>
+          <a:p>
+            <a:pPr algn="ctr" indent="0" marL="0">
+              <a:buNone/>
+            </a:pPr>
+            <a:r>
+              <a:rPr lang="en-US" sz="1400" b="1" dirty="0">
+                <a:solidFill>
+                  <a:srgbClr val="FFFFFF"/>
+                </a:solidFill>
+              </a:rPr>
+              <a:t>3</a:t>
+            </a:r>
+            <a:endParaRPr lang="en-US" sz="1400" dirty="0"/>
+          </a:p>
+        </p:txBody>
+      </p:sp>
+      <p:sp>
+        <p:nvSpPr>
+          <p:cNvPr id="17" name="tag"/>
+          <p:cNvSpPr/>
+          <p:nvPr/>
+        </p:nvSpPr>
+        <p:spPr>
+          <a:xfrm>
+            <a:off x="10204704" y="1783080"/>
+            <a:ext cx="1188720" cy="274320"/>
+          </a:xfrm>
+          <a:prstGeom prst="roundRect">
+            <a:avLst>
+              <a:gd name="adj" fmla="val 50000"/>
+            </a:avLst>
+          </a:prstGeom>
+          <a:solidFill>
+            <a:srgbClr val="F2A541"/>
+          </a:solidFill>
+          <a:ln w="12700">
+            <a:solidFill>
+              <a:srgbClr val="F2A541"/>
+            </a:solidFill>
+            <a:prstDash val="solid"/>
+          </a:ln>
+        </p:spPr>
+      </p:sp>
+      <p:sp>
+        <p:nvSpPr>
+          <p:cNvPr id="18" name="tag text"/>
+          <p:cNvSpPr txBox="1"/>
+          <p:nvPr/>
+        </p:nvSpPr>
+        <p:spPr>
+          <a:xfrm>
+            <a:off x="10204704" y="1783080"/>
+            <a:ext cx="1188720" cy="274320"/>
+          </a:xfrm>
+          <a:prstGeom prst="rect">
+            <a:avLst/>
+          </a:prstGeom>
+          <a:noFill/>
+          <a:ln/>
+        </p:spPr>
+        <p:txBody>
+          <a:bodyPr wrap="square" lIns="0" tIns="0" rIns="0" bIns="0" rtlCol="0" anchor="ctr"/>
+          <a:lstStyle/>
+          <a:p>
+            <a:pPr algn="ctr" indent="0" marL="0">
+              <a:buNone/>
+            </a:pPr>
+            <a:r>
+              <a:rPr lang="en-US" sz="1100" b="1" dirty="0">
+                <a:solidFill>
+                  <a:srgbClr val="17292B"/>
+                </a:solidFill>
+              </a:rPr>
+              <a:t>built this week</a:t>
+            </a:r>
+            <a:endParaRPr lang="en-US" sz="1100" dirty="0"/>
+          </a:p>
+        </p:txBody>
+      </p:sp>
+      <p:sp>
+        <p:nvSpPr>
+          <p:cNvPr id="19" name="step title"/>
+          <p:cNvSpPr txBox="1"/>
+          <p:nvPr/>
+        </p:nvSpPr>
+        <p:spPr>
+          <a:xfrm>
+            <a:off x="8330184" y="2286000"/>
+            <a:ext cx="3063240" cy="548640"/>
+          </a:xfrm>
+          <a:prstGeom prst="rect">
+            <a:avLst/>
+          </a:prstGeom>
+          <a:noFill/>
+          <a:ln/>
+        </p:spPr>
+        <p:txBody>
+          <a:bodyPr wrap="square" lIns="0" tIns="0" rIns="0" bIns="0" rtlCol="0" anchor="t"/>
+          <a:lstStyle/>
+          <a:p>
+            <a:pPr indent="0" marL="0">
+              <a:buNone/>
+            </a:pPr>
+            <a:r>
+              <a:rPr lang="en-US" sz="1800" b="1" dirty="0">
+                <a:solidFill>
+                  <a:srgbClr val="0E3B3F"/>
+                </a:solidFill>
+                <a:latin typeface="Cambria" pitchFamily="34" charset="0"/>
+                <a:ea typeface="Cambria" pitchFamily="34" charset="-122"/>
+                <a:cs typeface="Cambria" pitchFamily="34" charset="-120"/>
+              </a:rPr>
+              <a:t>Copilot explains and advises</a:t>
+            </a:r>
+            <a:endParaRPr lang="en-US" sz="1800" dirty="0"/>
+          </a:p>
+        </p:txBody>
+      </p:sp>
+      <p:sp>
+        <p:nvSpPr>
+          <p:cNvPr id="20" name="step text"/>
+          <p:cNvSpPr txBox="1"/>
+          <p:nvPr/>
+        </p:nvSpPr>
+        <p:spPr>
+          <a:xfrm>
+            <a:off x="8330184" y="2834640"/>
+            <a:ext cx="3063240" cy="731520"/>
+          </a:xfrm>
+          <a:prstGeom prst="rect">
+            <a:avLst/>
+          </a:prstGeom>
+          <a:noFill/>
+          <a:ln/>
+        </p:spPr>
+        <p:txBody>
+          <a:bodyPr wrap="square" lIns="0" tIns="0" rIns="0" bIns="0" rtlCol="0" anchor="t"/>
+          <a:lstStyle/>
+          <a:p>
+            <a:pPr indent="0" marL="0">
+              <a:buNone/>
+            </a:pPr>
+            <a:r>
+              <a:rPr lang="en-US" sz="1400" dirty="0">
+                <a:solidFill>
+                  <a:srgbClr val="17292B"/>
+                </a:solidFill>
+              </a:rPr>
+              <a:t>Summary, what to ask or correct, never an invented value</a:t>
+            </a:r>
+            <a:endParaRPr lang="en-US" sz="1400" dirty="0"/>
+          </a:p>
+        </p:txBody>
+      </p:sp>
+      <p:sp>
+        <p:nvSpPr>
+          <p:cNvPr id="21" name="step card 4"/>
+          <p:cNvSpPr/>
+          <p:nvPr/>
+        </p:nvSpPr>
+        <p:spPr>
+          <a:xfrm>
+            <a:off x="548640" y="3931920"/>
+            <a:ext cx="3520440" cy="2148840"/>
+          </a:xfrm>
+          <a:prstGeom prst="roundRect">
+            <a:avLst>
+              <a:gd name="adj" fmla="val 5106"/>
+            </a:avLst>
+          </a:prstGeom>
+          <a:solidFill>
+            <a:srgbClr val="F2F6F5"/>
+          </a:solidFill>
+          <a:ln w="12700">
+            <a:solidFill>
+              <a:srgbClr val="F2F6F5"/>
+            </a:solidFill>
+            <a:prstDash val="solid"/>
+          </a:ln>
+        </p:spPr>
+      </p:sp>
+      <p:sp>
+        <p:nvSpPr>
+          <p:cNvPr id="22" name="badge"/>
+          <p:cNvSpPr/>
+          <p:nvPr/>
+        </p:nvSpPr>
+        <p:spPr>
+          <a:xfrm>
+            <a:off x="777240" y="4160520"/>
+            <a:ext cx="384048" cy="384048"/>
+          </a:xfrm>
+          <a:prstGeom prst="ellipse">
+            <a:avLst/>
+          </a:prstGeom>
+          <a:solidFill>
+            <a:srgbClr val="14746F"/>
+          </a:solidFill>
+          <a:ln w="12700">
+            <a:solidFill>
+              <a:srgbClr val="14746F"/>
+            </a:solidFill>
+            <a:prstDash val="solid"/>
+          </a:ln>
+        </p:spPr>
+      </p:sp>
+      <p:sp>
+        <p:nvSpPr>
+          <p:cNvPr id="23" name="badge text"/>
+          <p:cNvSpPr txBox="1"/>
+          <p:nvPr/>
+        </p:nvSpPr>
+        <p:spPr>
+          <a:xfrm>
+            <a:off x="777240" y="4160520"/>
+            <a:ext cx="384048" cy="384048"/>
+          </a:xfrm>
+          <a:prstGeom prst="rect">
+            <a:avLst/>
+          </a:prstGeom>
+          <a:noFill/>
+          <a:ln/>
+        </p:spPr>
+        <p:txBody>
+          <a:bodyPr wrap="square" lIns="0" tIns="0" rIns="0" bIns="0" rtlCol="0" anchor="ctr"/>
+          <a:lstStyle/>
+          <a:p>
+            <a:pPr algn="ctr" indent="0" marL="0">
+              <a:buNone/>
+            </a:pPr>
+            <a:r>
+              <a:rPr lang="en-US" sz="1400" b="1" dirty="0">
+                <a:solidFill>
+                  <a:srgbClr val="FFFFFF"/>
+                </a:solidFill>
+              </a:rPr>
+              <a:t>4</a:t>
+            </a:r>
+            <a:endParaRPr lang="en-US" sz="1400" dirty="0"/>
+          </a:p>
+        </p:txBody>
+      </p:sp>
+      <p:sp>
+        <p:nvSpPr>
+          <p:cNvPr id="24" name="step title"/>
+          <p:cNvSpPr txBox="1"/>
+          <p:nvPr/>
+        </p:nvSpPr>
+        <p:spPr>
+          <a:xfrm>
+            <a:off x="777240" y="4709160"/>
+            <a:ext cx="3063240" cy="548640"/>
+          </a:xfrm>
+          <a:prstGeom prst="rect">
+            <a:avLst/>
+          </a:prstGeom>
+          <a:noFill/>
+          <a:ln/>
+        </p:spPr>
+        <p:txBody>
+          <a:bodyPr wrap="square" lIns="0" tIns="0" rIns="0" bIns="0" rtlCol="0" anchor="t"/>
+          <a:lstStyle/>
+          <a:p>
+            <a:pPr indent="0" marL="0">
+              <a:buNone/>
+            </a:pPr>
+            <a:r>
+              <a:rPr lang="en-US" sz="1800" b="1" dirty="0">
+                <a:solidFill>
+                  <a:srgbClr val="0E3B3F"/>
+                </a:solidFill>
+                <a:latin typeface="Cambria" pitchFamily="34" charset="0"/>
+                <a:ea typeface="Cambria" pitchFamily="34" charset="-122"/>
+                <a:cs typeface="Cambria" pitchFamily="34" charset="-120"/>
+              </a:rPr>
+              <a:t>Officer decides</a:t>
+            </a:r>
+            <a:endParaRPr lang="en-US" sz="1800" dirty="0"/>
+          </a:p>
+        </p:txBody>
+      </p:sp>
+      <p:sp>
+        <p:nvSpPr>
+          <p:cNvPr id="25" name="step text"/>
+          <p:cNvSpPr txBox="1"/>
+          <p:nvPr/>
+        </p:nvSpPr>
+        <p:spPr>
+          <a:xfrm>
+            <a:off x="777240" y="5257800"/>
+            <a:ext cx="3063240" cy="731520"/>
+          </a:xfrm>
+          <a:prstGeom prst="rect">
+            <a:avLst/>
+          </a:prstGeom>
+          <a:noFill/>
+          <a:ln/>
+        </p:spPr>
+        <p:txBody>
+          <a:bodyPr wrap="square" lIns="0" tIns="0" rIns="0" bIns="0" rtlCol="0" anchor="t"/>
+          <a:lstStyle/>
+          <a:p>
+            <a:pPr indent="0" marL="0">
+              <a:buNone/>
+            </a:pPr>
+            <a:r>
+              <a:rPr lang="en-US" sz="1400" dirty="0">
+                <a:solidFill>
+                  <a:srgbClr val="17292B"/>
+                </a:solidFill>
+              </a:rPr>
+              <a:t>Confirm, dismiss with a reason, request information. Seniors for high severity</a:t>
+            </a:r>
+            <a:endParaRPr lang="en-US" sz="1400" dirty="0"/>
+          </a:p>
+        </p:txBody>
+      </p:sp>
+      <p:sp>
+        <p:nvSpPr>
+          <p:cNvPr id="26" name="step card 5"/>
+          <p:cNvSpPr/>
+          <p:nvPr/>
+        </p:nvSpPr>
+        <p:spPr>
+          <a:xfrm>
+            <a:off x="4325112" y="3931920"/>
+            <a:ext cx="3520440" cy="2148840"/>
+          </a:xfrm>
+          <a:prstGeom prst="roundRect">
+            <a:avLst>
+              <a:gd name="adj" fmla="val 5106"/>
+            </a:avLst>
+          </a:prstGeom>
+          <a:solidFill>
+            <a:srgbClr val="FFF1DB"/>
+          </a:solidFill>
+          <a:ln w="12700">
+            <a:solidFill>
+              <a:srgbClr val="FFF1DB"/>
+            </a:solidFill>
+            <a:prstDash val="solid"/>
+          </a:ln>
+        </p:spPr>
+      </p:sp>
+      <p:sp>
+        <p:nvSpPr>
+          <p:cNvPr id="27" name="badge"/>
+          <p:cNvSpPr/>
+          <p:nvPr/>
+        </p:nvSpPr>
+        <p:spPr>
+          <a:xfrm>
+            <a:off x="4553712" y="4160520"/>
+            <a:ext cx="384048" cy="384048"/>
+          </a:xfrm>
+          <a:prstGeom prst="ellipse">
+            <a:avLst/>
+          </a:prstGeom>
+          <a:solidFill>
+            <a:srgbClr val="C47A12"/>
+          </a:solidFill>
+          <a:ln w="12700">
+            <a:solidFill>
+              <a:srgbClr val="C47A12"/>
+            </a:solidFill>
+            <a:prstDash val="solid"/>
+          </a:ln>
+        </p:spPr>
+      </p:sp>
+      <p:sp>
+        <p:nvSpPr>
+          <p:cNvPr id="28" name="badge text"/>
+          <p:cNvSpPr txBox="1"/>
+          <p:nvPr/>
+        </p:nvSpPr>
+        <p:spPr>
+          <a:xfrm>
+            <a:off x="4553712" y="4160520"/>
+            <a:ext cx="384048" cy="384048"/>
+          </a:xfrm>
+          <a:prstGeom prst="rect">
+            <a:avLst/>
+          </a:prstGeom>
+          <a:noFill/>
+          <a:ln/>
+        </p:spPr>
+        <p:txBody>
+          <a:bodyPr wrap="square" lIns="0" tIns="0" rIns="0" bIns="0" rtlCol="0" anchor="ctr"/>
+          <a:lstStyle/>
+          <a:p>
+            <a:pPr algn="ctr" indent="0" marL="0">
+              <a:buNone/>
+            </a:pPr>
+            <a:r>
+              <a:rPr lang="en-US" sz="1400" b="1" dirty="0">
+                <a:solidFill>
+                  <a:srgbClr val="FFFFFF"/>
+                </a:solidFill>
+              </a:rPr>
+              <a:t>5</a:t>
+            </a:r>
+            <a:endParaRPr lang="en-US" sz="1400" dirty="0"/>
+          </a:p>
+        </p:txBody>
+      </p:sp>
+      <p:sp>
+        <p:nvSpPr>
+          <p:cNvPr id="29" name="tag"/>
+          <p:cNvSpPr/>
+          <p:nvPr/>
+        </p:nvSpPr>
+        <p:spPr>
+          <a:xfrm>
+            <a:off x="6428232" y="4206240"/>
+            <a:ext cx="1188720" cy="274320"/>
+          </a:xfrm>
+          <a:prstGeom prst="roundRect">
+            <a:avLst>
+              <a:gd name="adj" fmla="val 50000"/>
+            </a:avLst>
+          </a:prstGeom>
+          <a:solidFill>
+            <a:srgbClr val="F2A541"/>
+          </a:solidFill>
+          <a:ln w="12700">
+            <a:solidFill>
+              <a:srgbClr val="F2A541"/>
+            </a:solidFill>
+            <a:prstDash val="solid"/>
+          </a:ln>
+        </p:spPr>
+      </p:sp>
+      <p:sp>
+        <p:nvSpPr>
+          <p:cNvPr id="30" name="tag text"/>
+          <p:cNvSpPr txBox="1"/>
+          <p:nvPr/>
+        </p:nvSpPr>
+        <p:spPr>
+          <a:xfrm>
+            <a:off x="6428232" y="4206240"/>
+            <a:ext cx="1188720" cy="274320"/>
+          </a:xfrm>
+          <a:prstGeom prst="rect">
+            <a:avLst/>
+          </a:prstGeom>
+          <a:noFill/>
+          <a:ln/>
+        </p:spPr>
+        <p:txBody>
+          <a:bodyPr wrap="square" lIns="0" tIns="0" rIns="0" bIns="0" rtlCol="0" anchor="ctr"/>
+          <a:lstStyle/>
+          <a:p>
+            <a:pPr algn="ctr" indent="0" marL="0">
+              <a:buNone/>
+            </a:pPr>
+            <a:r>
+              <a:rPr lang="en-US" sz="1100" b="1" dirty="0">
+                <a:solidFill>
+                  <a:srgbClr val="17292B"/>
+                </a:solidFill>
+              </a:rPr>
+              <a:t>built this week</a:t>
+            </a:r>
+            <a:endParaRPr lang="en-US" sz="1100" dirty="0"/>
+          </a:p>
+        </p:txBody>
+      </p:sp>
+      <p:sp>
+        <p:nvSpPr>
+          <p:cNvPr id="31" name="step title"/>
+          <p:cNvSpPr txBox="1"/>
+          <p:nvPr/>
+        </p:nvSpPr>
+        <p:spPr>
+          <a:xfrm>
+            <a:off x="4553712" y="4709160"/>
+            <a:ext cx="3063240" cy="548640"/>
+          </a:xfrm>
+          <a:prstGeom prst="rect">
+            <a:avLst/>
+          </a:prstGeom>
+          <a:noFill/>
+          <a:ln/>
+        </p:spPr>
+        <p:txBody>
+          <a:bodyPr wrap="square" lIns="0" tIns="0" rIns="0" bIns="0" rtlCol="0" anchor="t"/>
+          <a:lstStyle/>
+          <a:p>
+            <a:pPr indent="0" marL="0">
+              <a:buNone/>
+            </a:pPr>
+            <a:r>
+              <a:rPr lang="en-US" sz="1800" b="1" dirty="0">
+                <a:solidFill>
+                  <a:srgbClr val="0E3B3F"/>
+                </a:solidFill>
+                <a:latin typeface="Cambria" pitchFamily="34" charset="0"/>
+                <a:ea typeface="Cambria" pitchFamily="34" charset="-122"/>
+                <a:cs typeface="Cambria" pitchFamily="34" charset="-120"/>
+              </a:rPr>
+              <a:t>Correct and revalidate</a:t>
+            </a:r>
+            <a:endParaRPr lang="en-US" sz="1800" dirty="0"/>
+          </a:p>
+        </p:txBody>
+      </p:sp>
+      <p:sp>
+        <p:nvSpPr>
+          <p:cNvPr id="32" name="step text"/>
+          <p:cNvSpPr txBox="1"/>
+          <p:nvPr/>
+        </p:nvSpPr>
+        <p:spPr>
+          <a:xfrm>
+            <a:off x="4553712" y="5257800"/>
+            <a:ext cx="3063240" cy="731520"/>
+          </a:xfrm>
+          <a:prstGeom prst="rect">
+            <a:avLst/>
+          </a:prstGeom>
+          <a:noFill/>
+          <a:ln/>
+        </p:spPr>
+        <p:txBody>
+          <a:bodyPr wrap="square" lIns="0" tIns="0" rIns="0" bIns="0" rtlCol="0" anchor="t"/>
+          <a:lstStyle/>
+          <a:p>
+            <a:pPr indent="0" marL="0">
+              <a:buNone/>
+            </a:pPr>
+            <a:r>
+              <a:rPr lang="en-US" sz="1400" dirty="0">
+                <a:solidFill>
+                  <a:srgbClr val="17292B"/>
+                </a:solidFill>
+              </a:rPr>
+              <a:t>What-if first, then a new version. The original stays untouched</a:t>
+            </a:r>
+            <a:endParaRPr lang="en-US" sz="1400" dirty="0"/>
+          </a:p>
+        </p:txBody>
+      </p:sp>
+      <p:sp>
+        <p:nvSpPr>
+          <p:cNvPr id="33" name="step card 6"/>
+          <p:cNvSpPr/>
+          <p:nvPr/>
+        </p:nvSpPr>
+        <p:spPr>
+          <a:xfrm>
+            <a:off x="8101584" y="3931920"/>
+            <a:ext cx="3520440" cy="2148840"/>
+          </a:xfrm>
+          <a:prstGeom prst="roundRect">
+            <a:avLst>
+              <a:gd name="adj" fmla="val 5106"/>
+            </a:avLst>
+          </a:prstGeom>
+          <a:solidFill>
+            <a:srgbClr val="F2F6F5"/>
+          </a:solidFill>
+          <a:ln w="12700">
+            <a:solidFill>
+              <a:srgbClr val="F2F6F5"/>
+            </a:solidFill>
+            <a:prstDash val="solid"/>
+          </a:ln>
+        </p:spPr>
+      </p:sp>
+      <p:sp>
+        <p:nvSpPr>
+          <p:cNvPr id="34" name="badge"/>
+          <p:cNvSpPr/>
+          <p:nvPr/>
+        </p:nvSpPr>
+        <p:spPr>
+          <a:xfrm>
+            <a:off x="8330184" y="4160520"/>
+            <a:ext cx="384048" cy="384048"/>
+          </a:xfrm>
+          <a:prstGeom prst="ellipse">
+            <a:avLst/>
+          </a:prstGeom>
+          <a:solidFill>
+            <a:srgbClr val="14746F"/>
+          </a:solidFill>
+          <a:ln w="12700">
+            <a:solidFill>
+              <a:srgbClr val="14746F"/>
+            </a:solidFill>
+            <a:prstDash val="solid"/>
+          </a:ln>
+        </p:spPr>
+      </p:sp>
+      <p:sp>
+        <p:nvSpPr>
+          <p:cNvPr id="35" name="badge text"/>
+          <p:cNvSpPr txBox="1"/>
+          <p:nvPr/>
+        </p:nvSpPr>
+        <p:spPr>
+          <a:xfrm>
+            <a:off x="8330184" y="4160520"/>
+            <a:ext cx="384048" cy="384048"/>
+          </a:xfrm>
+          <a:prstGeom prst="rect">
+            <a:avLst/>
+          </a:prstGeom>
+          <a:noFill/>
+          <a:ln/>
+        </p:spPr>
+        <p:txBody>
+          <a:bodyPr wrap="square" lIns="0" tIns="0" rIns="0" bIns="0" rtlCol="0" anchor="ctr"/>
+          <a:lstStyle/>
+          <a:p>
+            <a:pPr algn="ctr" indent="0" marL="0">
+              <a:buNone/>
+            </a:pPr>
+            <a:r>
+              <a:rPr lang="en-US" sz="1400" b="1" dirty="0">
+                <a:solidFill>
+                  <a:srgbClr val="FFFFFF"/>
+                </a:solidFill>
+              </a:rPr>
+              <a:t>6</a:t>
+            </a:r>
+            <a:endParaRPr lang="en-US" sz="1400" dirty="0"/>
+          </a:p>
+        </p:txBody>
+      </p:sp>
+      <p:sp>
+        <p:nvSpPr>
+          <p:cNvPr id="36" name="step title"/>
+          <p:cNvSpPr txBox="1"/>
+          <p:nvPr/>
+        </p:nvSpPr>
+        <p:spPr>
+          <a:xfrm>
+            <a:off x="8330184" y="4709160"/>
+            <a:ext cx="3063240" cy="548640"/>
+          </a:xfrm>
+          <a:prstGeom prst="rect">
+            <a:avLst/>
+          </a:prstGeom>
+          <a:noFill/>
+          <a:ln/>
+        </p:spPr>
+        <p:txBody>
+          <a:bodyPr wrap="square" lIns="0" tIns="0" rIns="0" bIns="0" rtlCol="0" anchor="t"/>
+          <a:lstStyle/>
+          <a:p>
+            <a:pPr indent="0" marL="0">
+              <a:buNone/>
+            </a:pPr>
+            <a:r>
+              <a:rPr lang="en-US" sz="1800" b="1" dirty="0">
+                <a:solidFill>
+                  <a:srgbClr val="0E3B3F"/>
+                </a:solidFill>
+                <a:latin typeface="Cambria" pitchFamily="34" charset="0"/>
+                <a:ea typeface="Cambria" pitchFamily="34" charset="-122"/>
+                <a:cs typeface="Cambria" pitchFamily="34" charset="-120"/>
+              </a:rPr>
+              <a:t>Traceable, with limits shown</a:t>
+            </a:r>
+            <a:endParaRPr lang="en-US" sz="1800" dirty="0"/>
+          </a:p>
+        </p:txBody>
+      </p:sp>
+      <p:sp>
+        <p:nvSpPr>
+          <p:cNvPr id="37" name="step text"/>
+          <p:cNvSpPr txBox="1"/>
+          <p:nvPr/>
+        </p:nvSpPr>
+        <p:spPr>
+          <a:xfrm>
+            <a:off x="8330184" y="5257800"/>
+            <a:ext cx="3063240" cy="731520"/>
+          </a:xfrm>
+          <a:prstGeom prst="rect">
+            <a:avLst/>
+          </a:prstGeom>
+          <a:noFill/>
+          <a:ln/>
+        </p:spPr>
+        <p:txBody>
+          <a:bodyPr wrap="square" lIns="0" tIns="0" rIns="0" bIns="0" rtlCol="0" anchor="t"/>
+          <a:lstStyle/>
+          <a:p>
+            <a:pPr indent="0" marL="0">
+              <a:buNone/>
+            </a:pPr>
+            <a:r>
+              <a:rPr lang="en-US" sz="1400" dirty="0">
+                <a:solidFill>
+                  <a:srgbClr val="17292B"/>
+                </a:solidFill>
+              </a:rPr>
+              <a:t>Signed audit trail, both versions side by side, measured accuracy</a:t>
+            </a:r>
+            <a:endParaRPr lang="en-US" sz="1400" dirty="0"/>
+          </a:p>
+        </p:txBody>
+      </p:sp>
+      <p:sp>
+        <p:nvSpPr>
+          <p:cNvPr id="38" name="footnote"/>
+          <p:cNvSpPr txBox="1"/>
+          <p:nvPr/>
+        </p:nvSpPr>
+        <p:spPr>
+          <a:xfrm>
+            <a:off x="548640" y="6199632"/>
+            <a:ext cx="10424160" cy="365760"/>
+          </a:xfrm>
+          <a:prstGeom prst="rect">
+            <a:avLst/>
+          </a:prstGeom>
+          <a:noFill/>
+          <a:ln/>
+        </p:spPr>
+        <p:txBody>
+          <a:bodyPr wrap="square" lIns="0" tIns="0" rIns="0" bIns="0" rtlCol="0" anchor="ctr"/>
+          <a:lstStyle/>
+          <a:p>
+            <a:pPr indent="0" marL="0">
+              <a:buNone/>
+            </a:pPr>
+            <a:r>
+              <a:rPr lang="en-US" sz="1100" i="1" dirty="0">
+                <a:solidFill>
+                  <a:srgbClr val="5C7173"/>
+                </a:solidFill>
+              </a:rPr>
+              <a:t>All numbers in this deck come from commands you can re-run. Anything simulated says so on its slide.</a:t>
+            </a:r>
+            <a:endParaRPr lang="en-US" sz="1100" dirty="0"/>
+          </a:p>
+        </p:txBody>
+      </p:sp>
+      <p:sp>
+        <p:nvSpPr>
+          <p:cNvPr id="25" name="Slide Number Placeholder 0"/>
+          <p:cNvSpPr>
+            <a:spLocks noGrp="1"/>
+          </p:cNvSpPr>
+          <p:nvPr>
+            <p:ph type="sldNum" sz="quarter" idx="4294967295"/>
+          </p:nvPr>
+        </p:nvSpPr>
+        <p:spPr>
+          <a:xfrm>
+            <a:off x="11247120" y="6400800"/>
+            <a:ext cx="548640" cy="274320"/>
+          </a:xfrm>
+          <a:prstGeom prst="rect">
+            <a:avLst/>
+          </a:prstGeom>
+          <a:extLst>
+            <a:ext uri="{C572A759-6A51-4108-AA02-DFA0A04FC94B}">
+              <ma14:wrappingTextBoxFlag xmlns:ma14="http://schemas.microsoft.com/office/mac/drawingml/2011/main" val="0"/>
+            </a:ext>
+          </a:extLst>
+        </p:spPr>
+        <p:txBody>
+          <a:bodyPr/>
+          <a:lstStyle>
+            <a:lvl1pPr>
+              <a:defRPr sz="1000">
+                <a:solidFill>
+                  <a:srgbClr val="5C7173"/>
+                </a:solidFill>
+              </a:defRPr>
+            </a:lvl1pPr>
+          </a:lstStyle>
+          <a:p>
+            <a:pPr algn="l"/>
+            <a:fld id="{F7021451-1387-4CA6-816F-3879F97B5CBC}" type="slidenum">
+              <a:rPr b="0" lang="en-US"/>
+              <a:t>3</a:t>
+            </a:fld>
+            <a:endParaRPr lang="en-US"/>
+          </a:p>
+        </p:txBody>
+      </p:sp>
+    </p:spTree>
+  </p:cSld>
+  <p:clrMapOvr>
+    <a:masterClrMapping/>
+  </p:clrMapOvr>
+</p:sld>
+</file>
+
+<file path=ppt/slides/slide30.xml><?xml version="1.0" encoding="utf-8"?>
+<p:sld xmlns:a="http://schemas.openxmlformats.org/drawingml/2006/main" xmlns:r="http://schemas.openxmlformats.org/officeDocument/2006/relationships" xmlns:p="http://schemas.openxmlformats.org/presentationml/2006/main">
+  <p:cSld name="Slide 30">
+    <p:spTree>
+      <p:nvGrpSpPr>
+        <p:cNvPr id="1" name=""/>
+        <p:cNvGrpSpPr/>
+        <p:nvPr/>
+      </p:nvGrpSpPr>
+      <p:grpSpPr>
+        <a:xfrm>
+          <a:off x="0" y="0"/>
+          <a:ext cx="0" cy="0"/>
+          <a:chOff x="0" y="0"/>
+          <a:chExt cx="0" cy="0"/>
+        </a:xfrm>
+      </p:grpSpPr>
+      <p:sp>
+        <p:nvSpPr>
+          <p:cNvPr id="2" name="Text 0"/>
+          <p:cNvSpPr/>
+          <p:nvPr>
+            <p:ph idx="100" type="title" hasCustomPrompt="1"/>
+          </p:nvPr>
+        </p:nvSpPr>
+        <p:spPr>
+          <a:xfrm>
+            <a:off x="548640" y="365760"/>
+            <a:ext cx="11064240" cy="822960"/>
+          </a:xfrm>
+          <a:prstGeom prst="rect">
+            <a:avLst/>
+          </a:prstGeom>
+          <a:noFill/>
+          <a:ln/>
+        </p:spPr>
+        <p:txBody>
+          <a:bodyPr wrap="square" lIns="0" tIns="0" rIns="0" bIns="0" rtlCol="0" anchor="ctr"/>
+          <a:lstStyle/>
+          <a:p>
+            <a:pPr indent="0" marL="0">
+              <a:buNone/>
+            </a:pPr>
+            <a:r>
+              <a:rPr lang="en-US" sz="3200" b="1" dirty="0">
+                <a:solidFill>
+                  <a:srgbClr val="0E3B3F"/>
+                </a:solidFill>
+                <a:latin typeface="Cambria" pitchFamily="34" charset="0"/>
+                <a:ea typeface="Cambria" pitchFamily="34" charset="-122"/>
+                <a:cs typeface="Cambria" pitchFamily="34" charset="-120"/>
+              </a:rPr>
               <a:t>The console and the desktop app</a:t>
             </a:r>
             <a:endParaRPr lang="en-US" sz="3200" dirty="0"/>
@@ -25935,7 +30905,7 @@
       </p:sp>
       <p:graphicFrame>
         <p:nvGraphicFramePr>
-          <p:cNvPr id="28" name="table"/>
+          <p:cNvPr id="31" name="table"/>
           <p:cNvGraphicFramePr>
             <a:graphicFrameLocks noGrp="1"/>
           </p:cNvGraphicFramePr>
@@ -26767,7 +31737,7 @@
             <a:pPr algn="l"/>
             <a:fld id="{F7021451-1387-4CA6-816F-3879F97B5CBC}" type="slidenum">
               <a:rPr b="0" lang="en-US"/>
-              <a:t>27</a:t>
+              <a:t>30</a:t>
             </a:fld>
             <a:endParaRPr lang="en-US"/>
           </a:p>
@@ -26781,9 +31751,9 @@
 </p:sld>
 </file>
 
-<file path=ppt/slides/slide28.xml><?xml version="1.0" encoding="utf-8"?>
+<file path=ppt/slides/slide31.xml><?xml version="1.0" encoding="utf-8"?>
 <p:sld xmlns:a="http://schemas.openxmlformats.org/drawingml/2006/main" xmlns:r="http://schemas.openxmlformats.org/officeDocument/2006/relationships" xmlns:p="http://schemas.openxmlformats.org/presentationml/2006/main">
-  <p:cSld name="Slide 28">
+  <p:cSld name="Slide 31">
     <p:spTree>
       <p:nvGrpSpPr>
         <p:cNvPr id="1" name=""/>
@@ -27522,7 +32492,7 @@
             <a:pPr algn="l"/>
             <a:fld id="{F7021451-1387-4CA6-816F-3879F97B5CBC}" type="slidenum">
               <a:rPr b="0" lang="en-US"/>
-              <a:t>28</a:t>
+              <a:t>31</a:t>
             </a:fld>
             <a:endParaRPr lang="en-US"/>
           </a:p>
@@ -27536,9 +32506,9 @@
 </p:sld>
 </file>
 
-<file path=ppt/slides/slide29.xml><?xml version="1.0" encoding="utf-8"?>
+<file path=ppt/slides/slide32.xml><?xml version="1.0" encoding="utf-8"?>
 <p:sld xmlns:a="http://schemas.openxmlformats.org/drawingml/2006/main" xmlns:r="http://schemas.openxmlformats.org/officeDocument/2006/relationships" xmlns:p="http://schemas.openxmlformats.org/presentationml/2006/main">
-  <p:cSld name="Slide 29">
+  <p:cSld name="Slide 32">
     <p:spTree>
       <p:nvGrpSpPr>
         <p:cNvPr id="1" name=""/>
@@ -27588,6 +32558,2111 @@
                 <a:ea typeface="Cambria" pitchFamily="34" charset="-122"/>
                 <a:cs typeface="Cambria" pitchFamily="34" charset="-120"/>
               </a:rPr>
+              <a:t>Sign-in: hard to guess, hard to lock out, equal in time</a:t>
+            </a:r>
+            <a:endParaRPr lang="en-US" sz="3200" dirty="0"/>
+          </a:p>
+        </p:txBody>
+      </p:sp>
+      <p:sp>
+        <p:nvSpPr>
+          <p:cNvPr id="4" name="stat"/>
+          <p:cNvSpPr txBox="1"/>
+          <p:nvPr/>
+        </p:nvSpPr>
+        <p:spPr>
+          <a:xfrm>
+            <a:off x="548640" y="1371600"/>
+            <a:ext cx="2560320" cy="822960"/>
+          </a:xfrm>
+          <a:prstGeom prst="rect">
+            <a:avLst/>
+          </a:prstGeom>
+          <a:noFill/>
+          <a:ln/>
+        </p:spPr>
+        <p:txBody>
+          <a:bodyPr wrap="square" lIns="0" tIns="0" rIns="0" bIns="0" rtlCol="0" anchor="b"/>
+          <a:lstStyle/>
+          <a:p>
+            <a:pPr indent="0" marL="0">
+              <a:buNone/>
+            </a:pPr>
+            <a:r>
+              <a:rPr lang="en-US" sz="3200" b="1" dirty="0">
+                <a:solidFill>
+                  <a:srgbClr val="14746F"/>
+                </a:solidFill>
+                <a:latin typeface="Cambria" pitchFamily="34" charset="0"/>
+                <a:ea typeface="Cambria" pitchFamily="34" charset="-122"/>
+                <a:cs typeface="Cambria" pitchFamily="34" charset="-120"/>
+              </a:rPr>
+              <a:t>5 in 15 min</a:t>
+            </a:r>
+            <a:endParaRPr lang="en-US" sz="3200" dirty="0"/>
+          </a:p>
+        </p:txBody>
+      </p:sp>
+      <p:sp>
+        <p:nvSpPr>
+          <p:cNvPr id="5" name="stat label"/>
+          <p:cNvSpPr txBox="1"/>
+          <p:nvPr/>
+        </p:nvSpPr>
+        <p:spPr>
+          <a:xfrm>
+            <a:off x="548640" y="2240280"/>
+            <a:ext cx="2560320" cy="822960"/>
+          </a:xfrm>
+          <a:prstGeom prst="rect">
+            <a:avLst/>
+          </a:prstGeom>
+          <a:noFill/>
+          <a:ln/>
+        </p:spPr>
+        <p:txBody>
+          <a:bodyPr wrap="square" lIns="0" tIns="0" rIns="0" bIns="0" rtlCol="0" anchor="t"/>
+          <a:lstStyle/>
+          <a:p>
+            <a:pPr indent="0" marL="0">
+              <a:buNone/>
+            </a:pPr>
+            <a:r>
+              <a:rPr lang="en-US" sz="1400" dirty="0">
+                <a:solidFill>
+                  <a:srgbClr val="5C7173"/>
+                </a:solidFill>
+              </a:rPr>
+              <a:t>failures per badge and client; then that client is refused</a:t>
+            </a:r>
+            <a:endParaRPr lang="en-US" sz="1400" dirty="0"/>
+          </a:p>
+        </p:txBody>
+      </p:sp>
+      <p:sp>
+        <p:nvSpPr>
+          <p:cNvPr id="6" name="stat"/>
+          <p:cNvSpPr txBox="1"/>
+          <p:nvPr/>
+        </p:nvSpPr>
+        <p:spPr>
+          <a:xfrm>
+            <a:off x="3383280" y="1371600"/>
+            <a:ext cx="2560320" cy="822960"/>
+          </a:xfrm>
+          <a:prstGeom prst="rect">
+            <a:avLst/>
+          </a:prstGeom>
+          <a:noFill/>
+          <a:ln/>
+        </p:spPr>
+        <p:txBody>
+          <a:bodyPr wrap="square" lIns="0" tIns="0" rIns="0" bIns="0" rtlCol="0" anchor="b"/>
+          <a:lstStyle/>
+          <a:p>
+            <a:pPr indent="0" marL="0">
+              <a:buNone/>
+            </a:pPr>
+            <a:r>
+              <a:rPr lang="en-US" sz="3200" b="1" dirty="0">
+                <a:solidFill>
+                  <a:srgbClr val="14746F"/>
+                </a:solidFill>
+                <a:latin typeface="Cambria" pitchFamily="34" charset="0"/>
+                <a:ea typeface="Cambria" pitchFamily="34" charset="-122"/>
+                <a:cs typeface="Cambria" pitchFamily="34" charset="-120"/>
+              </a:rPr>
+              <a:t>100</a:t>
+            </a:r>
+            <a:endParaRPr lang="en-US" sz="3200" dirty="0"/>
+          </a:p>
+        </p:txBody>
+      </p:sp>
+      <p:sp>
+        <p:nvSpPr>
+          <p:cNvPr id="7" name="stat label"/>
+          <p:cNvSpPr txBox="1"/>
+          <p:nvPr/>
+        </p:nvSpPr>
+        <p:spPr>
+          <a:xfrm>
+            <a:off x="3383280" y="2240280"/>
+            <a:ext cx="2560320" cy="822960"/>
+          </a:xfrm>
+          <a:prstGeom prst="rect">
+            <a:avLst/>
+          </a:prstGeom>
+          <a:noFill/>
+          <a:ln/>
+        </p:spPr>
+        <p:txBody>
+          <a:bodyPr wrap="square" lIns="0" tIns="0" rIns="0" bIns="0" rtlCol="0" anchor="t"/>
+          <a:lstStyle/>
+          <a:p>
+            <a:pPr indent="0" marL="0">
+              <a:buNone/>
+            </a:pPr>
+            <a:r>
+              <a:rPr lang="en-US" sz="1400" dirty="0">
+                <a:solidFill>
+                  <a:srgbClr val="5C7173"/>
+                </a:solidFill>
+              </a:rPr>
+              <a:t>failures per 15 minutes for one address, over all badges</a:t>
+            </a:r>
+            <a:endParaRPr lang="en-US" sz="1400" dirty="0"/>
+          </a:p>
+        </p:txBody>
+      </p:sp>
+      <p:sp>
+        <p:nvSpPr>
+          <p:cNvPr id="8" name="stat"/>
+          <p:cNvSpPr txBox="1"/>
+          <p:nvPr/>
+        </p:nvSpPr>
+        <p:spPr>
+          <a:xfrm>
+            <a:off x="6217920" y="1371600"/>
+            <a:ext cx="2560320" cy="822960"/>
+          </a:xfrm>
+          <a:prstGeom prst="rect">
+            <a:avLst/>
+          </a:prstGeom>
+          <a:noFill/>
+          <a:ln/>
+        </p:spPr>
+        <p:txBody>
+          <a:bodyPr wrap="square" lIns="0" tIns="0" rIns="0" bIns="0" rtlCol="0" anchor="b"/>
+          <a:lstStyle/>
+          <a:p>
+            <a:pPr indent="0" marL="0">
+              <a:buNone/>
+            </a:pPr>
+            <a:r>
+              <a:rPr lang="en-US" sz="3200" b="1" dirty="0">
+                <a:solidFill>
+                  <a:srgbClr val="14746F"/>
+                </a:solidFill>
+                <a:latin typeface="Cambria" pitchFamily="34" charset="0"/>
+                <a:ea typeface="Cambria" pitchFamily="34" charset="-122"/>
+                <a:cs typeface="Cambria" pitchFamily="34" charset="-120"/>
+              </a:rPr>
+              <a:t>30 days</a:t>
+            </a:r>
+            <a:endParaRPr lang="en-US" sz="3200" dirty="0"/>
+          </a:p>
+        </p:txBody>
+      </p:sp>
+      <p:sp>
+        <p:nvSpPr>
+          <p:cNvPr id="9" name="stat label"/>
+          <p:cNvSpPr txBox="1"/>
+          <p:nvPr/>
+        </p:nvSpPr>
+        <p:spPr>
+          <a:xfrm>
+            <a:off x="6217920" y="2240280"/>
+            <a:ext cx="2560320" cy="822960"/>
+          </a:xfrm>
+          <a:prstGeom prst="rect">
+            <a:avLst/>
+          </a:prstGeom>
+          <a:noFill/>
+          <a:ln/>
+        </p:spPr>
+        <p:txBody>
+          <a:bodyPr wrap="square" lIns="0" tIns="0" rIns="0" bIns="0" rtlCol="0" anchor="t"/>
+          <a:lstStyle/>
+          <a:p>
+            <a:pPr indent="0" marL="0">
+              <a:buNone/>
+            </a:pPr>
+            <a:r>
+              <a:rPr lang="en-US" sz="1400" dirty="0">
+                <a:solidFill>
+                  <a:srgbClr val="5C7173"/>
+                </a:solidFill>
+              </a:rPr>
+              <a:t>a client the owner signed in from is remembered, as a keyed hash</a:t>
+            </a:r>
+            <a:endParaRPr lang="en-US" sz="1400" dirty="0"/>
+          </a:p>
+        </p:txBody>
+      </p:sp>
+      <p:sp>
+        <p:nvSpPr>
+          <p:cNvPr id="10" name="stat"/>
+          <p:cNvSpPr txBox="1"/>
+          <p:nvPr/>
+        </p:nvSpPr>
+        <p:spPr>
+          <a:xfrm>
+            <a:off x="9052560" y="1371600"/>
+            <a:ext cx="2560320" cy="822960"/>
+          </a:xfrm>
+          <a:prstGeom prst="rect">
+            <a:avLst/>
+          </a:prstGeom>
+          <a:noFill/>
+          <a:ln/>
+        </p:spPr>
+        <p:txBody>
+          <a:bodyPr wrap="square" lIns="0" tIns="0" rIns="0" bIns="0" rtlCol="0" anchor="b"/>
+          <a:lstStyle/>
+          <a:p>
+            <a:pPr indent="0" marL="0">
+              <a:buNone/>
+            </a:pPr>
+            <a:r>
+              <a:rPr lang="en-US" sz="3200" b="1" dirty="0">
+                <a:solidFill>
+                  <a:srgbClr val="14746F"/>
+                </a:solidFill>
+                <a:latin typeface="Cambria" pitchFamily="34" charset="0"/>
+                <a:ea typeface="Cambria" pitchFamily="34" charset="-122"/>
+                <a:cs typeface="Cambria" pitchFamily="34" charset="-120"/>
+              </a:rPr>
+              <a:t>within 3%</a:t>
+            </a:r>
+            <a:endParaRPr lang="en-US" sz="3200" dirty="0"/>
+          </a:p>
+        </p:txBody>
+      </p:sp>
+      <p:sp>
+        <p:nvSpPr>
+          <p:cNvPr id="11" name="stat label"/>
+          <p:cNvSpPr txBox="1"/>
+          <p:nvPr/>
+        </p:nvSpPr>
+        <p:spPr>
+          <a:xfrm>
+            <a:off x="9052560" y="2240280"/>
+            <a:ext cx="2560320" cy="822960"/>
+          </a:xfrm>
+          <a:prstGeom prst="rect">
+            <a:avLst/>
+          </a:prstGeom>
+          <a:noFill/>
+          <a:ln/>
+        </p:spPr>
+        <p:txBody>
+          <a:bodyPr wrap="square" lIns="0" tIns="0" rIns="0" bIns="0" rtlCol="0" anchor="t"/>
+          <a:lstStyle/>
+          <a:p>
+            <a:pPr indent="0" marL="0">
+              <a:buNone/>
+            </a:pPr>
+            <a:r>
+              <a:rPr lang="en-US" sz="1400" dirty="0">
+                <a:solidFill>
+                  <a:srgbClr val="5C7173"/>
+                </a:solidFill>
+              </a:rPr>
+              <a:t>time taken by 8 kinds of refused sign-in: 80.3 to 82.6 ms</a:t>
+            </a:r>
+            <a:endParaRPr lang="en-US" sz="1400" dirty="0"/>
+          </a:p>
+        </p:txBody>
+      </p:sp>
+      <p:sp>
+        <p:nvSpPr>
+          <p:cNvPr id="12" name="signin card 1"/>
+          <p:cNvSpPr/>
+          <p:nvPr/>
+        </p:nvSpPr>
+        <p:spPr>
+          <a:xfrm>
+            <a:off x="548640" y="3337560"/>
+            <a:ext cx="3566160" cy="2743200"/>
+          </a:xfrm>
+          <a:prstGeom prst="roundRect">
+            <a:avLst>
+              <a:gd name="adj" fmla="val 4000"/>
+            </a:avLst>
+          </a:prstGeom>
+          <a:solidFill>
+            <a:srgbClr val="F2F6F5"/>
+          </a:solidFill>
+          <a:ln w="12700">
+            <a:solidFill>
+              <a:srgbClr val="F2F6F5"/>
+            </a:solidFill>
+            <a:prstDash val="solid"/>
+          </a:ln>
+        </p:spPr>
+      </p:sp>
+      <p:sp>
+        <p:nvSpPr>
+          <p:cNvPr id="13" name="signin title"/>
+          <p:cNvSpPr txBox="1"/>
+          <p:nvPr/>
+        </p:nvSpPr>
+        <p:spPr>
+          <a:xfrm>
+            <a:off x="777240" y="3429000"/>
+            <a:ext cx="3108960" cy="411480"/>
+          </a:xfrm>
+          <a:prstGeom prst="rect">
+            <a:avLst/>
+          </a:prstGeom>
+          <a:noFill/>
+          <a:ln/>
+        </p:spPr>
+        <p:txBody>
+          <a:bodyPr wrap="square" lIns="0" tIns="0" rIns="0" bIns="0" rtlCol="0" anchor="ctr"/>
+          <a:lstStyle/>
+          <a:p>
+            <a:pPr indent="0" marL="0">
+              <a:buNone/>
+            </a:pPr>
+            <a:r>
+              <a:rPr lang="en-US" sz="1500" b="1" dirty="0">
+                <a:solidFill>
+                  <a:srgbClr val="0E3B3F"/>
+                </a:solidFill>
+                <a:latin typeface="Cambria" pitchFamily="34" charset="0"/>
+                <a:ea typeface="Cambria" pitchFamily="34" charset="-122"/>
+                <a:cs typeface="Cambria" pitchFamily="34" charset="-120"/>
+              </a:rPr>
+              <a:t>A stranger cannot lock you out</a:t>
+            </a:r>
+            <a:endParaRPr lang="en-US" sz="1500" dirty="0"/>
+          </a:p>
+        </p:txBody>
+      </p:sp>
+      <p:sp>
+        <p:nvSpPr>
+          <p:cNvPr id="14" name="bullets"/>
+          <p:cNvSpPr txBox="1"/>
+          <p:nvPr/>
+        </p:nvSpPr>
+        <p:spPr>
+          <a:xfrm>
+            <a:off x="777240" y="3886200"/>
+            <a:ext cx="3154680" cy="2148840"/>
+          </a:xfrm>
+          <a:prstGeom prst="rect">
+            <a:avLst/>
+          </a:prstGeom>
+          <a:noFill/>
+          <a:ln/>
+        </p:spPr>
+        <p:txBody>
+          <a:bodyPr wrap="square" lIns="0" tIns="0" rIns="0" bIns="0" rtlCol="0" anchor="t"/>
+          <a:lstStyle/>
+          <a:p>
+            <a:pPr marL="203200" indent="-203200">
+              <a:spcAft>
+                <a:spcPts val="600"/>
+              </a:spcAft>
+              <a:buSzPct val="100000"/>
+              <a:buChar char="•"/>
+            </a:pPr>
+            <a:r>
+              <a:rPr lang="en-US" sz="1200" dirty="0">
+                <a:solidFill>
+                  <a:srgbClr val="17292B"/>
+                </a:solidFill>
+              </a:rPr>
+              <a:t>The account lock only keeps out clients the owner has never used</a:t>
+            </a:r>
+            <a:endParaRPr lang="en-US" sz="1200" dirty="0"/>
+          </a:p>
+          <a:p>
+            <a:pPr marL="203200" indent="-203200">
+              <a:spcAft>
+                <a:spcPts val="600"/>
+              </a:spcAft>
+              <a:buSzPct val="100000"/>
+              <a:buChar char="•"/>
+            </a:pPr>
+            <a:r>
+              <a:rPr lang="en-US" sz="1200" dirty="0">
+                <a:solidFill>
+                  <a:srgbClr val="17292B"/>
+                </a:solidFill>
+              </a:rPr>
+              <a:t>A correct sign-in by the owner clears the lock</a:t>
+            </a:r>
+            <a:endParaRPr lang="en-US" sz="1200" dirty="0"/>
+          </a:p>
+          <a:p>
+            <a:pPr marL="203200" indent="-203200">
+              <a:spcAft>
+                <a:spcPts val="600"/>
+              </a:spcAft>
+              <a:buSzPct val="100000"/>
+              <a:buChar char="•"/>
+            </a:pPr>
+            <a:r>
+              <a:rPr lang="en-US" sz="1200" dirty="0">
+                <a:solidFill>
+                  <a:srgbClr val="17292B"/>
+                </a:solidFill>
+              </a:rPr>
+              <a:t>Still true: a stranger can keep someone out of a new device for 15 minutes</a:t>
+            </a:r>
+            <a:endParaRPr lang="en-US" sz="1200" dirty="0"/>
+          </a:p>
+        </p:txBody>
+      </p:sp>
+      <p:sp>
+        <p:nvSpPr>
+          <p:cNvPr id="15" name="signin card 2"/>
+          <p:cNvSpPr/>
+          <p:nvPr/>
+        </p:nvSpPr>
+        <p:spPr>
+          <a:xfrm>
+            <a:off x="4297680" y="3337560"/>
+            <a:ext cx="3566160" cy="2743200"/>
+          </a:xfrm>
+          <a:prstGeom prst="roundRect">
+            <a:avLst>
+              <a:gd name="adj" fmla="val 4000"/>
+            </a:avLst>
+          </a:prstGeom>
+          <a:solidFill>
+            <a:srgbClr val="F2F6F5"/>
+          </a:solidFill>
+          <a:ln w="12700">
+            <a:solidFill>
+              <a:srgbClr val="F2F6F5"/>
+            </a:solidFill>
+            <a:prstDash val="solid"/>
+          </a:ln>
+        </p:spPr>
+      </p:sp>
+      <p:sp>
+        <p:nvSpPr>
+          <p:cNvPr id="16" name="signin title"/>
+          <p:cNvSpPr txBox="1"/>
+          <p:nvPr/>
+        </p:nvSpPr>
+        <p:spPr>
+          <a:xfrm>
+            <a:off x="4526280" y="3429000"/>
+            <a:ext cx="3108960" cy="411480"/>
+          </a:xfrm>
+          <a:prstGeom prst="rect">
+            <a:avLst/>
+          </a:prstGeom>
+          <a:noFill/>
+          <a:ln/>
+        </p:spPr>
+        <p:txBody>
+          <a:bodyPr wrap="square" lIns="0" tIns="0" rIns="0" bIns="0" rtlCol="0" anchor="ctr"/>
+          <a:lstStyle/>
+          <a:p>
+            <a:pPr indent="0" marL="0">
+              <a:buNone/>
+            </a:pPr>
+            <a:r>
+              <a:rPr lang="en-US" sz="1500" b="1" dirty="0">
+                <a:solidFill>
+                  <a:srgbClr val="0E3B3F"/>
+                </a:solidFill>
+                <a:latin typeface="Cambria" pitchFamily="34" charset="0"/>
+                <a:ea typeface="Cambria" pitchFamily="34" charset="-122"/>
+                <a:cs typeface="Cambria" pitchFamily="34" charset="-120"/>
+              </a:rPr>
+              <a:t>Counts survive a restart</a:t>
+            </a:r>
+            <a:endParaRPr lang="en-US" sz="1500" dirty="0"/>
+          </a:p>
+        </p:txBody>
+      </p:sp>
+      <p:sp>
+        <p:nvSpPr>
+          <p:cNvPr id="17" name="bullets"/>
+          <p:cNvSpPr txBox="1"/>
+          <p:nvPr/>
+        </p:nvSpPr>
+        <p:spPr>
+          <a:xfrm>
+            <a:off x="4526280" y="3886200"/>
+            <a:ext cx="3154680" cy="2148840"/>
+          </a:xfrm>
+          <a:prstGeom prst="rect">
+            <a:avLst/>
+          </a:prstGeom>
+          <a:noFill/>
+          <a:ln/>
+        </p:spPr>
+        <p:txBody>
+          <a:bodyPr wrap="square" lIns="0" tIns="0" rIns="0" bIns="0" rtlCol="0" anchor="t"/>
+          <a:lstStyle/>
+          <a:p>
+            <a:pPr marL="203200" indent="-203200">
+              <a:spcAft>
+                <a:spcPts val="600"/>
+              </a:spcAft>
+              <a:buSzPct val="100000"/>
+              <a:buChar char="•"/>
+            </a:pPr>
+            <a:r>
+              <a:rPr lang="en-US" sz="1200" dirty="0">
+                <a:solidFill>
+                  <a:srgbClr val="17292B"/>
+                </a:solidFill>
+              </a:rPr>
+              <a:t>The counters live in the database, updated atomically and expiring by themselves</a:t>
+            </a:r>
+            <a:endParaRPr lang="en-US" sz="1200" dirty="0"/>
+          </a:p>
+          <a:p>
+            <a:pPr marL="203200" indent="-203200">
+              <a:spcAft>
+                <a:spcPts val="600"/>
+              </a:spcAft>
+              <a:buSzPct val="100000"/>
+              <a:buChar char="•"/>
+            </a:pPr>
+            <a:r>
+              <a:rPr lang="en-US" sz="1200" dirty="0">
+                <a:solidFill>
+                  <a:srgbClr val="17292B"/>
+                </a:solidFill>
+              </a:rPr>
+              <a:t>A restart, or a second server process, sees the same counts</a:t>
+            </a:r>
+            <a:endParaRPr lang="en-US" sz="1200" dirty="0"/>
+          </a:p>
+          <a:p>
+            <a:pPr marL="203200" indent="-203200">
+              <a:spcAft>
+                <a:spcPts val="600"/>
+              </a:spcAft>
+              <a:buSzPct val="100000"/>
+              <a:buChar char="•"/>
+            </a:pPr>
+            <a:r>
+              <a:rPr lang="en-US" sz="1200" dirty="0">
+                <a:solidFill>
+                  <a:srgbClr val="17292B"/>
+                </a:solidFill>
+              </a:rPr>
+              <a:t>Addresses are stored only as keyed hashes</a:t>
+            </a:r>
+            <a:endParaRPr lang="en-US" sz="1200" dirty="0"/>
+          </a:p>
+        </p:txBody>
+      </p:sp>
+      <p:sp>
+        <p:nvSpPr>
+          <p:cNvPr id="18" name="signin card 3"/>
+          <p:cNvSpPr/>
+          <p:nvPr/>
+        </p:nvSpPr>
+        <p:spPr>
+          <a:xfrm>
+            <a:off x="8046720" y="3337560"/>
+            <a:ext cx="3566160" cy="2743200"/>
+          </a:xfrm>
+          <a:prstGeom prst="roundRect">
+            <a:avLst>
+              <a:gd name="adj" fmla="val 4000"/>
+            </a:avLst>
+          </a:prstGeom>
+          <a:solidFill>
+            <a:srgbClr val="F2F6F5"/>
+          </a:solidFill>
+          <a:ln w="12700">
+            <a:solidFill>
+              <a:srgbClr val="F2F6F5"/>
+            </a:solidFill>
+            <a:prstDash val="solid"/>
+          </a:ln>
+        </p:spPr>
+      </p:sp>
+      <p:sp>
+        <p:nvSpPr>
+          <p:cNvPr id="19" name="signin title"/>
+          <p:cNvSpPr txBox="1"/>
+          <p:nvPr/>
+        </p:nvSpPr>
+        <p:spPr>
+          <a:xfrm>
+            <a:off x="8275320" y="3429000"/>
+            <a:ext cx="3108960" cy="411480"/>
+          </a:xfrm>
+          <a:prstGeom prst="rect">
+            <a:avLst/>
+          </a:prstGeom>
+          <a:noFill/>
+          <a:ln/>
+        </p:spPr>
+        <p:txBody>
+          <a:bodyPr wrap="square" lIns="0" tIns="0" rIns="0" bIns="0" rtlCol="0" anchor="ctr"/>
+          <a:lstStyle/>
+          <a:p>
+            <a:pPr indent="0" marL="0">
+              <a:buNone/>
+            </a:pPr>
+            <a:r>
+              <a:rPr lang="en-US" sz="1500" b="1" dirty="0">
+                <a:solidFill>
+                  <a:srgbClr val="0E3B3F"/>
+                </a:solidFill>
+                <a:latin typeface="Cambria" pitchFamily="34" charset="0"/>
+                <a:ea typeface="Cambria" pitchFamily="34" charset="-122"/>
+                <a:cs typeface="Cambria" pitchFamily="34" charset="-120"/>
+              </a:rPr>
+              <a:t>Every refusal looks the same</a:t>
+            </a:r>
+            <a:endParaRPr lang="en-US" sz="1500" dirty="0"/>
+          </a:p>
+        </p:txBody>
+      </p:sp>
+      <p:sp>
+        <p:nvSpPr>
+          <p:cNvPr id="20" name="bullets"/>
+          <p:cNvSpPr txBox="1"/>
+          <p:nvPr/>
+        </p:nvSpPr>
+        <p:spPr>
+          <a:xfrm>
+            <a:off x="8275320" y="3886200"/>
+            <a:ext cx="3154680" cy="2148840"/>
+          </a:xfrm>
+          <a:prstGeom prst="rect">
+            <a:avLst/>
+          </a:prstGeom>
+          <a:noFill/>
+          <a:ln/>
+        </p:spPr>
+        <p:txBody>
+          <a:bodyPr wrap="square" lIns="0" tIns="0" rIns="0" bIns="0" rtlCol="0" anchor="t"/>
+          <a:lstStyle/>
+          <a:p>
+            <a:pPr marL="203200" indent="-203200">
+              <a:spcAft>
+                <a:spcPts val="600"/>
+              </a:spcAft>
+              <a:buSzPct val="100000"/>
+              <a:buChar char="•"/>
+            </a:pPr>
+            <a:r>
+              <a:rPr lang="en-US" sz="1200" dirty="0">
+                <a:solidFill>
+                  <a:srgbClr val="17292B"/>
+                </a:solidFill>
+              </a:rPr>
+              <a:t>Unknown badge, wrong password, wrong code, replayed code, locked, inactive: the same steps, the same time, the same answer</a:t>
+            </a:r>
+            <a:endParaRPr lang="en-US" sz="1200" dirty="0"/>
+          </a:p>
+          <a:p>
+            <a:pPr marL="203200" indent="-203200">
+              <a:spcAft>
+                <a:spcPts val="600"/>
+              </a:spcAft>
+              <a:buSzPct val="100000"/>
+              <a:buChar char="•"/>
+            </a:pPr>
+            <a:r>
+              <a:rPr lang="en-US" sz="1200" dirty="0">
+                <a:solidFill>
+                  <a:srgbClr val="17292B"/>
+                </a:solidFill>
+              </a:rPr>
+              <a:t>Comparison of the anti-forgery token and the session signature is constant-time</a:t>
+            </a:r>
+            <a:endParaRPr lang="en-US" sz="1200" dirty="0"/>
+          </a:p>
+          <a:p>
+            <a:pPr marL="203200" indent="-203200">
+              <a:spcAft>
+                <a:spcPts val="600"/>
+              </a:spcAft>
+              <a:buSzPct val="100000"/>
+              <a:buChar char="•"/>
+            </a:pPr>
+            <a:r>
+              <a:rPr lang="en-US" sz="1200" dirty="0">
+                <a:solidFill>
+                  <a:srgbClr val="17292B"/>
+                </a:solidFill>
+              </a:rPr>
+              <a:t>Measured in-process, not across a network</a:t>
+            </a:r>
+            <a:endParaRPr lang="en-US" sz="1200" dirty="0"/>
+          </a:p>
+        </p:txBody>
+      </p:sp>
+      <p:sp>
+        <p:nvSpPr>
+          <p:cNvPr id="25" name="Slide Number Placeholder 0"/>
+          <p:cNvSpPr>
+            <a:spLocks noGrp="1"/>
+          </p:cNvSpPr>
+          <p:nvPr>
+            <p:ph type="sldNum" sz="quarter" idx="4294967295"/>
+          </p:nvPr>
+        </p:nvSpPr>
+        <p:spPr>
+          <a:xfrm>
+            <a:off x="11247120" y="6400800"/>
+            <a:ext cx="548640" cy="274320"/>
+          </a:xfrm>
+          <a:prstGeom prst="rect">
+            <a:avLst/>
+          </a:prstGeom>
+          <a:extLst>
+            <a:ext uri="{C572A759-6A51-4108-AA02-DFA0A04FC94B}">
+              <ma14:wrappingTextBoxFlag xmlns:ma14="http://schemas.microsoft.com/office/mac/drawingml/2011/main" val="0"/>
+            </a:ext>
+          </a:extLst>
+        </p:spPr>
+        <p:txBody>
+          <a:bodyPr/>
+          <a:lstStyle>
+            <a:lvl1pPr>
+              <a:defRPr sz="1000">
+                <a:solidFill>
+                  <a:srgbClr val="5C7173"/>
+                </a:solidFill>
+              </a:defRPr>
+            </a:lvl1pPr>
+          </a:lstStyle>
+          <a:p>
+            <a:pPr algn="l"/>
+            <a:fld id="{F7021451-1387-4CA6-816F-3879F97B5CBC}" type="slidenum">
+              <a:rPr b="0" lang="en-US"/>
+              <a:t>32</a:t>
+            </a:fld>
+            <a:endParaRPr lang="en-US"/>
+          </a:p>
+        </p:txBody>
+      </p:sp>
+    </p:spTree>
+  </p:cSld>
+  <p:clrMapOvr>
+    <a:masterClrMapping/>
+  </p:clrMapOvr>
+</p:sld>
+</file>
+
+<file path=ppt/slides/slide33.xml><?xml version="1.0" encoding="utf-8"?>
+<p:sld xmlns:a="http://schemas.openxmlformats.org/drawingml/2006/main" xmlns:r="http://schemas.openxmlformats.org/officeDocument/2006/relationships" xmlns:p="http://schemas.openxmlformats.org/presentationml/2006/main">
+  <p:cSld name="Slide 33">
+    <p:spTree>
+      <p:nvGrpSpPr>
+        <p:cNvPr id="1" name=""/>
+        <p:cNvGrpSpPr/>
+        <p:nvPr/>
+      </p:nvGrpSpPr>
+      <p:grpSpPr>
+        <a:xfrm>
+          <a:off x="0" y="0"/>
+          <a:ext cx="0" cy="0"/>
+          <a:chOff x="0" y="0"/>
+          <a:chExt cx="0" cy="0"/>
+        </a:xfrm>
+      </p:grpSpPr>
+      <p:sp>
+        <p:nvSpPr>
+          <p:cNvPr id="2" name="Text 0"/>
+          <p:cNvSpPr/>
+          <p:nvPr>
+            <p:ph idx="100" type="title" hasCustomPrompt="1"/>
+          </p:nvPr>
+        </p:nvSpPr>
+        <p:spPr>
+          <a:xfrm>
+            <a:off x="548640" y="365760"/>
+            <a:ext cx="11064240" cy="822960"/>
+          </a:xfrm>
+          <a:prstGeom prst="rect">
+            <a:avLst/>
+          </a:prstGeom>
+          <a:noFill/>
+          <a:ln/>
+        </p:spPr>
+        <p:txBody>
+          <a:bodyPr wrap="square" lIns="0" tIns="0" rIns="0" bIns="0" rtlCol="0" anchor="ctr"/>
+          <a:lstStyle/>
+          <a:p>
+            <a:pPr indent="0" marL="0">
+              <a:buNone/>
+            </a:pPr>
+            <a:r>
+              <a:rPr lang="en-US" sz="3200" b="1" dirty="0">
+                <a:solidFill>
+                  <a:srgbClr val="0E3B3F"/>
+                </a:solidFill>
+                <a:latin typeface="Cambria" pitchFamily="34" charset="0"/>
+                <a:ea typeface="Cambria" pitchFamily="34" charset="-122"/>
+                <a:cs typeface="Cambria" pitchFamily="34" charset="-120"/>
+              </a:rPr>
+              <a:t>Backup, restore and key rotation</a:t>
+            </a:r>
+            <a:endParaRPr lang="en-US" sz="3200" dirty="0"/>
+          </a:p>
+        </p:txBody>
+      </p:sp>
+      <p:sp>
+        <p:nvSpPr>
+          <p:cNvPr id="4" name="backup card"/>
+          <p:cNvSpPr/>
+          <p:nvPr/>
+        </p:nvSpPr>
+        <p:spPr>
+          <a:xfrm>
+            <a:off x="548640" y="1371600"/>
+            <a:ext cx="5394960" cy="4709160"/>
+          </a:xfrm>
+          <a:prstGeom prst="roundRect">
+            <a:avLst>
+              <a:gd name="adj" fmla="val 2330"/>
+            </a:avLst>
+          </a:prstGeom>
+          <a:solidFill>
+            <a:srgbClr val="F2F6F5"/>
+          </a:solidFill>
+          <a:ln w="12700">
+            <a:solidFill>
+              <a:srgbClr val="F2F6F5"/>
+            </a:solidFill>
+            <a:prstDash val="solid"/>
+          </a:ln>
+        </p:spPr>
+      </p:sp>
+      <p:sp>
+        <p:nvSpPr>
+          <p:cNvPr id="5" name="h"/>
+          <p:cNvSpPr txBox="1"/>
+          <p:nvPr/>
+        </p:nvSpPr>
+        <p:spPr>
+          <a:xfrm>
+            <a:off x="777240" y="1463040"/>
+            <a:ext cx="4937760" cy="457200"/>
+          </a:xfrm>
+          <a:prstGeom prst="rect">
+            <a:avLst/>
+          </a:prstGeom>
+          <a:noFill/>
+          <a:ln/>
+        </p:spPr>
+        <p:txBody>
+          <a:bodyPr wrap="square" lIns="0" tIns="0" rIns="0" bIns="0" rtlCol="0" anchor="ctr"/>
+          <a:lstStyle/>
+          <a:p>
+            <a:pPr indent="0" marL="0">
+              <a:buNone/>
+            </a:pPr>
+            <a:r>
+              <a:rPr lang="en-US" sz="1600" b="1" dirty="0">
+                <a:solidFill>
+                  <a:srgbClr val="0E3B3F"/>
+                </a:solidFill>
+                <a:latin typeface="Cambria" pitchFamily="34" charset="0"/>
+                <a:ea typeface="Cambria" pitchFamily="34" charset="-122"/>
+                <a:cs typeface="Cambria" pitchFamily="34" charset="-120"/>
+              </a:rPr>
+              <a:t>Encrypted backup, proven by wiping</a:t>
+            </a:r>
+            <a:endParaRPr lang="en-US" sz="1600" dirty="0"/>
+          </a:p>
+        </p:txBody>
+      </p:sp>
+      <p:sp>
+        <p:nvSpPr>
+          <p:cNvPr id="6" name="bullets"/>
+          <p:cNvSpPr txBox="1"/>
+          <p:nvPr/>
+        </p:nvSpPr>
+        <p:spPr>
+          <a:xfrm>
+            <a:off x="777240" y="2011680"/>
+            <a:ext cx="4937760" cy="3977640"/>
+          </a:xfrm>
+          <a:prstGeom prst="rect">
+            <a:avLst/>
+          </a:prstGeom>
+          <a:noFill/>
+          <a:ln/>
+        </p:spPr>
+        <p:txBody>
+          <a:bodyPr wrap="square" lIns="0" tIns="0" rIns="0" bIns="0" rtlCol="0" anchor="t"/>
+          <a:lstStyle/>
+          <a:p>
+            <a:pPr marL="203200" indent="-203200">
+              <a:spcAft>
+                <a:spcPts val="600"/>
+              </a:spcAft>
+              <a:buSzPct val="100000"/>
+              <a:buChar char="•"/>
+            </a:pPr>
+            <a:r>
+              <a:rPr lang="en-US" sz="1250" dirty="0">
+                <a:solidFill>
+                  <a:srgbClr val="17292B"/>
+                </a:solidFill>
+              </a:rPr>
+              <a:t>One encrypted file (AES-256, 600,000 key-stretching rounds, key from a file) holding both databases, both audit logs and the audit mirror, plus a checksum. It never overwrites</a:t>
+            </a:r>
+            <a:endParaRPr lang="en-US" sz="1250" dirty="0"/>
+          </a:p>
+          <a:p>
+            <a:pPr marL="203200" indent="-203200">
+              <a:spcAft>
+                <a:spcPts val="600"/>
+              </a:spcAft>
+              <a:buSzPct val="100000"/>
+              <a:buChar char="•"/>
+            </a:pPr>
+            <a:r>
+              <a:rPr lang="en-US" sz="1250" dirty="0">
+                <a:solidFill>
+                  <a:srgbClr val="17292B"/>
+                </a:solidFill>
+              </a:rPr>
+              <a:t>Restore refuses a wrong key, a damaged file or contents that fail their checksums, and fails loudly if any document does not restore</a:t>
+            </a:r>
+            <a:endParaRPr lang="en-US" sz="1250" dirty="0"/>
+          </a:p>
+          <a:p>
+            <a:pPr marL="203200" indent="-203200">
+              <a:spcAft>
+                <a:spcPts val="600"/>
+              </a:spcAft>
+              <a:buSzPct val="100000"/>
+              <a:buChar char="•"/>
+            </a:pPr>
+            <a:r>
+              <a:rPr lang="en-US" sz="1250" dirty="0">
+                <a:solidFill>
+                  <a:srgbClr val="17292B"/>
+                </a:solidFill>
+              </a:rPr>
+              <a:t>The test (23 checks): put users and 12 claims in through the real API, back up, destroy every volume, restore. The same administrator signs in with the same password and authenticator; the audit chains verify</a:t>
+            </a:r>
+            <a:endParaRPr lang="en-US" sz="1250" dirty="0"/>
+          </a:p>
+          <a:p>
+            <a:pPr marL="203200" indent="-203200">
+              <a:spcAft>
+                <a:spcPts val="600"/>
+              </a:spcAft>
+              <a:buSzPct val="100000"/>
+              <a:buChar char="•"/>
+            </a:pPr>
+            <a:r>
+              <a:rPr lang="en-US" sz="1250" dirty="0">
+                <a:solidFill>
+                  <a:srgbClr val="17292B"/>
+                </a:solidFill>
+              </a:rPr>
+              <a:t>Testing found two real problems, both fixed: a restore that replaced the database's own accounts mid-way, and a script that reported success after a failure</a:t>
+            </a:r>
+            <a:endParaRPr lang="en-US" sz="1250" dirty="0"/>
+          </a:p>
+        </p:txBody>
+      </p:sp>
+      <p:sp>
+        <p:nvSpPr>
+          <p:cNvPr id="7" name="rotation card"/>
+          <p:cNvSpPr/>
+          <p:nvPr/>
+        </p:nvSpPr>
+        <p:spPr>
+          <a:xfrm>
+            <a:off x="6217920" y="1371600"/>
+            <a:ext cx="5394960" cy="4709160"/>
+          </a:xfrm>
+          <a:prstGeom prst="roundRect">
+            <a:avLst>
+              <a:gd name="adj" fmla="val 2330"/>
+            </a:avLst>
+          </a:prstGeom>
+          <a:solidFill>
+            <a:srgbClr val="F2F6F5"/>
+          </a:solidFill>
+          <a:ln w="12700">
+            <a:solidFill>
+              <a:srgbClr val="F2F6F5"/>
+            </a:solidFill>
+            <a:prstDash val="solid"/>
+          </a:ln>
+        </p:spPr>
+      </p:sp>
+      <p:sp>
+        <p:nvSpPr>
+          <p:cNvPr id="8" name="h"/>
+          <p:cNvSpPr txBox="1"/>
+          <p:nvPr/>
+        </p:nvSpPr>
+        <p:spPr>
+          <a:xfrm>
+            <a:off x="6446520" y="1463040"/>
+            <a:ext cx="4937760" cy="457200"/>
+          </a:xfrm>
+          <a:prstGeom prst="rect">
+            <a:avLst/>
+          </a:prstGeom>
+          <a:noFill/>
+          <a:ln/>
+        </p:spPr>
+        <p:txBody>
+          <a:bodyPr wrap="square" lIns="0" tIns="0" rIns="0" bIns="0" rtlCol="0" anchor="ctr"/>
+          <a:lstStyle/>
+          <a:p>
+            <a:pPr indent="0" marL="0">
+              <a:buNone/>
+            </a:pPr>
+            <a:r>
+              <a:rPr lang="en-US" sz="1600" b="1" dirty="0">
+                <a:solidFill>
+                  <a:srgbClr val="0E3B3F"/>
+                </a:solidFill>
+                <a:latin typeface="Cambria" pitchFamily="34" charset="0"/>
+                <a:ea typeface="Cambria" pitchFamily="34" charset="-122"/>
+                <a:cs typeface="Cambria" pitchFamily="34" charset="-120"/>
+              </a:rPr>
+              <a:t>Keys can be rotated</a:t>
+            </a:r>
+            <a:endParaRPr lang="en-US" sz="1600" dirty="0"/>
+          </a:p>
+        </p:txBody>
+      </p:sp>
+      <p:sp>
+        <p:nvSpPr>
+          <p:cNvPr id="9" name="bullets"/>
+          <p:cNvSpPr txBox="1"/>
+          <p:nvPr/>
+        </p:nvSpPr>
+        <p:spPr>
+          <a:xfrm>
+            <a:off x="6446520" y="2011680"/>
+            <a:ext cx="4937760" cy="3977640"/>
+          </a:xfrm>
+          <a:prstGeom prst="rect">
+            <a:avLst/>
+          </a:prstGeom>
+          <a:noFill/>
+          <a:ln/>
+        </p:spPr>
+        <p:txBody>
+          <a:bodyPr wrap="square" lIns="0" tIns="0" rIns="0" bIns="0" rtlCol="0" anchor="t"/>
+          <a:lstStyle/>
+          <a:p>
+            <a:pPr marL="203200" indent="-203200">
+              <a:spcAft>
+                <a:spcPts val="600"/>
+              </a:spcAft>
+              <a:buSzPct val="100000"/>
+              <a:buChar char="•"/>
+            </a:pPr>
+            <a:r>
+              <a:rPr lang="en-US" sz="1250" dirty="0">
+                <a:solidFill>
+                  <a:srgbClr val="17292B"/>
+                </a:solidFill>
+              </a:rPr>
+              <a:t>cg rotate-key re-encrypts every stored claim, result, explanation, decision and name from the current data key to a new one, and rebuilds the patient index</a:t>
+            </a:r>
+            <a:endParaRPr lang="en-US" sz="1250" dirty="0"/>
+          </a:p>
+          <a:p>
+            <a:pPr marL="203200" indent="-203200">
+              <a:spcAft>
+                <a:spcPts val="600"/>
+              </a:spcAft>
+              <a:buSzPct val="100000"/>
+              <a:buChar char="•"/>
+            </a:pPr>
+            <a:r>
+              <a:rPr lang="en-US" sz="1250" dirty="0">
+                <a:solidFill>
+                  <a:srgbClr val="17292B"/>
+                </a:solidFill>
+              </a:rPr>
+              <a:t>It stops rather than damage a document that opens with neither key, skips and reports a document changed meanwhile, and can be repeated after an interruption</a:t>
+            </a:r>
+            <a:endParaRPr lang="en-US" sz="1250" dirty="0"/>
+          </a:p>
+          <a:p>
+            <a:pPr marL="203200" indent="-203200">
+              <a:spcAft>
+                <a:spcPts val="600"/>
+              </a:spcAft>
+              <a:buSzPct val="100000"/>
+              <a:buChar char="•"/>
+            </a:pPr>
+            <a:r>
+              <a:rPr lang="en-US" sz="1250" dirty="0">
+                <a:solidFill>
+                  <a:srgbClr val="17292B"/>
+                </a:solidFill>
+              </a:rPr>
+              <a:t>A dry run first. Tested against a real database: the old key is refused afterwards and the stored data holds nothing readable</a:t>
+            </a:r>
+            <a:endParaRPr lang="en-US" sz="1250" dirty="0"/>
+          </a:p>
+          <a:p>
+            <a:pPr marL="203200" indent="-203200">
+              <a:spcAft>
+                <a:spcPts val="600"/>
+              </a:spcAft>
+              <a:buSzPct val="100000"/>
+              <a:buChar char="•"/>
+            </a:pPr>
+            <a:r>
+              <a:rPr lang="en-US" sz="1250" dirty="0">
+                <a:solidFill>
+                  <a:srgbClr val="17292B"/>
+                </a:solidFill>
+              </a:rPr>
+              <a:t>cg rotate-fernet-key does the same for authenticator seeds, so nobody has to enrol again</a:t>
+            </a:r>
+            <a:endParaRPr lang="en-US" sz="1250" dirty="0"/>
+          </a:p>
+          <a:p>
+            <a:pPr marL="203200" indent="-203200">
+              <a:spcAft>
+                <a:spcPts val="600"/>
+              </a:spcAft>
+              <a:buSzPct val="100000"/>
+              <a:buChar char="•"/>
+            </a:pPr>
+            <a:r>
+              <a:rPr lang="en-US" sz="1250" dirty="0">
+                <a:solidFill>
+                  <a:srgbClr val="17292B"/>
+                </a:solidFill>
+              </a:rPr>
+              <a:t>The key for claim data and the key for authenticator seeds are separate</a:t>
+            </a:r>
+            <a:endParaRPr lang="en-US" sz="1250" dirty="0"/>
+          </a:p>
+        </p:txBody>
+      </p:sp>
+      <p:sp>
+        <p:nvSpPr>
+          <p:cNvPr id="25" name="Slide Number Placeholder 0"/>
+          <p:cNvSpPr>
+            <a:spLocks noGrp="1"/>
+          </p:cNvSpPr>
+          <p:nvPr>
+            <p:ph type="sldNum" sz="quarter" idx="4294967295"/>
+          </p:nvPr>
+        </p:nvSpPr>
+        <p:spPr>
+          <a:xfrm>
+            <a:off x="11247120" y="6400800"/>
+            <a:ext cx="548640" cy="274320"/>
+          </a:xfrm>
+          <a:prstGeom prst="rect">
+            <a:avLst/>
+          </a:prstGeom>
+          <a:extLst>
+            <a:ext uri="{C572A759-6A51-4108-AA02-DFA0A04FC94B}">
+              <ma14:wrappingTextBoxFlag xmlns:ma14="http://schemas.microsoft.com/office/mac/drawingml/2011/main" val="0"/>
+            </a:ext>
+          </a:extLst>
+        </p:spPr>
+        <p:txBody>
+          <a:bodyPr/>
+          <a:lstStyle>
+            <a:lvl1pPr>
+              <a:defRPr sz="1000">
+                <a:solidFill>
+                  <a:srgbClr val="5C7173"/>
+                </a:solidFill>
+              </a:defRPr>
+            </a:lvl1pPr>
+          </a:lstStyle>
+          <a:p>
+            <a:pPr algn="l"/>
+            <a:fld id="{F7021451-1387-4CA6-816F-3879F97B5CBC}" type="slidenum">
+              <a:rPr b="0" lang="en-US"/>
+              <a:t>33</a:t>
+            </a:fld>
+            <a:endParaRPr lang="en-US"/>
+          </a:p>
+        </p:txBody>
+      </p:sp>
+    </p:spTree>
+  </p:cSld>
+  <p:clrMapOvr>
+    <a:masterClrMapping/>
+  </p:clrMapOvr>
+</p:sld>
+</file>
+
+<file path=ppt/slides/slide34.xml><?xml version="1.0" encoding="utf-8"?>
+<p:sld xmlns:a="http://schemas.openxmlformats.org/drawingml/2006/main" xmlns:r="http://schemas.openxmlformats.org/officeDocument/2006/relationships" xmlns:p="http://schemas.openxmlformats.org/presentationml/2006/main">
+  <p:cSld name="Slide 34">
+    <p:spTree>
+      <p:nvGrpSpPr>
+        <p:cNvPr id="1" name=""/>
+        <p:cNvGrpSpPr/>
+        <p:nvPr/>
+      </p:nvGrpSpPr>
+      <p:grpSpPr>
+        <a:xfrm>
+          <a:off x="0" y="0"/>
+          <a:ext cx="0" cy="0"/>
+          <a:chOff x="0" y="0"/>
+          <a:chExt cx="0" cy="0"/>
+        </a:xfrm>
+      </p:grpSpPr>
+      <p:sp>
+        <p:nvSpPr>
+          <p:cNvPr id="2" name="Text 0"/>
+          <p:cNvSpPr/>
+          <p:nvPr>
+            <p:ph idx="100" type="title" hasCustomPrompt="1"/>
+          </p:nvPr>
+        </p:nvSpPr>
+        <p:spPr>
+          <a:xfrm>
+            <a:off x="548640" y="365760"/>
+            <a:ext cx="11064240" cy="822960"/>
+          </a:xfrm>
+          <a:prstGeom prst="rect">
+            <a:avLst/>
+          </a:prstGeom>
+          <a:noFill/>
+          <a:ln/>
+        </p:spPr>
+        <p:txBody>
+          <a:bodyPr wrap="square" lIns="0" tIns="0" rIns="0" bIns="0" rtlCol="0" anchor="ctr"/>
+          <a:lstStyle/>
+          <a:p>
+            <a:pPr indent="0" marL="0">
+              <a:buNone/>
+            </a:pPr>
+            <a:r>
+              <a:rPr lang="en-US" sz="3200" b="1" dirty="0">
+                <a:solidFill>
+                  <a:srgbClr val="0E3B3F"/>
+                </a:solidFill>
+                <a:latin typeface="Cambria" pitchFamily="34" charset="0"/>
+                <a:ea typeface="Cambria" pitchFamily="34" charset="-122"/>
+                <a:cs typeface="Cambria" pitchFamily="34" charset="-120"/>
+              </a:rPr>
+              <a:t>Stress tests: floods and hostile input</a:t>
+            </a:r>
+            <a:endParaRPr lang="en-US" sz="3200" dirty="0"/>
+          </a:p>
+        </p:txBody>
+      </p:sp>
+      <p:sp>
+        <p:nvSpPr>
+          <p:cNvPr id="4" name="stat"/>
+          <p:cNvSpPr txBox="1"/>
+          <p:nvPr/>
+        </p:nvSpPr>
+        <p:spPr>
+          <a:xfrm>
+            <a:off x="548640" y="1371600"/>
+            <a:ext cx="2560320" cy="822960"/>
+          </a:xfrm>
+          <a:prstGeom prst="rect">
+            <a:avLst/>
+          </a:prstGeom>
+          <a:noFill/>
+          <a:ln/>
+        </p:spPr>
+        <p:txBody>
+          <a:bodyPr wrap="square" lIns="0" tIns="0" rIns="0" bIns="0" rtlCol="0" anchor="b"/>
+          <a:lstStyle/>
+          <a:p>
+            <a:pPr indent="0" marL="0">
+              <a:buNone/>
+            </a:pPr>
+            <a:r>
+              <a:rPr lang="en-US" sz="3600" b="1" dirty="0">
+                <a:solidFill>
+                  <a:srgbClr val="14746F"/>
+                </a:solidFill>
+                <a:latin typeface="Cambria" pitchFamily="34" charset="0"/>
+                <a:ea typeface="Cambria" pitchFamily="34" charset="-122"/>
+                <a:cs typeface="Cambria" pitchFamily="34" charset="-120"/>
+              </a:rPr>
+              <a:t>29,700</a:t>
+            </a:r>
+            <a:endParaRPr lang="en-US" sz="3600" dirty="0"/>
+          </a:p>
+        </p:txBody>
+      </p:sp>
+      <p:sp>
+        <p:nvSpPr>
+          <p:cNvPr id="5" name="stat label"/>
+          <p:cNvSpPr txBox="1"/>
+          <p:nvPr/>
+        </p:nvSpPr>
+        <p:spPr>
+          <a:xfrm>
+            <a:off x="548640" y="2240280"/>
+            <a:ext cx="2560320" cy="822960"/>
+          </a:xfrm>
+          <a:prstGeom prst="rect">
+            <a:avLst/>
+          </a:prstGeom>
+          <a:noFill/>
+          <a:ln/>
+        </p:spPr>
+        <p:txBody>
+          <a:bodyPr wrap="square" lIns="0" tIns="0" rIns="0" bIns="0" rtlCol="0" anchor="t"/>
+          <a:lstStyle/>
+          <a:p>
+            <a:pPr indent="0" marL="0">
+              <a:buNone/>
+            </a:pPr>
+            <a:r>
+              <a:rPr lang="en-US" sz="1400" dirty="0">
+                <a:solidFill>
+                  <a:srgbClr val="5C7173"/>
+                </a:solidFill>
+              </a:rPr>
+              <a:t>requests from 300 clients in 20 seconds, all answered</a:t>
+            </a:r>
+            <a:endParaRPr lang="en-US" sz="1400" dirty="0"/>
+          </a:p>
+        </p:txBody>
+      </p:sp>
+      <p:sp>
+        <p:nvSpPr>
+          <p:cNvPr id="6" name="stat"/>
+          <p:cNvSpPr txBox="1"/>
+          <p:nvPr/>
+        </p:nvSpPr>
+        <p:spPr>
+          <a:xfrm>
+            <a:off x="3383280" y="1371600"/>
+            <a:ext cx="2560320" cy="822960"/>
+          </a:xfrm>
+          <a:prstGeom prst="rect">
+            <a:avLst/>
+          </a:prstGeom>
+          <a:noFill/>
+          <a:ln/>
+        </p:spPr>
+        <p:txBody>
+          <a:bodyPr wrap="square" lIns="0" tIns="0" rIns="0" bIns="0" rtlCol="0" anchor="b"/>
+          <a:lstStyle/>
+          <a:p>
+            <a:pPr indent="0" marL="0">
+              <a:buNone/>
+            </a:pPr>
+            <a:r>
+              <a:rPr lang="en-US" sz="3600" b="1" dirty="0">
+                <a:solidFill>
+                  <a:srgbClr val="14746F"/>
+                </a:solidFill>
+                <a:latin typeface="Cambria" pitchFamily="34" charset="0"/>
+                <a:ea typeface="Cambria" pitchFamily="34" charset="-122"/>
+                <a:cs typeface="Cambria" pitchFamily="34" charset="-120"/>
+              </a:rPr>
+              <a:t>400</a:t>
+            </a:r>
+            <a:endParaRPr lang="en-US" sz="3600" dirty="0"/>
+          </a:p>
+        </p:txBody>
+      </p:sp>
+      <p:sp>
+        <p:nvSpPr>
+          <p:cNvPr id="7" name="stat label"/>
+          <p:cNvSpPr txBox="1"/>
+          <p:nvPr/>
+        </p:nvSpPr>
+        <p:spPr>
+          <a:xfrm>
+            <a:off x="3383280" y="2240280"/>
+            <a:ext cx="2560320" cy="822960"/>
+          </a:xfrm>
+          <a:prstGeom prst="rect">
+            <a:avLst/>
+          </a:prstGeom>
+          <a:noFill/>
+          <a:ln/>
+        </p:spPr>
+        <p:txBody>
+          <a:bodyPr wrap="square" lIns="0" tIns="0" rIns="0" bIns="0" rtlCol="0" anchor="t"/>
+          <a:lstStyle/>
+          <a:p>
+            <a:pPr indent="0" marL="0">
+              <a:buNone/>
+            </a:pPr>
+            <a:r>
+              <a:rPr lang="en-US" sz="1400" dirty="0">
+                <a:solidFill>
+                  <a:srgbClr val="5C7173"/>
+                </a:solidFill>
+              </a:rPr>
+              <a:t>parallel sign-ins: ordinary refusals, then 429, no server error</a:t>
+            </a:r>
+            <a:endParaRPr lang="en-US" sz="1400" dirty="0"/>
+          </a:p>
+        </p:txBody>
+      </p:sp>
+      <p:sp>
+        <p:nvSpPr>
+          <p:cNvPr id="8" name="stat"/>
+          <p:cNvSpPr txBox="1"/>
+          <p:nvPr/>
+        </p:nvSpPr>
+        <p:spPr>
+          <a:xfrm>
+            <a:off x="6217920" y="1371600"/>
+            <a:ext cx="2560320" cy="822960"/>
+          </a:xfrm>
+          <a:prstGeom prst="rect">
+            <a:avLst/>
+          </a:prstGeom>
+          <a:noFill/>
+          <a:ln/>
+        </p:spPr>
+        <p:txBody>
+          <a:bodyPr wrap="square" lIns="0" tIns="0" rIns="0" bIns="0" rtlCol="0" anchor="b"/>
+          <a:lstStyle/>
+          <a:p>
+            <a:pPr indent="0" marL="0">
+              <a:buNone/>
+            </a:pPr>
+            <a:r>
+              <a:rPr lang="en-US" sz="3600" b="1" dirty="0">
+                <a:solidFill>
+                  <a:srgbClr val="14746F"/>
+                </a:solidFill>
+                <a:latin typeface="Cambria" pitchFamily="34" charset="0"/>
+                <a:ea typeface="Cambria" pitchFamily="34" charset="-122"/>
+                <a:cs typeface="Cambria" pitchFamily="34" charset="-120"/>
+              </a:rPr>
+              <a:t>1 to 12 ms</a:t>
+            </a:r>
+            <a:endParaRPr lang="en-US" sz="3600" dirty="0"/>
+          </a:p>
+        </p:txBody>
+      </p:sp>
+      <p:sp>
+        <p:nvSpPr>
+          <p:cNvPr id="9" name="stat label"/>
+          <p:cNvSpPr txBox="1"/>
+          <p:nvPr/>
+        </p:nvSpPr>
+        <p:spPr>
+          <a:xfrm>
+            <a:off x="6217920" y="2240280"/>
+            <a:ext cx="2560320" cy="822960"/>
+          </a:xfrm>
+          <a:prstGeom prst="rect">
+            <a:avLst/>
+          </a:prstGeom>
+          <a:noFill/>
+          <a:ln/>
+        </p:spPr>
+        <p:txBody>
+          <a:bodyPr wrap="square" lIns="0" tIns="0" rIns="0" bIns="0" rtlCol="0" anchor="t"/>
+          <a:lstStyle/>
+          <a:p>
+            <a:pPr indent="0" marL="0">
+              <a:buNone/>
+            </a:pPr>
+            <a:r>
+              <a:rPr lang="en-US" sz="1400" dirty="0">
+                <a:solidFill>
+                  <a:srgbClr val="5C7173"/>
+                </a:solidFill>
+              </a:rPr>
+              <a:t>answer time for a polite client during every flood</a:t>
+            </a:r>
+            <a:endParaRPr lang="en-US" sz="1400" dirty="0"/>
+          </a:p>
+        </p:txBody>
+      </p:sp>
+      <p:sp>
+        <p:nvSpPr>
+          <p:cNvPr id="10" name="stat"/>
+          <p:cNvSpPr txBox="1"/>
+          <p:nvPr/>
+        </p:nvSpPr>
+        <p:spPr>
+          <a:xfrm>
+            <a:off x="9052560" y="1371600"/>
+            <a:ext cx="2560320" cy="822960"/>
+          </a:xfrm>
+          <a:prstGeom prst="rect">
+            <a:avLst/>
+          </a:prstGeom>
+          <a:noFill/>
+          <a:ln/>
+        </p:spPr>
+        <p:txBody>
+          <a:bodyPr wrap="square" lIns="0" tIns="0" rIns="0" bIns="0" rtlCol="0" anchor="b"/>
+          <a:lstStyle/>
+          <a:p>
+            <a:pPr indent="0" marL="0">
+              <a:buNone/>
+            </a:pPr>
+            <a:r>
+              <a:rPr lang="en-US" sz="3600" b="1" dirty="0">
+                <a:solidFill>
+                  <a:srgbClr val="14746F"/>
+                </a:solidFill>
+                <a:latin typeface="Cambria" pitchFamily="34" charset="0"/>
+                <a:ea typeface="Cambria" pitchFamily="34" charset="-122"/>
+                <a:cs typeface="Cambria" pitchFamily="34" charset="-120"/>
+              </a:rPr>
+              <a:t>87 MB</a:t>
+            </a:r>
+            <a:endParaRPr lang="en-US" sz="3600" dirty="0"/>
+          </a:p>
+        </p:txBody>
+      </p:sp>
+      <p:sp>
+        <p:nvSpPr>
+          <p:cNvPr id="11" name="stat label"/>
+          <p:cNvSpPr txBox="1"/>
+          <p:nvPr/>
+        </p:nvSpPr>
+        <p:spPr>
+          <a:xfrm>
+            <a:off x="9052560" y="2240280"/>
+            <a:ext cx="2560320" cy="822960"/>
+          </a:xfrm>
+          <a:prstGeom prst="rect">
+            <a:avLst/>
+          </a:prstGeom>
+          <a:noFill/>
+          <a:ln/>
+        </p:spPr>
+        <p:txBody>
+          <a:bodyPr wrap="square" lIns="0" tIns="0" rIns="0" bIns="0" rtlCol="0" anchor="t"/>
+          <a:lstStyle/>
+          <a:p>
+            <a:pPr indent="0" marL="0">
+              <a:buNone/>
+            </a:pPr>
+            <a:r>
+              <a:rPr lang="en-US" sz="1400" dirty="0">
+                <a:solidFill>
+                  <a:srgbClr val="5C7173"/>
+                </a:solidFill>
+              </a:rPr>
+              <a:t>peak memory under flood (66 MB idle)</a:t>
+            </a:r>
+            <a:endParaRPr lang="en-US" sz="1400" dirty="0"/>
+          </a:p>
+        </p:txBody>
+      </p:sp>
+      <p:sp>
+        <p:nvSpPr>
+          <p:cNvPr id="12" name="stress card 1"/>
+          <p:cNvSpPr/>
+          <p:nvPr/>
+        </p:nvSpPr>
+        <p:spPr>
+          <a:xfrm>
+            <a:off x="548640" y="3337560"/>
+            <a:ext cx="3566160" cy="2743200"/>
+          </a:xfrm>
+          <a:prstGeom prst="roundRect">
+            <a:avLst>
+              <a:gd name="adj" fmla="val 4000"/>
+            </a:avLst>
+          </a:prstGeom>
+          <a:solidFill>
+            <a:srgbClr val="F2F6F5"/>
+          </a:solidFill>
+          <a:ln w="12700">
+            <a:solidFill>
+              <a:srgbClr val="F2F6F5"/>
+            </a:solidFill>
+            <a:prstDash val="solid"/>
+          </a:ln>
+        </p:spPr>
+      </p:sp>
+      <p:sp>
+        <p:nvSpPr>
+          <p:cNvPr id="13" name="stress title"/>
+          <p:cNvSpPr txBox="1"/>
+          <p:nvPr/>
+        </p:nvSpPr>
+        <p:spPr>
+          <a:xfrm>
+            <a:off x="777240" y="3429000"/>
+            <a:ext cx="3108960" cy="411480"/>
+          </a:xfrm>
+          <a:prstGeom prst="rect">
+            <a:avLst/>
+          </a:prstGeom>
+          <a:noFill/>
+          <a:ln/>
+        </p:spPr>
+        <p:txBody>
+          <a:bodyPr wrap="square" lIns="0" tIns="0" rIns="0" bIns="0" rtlCol="0" anchor="ctr"/>
+          <a:lstStyle/>
+          <a:p>
+            <a:pPr indent="0" marL="0">
+              <a:buNone/>
+            </a:pPr>
+            <a:r>
+              <a:rPr lang="en-US" sz="1500" b="1" dirty="0">
+                <a:solidFill>
+                  <a:srgbClr val="0E3B3F"/>
+                </a:solidFill>
+                <a:latin typeface="Cambria" pitchFamily="34" charset="0"/>
+                <a:ea typeface="Cambria" pitchFamily="34" charset="-122"/>
+                <a:cs typeface="Cambria" pitchFamily="34" charset="-120"/>
+              </a:rPr>
+              <a:t>The flood harness</a:t>
+            </a:r>
+            <a:endParaRPr lang="en-US" sz="1500" dirty="0"/>
+          </a:p>
+        </p:txBody>
+      </p:sp>
+      <p:sp>
+        <p:nvSpPr>
+          <p:cNvPr id="14" name="bullets"/>
+          <p:cNvSpPr txBox="1"/>
+          <p:nvPr/>
+        </p:nvSpPr>
+        <p:spPr>
+          <a:xfrm>
+            <a:off x="777240" y="3886200"/>
+            <a:ext cx="3154680" cy="2148840"/>
+          </a:xfrm>
+          <a:prstGeom prst="rect">
+            <a:avLst/>
+          </a:prstGeom>
+          <a:noFill/>
+          <a:ln/>
+        </p:spPr>
+        <p:txBody>
+          <a:bodyPr wrap="square" lIns="0" tIns="0" rIns="0" bIns="0" rtlCol="0" anchor="t"/>
+          <a:lstStyle/>
+          <a:p>
+            <a:pPr marL="203200" indent="-203200">
+              <a:spcAft>
+                <a:spcPts val="600"/>
+              </a:spcAft>
+              <a:buSzPct val="100000"/>
+              <a:buChar char="•"/>
+            </a:pPr>
+            <a:r>
+              <a:rPr lang="en-US" sz="1200" dirty="0">
+                <a:solidFill>
+                  <a:srgbClr val="17292B"/>
+                </a:solidFill>
+              </a:rPr>
+              <a:t>16 checks: 3,000 idle connections, 300 busy clients, 200 clients without a session (all refused), a 400-client sign-in flood, 100 clients sending large bodies</a:t>
+            </a:r>
+            <a:endParaRPr lang="en-US" sz="1200" dirty="0"/>
+          </a:p>
+          <a:p>
+            <a:pPr marL="203200" indent="-203200">
+              <a:spcAft>
+                <a:spcPts val="600"/>
+              </a:spcAft>
+              <a:buSzPct val="100000"/>
+              <a:buChar char="•"/>
+            </a:pPr>
+            <a:r>
+              <a:rPr lang="en-US" sz="1200" dirty="0">
+                <a:solidFill>
+                  <a:srgbClr val="17292B"/>
+                </a:solidFill>
+              </a:rPr>
+              <a:t>The server was healthy afterwards</a:t>
+            </a:r>
+            <a:endParaRPr lang="en-US" sz="1200" dirty="0"/>
+          </a:p>
+          <a:p>
+            <a:pPr marL="203200" indent="-203200">
+              <a:spcAft>
+                <a:spcPts val="600"/>
+              </a:spcAft>
+              <a:buSzPct val="100000"/>
+              <a:buChar char="•"/>
+            </a:pPr>
+            <a:r>
+              <a:rPr lang="en-US" sz="1200" dirty="0">
+                <a:solidFill>
+                  <a:srgbClr val="17292B"/>
+                </a:solidFill>
+              </a:rPr>
+              <a:t>One machine and one address: no distributed attack</a:t>
+            </a:r>
+            <a:endParaRPr lang="en-US" sz="1200" dirty="0"/>
+          </a:p>
+        </p:txBody>
+      </p:sp>
+      <p:sp>
+        <p:nvSpPr>
+          <p:cNvPr id="15" name="stress card 2"/>
+          <p:cNvSpPr/>
+          <p:nvPr/>
+        </p:nvSpPr>
+        <p:spPr>
+          <a:xfrm>
+            <a:off x="4297680" y="3337560"/>
+            <a:ext cx="3566160" cy="2743200"/>
+          </a:xfrm>
+          <a:prstGeom prst="roundRect">
+            <a:avLst>
+              <a:gd name="adj" fmla="val 4000"/>
+            </a:avLst>
+          </a:prstGeom>
+          <a:solidFill>
+            <a:srgbClr val="F2F6F5"/>
+          </a:solidFill>
+          <a:ln w="12700">
+            <a:solidFill>
+              <a:srgbClr val="F2F6F5"/>
+            </a:solidFill>
+            <a:prstDash val="solid"/>
+          </a:ln>
+        </p:spPr>
+      </p:sp>
+      <p:sp>
+        <p:nvSpPr>
+          <p:cNvPr id="16" name="stress title"/>
+          <p:cNvSpPr txBox="1"/>
+          <p:nvPr/>
+        </p:nvSpPr>
+        <p:spPr>
+          <a:xfrm>
+            <a:off x="4526280" y="3429000"/>
+            <a:ext cx="3108960" cy="411480"/>
+          </a:xfrm>
+          <a:prstGeom prst="rect">
+            <a:avLst/>
+          </a:prstGeom>
+          <a:noFill/>
+          <a:ln/>
+        </p:spPr>
+        <p:txBody>
+          <a:bodyPr wrap="square" lIns="0" tIns="0" rIns="0" bIns="0" rtlCol="0" anchor="ctr"/>
+          <a:lstStyle/>
+          <a:p>
+            <a:pPr indent="0" marL="0">
+              <a:buNone/>
+            </a:pPr>
+            <a:r>
+              <a:rPr lang="en-US" sz="1500" b="1" dirty="0">
+                <a:solidFill>
+                  <a:srgbClr val="0E3B3F"/>
+                </a:solidFill>
+                <a:latin typeface="Cambria" pitchFamily="34" charset="0"/>
+                <a:ea typeface="Cambria" pitchFamily="34" charset="-122"/>
+                <a:cs typeface="Cambria" pitchFamily="34" charset="-120"/>
+              </a:rPr>
+              <a:t>Hostile input in a real browser</a:t>
+            </a:r>
+            <a:endParaRPr lang="en-US" sz="1500" dirty="0"/>
+          </a:p>
+        </p:txBody>
+      </p:sp>
+      <p:sp>
+        <p:nvSpPr>
+          <p:cNvPr id="17" name="bullets"/>
+          <p:cNvSpPr txBox="1"/>
+          <p:nvPr/>
+        </p:nvSpPr>
+        <p:spPr>
+          <a:xfrm>
+            <a:off x="4526280" y="3886200"/>
+            <a:ext cx="3154680" cy="2148840"/>
+          </a:xfrm>
+          <a:prstGeom prst="rect">
+            <a:avLst/>
+          </a:prstGeom>
+          <a:noFill/>
+          <a:ln/>
+        </p:spPr>
+        <p:txBody>
+          <a:bodyPr wrap="square" lIns="0" tIns="0" rIns="0" bIns="0" rtlCol="0" anchor="t"/>
+          <a:lstStyle/>
+          <a:p>
+            <a:pPr marL="203200" indent="-203200">
+              <a:spcAft>
+                <a:spcPts val="600"/>
+              </a:spcAft>
+              <a:buSzPct val="100000"/>
+              <a:buChar char="•"/>
+            </a:pPr>
+            <a:r>
+              <a:rPr lang="en-US" sz="1200" dirty="0">
+                <a:solidFill>
+                  <a:srgbClr val="17292B"/>
+                </a:solidFill>
+              </a:rPr>
+              <a:t>19 checks in Chrome: script-injection payloads planted in notes, invoice numbers, provider ids, currencies, line ids, attachment text, names and failed-sign-in badges</a:t>
+            </a:r>
+            <a:endParaRPr lang="en-US" sz="1200" dirty="0"/>
+          </a:p>
+          <a:p>
+            <a:pPr marL="203200" indent="-203200">
+              <a:spcAft>
+                <a:spcPts val="600"/>
+              </a:spcAft>
+              <a:buSzPct val="100000"/>
+              <a:buChar char="•"/>
+            </a:pPr>
+            <a:r>
+              <a:rPr lang="en-US" sz="1200" dirty="0">
+                <a:solidFill>
+                  <a:srgbClr val="17292B"/>
+                </a:solidFill>
+              </a:rPr>
+              <a:t>On every screen no payload ran and the text showed as plain text</a:t>
+            </a:r>
+            <a:endParaRPr lang="en-US" sz="1200" dirty="0"/>
+          </a:p>
+        </p:txBody>
+      </p:sp>
+      <p:sp>
+        <p:nvSpPr>
+          <p:cNvPr id="18" name="stress card 3"/>
+          <p:cNvSpPr/>
+          <p:nvPr/>
+        </p:nvSpPr>
+        <p:spPr>
+          <a:xfrm>
+            <a:off x="8046720" y="3337560"/>
+            <a:ext cx="3566160" cy="2743200"/>
+          </a:xfrm>
+          <a:prstGeom prst="roundRect">
+            <a:avLst>
+              <a:gd name="adj" fmla="val 4000"/>
+            </a:avLst>
+          </a:prstGeom>
+          <a:solidFill>
+            <a:srgbClr val="F2F6F5"/>
+          </a:solidFill>
+          <a:ln w="12700">
+            <a:solidFill>
+              <a:srgbClr val="F2F6F5"/>
+            </a:solidFill>
+            <a:prstDash val="solid"/>
+          </a:ln>
+        </p:spPr>
+      </p:sp>
+      <p:sp>
+        <p:nvSpPr>
+          <p:cNvPr id="19" name="stress title"/>
+          <p:cNvSpPr txBox="1"/>
+          <p:nvPr/>
+        </p:nvSpPr>
+        <p:spPr>
+          <a:xfrm>
+            <a:off x="8275320" y="3429000"/>
+            <a:ext cx="3108960" cy="411480"/>
+          </a:xfrm>
+          <a:prstGeom prst="rect">
+            <a:avLst/>
+          </a:prstGeom>
+          <a:noFill/>
+          <a:ln/>
+        </p:spPr>
+        <p:txBody>
+          <a:bodyPr wrap="square" lIns="0" tIns="0" rIns="0" bIns="0" rtlCol="0" anchor="ctr"/>
+          <a:lstStyle/>
+          <a:p>
+            <a:pPr indent="0" marL="0">
+              <a:buNone/>
+            </a:pPr>
+            <a:r>
+              <a:rPr lang="en-US" sz="1500" b="1" dirty="0">
+                <a:solidFill>
+                  <a:srgbClr val="0E3B3F"/>
+                </a:solidFill>
+                <a:latin typeface="Cambria" pitchFamily="34" charset="0"/>
+                <a:ea typeface="Cambria" pitchFamily="34" charset="-122"/>
+                <a:cs typeface="Cambria" pitchFamily="34" charset="-120"/>
+              </a:rPr>
+              <a:t>Fuzzing and breakage</a:t>
+            </a:r>
+            <a:endParaRPr lang="en-US" sz="1500" dirty="0"/>
+          </a:p>
+        </p:txBody>
+      </p:sp>
+      <p:sp>
+        <p:nvSpPr>
+          <p:cNvPr id="20" name="bullets"/>
+          <p:cNvSpPr txBox="1"/>
+          <p:nvPr/>
+        </p:nvSpPr>
+        <p:spPr>
+          <a:xfrm>
+            <a:off x="8275320" y="3886200"/>
+            <a:ext cx="3154680" cy="2148840"/>
+          </a:xfrm>
+          <a:prstGeom prst="rect">
+            <a:avLst/>
+          </a:prstGeom>
+          <a:noFill/>
+          <a:ln/>
+        </p:spPr>
+        <p:txBody>
+          <a:bodyPr wrap="square" lIns="0" tIns="0" rIns="0" bIns="0" rtlCol="0" anchor="t"/>
+          <a:lstStyle/>
+          <a:p>
+            <a:pPr marL="203200" indent="-203200">
+              <a:spcAft>
+                <a:spcPts val="600"/>
+              </a:spcAft>
+              <a:buSzPct val="100000"/>
+              <a:buChar char="•"/>
+            </a:pPr>
+            <a:r>
+              <a:rPr lang="en-US" sz="1200" dirty="0">
+                <a:solidFill>
+                  <a:srgbClr val="17292B"/>
+                </a:solidFill>
+              </a:rPr>
+              <a:t>400,000 random requests through the API, with sessions of each role</a:t>
+            </a:r>
+            <a:endParaRPr lang="en-US" sz="1200" dirty="0"/>
+          </a:p>
+          <a:p>
+            <a:pPr marL="203200" indent="-203200">
+              <a:spcAft>
+                <a:spcPts val="600"/>
+              </a:spcAft>
+              <a:buSzPct val="100000"/>
+              <a:buChar char="•"/>
+            </a:pPr>
+            <a:r>
+              <a:rPr lang="en-US" sz="1200" dirty="0">
+                <a:solidFill>
+                  <a:srgbClr val="17292B"/>
+                </a:solidFill>
+              </a:rPr>
+              <a:t>93 deliberate breakages of the security rules, each caught by a test</a:t>
+            </a:r>
+            <a:endParaRPr lang="en-US" sz="1200" dirty="0"/>
+          </a:p>
+          <a:p>
+            <a:pPr marL="203200" indent="-203200">
+              <a:spcAft>
+                <a:spcPts val="600"/>
+              </a:spcAft>
+              <a:buSzPct val="100000"/>
+              <a:buChar char="•"/>
+            </a:pPr>
+            <a:r>
+              <a:rPr lang="en-US" sz="1200" dirty="0">
+                <a:solidFill>
+                  <a:srgbClr val="17292B"/>
+                </a:solidFill>
+              </a:rPr>
+              <a:t>Not tested: floods below the HTTP layer, attack on the database server</a:t>
+            </a:r>
+            <a:endParaRPr lang="en-US" sz="1200" dirty="0"/>
+          </a:p>
+        </p:txBody>
+      </p:sp>
+      <p:sp>
+        <p:nvSpPr>
+          <p:cNvPr id="25" name="Slide Number Placeholder 0"/>
+          <p:cNvSpPr>
+            <a:spLocks noGrp="1"/>
+          </p:cNvSpPr>
+          <p:nvPr>
+            <p:ph type="sldNum" sz="quarter" idx="4294967295"/>
+          </p:nvPr>
+        </p:nvSpPr>
+        <p:spPr>
+          <a:xfrm>
+            <a:off x="11247120" y="6400800"/>
+            <a:ext cx="548640" cy="274320"/>
+          </a:xfrm>
+          <a:prstGeom prst="rect">
+            <a:avLst/>
+          </a:prstGeom>
+          <a:extLst>
+            <a:ext uri="{C572A759-6A51-4108-AA02-DFA0A04FC94B}">
+              <ma14:wrappingTextBoxFlag xmlns:ma14="http://schemas.microsoft.com/office/mac/drawingml/2011/main" val="0"/>
+            </a:ext>
+          </a:extLst>
+        </p:spPr>
+        <p:txBody>
+          <a:bodyPr/>
+          <a:lstStyle>
+            <a:lvl1pPr>
+              <a:defRPr sz="1000">
+                <a:solidFill>
+                  <a:srgbClr val="5C7173"/>
+                </a:solidFill>
+              </a:defRPr>
+            </a:lvl1pPr>
+          </a:lstStyle>
+          <a:p>
+            <a:pPr algn="l"/>
+            <a:fld id="{F7021451-1387-4CA6-816F-3879F97B5CBC}" type="slidenum">
+              <a:rPr b="0" lang="en-US"/>
+              <a:t>34</a:t>
+            </a:fld>
+            <a:endParaRPr lang="en-US"/>
+          </a:p>
+        </p:txBody>
+      </p:sp>
+    </p:spTree>
+  </p:cSld>
+  <p:clrMapOvr>
+    <a:masterClrMapping/>
+  </p:clrMapOvr>
+</p:sld>
+</file>
+
+<file path=ppt/slides/slide35.xml><?xml version="1.0" encoding="utf-8"?>
+<p:sld xmlns:a="http://schemas.openxmlformats.org/drawingml/2006/main" xmlns:r="http://schemas.openxmlformats.org/officeDocument/2006/relationships" xmlns:p="http://schemas.openxmlformats.org/presentationml/2006/main">
+  <p:cSld name="Slide 35">
+    <p:spTree>
+      <p:nvGrpSpPr>
+        <p:cNvPr id="1" name=""/>
+        <p:cNvGrpSpPr/>
+        <p:nvPr/>
+      </p:nvGrpSpPr>
+      <p:grpSpPr>
+        <a:xfrm>
+          <a:off x="0" y="0"/>
+          <a:ext cx="0" cy="0"/>
+          <a:chOff x="0" y="0"/>
+          <a:chExt cx="0" cy="0"/>
+        </a:xfrm>
+      </p:grpSpPr>
+      <p:sp>
+        <p:nvSpPr>
+          <p:cNvPr id="2" name="Text 0"/>
+          <p:cNvSpPr/>
+          <p:nvPr>
+            <p:ph idx="100" type="title" hasCustomPrompt="1"/>
+          </p:nvPr>
+        </p:nvSpPr>
+        <p:spPr>
+          <a:xfrm>
+            <a:off x="548640" y="365760"/>
+            <a:ext cx="11064240" cy="822960"/>
+          </a:xfrm>
+          <a:prstGeom prst="rect">
+            <a:avLst/>
+          </a:prstGeom>
+          <a:noFill/>
+          <a:ln/>
+        </p:spPr>
+        <p:txBody>
+          <a:bodyPr wrap="square" lIns="0" tIns="0" rIns="0" bIns="0" rtlCol="0" anchor="ctr"/>
+          <a:lstStyle/>
+          <a:p>
+            <a:pPr indent="0" marL="0">
+              <a:buNone/>
+            </a:pPr>
+            <a:r>
+              <a:rPr lang="en-US" sz="3200" b="1" dirty="0">
+                <a:solidFill>
+                  <a:srgbClr val="0E3B3F"/>
+                </a:solidFill>
+                <a:latin typeface="Cambria" pitchFamily="34" charset="0"/>
+                <a:ea typeface="Cambria" pitchFamily="34" charset="-122"/>
+                <a:cs typeface="Cambria" pitchFamily="34" charset="-120"/>
+              </a:rPr>
               <a:t>Everything is on record, and an edit is caught</a:t>
             </a:r>
             <a:endParaRPr lang="en-US" sz="3200" dirty="0"/>
@@ -27596,7 +34671,7 @@
       </p:sp>
       <p:graphicFrame>
         <p:nvGraphicFramePr>
-          <p:cNvPr id="30" name="table"/>
+          <p:cNvPr id="36" name="table"/>
           <p:cNvGraphicFramePr>
             <a:graphicFrameLocks noGrp="1"/>
           </p:cNvGraphicFramePr>
@@ -28600,7 +35675,7 @@
             <a:pPr algn="l"/>
             <a:fld id="{F7021451-1387-4CA6-816F-3879F97B5CBC}" type="slidenum">
               <a:rPr b="0" lang="en-US"/>
-              <a:t>29</a:t>
+              <a:t>35</a:t>
             </a:fld>
             <a:endParaRPr lang="en-US"/>
           </a:p>
@@ -28614,9 +35689,9 @@
 </p:sld>
 </file>
 
-<file path=ppt/slides/slide3.xml><?xml version="1.0" encoding="utf-8"?>
+<file path=ppt/slides/slide36.xml><?xml version="1.0" encoding="utf-8"?>
 <p:sld xmlns:a="http://schemas.openxmlformats.org/drawingml/2006/main" xmlns:r="http://schemas.openxmlformats.org/officeDocument/2006/relationships" xmlns:p="http://schemas.openxmlformats.org/presentationml/2006/main">
-  <p:cSld name="Slide 3">
+  <p:cSld name="Slide 36">
     <p:spTree>
       <p:nvGrpSpPr>
         <p:cNvPr id="1" name=""/>
@@ -28666,1257 +35741,6 @@
                 <a:ea typeface="Cambria" pitchFamily="34" charset="-122"/>
                 <a:cs typeface="Cambria" pitchFamily="34" charset="-120"/>
               </a:rPr>
-              <a:t>The workflow you described, running end to end</a:t>
-            </a:r>
-            <a:endParaRPr lang="en-US" sz="3200" dirty="0"/>
-          </a:p>
-        </p:txBody>
-      </p:sp>
-      <p:sp>
-        <p:nvSpPr>
-          <p:cNvPr id="4" name="step card 1"/>
-          <p:cNvSpPr/>
-          <p:nvPr/>
-        </p:nvSpPr>
-        <p:spPr>
-          <a:xfrm>
-            <a:off x="548640" y="1508760"/>
-            <a:ext cx="3520440" cy="2148840"/>
-          </a:xfrm>
-          <a:prstGeom prst="roundRect">
-            <a:avLst>
-              <a:gd name="adj" fmla="val 5106"/>
-            </a:avLst>
-          </a:prstGeom>
-          <a:solidFill>
-            <a:srgbClr val="F2F6F5"/>
-          </a:solidFill>
-          <a:ln w="12700">
-            <a:solidFill>
-              <a:srgbClr val="F2F6F5"/>
-            </a:solidFill>
-            <a:prstDash val="solid"/>
-          </a:ln>
-        </p:spPr>
-      </p:sp>
-      <p:sp>
-        <p:nvSpPr>
-          <p:cNvPr id="5" name="badge"/>
-          <p:cNvSpPr/>
-          <p:nvPr/>
-        </p:nvSpPr>
-        <p:spPr>
-          <a:xfrm>
-            <a:off x="777240" y="1737360"/>
-            <a:ext cx="384048" cy="384048"/>
-          </a:xfrm>
-          <a:prstGeom prst="ellipse">
-            <a:avLst/>
-          </a:prstGeom>
-          <a:solidFill>
-            <a:srgbClr val="14746F"/>
-          </a:solidFill>
-          <a:ln w="12700">
-            <a:solidFill>
-              <a:srgbClr val="14746F"/>
-            </a:solidFill>
-            <a:prstDash val="solid"/>
-          </a:ln>
-        </p:spPr>
-      </p:sp>
-      <p:sp>
-        <p:nvSpPr>
-          <p:cNvPr id="6" name="badge text"/>
-          <p:cNvSpPr txBox="1"/>
-          <p:nvPr/>
-        </p:nvSpPr>
-        <p:spPr>
-          <a:xfrm>
-            <a:off x="777240" y="1737360"/>
-            <a:ext cx="384048" cy="384048"/>
-          </a:xfrm>
-          <a:prstGeom prst="rect">
-            <a:avLst/>
-          </a:prstGeom>
-          <a:noFill/>
-          <a:ln/>
-        </p:spPr>
-        <p:txBody>
-          <a:bodyPr wrap="square" lIns="0" tIns="0" rIns="0" bIns="0" rtlCol="0" anchor="ctr"/>
-          <a:lstStyle/>
-          <a:p>
-            <a:pPr algn="ctr" indent="0" marL="0">
-              <a:buNone/>
-            </a:pPr>
-            <a:r>
-              <a:rPr lang="en-US" sz="1400" b="1" dirty="0">
-                <a:solidFill>
-                  <a:srgbClr val="FFFFFF"/>
-                </a:solidFill>
-              </a:rPr>
-              <a:t>1</a:t>
-            </a:r>
-            <a:endParaRPr lang="en-US" sz="1400" dirty="0"/>
-          </a:p>
-        </p:txBody>
-      </p:sp>
-      <p:sp>
-        <p:nvSpPr>
-          <p:cNvPr id="7" name="step title"/>
-          <p:cNvSpPr txBox="1"/>
-          <p:nvPr/>
-        </p:nvSpPr>
-        <p:spPr>
-          <a:xfrm>
-            <a:off x="777240" y="2286000"/>
-            <a:ext cx="3063240" cy="548640"/>
-          </a:xfrm>
-          <a:prstGeom prst="rect">
-            <a:avLst/>
-          </a:prstGeom>
-          <a:noFill/>
-          <a:ln/>
-        </p:spPr>
-        <p:txBody>
-          <a:bodyPr wrap="square" lIns="0" tIns="0" rIns="0" bIns="0" rtlCol="0" anchor="t"/>
-          <a:lstStyle/>
-          <a:p>
-            <a:pPr indent="0" marL="0">
-              <a:buNone/>
-            </a:pPr>
-            <a:r>
-              <a:rPr lang="en-US" sz="1800" b="1" dirty="0">
-                <a:solidFill>
-                  <a:srgbClr val="0E3B3F"/>
-                </a:solidFill>
-                <a:latin typeface="Cambria" pitchFamily="34" charset="0"/>
-                <a:ea typeface="Cambria" pitchFamily="34" charset="-122"/>
-                <a:cs typeface="Cambria" pitchFamily="34" charset="-120"/>
-              </a:rPr>
-              <a:t>Claim received and validated</a:t>
-            </a:r>
-            <a:endParaRPr lang="en-US" sz="1800" dirty="0"/>
-          </a:p>
-        </p:txBody>
-      </p:sp>
-      <p:sp>
-        <p:nvSpPr>
-          <p:cNvPr id="8" name="step text"/>
-          <p:cNvSpPr txBox="1"/>
-          <p:nvPr/>
-        </p:nvSpPr>
-        <p:spPr>
-          <a:xfrm>
-            <a:off x="777240" y="2834640"/>
-            <a:ext cx="3063240" cy="731520"/>
-          </a:xfrm>
-          <a:prstGeom prst="rect">
-            <a:avLst/>
-          </a:prstGeom>
-          <a:noFill/>
-          <a:ln/>
-        </p:spPr>
-        <p:txBody>
-          <a:bodyPr wrap="square" lIns="0" tIns="0" rIns="0" bIns="0" rtlCol="0" anchor="t"/>
-          <a:lstStyle/>
-          <a:p>
-            <a:pPr indent="0" marL="0">
-              <a:buNone/>
-            </a:pPr>
-            <a:r>
-              <a:rPr lang="en-US" sz="1400" dirty="0">
-                <a:solidFill>
-                  <a:srgbClr val="17292B"/>
-                </a:solidFill>
-              </a:rPr>
-              <a:t>FHIR, CSV, JSONL, PDF or photo. 15 rules, 0.19 ms per claim</a:t>
-            </a:r>
-            <a:endParaRPr lang="en-US" sz="1400" dirty="0"/>
-          </a:p>
-        </p:txBody>
-      </p:sp>
-      <p:sp>
-        <p:nvSpPr>
-          <p:cNvPr id="9" name="step card 2"/>
-          <p:cNvSpPr/>
-          <p:nvPr/>
-        </p:nvSpPr>
-        <p:spPr>
-          <a:xfrm>
-            <a:off x="4325112" y="1508760"/>
-            <a:ext cx="3520440" cy="2148840"/>
-          </a:xfrm>
-          <a:prstGeom prst="roundRect">
-            <a:avLst>
-              <a:gd name="adj" fmla="val 5106"/>
-            </a:avLst>
-          </a:prstGeom>
-          <a:solidFill>
-            <a:srgbClr val="F2F6F5"/>
-          </a:solidFill>
-          <a:ln w="12700">
-            <a:solidFill>
-              <a:srgbClr val="F2F6F5"/>
-            </a:solidFill>
-            <a:prstDash val="solid"/>
-          </a:ln>
-        </p:spPr>
-      </p:sp>
-      <p:sp>
-        <p:nvSpPr>
-          <p:cNvPr id="10" name="badge"/>
-          <p:cNvSpPr/>
-          <p:nvPr/>
-        </p:nvSpPr>
-        <p:spPr>
-          <a:xfrm>
-            <a:off x="4553712" y="1737360"/>
-            <a:ext cx="384048" cy="384048"/>
-          </a:xfrm>
-          <a:prstGeom prst="ellipse">
-            <a:avLst/>
-          </a:prstGeom>
-          <a:solidFill>
-            <a:srgbClr val="14746F"/>
-          </a:solidFill>
-          <a:ln w="12700">
-            <a:solidFill>
-              <a:srgbClr val="14746F"/>
-            </a:solidFill>
-            <a:prstDash val="solid"/>
-          </a:ln>
-        </p:spPr>
-      </p:sp>
-      <p:sp>
-        <p:nvSpPr>
-          <p:cNvPr id="11" name="badge text"/>
-          <p:cNvSpPr txBox="1"/>
-          <p:nvPr/>
-        </p:nvSpPr>
-        <p:spPr>
-          <a:xfrm>
-            <a:off x="4553712" y="1737360"/>
-            <a:ext cx="384048" cy="384048"/>
-          </a:xfrm>
-          <a:prstGeom prst="rect">
-            <a:avLst/>
-          </a:prstGeom>
-          <a:noFill/>
-          <a:ln/>
-        </p:spPr>
-        <p:txBody>
-          <a:bodyPr wrap="square" lIns="0" tIns="0" rIns="0" bIns="0" rtlCol="0" anchor="ctr"/>
-          <a:lstStyle/>
-          <a:p>
-            <a:pPr algn="ctr" indent="0" marL="0">
-              <a:buNone/>
-            </a:pPr>
-            <a:r>
-              <a:rPr lang="en-US" sz="1400" b="1" dirty="0">
-                <a:solidFill>
-                  <a:srgbClr val="FFFFFF"/>
-                </a:solidFill>
-              </a:rPr>
-              <a:t>2</a:t>
-            </a:r>
-            <a:endParaRPr lang="en-US" sz="1400" dirty="0"/>
-          </a:p>
-        </p:txBody>
-      </p:sp>
-      <p:sp>
-        <p:nvSpPr>
-          <p:cNvPr id="12" name="step title"/>
-          <p:cNvSpPr txBox="1"/>
-          <p:nvPr/>
-        </p:nvSpPr>
-        <p:spPr>
-          <a:xfrm>
-            <a:off x="4553712" y="2286000"/>
-            <a:ext cx="3063240" cy="548640"/>
-          </a:xfrm>
-          <a:prstGeom prst="rect">
-            <a:avLst/>
-          </a:prstGeom>
-          <a:noFill/>
-          <a:ln/>
-        </p:spPr>
-        <p:txBody>
-          <a:bodyPr wrap="square" lIns="0" tIns="0" rIns="0" bIns="0" rtlCol="0" anchor="t"/>
-          <a:lstStyle/>
-          <a:p>
-            <a:pPr indent="0" marL="0">
-              <a:buNone/>
-            </a:pPr>
-            <a:r>
-              <a:rPr lang="en-US" sz="1800" b="1" dirty="0">
-                <a:solidFill>
-                  <a:srgbClr val="0E3B3F"/>
-                </a:solidFill>
-                <a:latin typeface="Cambria" pitchFamily="34" charset="0"/>
-                <a:ea typeface="Cambria" pitchFamily="34" charset="-122"/>
-                <a:cs typeface="Cambria" pitchFamily="34" charset="-120"/>
-              </a:rPr>
-              <a:t>Errors, doubts and evidence</a:t>
-            </a:r>
-            <a:endParaRPr lang="en-US" sz="1800" dirty="0"/>
-          </a:p>
-        </p:txBody>
-      </p:sp>
-      <p:sp>
-        <p:nvSpPr>
-          <p:cNvPr id="13" name="step text"/>
-          <p:cNvSpPr txBox="1"/>
-          <p:nvPr/>
-        </p:nvSpPr>
-        <p:spPr>
-          <a:xfrm>
-            <a:off x="4553712" y="2834640"/>
-            <a:ext cx="3063240" cy="731520"/>
-          </a:xfrm>
-          <a:prstGeom prst="rect">
-            <a:avLst/>
-          </a:prstGeom>
-          <a:noFill/>
-          <a:ln/>
-        </p:spPr>
-        <p:txBody>
-          <a:bodyPr wrap="square" lIns="0" tIns="0" rIns="0" bIns="0" rtlCol="0" anchor="t"/>
-          <a:lstStyle/>
-          <a:p>
-            <a:pPr indent="0" marL="0">
-              <a:buNone/>
-            </a:pPr>
-            <a:r>
-              <a:rPr lang="en-US" sz="1400" dirty="0">
-                <a:solidFill>
-                  <a:srgbClr val="17292B"/>
-                </a:solidFill>
-              </a:rPr>
-              <a:t>FAIL, or UNABLE_TO_ASSESS when data is missing. Each finding cites claim paths</a:t>
-            </a:r>
-            <a:endParaRPr lang="en-US" sz="1400" dirty="0"/>
-          </a:p>
-        </p:txBody>
-      </p:sp>
-      <p:sp>
-        <p:nvSpPr>
-          <p:cNvPr id="14" name="step card 3"/>
-          <p:cNvSpPr/>
-          <p:nvPr/>
-        </p:nvSpPr>
-        <p:spPr>
-          <a:xfrm>
-            <a:off x="8101584" y="1508760"/>
-            <a:ext cx="3520440" cy="2148840"/>
-          </a:xfrm>
-          <a:prstGeom prst="roundRect">
-            <a:avLst>
-              <a:gd name="adj" fmla="val 5106"/>
-            </a:avLst>
-          </a:prstGeom>
-          <a:solidFill>
-            <a:srgbClr val="FFF1DB"/>
-          </a:solidFill>
-          <a:ln w="12700">
-            <a:solidFill>
-              <a:srgbClr val="FFF1DB"/>
-            </a:solidFill>
-            <a:prstDash val="solid"/>
-          </a:ln>
-        </p:spPr>
-      </p:sp>
-      <p:sp>
-        <p:nvSpPr>
-          <p:cNvPr id="15" name="badge"/>
-          <p:cNvSpPr/>
-          <p:nvPr/>
-        </p:nvSpPr>
-        <p:spPr>
-          <a:xfrm>
-            <a:off x="8330184" y="1737360"/>
-            <a:ext cx="384048" cy="384048"/>
-          </a:xfrm>
-          <a:prstGeom prst="ellipse">
-            <a:avLst/>
-          </a:prstGeom>
-          <a:solidFill>
-            <a:srgbClr val="C47A12"/>
-          </a:solidFill>
-          <a:ln w="12700">
-            <a:solidFill>
-              <a:srgbClr val="C47A12"/>
-            </a:solidFill>
-            <a:prstDash val="solid"/>
-          </a:ln>
-        </p:spPr>
-      </p:sp>
-      <p:sp>
-        <p:nvSpPr>
-          <p:cNvPr id="16" name="badge text"/>
-          <p:cNvSpPr txBox="1"/>
-          <p:nvPr/>
-        </p:nvSpPr>
-        <p:spPr>
-          <a:xfrm>
-            <a:off x="8330184" y="1737360"/>
-            <a:ext cx="384048" cy="384048"/>
-          </a:xfrm>
-          <a:prstGeom prst="rect">
-            <a:avLst/>
-          </a:prstGeom>
-          <a:noFill/>
-          <a:ln/>
-        </p:spPr>
-        <p:txBody>
-          <a:bodyPr wrap="square" lIns="0" tIns="0" rIns="0" bIns="0" rtlCol="0" anchor="ctr"/>
-          <a:lstStyle/>
-          <a:p>
-            <a:pPr algn="ctr" indent="0" marL="0">
-              <a:buNone/>
-            </a:pPr>
-            <a:r>
-              <a:rPr lang="en-US" sz="1400" b="1" dirty="0">
-                <a:solidFill>
-                  <a:srgbClr val="FFFFFF"/>
-                </a:solidFill>
-              </a:rPr>
-              <a:t>3</a:t>
-            </a:r>
-            <a:endParaRPr lang="en-US" sz="1400" dirty="0"/>
-          </a:p>
-        </p:txBody>
-      </p:sp>
-      <p:sp>
-        <p:nvSpPr>
-          <p:cNvPr id="17" name="tag"/>
-          <p:cNvSpPr/>
-          <p:nvPr/>
-        </p:nvSpPr>
-        <p:spPr>
-          <a:xfrm>
-            <a:off x="10204704" y="1783080"/>
-            <a:ext cx="1188720" cy="274320"/>
-          </a:xfrm>
-          <a:prstGeom prst="roundRect">
-            <a:avLst>
-              <a:gd name="adj" fmla="val 50000"/>
-            </a:avLst>
-          </a:prstGeom>
-          <a:solidFill>
-            <a:srgbClr val="F2A541"/>
-          </a:solidFill>
-          <a:ln w="12700">
-            <a:solidFill>
-              <a:srgbClr val="F2A541"/>
-            </a:solidFill>
-            <a:prstDash val="solid"/>
-          </a:ln>
-        </p:spPr>
-      </p:sp>
-      <p:sp>
-        <p:nvSpPr>
-          <p:cNvPr id="18" name="tag text"/>
-          <p:cNvSpPr txBox="1"/>
-          <p:nvPr/>
-        </p:nvSpPr>
-        <p:spPr>
-          <a:xfrm>
-            <a:off x="10204704" y="1783080"/>
-            <a:ext cx="1188720" cy="274320"/>
-          </a:xfrm>
-          <a:prstGeom prst="rect">
-            <a:avLst/>
-          </a:prstGeom>
-          <a:noFill/>
-          <a:ln/>
-        </p:spPr>
-        <p:txBody>
-          <a:bodyPr wrap="square" lIns="0" tIns="0" rIns="0" bIns="0" rtlCol="0" anchor="ctr"/>
-          <a:lstStyle/>
-          <a:p>
-            <a:pPr algn="ctr" indent="0" marL="0">
-              <a:buNone/>
-            </a:pPr>
-            <a:r>
-              <a:rPr lang="en-US" sz="1100" b="1" dirty="0">
-                <a:solidFill>
-                  <a:srgbClr val="17292B"/>
-                </a:solidFill>
-              </a:rPr>
-              <a:t>built this week</a:t>
-            </a:r>
-            <a:endParaRPr lang="en-US" sz="1100" dirty="0"/>
-          </a:p>
-        </p:txBody>
-      </p:sp>
-      <p:sp>
-        <p:nvSpPr>
-          <p:cNvPr id="19" name="step title"/>
-          <p:cNvSpPr txBox="1"/>
-          <p:nvPr/>
-        </p:nvSpPr>
-        <p:spPr>
-          <a:xfrm>
-            <a:off x="8330184" y="2286000"/>
-            <a:ext cx="3063240" cy="548640"/>
-          </a:xfrm>
-          <a:prstGeom prst="rect">
-            <a:avLst/>
-          </a:prstGeom>
-          <a:noFill/>
-          <a:ln/>
-        </p:spPr>
-        <p:txBody>
-          <a:bodyPr wrap="square" lIns="0" tIns="0" rIns="0" bIns="0" rtlCol="0" anchor="t"/>
-          <a:lstStyle/>
-          <a:p>
-            <a:pPr indent="0" marL="0">
-              <a:buNone/>
-            </a:pPr>
-            <a:r>
-              <a:rPr lang="en-US" sz="1800" b="1" dirty="0">
-                <a:solidFill>
-                  <a:srgbClr val="0E3B3F"/>
-                </a:solidFill>
-                <a:latin typeface="Cambria" pitchFamily="34" charset="0"/>
-                <a:ea typeface="Cambria" pitchFamily="34" charset="-122"/>
-                <a:cs typeface="Cambria" pitchFamily="34" charset="-120"/>
-              </a:rPr>
-              <a:t>Copilot explains and advises</a:t>
-            </a:r>
-            <a:endParaRPr lang="en-US" sz="1800" dirty="0"/>
-          </a:p>
-        </p:txBody>
-      </p:sp>
-      <p:sp>
-        <p:nvSpPr>
-          <p:cNvPr id="20" name="step text"/>
-          <p:cNvSpPr txBox="1"/>
-          <p:nvPr/>
-        </p:nvSpPr>
-        <p:spPr>
-          <a:xfrm>
-            <a:off x="8330184" y="2834640"/>
-            <a:ext cx="3063240" cy="731520"/>
-          </a:xfrm>
-          <a:prstGeom prst="rect">
-            <a:avLst/>
-          </a:prstGeom>
-          <a:noFill/>
-          <a:ln/>
-        </p:spPr>
-        <p:txBody>
-          <a:bodyPr wrap="square" lIns="0" tIns="0" rIns="0" bIns="0" rtlCol="0" anchor="t"/>
-          <a:lstStyle/>
-          <a:p>
-            <a:pPr indent="0" marL="0">
-              <a:buNone/>
-            </a:pPr>
-            <a:r>
-              <a:rPr lang="en-US" sz="1400" dirty="0">
-                <a:solidFill>
-                  <a:srgbClr val="17292B"/>
-                </a:solidFill>
-              </a:rPr>
-              <a:t>Summary, what to ask or correct, never an invented value</a:t>
-            </a:r>
-            <a:endParaRPr lang="en-US" sz="1400" dirty="0"/>
-          </a:p>
-        </p:txBody>
-      </p:sp>
-      <p:sp>
-        <p:nvSpPr>
-          <p:cNvPr id="21" name="step card 4"/>
-          <p:cNvSpPr/>
-          <p:nvPr/>
-        </p:nvSpPr>
-        <p:spPr>
-          <a:xfrm>
-            <a:off x="548640" y="3931920"/>
-            <a:ext cx="3520440" cy="2148840"/>
-          </a:xfrm>
-          <a:prstGeom prst="roundRect">
-            <a:avLst>
-              <a:gd name="adj" fmla="val 5106"/>
-            </a:avLst>
-          </a:prstGeom>
-          <a:solidFill>
-            <a:srgbClr val="F2F6F5"/>
-          </a:solidFill>
-          <a:ln w="12700">
-            <a:solidFill>
-              <a:srgbClr val="F2F6F5"/>
-            </a:solidFill>
-            <a:prstDash val="solid"/>
-          </a:ln>
-        </p:spPr>
-      </p:sp>
-      <p:sp>
-        <p:nvSpPr>
-          <p:cNvPr id="22" name="badge"/>
-          <p:cNvSpPr/>
-          <p:nvPr/>
-        </p:nvSpPr>
-        <p:spPr>
-          <a:xfrm>
-            <a:off x="777240" y="4160520"/>
-            <a:ext cx="384048" cy="384048"/>
-          </a:xfrm>
-          <a:prstGeom prst="ellipse">
-            <a:avLst/>
-          </a:prstGeom>
-          <a:solidFill>
-            <a:srgbClr val="14746F"/>
-          </a:solidFill>
-          <a:ln w="12700">
-            <a:solidFill>
-              <a:srgbClr val="14746F"/>
-            </a:solidFill>
-            <a:prstDash val="solid"/>
-          </a:ln>
-        </p:spPr>
-      </p:sp>
-      <p:sp>
-        <p:nvSpPr>
-          <p:cNvPr id="23" name="badge text"/>
-          <p:cNvSpPr txBox="1"/>
-          <p:nvPr/>
-        </p:nvSpPr>
-        <p:spPr>
-          <a:xfrm>
-            <a:off x="777240" y="4160520"/>
-            <a:ext cx="384048" cy="384048"/>
-          </a:xfrm>
-          <a:prstGeom prst="rect">
-            <a:avLst/>
-          </a:prstGeom>
-          <a:noFill/>
-          <a:ln/>
-        </p:spPr>
-        <p:txBody>
-          <a:bodyPr wrap="square" lIns="0" tIns="0" rIns="0" bIns="0" rtlCol="0" anchor="ctr"/>
-          <a:lstStyle/>
-          <a:p>
-            <a:pPr algn="ctr" indent="0" marL="0">
-              <a:buNone/>
-            </a:pPr>
-            <a:r>
-              <a:rPr lang="en-US" sz="1400" b="1" dirty="0">
-                <a:solidFill>
-                  <a:srgbClr val="FFFFFF"/>
-                </a:solidFill>
-              </a:rPr>
-              <a:t>4</a:t>
-            </a:r>
-            <a:endParaRPr lang="en-US" sz="1400" dirty="0"/>
-          </a:p>
-        </p:txBody>
-      </p:sp>
-      <p:sp>
-        <p:nvSpPr>
-          <p:cNvPr id="24" name="step title"/>
-          <p:cNvSpPr txBox="1"/>
-          <p:nvPr/>
-        </p:nvSpPr>
-        <p:spPr>
-          <a:xfrm>
-            <a:off x="777240" y="4709160"/>
-            <a:ext cx="3063240" cy="548640"/>
-          </a:xfrm>
-          <a:prstGeom prst="rect">
-            <a:avLst/>
-          </a:prstGeom>
-          <a:noFill/>
-          <a:ln/>
-        </p:spPr>
-        <p:txBody>
-          <a:bodyPr wrap="square" lIns="0" tIns="0" rIns="0" bIns="0" rtlCol="0" anchor="t"/>
-          <a:lstStyle/>
-          <a:p>
-            <a:pPr indent="0" marL="0">
-              <a:buNone/>
-            </a:pPr>
-            <a:r>
-              <a:rPr lang="en-US" sz="1800" b="1" dirty="0">
-                <a:solidFill>
-                  <a:srgbClr val="0E3B3F"/>
-                </a:solidFill>
-                <a:latin typeface="Cambria" pitchFamily="34" charset="0"/>
-                <a:ea typeface="Cambria" pitchFamily="34" charset="-122"/>
-                <a:cs typeface="Cambria" pitchFamily="34" charset="-120"/>
-              </a:rPr>
-              <a:t>Officer decides</a:t>
-            </a:r>
-            <a:endParaRPr lang="en-US" sz="1800" dirty="0"/>
-          </a:p>
-        </p:txBody>
-      </p:sp>
-      <p:sp>
-        <p:nvSpPr>
-          <p:cNvPr id="25" name="step text"/>
-          <p:cNvSpPr txBox="1"/>
-          <p:nvPr/>
-        </p:nvSpPr>
-        <p:spPr>
-          <a:xfrm>
-            <a:off x="777240" y="5257800"/>
-            <a:ext cx="3063240" cy="731520"/>
-          </a:xfrm>
-          <a:prstGeom prst="rect">
-            <a:avLst/>
-          </a:prstGeom>
-          <a:noFill/>
-          <a:ln/>
-        </p:spPr>
-        <p:txBody>
-          <a:bodyPr wrap="square" lIns="0" tIns="0" rIns="0" bIns="0" rtlCol="0" anchor="t"/>
-          <a:lstStyle/>
-          <a:p>
-            <a:pPr indent="0" marL="0">
-              <a:buNone/>
-            </a:pPr>
-            <a:r>
-              <a:rPr lang="en-US" sz="1400" dirty="0">
-                <a:solidFill>
-                  <a:srgbClr val="17292B"/>
-                </a:solidFill>
-              </a:rPr>
-              <a:t>Confirm, dismiss with a reason, request information. Seniors for high severity</a:t>
-            </a:r>
-            <a:endParaRPr lang="en-US" sz="1400" dirty="0"/>
-          </a:p>
-        </p:txBody>
-      </p:sp>
-      <p:sp>
-        <p:nvSpPr>
-          <p:cNvPr id="26" name="step card 5"/>
-          <p:cNvSpPr/>
-          <p:nvPr/>
-        </p:nvSpPr>
-        <p:spPr>
-          <a:xfrm>
-            <a:off x="4325112" y="3931920"/>
-            <a:ext cx="3520440" cy="2148840"/>
-          </a:xfrm>
-          <a:prstGeom prst="roundRect">
-            <a:avLst>
-              <a:gd name="adj" fmla="val 5106"/>
-            </a:avLst>
-          </a:prstGeom>
-          <a:solidFill>
-            <a:srgbClr val="FFF1DB"/>
-          </a:solidFill>
-          <a:ln w="12700">
-            <a:solidFill>
-              <a:srgbClr val="FFF1DB"/>
-            </a:solidFill>
-            <a:prstDash val="solid"/>
-          </a:ln>
-        </p:spPr>
-      </p:sp>
-      <p:sp>
-        <p:nvSpPr>
-          <p:cNvPr id="27" name="badge"/>
-          <p:cNvSpPr/>
-          <p:nvPr/>
-        </p:nvSpPr>
-        <p:spPr>
-          <a:xfrm>
-            <a:off x="4553712" y="4160520"/>
-            <a:ext cx="384048" cy="384048"/>
-          </a:xfrm>
-          <a:prstGeom prst="ellipse">
-            <a:avLst/>
-          </a:prstGeom>
-          <a:solidFill>
-            <a:srgbClr val="C47A12"/>
-          </a:solidFill>
-          <a:ln w="12700">
-            <a:solidFill>
-              <a:srgbClr val="C47A12"/>
-            </a:solidFill>
-            <a:prstDash val="solid"/>
-          </a:ln>
-        </p:spPr>
-      </p:sp>
-      <p:sp>
-        <p:nvSpPr>
-          <p:cNvPr id="28" name="badge text"/>
-          <p:cNvSpPr txBox="1"/>
-          <p:nvPr/>
-        </p:nvSpPr>
-        <p:spPr>
-          <a:xfrm>
-            <a:off x="4553712" y="4160520"/>
-            <a:ext cx="384048" cy="384048"/>
-          </a:xfrm>
-          <a:prstGeom prst="rect">
-            <a:avLst/>
-          </a:prstGeom>
-          <a:noFill/>
-          <a:ln/>
-        </p:spPr>
-        <p:txBody>
-          <a:bodyPr wrap="square" lIns="0" tIns="0" rIns="0" bIns="0" rtlCol="0" anchor="ctr"/>
-          <a:lstStyle/>
-          <a:p>
-            <a:pPr algn="ctr" indent="0" marL="0">
-              <a:buNone/>
-            </a:pPr>
-            <a:r>
-              <a:rPr lang="en-US" sz="1400" b="1" dirty="0">
-                <a:solidFill>
-                  <a:srgbClr val="FFFFFF"/>
-                </a:solidFill>
-              </a:rPr>
-              <a:t>5</a:t>
-            </a:r>
-            <a:endParaRPr lang="en-US" sz="1400" dirty="0"/>
-          </a:p>
-        </p:txBody>
-      </p:sp>
-      <p:sp>
-        <p:nvSpPr>
-          <p:cNvPr id="29" name="tag"/>
-          <p:cNvSpPr/>
-          <p:nvPr/>
-        </p:nvSpPr>
-        <p:spPr>
-          <a:xfrm>
-            <a:off x="6428232" y="4206240"/>
-            <a:ext cx="1188720" cy="274320"/>
-          </a:xfrm>
-          <a:prstGeom prst="roundRect">
-            <a:avLst>
-              <a:gd name="adj" fmla="val 50000"/>
-            </a:avLst>
-          </a:prstGeom>
-          <a:solidFill>
-            <a:srgbClr val="F2A541"/>
-          </a:solidFill>
-          <a:ln w="12700">
-            <a:solidFill>
-              <a:srgbClr val="F2A541"/>
-            </a:solidFill>
-            <a:prstDash val="solid"/>
-          </a:ln>
-        </p:spPr>
-      </p:sp>
-      <p:sp>
-        <p:nvSpPr>
-          <p:cNvPr id="30" name="tag text"/>
-          <p:cNvSpPr txBox="1"/>
-          <p:nvPr/>
-        </p:nvSpPr>
-        <p:spPr>
-          <a:xfrm>
-            <a:off x="6428232" y="4206240"/>
-            <a:ext cx="1188720" cy="274320"/>
-          </a:xfrm>
-          <a:prstGeom prst="rect">
-            <a:avLst/>
-          </a:prstGeom>
-          <a:noFill/>
-          <a:ln/>
-        </p:spPr>
-        <p:txBody>
-          <a:bodyPr wrap="square" lIns="0" tIns="0" rIns="0" bIns="0" rtlCol="0" anchor="ctr"/>
-          <a:lstStyle/>
-          <a:p>
-            <a:pPr algn="ctr" indent="0" marL="0">
-              <a:buNone/>
-            </a:pPr>
-            <a:r>
-              <a:rPr lang="en-US" sz="1100" b="1" dirty="0">
-                <a:solidFill>
-                  <a:srgbClr val="17292B"/>
-                </a:solidFill>
-              </a:rPr>
-              <a:t>built this week</a:t>
-            </a:r>
-            <a:endParaRPr lang="en-US" sz="1100" dirty="0"/>
-          </a:p>
-        </p:txBody>
-      </p:sp>
-      <p:sp>
-        <p:nvSpPr>
-          <p:cNvPr id="31" name="step title"/>
-          <p:cNvSpPr txBox="1"/>
-          <p:nvPr/>
-        </p:nvSpPr>
-        <p:spPr>
-          <a:xfrm>
-            <a:off x="4553712" y="4709160"/>
-            <a:ext cx="3063240" cy="548640"/>
-          </a:xfrm>
-          <a:prstGeom prst="rect">
-            <a:avLst/>
-          </a:prstGeom>
-          <a:noFill/>
-          <a:ln/>
-        </p:spPr>
-        <p:txBody>
-          <a:bodyPr wrap="square" lIns="0" tIns="0" rIns="0" bIns="0" rtlCol="0" anchor="t"/>
-          <a:lstStyle/>
-          <a:p>
-            <a:pPr indent="0" marL="0">
-              <a:buNone/>
-            </a:pPr>
-            <a:r>
-              <a:rPr lang="en-US" sz="1800" b="1" dirty="0">
-                <a:solidFill>
-                  <a:srgbClr val="0E3B3F"/>
-                </a:solidFill>
-                <a:latin typeface="Cambria" pitchFamily="34" charset="0"/>
-                <a:ea typeface="Cambria" pitchFamily="34" charset="-122"/>
-                <a:cs typeface="Cambria" pitchFamily="34" charset="-120"/>
-              </a:rPr>
-              <a:t>Correct and revalidate</a:t>
-            </a:r>
-            <a:endParaRPr lang="en-US" sz="1800" dirty="0"/>
-          </a:p>
-        </p:txBody>
-      </p:sp>
-      <p:sp>
-        <p:nvSpPr>
-          <p:cNvPr id="32" name="step text"/>
-          <p:cNvSpPr txBox="1"/>
-          <p:nvPr/>
-        </p:nvSpPr>
-        <p:spPr>
-          <a:xfrm>
-            <a:off x="4553712" y="5257800"/>
-            <a:ext cx="3063240" cy="731520"/>
-          </a:xfrm>
-          <a:prstGeom prst="rect">
-            <a:avLst/>
-          </a:prstGeom>
-          <a:noFill/>
-          <a:ln/>
-        </p:spPr>
-        <p:txBody>
-          <a:bodyPr wrap="square" lIns="0" tIns="0" rIns="0" bIns="0" rtlCol="0" anchor="t"/>
-          <a:lstStyle/>
-          <a:p>
-            <a:pPr indent="0" marL="0">
-              <a:buNone/>
-            </a:pPr>
-            <a:r>
-              <a:rPr lang="en-US" sz="1400" dirty="0">
-                <a:solidFill>
-                  <a:srgbClr val="17292B"/>
-                </a:solidFill>
-              </a:rPr>
-              <a:t>What-if first, then a new version. The original stays untouched</a:t>
-            </a:r>
-            <a:endParaRPr lang="en-US" sz="1400" dirty="0"/>
-          </a:p>
-        </p:txBody>
-      </p:sp>
-      <p:sp>
-        <p:nvSpPr>
-          <p:cNvPr id="33" name="step card 6"/>
-          <p:cNvSpPr/>
-          <p:nvPr/>
-        </p:nvSpPr>
-        <p:spPr>
-          <a:xfrm>
-            <a:off x="8101584" y="3931920"/>
-            <a:ext cx="3520440" cy="2148840"/>
-          </a:xfrm>
-          <a:prstGeom prst="roundRect">
-            <a:avLst>
-              <a:gd name="adj" fmla="val 5106"/>
-            </a:avLst>
-          </a:prstGeom>
-          <a:solidFill>
-            <a:srgbClr val="F2F6F5"/>
-          </a:solidFill>
-          <a:ln w="12700">
-            <a:solidFill>
-              <a:srgbClr val="F2F6F5"/>
-            </a:solidFill>
-            <a:prstDash val="solid"/>
-          </a:ln>
-        </p:spPr>
-      </p:sp>
-      <p:sp>
-        <p:nvSpPr>
-          <p:cNvPr id="34" name="badge"/>
-          <p:cNvSpPr/>
-          <p:nvPr/>
-        </p:nvSpPr>
-        <p:spPr>
-          <a:xfrm>
-            <a:off x="8330184" y="4160520"/>
-            <a:ext cx="384048" cy="384048"/>
-          </a:xfrm>
-          <a:prstGeom prst="ellipse">
-            <a:avLst/>
-          </a:prstGeom>
-          <a:solidFill>
-            <a:srgbClr val="14746F"/>
-          </a:solidFill>
-          <a:ln w="12700">
-            <a:solidFill>
-              <a:srgbClr val="14746F"/>
-            </a:solidFill>
-            <a:prstDash val="solid"/>
-          </a:ln>
-        </p:spPr>
-      </p:sp>
-      <p:sp>
-        <p:nvSpPr>
-          <p:cNvPr id="35" name="badge text"/>
-          <p:cNvSpPr txBox="1"/>
-          <p:nvPr/>
-        </p:nvSpPr>
-        <p:spPr>
-          <a:xfrm>
-            <a:off x="8330184" y="4160520"/>
-            <a:ext cx="384048" cy="384048"/>
-          </a:xfrm>
-          <a:prstGeom prst="rect">
-            <a:avLst/>
-          </a:prstGeom>
-          <a:noFill/>
-          <a:ln/>
-        </p:spPr>
-        <p:txBody>
-          <a:bodyPr wrap="square" lIns="0" tIns="0" rIns="0" bIns="0" rtlCol="0" anchor="ctr"/>
-          <a:lstStyle/>
-          <a:p>
-            <a:pPr algn="ctr" indent="0" marL="0">
-              <a:buNone/>
-            </a:pPr>
-            <a:r>
-              <a:rPr lang="en-US" sz="1400" b="1" dirty="0">
-                <a:solidFill>
-                  <a:srgbClr val="FFFFFF"/>
-                </a:solidFill>
-              </a:rPr>
-              <a:t>6</a:t>
-            </a:r>
-            <a:endParaRPr lang="en-US" sz="1400" dirty="0"/>
-          </a:p>
-        </p:txBody>
-      </p:sp>
-      <p:sp>
-        <p:nvSpPr>
-          <p:cNvPr id="36" name="step title"/>
-          <p:cNvSpPr txBox="1"/>
-          <p:nvPr/>
-        </p:nvSpPr>
-        <p:spPr>
-          <a:xfrm>
-            <a:off x="8330184" y="4709160"/>
-            <a:ext cx="3063240" cy="548640"/>
-          </a:xfrm>
-          <a:prstGeom prst="rect">
-            <a:avLst/>
-          </a:prstGeom>
-          <a:noFill/>
-          <a:ln/>
-        </p:spPr>
-        <p:txBody>
-          <a:bodyPr wrap="square" lIns="0" tIns="0" rIns="0" bIns="0" rtlCol="0" anchor="t"/>
-          <a:lstStyle/>
-          <a:p>
-            <a:pPr indent="0" marL="0">
-              <a:buNone/>
-            </a:pPr>
-            <a:r>
-              <a:rPr lang="en-US" sz="1800" b="1" dirty="0">
-                <a:solidFill>
-                  <a:srgbClr val="0E3B3F"/>
-                </a:solidFill>
-                <a:latin typeface="Cambria" pitchFamily="34" charset="0"/>
-                <a:ea typeface="Cambria" pitchFamily="34" charset="-122"/>
-                <a:cs typeface="Cambria" pitchFamily="34" charset="-120"/>
-              </a:rPr>
-              <a:t>Traceable, with limits shown</a:t>
-            </a:r>
-            <a:endParaRPr lang="en-US" sz="1800" dirty="0"/>
-          </a:p>
-        </p:txBody>
-      </p:sp>
-      <p:sp>
-        <p:nvSpPr>
-          <p:cNvPr id="37" name="step text"/>
-          <p:cNvSpPr txBox="1"/>
-          <p:nvPr/>
-        </p:nvSpPr>
-        <p:spPr>
-          <a:xfrm>
-            <a:off x="8330184" y="5257800"/>
-            <a:ext cx="3063240" cy="731520"/>
-          </a:xfrm>
-          <a:prstGeom prst="rect">
-            <a:avLst/>
-          </a:prstGeom>
-          <a:noFill/>
-          <a:ln/>
-        </p:spPr>
-        <p:txBody>
-          <a:bodyPr wrap="square" lIns="0" tIns="0" rIns="0" bIns="0" rtlCol="0" anchor="t"/>
-          <a:lstStyle/>
-          <a:p>
-            <a:pPr indent="0" marL="0">
-              <a:buNone/>
-            </a:pPr>
-            <a:r>
-              <a:rPr lang="en-US" sz="1400" dirty="0">
-                <a:solidFill>
-                  <a:srgbClr val="17292B"/>
-                </a:solidFill>
-              </a:rPr>
-              <a:t>Signed audit trail, both versions side by side, measured accuracy</a:t>
-            </a:r>
-            <a:endParaRPr lang="en-US" sz="1400" dirty="0"/>
-          </a:p>
-        </p:txBody>
-      </p:sp>
-      <p:sp>
-        <p:nvSpPr>
-          <p:cNvPr id="38" name="footnote"/>
-          <p:cNvSpPr txBox="1"/>
-          <p:nvPr/>
-        </p:nvSpPr>
-        <p:spPr>
-          <a:xfrm>
-            <a:off x="548640" y="6199632"/>
-            <a:ext cx="10424160" cy="365760"/>
-          </a:xfrm>
-          <a:prstGeom prst="rect">
-            <a:avLst/>
-          </a:prstGeom>
-          <a:noFill/>
-          <a:ln/>
-        </p:spPr>
-        <p:txBody>
-          <a:bodyPr wrap="square" lIns="0" tIns="0" rIns="0" bIns="0" rtlCol="0" anchor="ctr"/>
-          <a:lstStyle/>
-          <a:p>
-            <a:pPr indent="0" marL="0">
-              <a:buNone/>
-            </a:pPr>
-            <a:r>
-              <a:rPr lang="en-US" sz="1100" i="1" dirty="0">
-                <a:solidFill>
-                  <a:srgbClr val="5C7173"/>
-                </a:solidFill>
-              </a:rPr>
-              <a:t>All numbers in this deck come from commands you can re-run. Anything simulated says so on its slide.</a:t>
-            </a:r>
-            <a:endParaRPr lang="en-US" sz="1100" dirty="0"/>
-          </a:p>
-        </p:txBody>
-      </p:sp>
-      <p:sp>
-        <p:nvSpPr>
-          <p:cNvPr id="25" name="Slide Number Placeholder 0"/>
-          <p:cNvSpPr>
-            <a:spLocks noGrp="1"/>
-          </p:cNvSpPr>
-          <p:nvPr>
-            <p:ph type="sldNum" sz="quarter" idx="4294967295"/>
-          </p:nvPr>
-        </p:nvSpPr>
-        <p:spPr>
-          <a:xfrm>
-            <a:off x="11247120" y="6400800"/>
-            <a:ext cx="548640" cy="274320"/>
-          </a:xfrm>
-          <a:prstGeom prst="rect">
-            <a:avLst/>
-          </a:prstGeom>
-          <a:extLst>
-            <a:ext uri="{C572A759-6A51-4108-AA02-DFA0A04FC94B}">
-              <ma14:wrappingTextBoxFlag xmlns:ma14="http://schemas.microsoft.com/office/mac/drawingml/2011/main" val="0"/>
-            </a:ext>
-          </a:extLst>
-        </p:spPr>
-        <p:txBody>
-          <a:bodyPr/>
-          <a:lstStyle>
-            <a:lvl1pPr>
-              <a:defRPr sz="1000">
-                <a:solidFill>
-                  <a:srgbClr val="5C7173"/>
-                </a:solidFill>
-              </a:defRPr>
-            </a:lvl1pPr>
-          </a:lstStyle>
-          <a:p>
-            <a:pPr algn="l"/>
-            <a:fld id="{F7021451-1387-4CA6-816F-3879F97B5CBC}" type="slidenum">
-              <a:rPr b="0" lang="en-US"/>
-              <a:t>3</a:t>
-            </a:fld>
-            <a:endParaRPr lang="en-US"/>
-          </a:p>
-        </p:txBody>
-      </p:sp>
-    </p:spTree>
-  </p:cSld>
-  <p:clrMapOvr>
-    <a:masterClrMapping/>
-  </p:clrMapOvr>
-</p:sld>
-</file>
-
-<file path=ppt/slides/slide30.xml><?xml version="1.0" encoding="utf-8"?>
-<p:sld xmlns:a="http://schemas.openxmlformats.org/drawingml/2006/main" xmlns:r="http://schemas.openxmlformats.org/officeDocument/2006/relationships" xmlns:p="http://schemas.openxmlformats.org/presentationml/2006/main">
-  <p:cSld name="Slide 30">
-    <p:spTree>
-      <p:nvGrpSpPr>
-        <p:cNvPr id="1" name=""/>
-        <p:cNvGrpSpPr/>
-        <p:nvPr/>
-      </p:nvGrpSpPr>
-      <p:grpSpPr>
-        <a:xfrm>
-          <a:off x="0" y="0"/>
-          <a:ext cx="0" cy="0"/>
-          <a:chOff x="0" y="0"/>
-          <a:chExt cx="0" cy="0"/>
-        </a:xfrm>
-      </p:grpSpPr>
-      <p:sp>
-        <p:nvSpPr>
-          <p:cNvPr id="2" name="Text 0"/>
-          <p:cNvSpPr/>
-          <p:nvPr>
-            <p:ph idx="100" type="title" hasCustomPrompt="1"/>
-          </p:nvPr>
-        </p:nvSpPr>
-        <p:spPr>
-          <a:xfrm>
-            <a:off x="548640" y="365760"/>
-            <a:ext cx="11064240" cy="822960"/>
-          </a:xfrm>
-          <a:prstGeom prst="rect">
-            <a:avLst/>
-          </a:prstGeom>
-          <a:noFill/>
-          <a:ln/>
-        </p:spPr>
-        <p:txBody>
-          <a:bodyPr wrap="square" lIns="0" tIns="0" rIns="0" bIns="0" rtlCol="0" anchor="ctr"/>
-          <a:lstStyle/>
-          <a:p>
-            <a:pPr indent="0" marL="0">
-              <a:buNone/>
-            </a:pPr>
-            <a:r>
-              <a:rPr lang="en-US" sz="3200" b="1" dirty="0">
-                <a:solidFill>
-                  <a:srgbClr val="0E3B3F"/>
-                </a:solidFill>
-                <a:latin typeface="Cambria" pitchFamily="34" charset="0"/>
-                <a:ea typeface="Cambria" pitchFamily="34" charset="-122"/>
-                <a:cs typeface="Cambria" pitchFamily="34" charset="-120"/>
-              </a:rPr>
               <a:t>Serving the model: what this laptop measured</a:t>
             </a:r>
             <a:endParaRPr lang="en-US" sz="3200" dirty="0"/>
@@ -29925,7 +35749,7 @@
       </p:sp>
       <p:graphicFrame>
         <p:nvGraphicFramePr>
-          <p:cNvPr id="31" name="table"/>
+          <p:cNvPr id="37" name="table"/>
           <p:cNvGraphicFramePr>
             <a:graphicFrameLocks noGrp="1"/>
           </p:cNvGraphicFramePr>
@@ -31991,7 +37815,7 @@
             <a:pPr algn="l"/>
             <a:fld id="{F7021451-1387-4CA6-816F-3879F97B5CBC}" type="slidenum">
               <a:rPr b="0" lang="en-US"/>
-              <a:t>30</a:t>
+              <a:t>36</a:t>
             </a:fld>
             <a:endParaRPr lang="en-US"/>
           </a:p>
@@ -32005,9 +37829,9 @@
 </p:sld>
 </file>
 
-<file path=ppt/slides/slide31.xml><?xml version="1.0" encoding="utf-8"?>
+<file path=ppt/slides/slide37.xml><?xml version="1.0" encoding="utf-8"?>
 <p:sld xmlns:a="http://schemas.openxmlformats.org/drawingml/2006/main" xmlns:r="http://schemas.openxmlformats.org/officeDocument/2006/relationships" xmlns:p="http://schemas.openxmlformats.org/presentationml/2006/main">
-  <p:cSld name="Slide 31">
+  <p:cSld name="Slide 37">
     <p:spTree>
       <p:nvGrpSpPr>
         <p:cNvPr id="1" name=""/>
@@ -32733,7 +38557,7 @@
                   <a:srgbClr val="0E3B3F"/>
                 </a:solidFill>
               </a:rPr>
-              <a:t>Encryption keys</a:t>
+              <a:t>Automatic modes</a:t>
             </a:r>
             <a:endParaRPr lang="en-US" sz="1500" dirty="0"/>
           </a:p>
@@ -32747,7 +38571,7 @@
                   <a:srgbClr val="17292B"/>
                 </a:solidFill>
               </a:rPr>
-              <a:t>Rotating the key needs a re-encryption pass that is not built.</a:t>
+              <a:t>One administrator can switch them on, logged but without a second approval, and nothing switches them off by itself.</a:t>
             </a:r>
             <a:endParaRPr lang="en-US" sz="1500" dirty="0"/>
           </a:p>
@@ -33206,7 +39030,7 @@
             <a:pPr algn="l"/>
             <a:fld id="{F7021451-1387-4CA6-816F-3879F97B5CBC}" type="slidenum">
               <a:rPr b="0" lang="en-US"/>
-              <a:t>31</a:t>
+              <a:t>37</a:t>
             </a:fld>
             <a:endParaRPr lang="en-US"/>
           </a:p>
@@ -33220,9 +39044,9 @@
 </p:sld>
 </file>
 
-<file path=ppt/slides/slide32.xml><?xml version="1.0" encoding="utf-8"?>
+<file path=ppt/slides/slide38.xml><?xml version="1.0" encoding="utf-8"?>
 <p:sld xmlns:a="http://schemas.openxmlformats.org/drawingml/2006/main" xmlns:r="http://schemas.openxmlformats.org/officeDocument/2006/relationships" xmlns:p="http://schemas.openxmlformats.org/presentationml/2006/main">
-  <p:cSld name="Slide 32">
+  <p:cSld name="Slide 38">
     <p:spTree>
       <p:nvGrpSpPr>
         <p:cNvPr id="1" name=""/>
@@ -33932,7 +39756,7 @@
             <a:pPr algn="l"/>
             <a:fld id="{F7021451-1387-4CA6-816F-3879F97B5CBC}" type="slidenum">
               <a:rPr b="0" lang="en-US"/>
-              <a:t>32</a:t>
+              <a:t>38</a:t>
             </a:fld>
             <a:endParaRPr lang="en-US"/>
           </a:p>
@@ -33946,9 +39770,9 @@
 </p:sld>
 </file>
 
-<file path=ppt/slides/slide33.xml><?xml version="1.0" encoding="utf-8"?>
+<file path=ppt/slides/slide39.xml><?xml version="1.0" encoding="utf-8"?>
 <p:sld xmlns:a="http://schemas.openxmlformats.org/drawingml/2006/main" xmlns:r="http://schemas.openxmlformats.org/officeDocument/2006/relationships" xmlns:p="http://schemas.openxmlformats.org/presentationml/2006/main">
-  <p:cSld name="Slide 33">
+  <p:cSld name="Slide 39">
     <p:spTree>
       <p:nvGrpSpPr>
         <p:cNvPr id="1" name=""/>
@@ -34855,7 +40679,7 @@
             <a:pPr algn="l"/>
             <a:fld id="{F7021451-1387-4CA6-816F-3879F97B5CBC}" type="slidenum">
               <a:rPr b="0" lang="en-US"/>
-              <a:t>33</a:t>
+              <a:t>39</a:t>
             </a:fld>
             <a:endParaRPr lang="en-US"/>
           </a:p>
